--- a/Altura_Household_Convergence_Strategy.pptx
+++ b/Altura_Household_Convergence_Strategy.pptx
@@ -10,7 +10,6 @@
   <p:sldIdLst>
     <p:sldId id="256" r:id="rId2"/>
     <p:sldId id="257" r:id="rId3"/>
-    <p:sldId id="258" r:id="rId4"/>
     <p:sldId id="260" r:id="rId5"/>
     <p:sldId id="261" r:id="rId6"/>
     <p:sldId id="262" r:id="rId7"/>
@@ -20,6 +19,7 @@
     <p:sldId id="266" r:id="rId16"/>
     <p:sldId id="267" r:id="rId17"/>
     <p:sldId id="268" r:id="rId18"/>
+    <p:sldId id="269" r:id="rId4"/>
   </p:sldIdLst>
   <p:sldSz cx="9144000" cy="5143500" type="screen16x9"/>
   <p:notesSz cx="6858000" cy="9144000"/>
@@ -913,133 +913,6 @@
         </p:txBody>
       </p:sp>
     </p:spTree>
-  </p:cSld>
-  <p:clrMapOvr>
-    <a:masterClrMapping/>
-  </p:clrMapOvr>
-</p:notes>
-</file>
-
-<file path=ppt/notesSlides/notesSlide3.xml><?xml version="1.0" encoding="utf-8"?>
-<p:notes xmlns:a="http://schemas.openxmlformats.org/drawingml/2006/main" xmlns:r="http://schemas.openxmlformats.org/officeDocument/2006/relationships" xmlns:p="http://schemas.openxmlformats.org/presentationml/2006/main" showMasterSp="0" showMasterPhAnim="0">
-  <p:cSld>
-    <p:spTree>
-      <p:nvGrpSpPr>
-        <p:cNvPr id="1" name="Shape 55">
-          <a:extLst>
-            <a:ext uri="{FF2B5EF4-FFF2-40B4-BE49-F238E27FC236}">
-              <a16:creationId xmlns:a16="http://schemas.microsoft.com/office/drawing/2014/main" id="{9091668D-A8FE-89DA-D5F0-64689047E506}"/>
-            </a:ext>
-          </a:extLst>
-        </p:cNvPr>
-        <p:cNvGrpSpPr/>
-        <p:nvPr/>
-      </p:nvGrpSpPr>
-      <p:grpSpPr>
-        <a:xfrm>
-          <a:off x="0" y="0"/>
-          <a:ext cx="0" cy="0"/>
-          <a:chOff x="0" y="0"/>
-          <a:chExt cx="0" cy="0"/>
-        </a:xfrm>
-      </p:grpSpPr>
-      <p:sp>
-        <p:nvSpPr>
-          <p:cNvPr id="56" name="Google Shape;56;g3f2dfdaf518_0_1:notes">
-            <a:extLst>
-              <a:ext uri="{FF2B5EF4-FFF2-40B4-BE49-F238E27FC236}">
-                <a16:creationId xmlns:a16="http://schemas.microsoft.com/office/drawing/2014/main" id="{B190057C-A0F7-315E-FFE5-3CCFF993A8E9}"/>
-              </a:ext>
-            </a:extLst>
-          </p:cNvPr>
-          <p:cNvSpPr>
-            <a:spLocks noGrp="1" noRot="1" noChangeAspect="1"/>
-          </p:cNvSpPr>
-          <p:nvPr>
-            <p:ph type="sldImg" idx="2"/>
-          </p:nvPr>
-        </p:nvSpPr>
-        <p:spPr>
-          <a:xfrm>
-            <a:off x="381000" y="685800"/>
-            <a:ext cx="6096000" cy="3429000"/>
-          </a:xfrm>
-          <a:custGeom>
-            <a:avLst/>
-            <a:gdLst/>
-            <a:ahLst/>
-            <a:cxnLst/>
-            <a:rect l="l" t="t" r="r" b="b"/>
-            <a:pathLst>
-              <a:path w="120000" h="120000" extrusionOk="0">
-                <a:moveTo>
-                  <a:pt x="0" y="0"/>
-                </a:moveTo>
-                <a:lnTo>
-                  <a:pt x="120000" y="0"/>
-                </a:lnTo>
-                <a:lnTo>
-                  <a:pt x="120000" y="120000"/>
-                </a:lnTo>
-                <a:lnTo>
-                  <a:pt x="0" y="120000"/>
-                </a:lnTo>
-                <a:close/>
-              </a:path>
-            </a:pathLst>
-          </a:custGeom>
-        </p:spPr>
-      </p:sp>
-      <p:sp>
-        <p:nvSpPr>
-          <p:cNvPr id="57" name="Google Shape;57;g3f2dfdaf518_0_1:notes">
-            <a:extLst>
-              <a:ext uri="{FF2B5EF4-FFF2-40B4-BE49-F238E27FC236}">
-                <a16:creationId xmlns:a16="http://schemas.microsoft.com/office/drawing/2014/main" id="{605D3E22-BDC3-43B6-2849-F2D28AB0C3DD}"/>
-              </a:ext>
-            </a:extLst>
-          </p:cNvPr>
-          <p:cNvSpPr txBox="1">
-            <a:spLocks noGrp="1"/>
-          </p:cNvSpPr>
-          <p:nvPr>
-            <p:ph type="body" idx="1"/>
-          </p:nvPr>
-        </p:nvSpPr>
-        <p:spPr>
-          <a:xfrm>
-            <a:off x="685800" y="4343400"/>
-            <a:ext cx="5486400" cy="4114800"/>
-          </a:xfrm>
-          <a:prstGeom prst="rect">
-            <a:avLst/>
-          </a:prstGeom>
-        </p:spPr>
-        <p:txBody>
-          <a:bodyPr spcFirstLastPara="1" wrap="square" lIns="91425" tIns="91425" rIns="91425" bIns="91425" anchor="t" anchorCtr="0">
-            <a:noAutofit/>
-          </a:bodyPr>
-          <a:lstStyle/>
-          <a:p>
-            <a:pPr marL="0" lvl="0" indent="0" algn="l" rtl="0">
-              <a:spcBef>
-                <a:spcPts val="0"/>
-              </a:spcBef>
-              <a:spcAft>
-                <a:spcPts val="0"/>
-              </a:spcAft>
-              <a:buNone/>
-            </a:pPr>
-            <a:endParaRPr/>
-          </a:p>
-        </p:txBody>
-      </p:sp>
-    </p:spTree>
-    <p:extLst>
-      <p:ext uri="{BB962C8B-B14F-4D97-AF65-F5344CB8AC3E}">
-        <p14:creationId xmlns:p14="http://schemas.microsoft.com/office/powerpoint/2010/main" val="4245483543"/>
-      </p:ext>
-    </p:extLst>
   </p:cSld>
   <p:clrMapOvr>
     <a:masterClrMapping/>
@@ -6024,129 +5897,6 @@
           </a:prstGeom>
         </p:spPr>
       </p:pic>
-      <p:sp>
-        <p:nvSpPr>
-          <p:cNvPr id="4" name="TextBox 3"/>
-          <p:cNvSpPr txBox="1"/>
-          <p:nvPr/>
-        </p:nvSpPr>
-        <p:spPr>
-          <a:xfrm>
-            <a:off x="457200" y="182880"/>
-            <a:ext cx="8229600" cy="731520"/>
-          </a:xfrm>
-          <a:prstGeom prst="rect">
-            <a:avLst/>
-          </a:prstGeom>
-          <a:noFill/>
-        </p:spPr>
-        <p:txBody>
-          <a:bodyPr wrap="square" lIns="0" tIns="0">
-            <a:spAutoFit/>
-          </a:bodyPr>
-          <a:lstStyle/>
-          <a:p>
-            <a:pPr>
-              <a:defRPr sz="2100" b="1">
-                <a:solidFill>
-                  <a:srgbClr val="ED1D24"/>
-                </a:solidFill>
-                <a:latin typeface="Calibri"/>
-              </a:defRPr>
-            </a:pPr>
-            <a:r>
-              <a:t>Annexure 2: Inbound Customer Portal &amp; Choice Matrices</a:t>
-            </a:r>
-          </a:p>
-        </p:txBody>
-      </p:sp>
-      <p:sp>
-        <p:nvSpPr>
-          <p:cNvPr id="5" name="TextBox 4"/>
-          <p:cNvSpPr txBox="1"/>
-          <p:nvPr/>
-        </p:nvSpPr>
-        <p:spPr>
-          <a:xfrm>
-            <a:off x="457200" y="1005840"/>
-            <a:ext cx="3840480" cy="3657600"/>
-          </a:xfrm>
-          <a:prstGeom prst="rect">
-            <a:avLst/>
-          </a:prstGeom>
-          <a:noFill/>
-        </p:spPr>
-        <p:txBody>
-          <a:bodyPr wrap="square" lIns="0" tIns="0">
-            <a:spAutoFit/>
-          </a:bodyPr>
-          <a:lstStyle/>
-          <a:p>
-            <a:pPr>
-              <a:spcAft>
-                <a:spcPts val="800"/>
-              </a:spcAft>
-              <a:defRPr sz="1300" b="1">
-                <a:solidFill>
-                  <a:srgbClr val="0F121C"/>
-                </a:solidFill>
-                <a:latin typeface="Calibri"/>
-              </a:defRPr>
-            </a:pPr>
-            <a:r>
-              <a:t>Digitizing the Onboarding Funnel</a:t>
-            </a:r>
-          </a:p>
-          <a:p>
-            <a:pPr>
-              <a:spcAft>
-                <a:spcPts val="600"/>
-              </a:spcAft>
-              <a:defRPr sz="950" b="0">
-                <a:solidFill>
-                  <a:srgbClr val="212121"/>
-                </a:solidFill>
-                <a:latin typeface="Arial"/>
-              </a:defRPr>
-            </a:pPr>
-            <a:r>
-              <a:t>• Website Re-architecting: Designed a premium tab-based structure instead of long scroll sheets, streamlining categories for different household priorities.</a:t>
-            </a:r>
-          </a:p>
-          <a:p>
-            <a:pPr>
-              <a:spcAft>
-                <a:spcPts val="600"/>
-              </a:spcAft>
-              <a:defRPr sz="950" b="0">
-                <a:solidFill>
-                  <a:srgbClr val="212121"/>
-                </a:solidFill>
-                <a:latin typeface="Arial"/>
-              </a:defRPr>
-            </a:pPr>
-            <a:r>
-              <a:t>• AirBot Integration: AirBot acts as a frictionless digital concierge. It replaces standard sales pitch dialogue with multi-select service checklists and contextual profiling.</a:t>
-            </a:r>
-          </a:p>
-          <a:p>
-            <a:pPr>
-              <a:spcAft>
-                <a:spcPts val="600"/>
-              </a:spcAft>
-              <a:defRPr sz="950" b="0">
-                <a:solidFill>
-                  <a:srgbClr val="212121"/>
-                </a:solidFill>
-                <a:latin typeface="Arial"/>
-              </a:defRPr>
-            </a:pPr>
-            <a:r>
-              <a:t>• Autopay &amp; Coin Loops: The online checkout dynamically demonstrates monthly savings (₹50 discount) and Thanks Coins loyalty accumulation to increase signup rates.</a:t>
-            </a:r>
-          </a:p>
-        </p:txBody>
-      </p:sp>
       <p:pic>
         <p:nvPicPr>
           <p:cNvPr id="6" name="Picture 5" descr="image.jpg"/>
@@ -6230,129 +5980,6 @@
           </a:prstGeom>
         </p:spPr>
       </p:pic>
-      <p:sp>
-        <p:nvSpPr>
-          <p:cNvPr id="4" name="TextBox 3"/>
-          <p:cNvSpPr txBox="1"/>
-          <p:nvPr/>
-        </p:nvSpPr>
-        <p:spPr>
-          <a:xfrm>
-            <a:off x="457200" y="182880"/>
-            <a:ext cx="8229600" cy="731520"/>
-          </a:xfrm>
-          <a:prstGeom prst="rect">
-            <a:avLst/>
-          </a:prstGeom>
-          <a:noFill/>
-        </p:spPr>
-        <p:txBody>
-          <a:bodyPr wrap="square" lIns="0" tIns="0">
-            <a:spAutoFit/>
-          </a:bodyPr>
-          <a:lstStyle/>
-          <a:p>
-            <a:pPr>
-              <a:defRPr sz="2100" b="1">
-                <a:solidFill>
-                  <a:srgbClr val="ED1D24"/>
-                </a:solidFill>
-                <a:latin typeface="Calibri"/>
-              </a:defRPr>
-            </a:pPr>
-            <a:r>
-              <a:t>Annexure 3: Data-Driven Target Cohorts &amp; Economics</a:t>
-            </a:r>
-          </a:p>
-        </p:txBody>
-      </p:sp>
-      <p:sp>
-        <p:nvSpPr>
-          <p:cNvPr id="5" name="TextBox 4"/>
-          <p:cNvSpPr txBox="1"/>
-          <p:nvPr/>
-        </p:nvSpPr>
-        <p:spPr>
-          <a:xfrm>
-            <a:off x="457200" y="1005840"/>
-            <a:ext cx="8229600" cy="3657600"/>
-          </a:xfrm>
-          <a:prstGeom prst="rect">
-            <a:avLst/>
-          </a:prstGeom>
-          <a:noFill/>
-        </p:spPr>
-        <p:txBody>
-          <a:bodyPr wrap="square" lIns="0" tIns="0">
-            <a:spAutoFit/>
-          </a:bodyPr>
-          <a:lstStyle/>
-          <a:p>
-            <a:pPr>
-              <a:spcAft>
-                <a:spcPts val="800"/>
-              </a:spcAft>
-              <a:defRPr sz="1300" b="1">
-                <a:solidFill>
-                  <a:srgbClr val="0F121C"/>
-                </a:solidFill>
-                <a:latin typeface="Calibri"/>
-              </a:defRPr>
-            </a:pPr>
-            <a:r>
-              <a:t>AI-Targeted Cross-Sell Opportunities (Exhibits 4 &amp; 5)</a:t>
-            </a:r>
-          </a:p>
-          <a:p>
-            <a:pPr>
-              <a:spcAft>
-                <a:spcPts val="600"/>
-              </a:spcAft>
-              <a:defRPr sz="950" b="0">
-                <a:solidFill>
-                  <a:srgbClr val="212121"/>
-                </a:solidFill>
-                <a:latin typeface="Arial"/>
-              </a:defRPr>
-            </a:pPr>
-            <a:r>
-              <a:t>• Cohort A: High-Intent Overlaps (2.5M Users): Target the 2.5 million households subscribing to both Broadband and DTH. Since they are already double-billed, they represent low-hanging fruit for the 'Connect' or 'Family Secure' bundles.</a:t>
-            </a:r>
-          </a:p>
-          <a:p>
-            <a:pPr>
-              <a:spcAft>
-                <a:spcPts val="600"/>
-              </a:spcAft>
-              <a:defRPr sz="950" b="0">
-                <a:solidFill>
-                  <a:srgbClr val="212121"/>
-                </a:solidFill>
-                <a:latin typeface="Arial"/>
-              </a:defRPr>
-            </a:pPr>
-            <a:r>
-              <a:t>• Cohort B: DTH-Only Accounts (16M Users): DTH is expected to decline due to streaming (Exhibit 2). Transitioning these 16 million siloed accounts into converged Fiber+SIM+TV bundles saves them money while preventing DTH cord-cutting.</a:t>
-            </a:r>
-          </a:p>
-          <a:p>
-            <a:pPr>
-              <a:spcAft>
-                <a:spcPts val="600"/>
-              </a:spcAft>
-              <a:defRPr sz="950" b="0">
-                <a:solidFill>
-                  <a:srgbClr val="212121"/>
-                </a:solidFill>
-                <a:latin typeface="Arial"/>
-              </a:defRPr>
-            </a:pPr>
-            <a:r>
-              <a:t>• Channel Optimization: Digital channel CAC is 50% lower than direct sales (Broadband: ₹220 vs ₹450), but direct sales secure higher Month-4 retention. We route online AirBot leads directly to concierge field technicians to optimize conversion.</a:t>
-            </a:r>
-          </a:p>
-        </p:txBody>
-      </p:sp>
     </p:spTree>
   </p:cSld>
   <p:clrMapOvr>
@@ -6412,161 +6039,239 @@
           </a:prstGeom>
         </p:spPr>
       </p:pic>
-      <p:sp>
-        <p:nvSpPr>
-          <p:cNvPr id="4" name="TextBox 3"/>
-          <p:cNvSpPr txBox="1"/>
+      <p:pic>
+        <p:nvPicPr>
+          <p:cNvPr id="7" name="Picture 6" descr="image.png"/>
+          <p:cNvPicPr>
+            <a:picLocks noChangeAspect="1"/>
+          </p:cNvPicPr>
           <p:nvPr/>
-        </p:nvSpPr>
+        </p:nvPicPr>
+        <p:blipFill>
+          <a:blip r:embed="rId3"/>
+          <a:stretch>
+            <a:fillRect/>
+          </a:stretch>
+        </p:blipFill>
         <p:spPr>
           <a:xfrm>
-            <a:off x="457200" y="182880"/>
-            <a:ext cx="8229600" cy="731520"/>
+            <a:off x="4389120" y="1005840"/>
+            <a:ext cx="1005840" cy="1097280"/>
           </a:xfrm>
           <a:prstGeom prst="rect">
             <a:avLst/>
           </a:prstGeom>
-          <a:noFill/>
+          <a:ln w="12700">
+            <a:solidFill>
+              <a:srgbClr val="E4E6EB"/>
+            </a:solidFill>
+          </a:ln>
         </p:spPr>
-        <p:txBody>
-          <a:bodyPr wrap="square" lIns="0" tIns="0">
-            <a:spAutoFit/>
-          </a:bodyPr>
-          <a:lstStyle/>
-          <a:p>
-            <a:pPr>
-              <a:defRPr sz="2100" b="1">
-                <a:solidFill>
-                  <a:srgbClr val="ED1D24"/>
-                </a:solidFill>
-                <a:latin typeface="Calibri"/>
-              </a:defRPr>
-            </a:pPr>
-            <a:r>
-              <a:t>Annexure 4: Bundle Pricing Model &amp; EBITDA Accretion</a:t>
-            </a:r>
-          </a:p>
-        </p:txBody>
-      </p:sp>
-      <p:sp>
-        <p:nvSpPr>
-          <p:cNvPr id="5" name="TextBox 4"/>
-          <p:cNvSpPr txBox="1"/>
+      </p:pic>
+      <p:pic>
+        <p:nvPicPr>
+          <p:cNvPr id="9" name="Picture 8" descr="image.png"/>
+          <p:cNvPicPr>
+            <a:picLocks noChangeAspect="1"/>
+          </p:cNvPicPr>
           <p:nvPr/>
-        </p:nvSpPr>
+        </p:nvPicPr>
+        <p:blipFill>
+          <a:blip r:embed="rId4"/>
+          <a:stretch>
+            <a:fillRect/>
+          </a:stretch>
+        </p:blipFill>
         <p:spPr>
           <a:xfrm>
-            <a:off x="457200" y="1005840"/>
-            <a:ext cx="8229600" cy="3657600"/>
+            <a:off x="4389120" y="2286000"/>
+            <a:ext cx="1828800" cy="1033271"/>
           </a:xfrm>
           <a:prstGeom prst="rect">
             <a:avLst/>
           </a:prstGeom>
-          <a:noFill/>
+          <a:ln w="12700">
+            <a:solidFill>
+              <a:srgbClr val="E4E6EB"/>
+            </a:solidFill>
+          </a:ln>
         </p:spPr>
+      </p:pic>
+      <p:pic>
+        <p:nvPicPr>
+          <p:cNvPr id="11" name="Picture 10" descr="image.png"/>
+          <p:cNvPicPr>
+            <a:picLocks noChangeAspect="1"/>
+          </p:cNvPicPr>
+          <p:nvPr/>
+        </p:nvPicPr>
+        <p:blipFill>
+          <a:blip r:embed="rId5"/>
+          <a:stretch>
+            <a:fillRect/>
+          </a:stretch>
+        </p:blipFill>
+        <p:spPr>
+          <a:xfrm>
+            <a:off x="4389120" y="3474720"/>
+            <a:ext cx="1828800" cy="1033271"/>
+          </a:xfrm>
+          <a:prstGeom prst="rect">
+            <a:avLst/>
+          </a:prstGeom>
+          <a:ln w="12700">
+            <a:solidFill>
+              <a:srgbClr val="E4E6EB"/>
+            </a:solidFill>
+          </a:ln>
+        </p:spPr>
+      </p:pic>
+    </p:spTree>
+  </p:cSld>
+  <p:clrMapOvr>
+    <a:masterClrMapping/>
+  </p:clrMapOvr>
+</p:sld>
+</file>
+
+<file path=ppt/slides/slide12.xml><?xml version="1.0" encoding="utf-8"?>
+<p:sld xmlns:a="http://schemas.openxmlformats.org/drawingml/2006/main" xmlns:p="http://schemas.openxmlformats.org/presentationml/2006/main" xmlns:r="http://schemas.openxmlformats.org/officeDocument/2006/relationships">
+  <p:cSld>
+    <p:spTree>
+      <p:nvGrpSpPr>
+        <p:cNvPr id="1" name=""/>
+        <p:cNvGrpSpPr/>
+        <p:nvPr/>
+      </p:nvGrpSpPr>
+      <p:grpSpPr/>
+      <p:sp>
+        <p:nvSpPr>
+          <p:cNvPr id="2" name="Title 1"/>
+          <p:cNvSpPr>
+            <a:spLocks noGrp="1"/>
+          </p:cNvSpPr>
+          <p:nvPr>
+            <p:ph type="title"/>
+          </p:nvPr>
+        </p:nvSpPr>
+        <p:spPr/>
         <p:txBody>
-          <a:bodyPr wrap="square" lIns="0" tIns="0">
-            <a:spAutoFit/>
-          </a:bodyPr>
+          <a:bodyPr/>
           <a:lstStyle/>
-          <a:p>
-            <a:pPr>
-              <a:spcAft>
-                <a:spcPts val="800"/>
-              </a:spcAft>
-              <a:defRPr sz="1300" b="1">
-                <a:solidFill>
-                  <a:srgbClr val="0F121C"/>
-                </a:solidFill>
-                <a:latin typeface="Calibri"/>
-              </a:defRPr>
-            </a:pPr>
-            <a:r>
-              <a:t>Converged Pricing Sheets &amp; EBITDA Margins (Exhibits 1 &amp; 2)</a:t>
-            </a:r>
-          </a:p>
-          <a:p>
-            <a:pPr>
-              <a:spcAft>
-                <a:spcPts val="600"/>
-              </a:spcAft>
-              <a:defRPr sz="950" b="0">
-                <a:solidFill>
-                  <a:srgbClr val="212121"/>
-                </a:solidFill>
-                <a:latin typeface="Arial"/>
-              </a:defRPr>
-            </a:pPr>
-            <a:r>
-              <a:t>• Individual vs. Bundle Price Matrix:</a:t>
-            </a:r>
-          </a:p>
-          <a:p>
-            <a:pPr>
-              <a:spcAft>
-                <a:spcPts val="600"/>
-              </a:spcAft>
-              <a:defRPr sz="950" b="0">
-                <a:solidFill>
-                  <a:srgbClr val="212121"/>
-                </a:solidFill>
-                <a:latin typeface="Arial"/>
-              </a:defRPr>
-            </a:pPr>
-            <a:r>
-              <a:t>   - Standalone Sum: Broadband (₹599) + 2 SIMs (₹700) + Xstream Box (₹250) + Google One (₹209) + Xsafe CCTV (₹150) + Bank (₹99) = ₹2,006/mo.</a:t>
-            </a:r>
-          </a:p>
-          <a:p>
-            <a:pPr>
-              <a:spcAft>
-                <a:spcPts val="600"/>
-              </a:spcAft>
-              <a:defRPr sz="950" b="0">
-                <a:solidFill>
-                  <a:srgbClr val="212121"/>
-                </a:solidFill>
-                <a:latin typeface="Arial"/>
-              </a:defRPr>
-            </a:pPr>
-            <a:r>
-              <a:t>   - Consolidated Family Secure: ₹1,499/mo (Saves ₹507/mo or 25% discount). Promoted at ₹999/mo for the first 3 months to destroy switching inertia.</a:t>
-            </a:r>
-          </a:p>
-          <a:p>
-            <a:pPr>
-              <a:spcAft>
-                <a:spcPts val="600"/>
-              </a:spcAft>
-              <a:defRPr sz="950" b="0">
-                <a:solidFill>
-                  <a:srgbClr val="212121"/>
-                </a:solidFill>
-                <a:latin typeface="Arial"/>
-              </a:defRPr>
-            </a:pPr>
-            <a:r>
-              <a:t>• Margin Protection: Home Surveillance holds the highest EBITDA margin at 35% (Exhibit 1) and is growing at 35.7% CAGR (Exhibit 2). By bundling Xsafe cameras into Family Secure and Infinite tiers, we offset lower TV margins (12% EBITDA) and drive net margin expansion.</a:t>
-            </a:r>
-          </a:p>
-          <a:p>
-            <a:pPr>
-              <a:spcAft>
-                <a:spcPts val="600"/>
-              </a:spcAft>
-              <a:defRPr sz="950" b="0">
-                <a:solidFill>
-                  <a:srgbClr val="212121"/>
-                </a:solidFill>
-                <a:latin typeface="Arial"/>
-              </a:defRPr>
-            </a:pPr>
-            <a:r>
-              <a:t>• Churn Leverage: Reducing household churn from 22% down to 5% lifts customer lifetime value (LTV) by over 400%, easily amortizing the initial ₹999/mo introductory launch promo cost.</a:t>
-            </a:r>
-          </a:p>
+          <a:p/>
         </p:txBody>
       </p:sp>
+      <p:pic>
+        <p:nvPicPr>
+          <p:cNvPr id="3" name="Picture 2" descr="image.jpg"/>
+          <p:cNvPicPr>
+            <a:picLocks noChangeAspect="1"/>
+          </p:cNvPicPr>
+          <p:nvPr/>
+        </p:nvPicPr>
+        <p:blipFill>
+          <a:blip r:embed="rId2"/>
+          <a:stretch>
+            <a:fillRect/>
+          </a:stretch>
+        </p:blipFill>
+        <p:spPr>
+          <a:xfrm>
+            <a:off x="1" y="0"/>
+            <a:ext cx="9144000" cy="5143500"/>
+          </a:xfrm>
+          <a:prstGeom prst="rect">
+            <a:avLst/>
+          </a:prstGeom>
+        </p:spPr>
+      </p:pic>
+      <p:pic>
+        <p:nvPicPr>
+          <p:cNvPr id="7" name="Picture 6" descr="image.png"/>
+          <p:cNvPicPr>
+            <a:picLocks noChangeAspect="1"/>
+          </p:cNvPicPr>
+          <p:nvPr/>
+        </p:nvPicPr>
+        <p:blipFill>
+          <a:blip r:embed="rId3"/>
+          <a:stretch>
+            <a:fillRect/>
+          </a:stretch>
+        </p:blipFill>
+        <p:spPr>
+          <a:xfrm>
+            <a:off x="4389120" y="1005840"/>
+            <a:ext cx="1005840" cy="1097280"/>
+          </a:xfrm>
+          <a:prstGeom prst="rect">
+            <a:avLst/>
+          </a:prstGeom>
+          <a:ln w="12700">
+            <a:solidFill>
+              <a:srgbClr val="E4E6EB"/>
+            </a:solidFill>
+          </a:ln>
+        </p:spPr>
+      </p:pic>
+      <p:pic>
+        <p:nvPicPr>
+          <p:cNvPr id="9" name="Picture 8" descr="image.png"/>
+          <p:cNvPicPr>
+            <a:picLocks noChangeAspect="1"/>
+          </p:cNvPicPr>
+          <p:nvPr/>
+        </p:nvPicPr>
+        <p:blipFill>
+          <a:blip r:embed="rId4"/>
+          <a:stretch>
+            <a:fillRect/>
+          </a:stretch>
+        </p:blipFill>
+        <p:spPr>
+          <a:xfrm>
+            <a:off x="4389120" y="2286000"/>
+            <a:ext cx="1828800" cy="1033271"/>
+          </a:xfrm>
+          <a:prstGeom prst="rect">
+            <a:avLst/>
+          </a:prstGeom>
+          <a:ln w="12700">
+            <a:solidFill>
+              <a:srgbClr val="E4E6EB"/>
+            </a:solidFill>
+          </a:ln>
+        </p:spPr>
+      </p:pic>
+      <p:pic>
+        <p:nvPicPr>
+          <p:cNvPr id="11" name="Picture 10" descr="image.png"/>
+          <p:cNvPicPr>
+            <a:picLocks noChangeAspect="1"/>
+          </p:cNvPicPr>
+          <p:nvPr/>
+        </p:nvPicPr>
+        <p:blipFill>
+          <a:blip r:embed="rId5"/>
+          <a:stretch>
+            <a:fillRect/>
+          </a:stretch>
+        </p:blipFill>
+        <p:spPr>
+          <a:xfrm>
+            <a:off x="4389120" y="3474720"/>
+            <a:ext cx="1828800" cy="1033271"/>
+          </a:xfrm>
+          <a:prstGeom prst="rect">
+            <a:avLst/>
+          </a:prstGeom>
+          <a:ln w="12700">
+            <a:solidFill>
+              <a:srgbClr val="E4E6EB"/>
+            </a:solidFill>
+          </a:ln>
+        </p:spPr>
+      </p:pic>
     </p:spTree>
   </p:cSld>
   <p:clrMapOvr>
@@ -6658,8 +6363,8 @@
       </p:sp>
       <p:sp>
         <p:nvSpPr>
-          <p:cNvPr id="61" name="TextBox 60"/>
-          <p:cNvSpPr txBox="1"/>
+          <p:cNvPr id="61" name="Rounded Rectangle 60"/>
+          <p:cNvSpPr/>
           <p:nvPr/>
         </p:nvSpPr>
         <p:spPr>
@@ -6667,20 +6372,39 @@
             <a:off x="457200" y="1005840"/>
             <a:ext cx="2468880" cy="3657600"/>
           </a:xfrm>
-          <a:prstGeom prst="rect">
+          <a:prstGeom prst="roundRect">
             <a:avLst/>
           </a:prstGeom>
-          <a:noFill/>
+          <a:solidFill>
+            <a:srgbClr val="F8F9FA"/>
+          </a:solidFill>
+          <a:ln w="12700">
+            <a:solidFill>
+              <a:srgbClr val="E4E6EB"/>
+            </a:solidFill>
+          </a:ln>
         </p:spPr>
+        <p:style>
+          <a:lnRef idx="1">
+            <a:schemeClr val="accent1"/>
+          </a:lnRef>
+          <a:fillRef idx="3">
+            <a:schemeClr val="accent1"/>
+          </a:fillRef>
+          <a:effectRef idx="2">
+            <a:schemeClr val="accent1"/>
+          </a:effectRef>
+          <a:fontRef idx="minor">
+            <a:schemeClr val="lt1"/>
+          </a:fontRef>
+        </p:style>
         <p:txBody>
-          <a:bodyPr wrap="square" lIns="0" tIns="0">
-            <a:spAutoFit/>
-          </a:bodyPr>
+          <a:bodyPr rtlCol="0" anchor="t" wrap="square" lIns="137160" rIns="137160" tIns="164592" bIns="137160"/>
           <a:lstStyle/>
           <a:p>
-            <a:pPr>
-              <a:spcAft>
-                <a:spcPts val="800"/>
+            <a:pPr algn="ctr">
+              <a:spcAft>
+                <a:spcPts val="400"/>
               </a:spcAft>
               <a:defRPr sz="1300" b="1">
                 <a:solidFill>
@@ -6695,10 +6419,39 @@
           </a:p>
           <a:p>
             <a:pPr>
-              <a:spcAft>
-                <a:spcPts val="600"/>
-              </a:spcAft>
-              <a:defRPr sz="950" b="0">
+              <a:defRPr sz="3200" b="1">
+                <a:solidFill>
+                  <a:srgbClr val="ED1D24"/>
+                </a:solidFill>
+                <a:latin typeface="Calibri"/>
+              </a:defRPr>
+            </a:pPr>
+            <a:r>
+              <a:t>₹18,000</a:t>
+            </a:r>
+          </a:p>
+          <a:p>
+            <a:pPr>
+              <a:spcAft>
+                <a:spcPts val="800"/>
+              </a:spcAft>
+              <a:defRPr sz="850" b="1">
+                <a:solidFill>
+                  <a:srgbClr val="3498DB"/>
+                </a:solidFill>
+                <a:latin typeface="Arial"/>
+              </a:defRPr>
+            </a:pPr>
+            <a:r>
+              <a:t>Annual Wallet Opportunity per Home</a:t>
+            </a:r>
+          </a:p>
+          <a:p>
+            <a:pPr>
+              <a:spcAft>
+                <a:spcPts val="400"/>
+              </a:spcAft>
+              <a:defRPr sz="850" b="0">
                 <a:solidFill>
                   <a:srgbClr val="212121"/>
                 </a:solidFill>
@@ -6706,15 +6459,15 @@
               </a:defRPr>
             </a:pPr>
             <a:r>
-              <a:t>• Wallet Gaps: Connectivity accounts for 35% of household spend, but adjacent services like Entertainment (12%) and Home Security (2%) represent massive white spaces (Exhibit 3).</a:t>
+              <a:t>• Value White Spaces: Connectivity accounts for 35% of household spend, but adjacent services like Entertainment (12%) and Security (2%) represent massive white spaces (Exhibit 3).</a:t>
             </a:r>
           </a:p>
           <a:p>
             <a:pPr>
               <a:spcAft>
-                <a:spcPts val="600"/>
-              </a:spcAft>
-              <a:defRPr sz="950" b="0">
+                <a:spcPts val="400"/>
+              </a:spcAft>
+              <a:defRPr sz="850" b="0">
                 <a:solidFill>
                   <a:srgbClr val="212121"/>
                 </a:solidFill>
@@ -6722,15 +6475,15 @@
               </a:defRPr>
             </a:pPr>
             <a:r>
-              <a:t>• Bundling Retention: Moving a customer from 1 product to 3+ services drops annual churn from 22% to 5% while increasing annual revenue from ₹5,500 to ₹18,000 (Exhibit 4).</a:t>
+              <a:t>• Churn Moat: Moving a customer from 1 product to 3+ services drops annual churn from 22% to 5% (Exhibit 4).</a:t>
             </a:r>
           </a:p>
           <a:p>
             <a:pPr>
               <a:spcAft>
-                <a:spcPts val="600"/>
-              </a:spcAft>
-              <a:defRPr sz="950" b="0">
+                <a:spcPts val="400"/>
+              </a:spcAft>
+              <a:defRPr sz="850" b="0">
                 <a:solidFill>
                   <a:srgbClr val="212121"/>
                 </a:solidFill>
@@ -6738,15 +6491,58 @@
               </a:defRPr>
             </a:pPr>
             <a:r>
-              <a:t>• Postpaid Economics: Postpaid SIMs deliver ₹100 higher ARPU and 50% stronger customer stickiness than prepaid, yet organizational silos block seamless customer migrations.</a:t>
+              <a:t>• Postpaid Lift: Postpaid SIMs deliver ₹100 higher ARPU and 50% stronger customer stickiness than prepaid, yet silos block migrations.</a:t>
             </a:r>
           </a:p>
         </p:txBody>
       </p:sp>
       <p:sp>
         <p:nvSpPr>
-          <p:cNvPr id="62" name="TextBox 61"/>
-          <p:cNvSpPr txBox="1"/>
+          <p:cNvPr id="62" name="Rectangle 61"/>
+          <p:cNvSpPr/>
+          <p:nvPr/>
+        </p:nvSpPr>
+        <p:spPr>
+          <a:xfrm>
+            <a:off x="502920" y="1005840"/>
+            <a:ext cx="2377440" cy="73152"/>
+          </a:xfrm>
+          <a:prstGeom prst="rect">
+            <a:avLst/>
+          </a:prstGeom>
+          <a:solidFill>
+            <a:srgbClr val="ED1D24"/>
+          </a:solidFill>
+          <a:ln>
+            <a:noFill/>
+          </a:ln>
+        </p:spPr>
+        <p:style>
+          <a:lnRef idx="1">
+            <a:schemeClr val="accent1"/>
+          </a:lnRef>
+          <a:fillRef idx="3">
+            <a:schemeClr val="accent1"/>
+          </a:fillRef>
+          <a:effectRef idx="2">
+            <a:schemeClr val="accent1"/>
+          </a:effectRef>
+          <a:fontRef idx="minor">
+            <a:schemeClr val="lt1"/>
+          </a:fontRef>
+        </p:style>
+        <p:txBody>
+          <a:bodyPr rtlCol="0" anchor="ctr"/>
+          <a:lstStyle/>
+          <a:p>
+            <a:pPr algn="ctr"/>
+          </a:p>
+        </p:txBody>
+      </p:sp>
+      <p:sp>
+        <p:nvSpPr>
+          <p:cNvPr id="63" name="Rounded Rectangle 62"/>
+          <p:cNvSpPr/>
           <p:nvPr/>
         </p:nvSpPr>
         <p:spPr>
@@ -6754,20 +6550,39 @@
             <a:off x="3291840" y="1005840"/>
             <a:ext cx="2468880" cy="3657600"/>
           </a:xfrm>
-          <a:prstGeom prst="rect">
+          <a:prstGeom prst="roundRect">
             <a:avLst/>
           </a:prstGeom>
-          <a:noFill/>
+          <a:solidFill>
+            <a:srgbClr val="F8F9FA"/>
+          </a:solidFill>
+          <a:ln w="12700">
+            <a:solidFill>
+              <a:srgbClr val="E4E6EB"/>
+            </a:solidFill>
+          </a:ln>
         </p:spPr>
+        <p:style>
+          <a:lnRef idx="1">
+            <a:schemeClr val="accent1"/>
+          </a:lnRef>
+          <a:fillRef idx="3">
+            <a:schemeClr val="accent1"/>
+          </a:fillRef>
+          <a:effectRef idx="2">
+            <a:schemeClr val="accent1"/>
+          </a:effectRef>
+          <a:fontRef idx="minor">
+            <a:schemeClr val="lt1"/>
+          </a:fontRef>
+        </p:style>
         <p:txBody>
-          <a:bodyPr wrap="square" lIns="0" tIns="0">
-            <a:spAutoFit/>
-          </a:bodyPr>
+          <a:bodyPr rtlCol="0" anchor="t" wrap="square" lIns="137160" rIns="137160" tIns="164592" bIns="137160"/>
           <a:lstStyle/>
           <a:p>
-            <a:pPr>
-              <a:spcAft>
-                <a:spcPts val="800"/>
+            <a:pPr algn="ctr">
+              <a:spcAft>
+                <a:spcPts val="400"/>
               </a:spcAft>
               <a:defRPr sz="1300" b="1">
                 <a:solidFill>
@@ -6782,10 +6597,39 @@
           </a:p>
           <a:p>
             <a:pPr>
-              <a:spcAft>
-                <a:spcPts val="600"/>
-              </a:spcAft>
-              <a:defRPr sz="950" b="0">
+              <a:defRPr sz="3200" b="1">
+                <a:solidFill>
+                  <a:srgbClr val="0F121C"/>
+                </a:solidFill>
+                <a:latin typeface="Calibri"/>
+              </a:defRPr>
+            </a:pPr>
+            <a:r>
+              <a:t>60%+</a:t>
+            </a:r>
+          </a:p>
+          <a:p>
+            <a:pPr>
+              <a:spcAft>
+                <a:spcPts val="800"/>
+              </a:spcAft>
+              <a:defRPr sz="850" b="1">
+                <a:solidFill>
+                  <a:srgbClr val="3498DB"/>
+                </a:solidFill>
+                <a:latin typeface="Arial"/>
+              </a:defRPr>
+            </a:pPr>
+            <a:r>
+              <a:t>Households Fear Single Point of Failure</a:t>
+            </a:r>
+          </a:p>
+          <a:p>
+            <a:pPr>
+              <a:spcAft>
+                <a:spcPts val="400"/>
+              </a:spcAft>
+              <a:defRPr sz="850" b="0">
                 <a:solidFill>
                   <a:srgbClr val="212121"/>
                 </a:solidFill>
@@ -6793,15 +6637,15 @@
               </a:defRPr>
             </a:pPr>
             <a:r>
-              <a:t>• Prepaid Saturation: Prepaid mobile markets are mature with high penetration and constrained pricing power. Future growth must rely on adjacencies.</a:t>
+              <a:t>• Prepaid Saturation: Prepaid mobile markets are mature with high penetration and constrained pricing power. Growth must rely on adjacencies.</a:t>
             </a:r>
           </a:p>
           <a:p>
             <a:pPr>
               <a:spcAft>
-                <a:spcPts val="600"/>
-              </a:spcAft>
-              <a:defRPr sz="950" b="0">
+                <a:spcPts val="400"/>
+              </a:spcAft>
+              <a:defRPr sz="850" b="0">
                 <a:solidFill>
                   <a:srgbClr val="212121"/>
                 </a:solidFill>
@@ -6809,15 +6653,15 @@
               </a:defRPr>
             </a:pPr>
             <a:r>
-              <a:t>• Competitive Grid: Regional broadband players are fragmented, and DTH television revenues are shrinking globally due to cord-cutting pressures (Exhibit 1 &amp; 2).</a:t>
+              <a:t>• Cord-Cutting: DTH television revenues are shrinking globally due to cord-cutting pressures (Exhibit 1 &amp; 2).</a:t>
             </a:r>
           </a:p>
           <a:p>
             <a:pPr>
               <a:spcAft>
-                <a:spcPts val="600"/>
-              </a:spcAft>
-              <a:defRPr sz="950" b="0">
+                <a:spcPts val="400"/>
+              </a:spcAft>
+              <a:defRPr sz="850" b="0">
                 <a:solidFill>
                   <a:srgbClr val="212121"/>
                 </a:solidFill>
@@ -6825,15 +6669,58 @@
               </a:defRPr>
             </a:pPr>
             <a:r>
-              <a:t>• Persona Triggers: High-value connected households value unified billing and reward points. Core motivators include automated convenience (Autopay) and brand security trust.</a:t>
+              <a:t>• Persona Triggers: High-value households value unified billing and reward points. Core motivators include automated convenience and brand security trust.</a:t>
             </a:r>
           </a:p>
         </p:txBody>
       </p:sp>
       <p:sp>
         <p:nvSpPr>
-          <p:cNvPr id="63" name="TextBox 62"/>
-          <p:cNvSpPr txBox="1"/>
+          <p:cNvPr id="64" name="Rectangle 63"/>
+          <p:cNvSpPr/>
+          <p:nvPr/>
+        </p:nvSpPr>
+        <p:spPr>
+          <a:xfrm>
+            <a:off x="3337560" y="1005840"/>
+            <a:ext cx="2377440" cy="73152"/>
+          </a:xfrm>
+          <a:prstGeom prst="rect">
+            <a:avLst/>
+          </a:prstGeom>
+          <a:solidFill>
+            <a:srgbClr val="0F121C"/>
+          </a:solidFill>
+          <a:ln>
+            <a:noFill/>
+          </a:ln>
+        </p:spPr>
+        <p:style>
+          <a:lnRef idx="1">
+            <a:schemeClr val="accent1"/>
+          </a:lnRef>
+          <a:fillRef idx="3">
+            <a:schemeClr val="accent1"/>
+          </a:fillRef>
+          <a:effectRef idx="2">
+            <a:schemeClr val="accent1"/>
+          </a:effectRef>
+          <a:fontRef idx="minor">
+            <a:schemeClr val="lt1"/>
+          </a:fontRef>
+        </p:style>
+        <p:txBody>
+          <a:bodyPr rtlCol="0" anchor="ctr"/>
+          <a:lstStyle/>
+          <a:p>
+            <a:pPr algn="ctr"/>
+          </a:p>
+        </p:txBody>
+      </p:sp>
+      <p:sp>
+        <p:nvSpPr>
+          <p:cNvPr id="65" name="Rounded Rectangle 64"/>
+          <p:cNvSpPr/>
           <p:nvPr/>
         </p:nvSpPr>
         <p:spPr>
@@ -6841,20 +6728,39 @@
             <a:off x="6126480" y="1005840"/>
             <a:ext cx="2468880" cy="3657600"/>
           </a:xfrm>
-          <a:prstGeom prst="rect">
+          <a:prstGeom prst="roundRect">
             <a:avLst/>
           </a:prstGeom>
-          <a:noFill/>
+          <a:solidFill>
+            <a:srgbClr val="F8F9FA"/>
+          </a:solidFill>
+          <a:ln w="12700">
+            <a:solidFill>
+              <a:srgbClr val="E4E6EB"/>
+            </a:solidFill>
+          </a:ln>
         </p:spPr>
+        <p:style>
+          <a:lnRef idx="1">
+            <a:schemeClr val="accent1"/>
+          </a:lnRef>
+          <a:fillRef idx="3">
+            <a:schemeClr val="accent1"/>
+          </a:fillRef>
+          <a:effectRef idx="2">
+            <a:schemeClr val="accent1"/>
+          </a:effectRef>
+          <a:fontRef idx="minor">
+            <a:schemeClr val="lt1"/>
+          </a:fontRef>
+        </p:style>
         <p:txBody>
-          <a:bodyPr wrap="square" lIns="0" tIns="0">
-            <a:spAutoFit/>
-          </a:bodyPr>
+          <a:bodyPr rtlCol="0" anchor="t" wrap="square" lIns="137160" rIns="137160" tIns="164592" bIns="137160"/>
           <a:lstStyle/>
           <a:p>
-            <a:pPr>
-              <a:spcAft>
-                <a:spcPts val="800"/>
+            <a:pPr algn="ctr">
+              <a:spcAft>
+                <a:spcPts val="400"/>
               </a:spcAft>
               <a:defRPr sz="1300" b="1">
                 <a:solidFill>
@@ -6869,10 +6775,39 @@
           </a:p>
           <a:p>
             <a:pPr>
-              <a:spcAft>
-                <a:spcPts val="600"/>
-              </a:spcAft>
-              <a:defRPr sz="950" b="0">
+              <a:defRPr sz="3200" b="1">
+                <a:solidFill>
+                  <a:srgbClr val="3498DB"/>
+                </a:solidFill>
+                <a:latin typeface="Calibri"/>
+              </a:defRPr>
+            </a:pPr>
+            <a:r>
+              <a:t>12%</a:t>
+            </a:r>
+          </a:p>
+          <a:p>
+            <a:pPr>
+              <a:spcAft>
+                <a:spcPts val="800"/>
+              </a:spcAft>
+              <a:defRPr sz="850" b="1">
+                <a:solidFill>
+                  <a:srgbClr val="3498DB"/>
+                </a:solidFill>
+                <a:latin typeface="Arial"/>
+              </a:defRPr>
+            </a:pPr>
+            <a:r>
+              <a:t>Lowest Month-4 Customer Decay</a:t>
+            </a:r>
+          </a:p>
+          <a:p>
+            <a:pPr>
+              <a:spcAft>
+                <a:spcPts val="400"/>
+              </a:spcAft>
+              <a:defRPr sz="850" b="0">
                 <a:solidFill>
                   <a:srgbClr val="212121"/>
                 </a:solidFill>
@@ -6880,15 +6815,15 @@
               </a:defRPr>
             </a:pPr>
             <a:r>
-              <a:t>• Single Point of Failure: 60%+ of households fear putting mobile and fiber under one operator due to worry over complete connectivity blackout during fiber cuts.</a:t>
+              <a:t>• Infrastructure Dread: Households fear putting mobile and fiber under one operator due to worry over complete connectivity blackout during fiber cuts.</a:t>
             </a:r>
           </a:p>
           <a:p>
             <a:pPr>
               <a:spcAft>
-                <a:spcPts val="600"/>
-              </a:spcAft>
-              <a:defRPr sz="950" b="0">
+                <a:spcPts val="400"/>
+              </a:spcAft>
+              <a:defRPr sz="850" b="0">
                 <a:solidFill>
                   <a:srgbClr val="212121"/>
                 </a:solidFill>
@@ -6896,15 +6831,15 @@
               </a:defRPr>
             </a:pPr>
             <a:r>
-              <a:t>• Migration Complexity: Customers dread porting numbers and coordinating multiple technician visits for routers, TV boxes, and cameras.</a:t>
+              <a:t>• Setup Friction: Customers dread porting numbers and coordinating multiple technician visits.</a:t>
             </a:r>
           </a:p>
           <a:p>
             <a:pPr>
               <a:spcAft>
-                <a:spcPts val="600"/>
-              </a:spcAft>
-              <a:defRPr sz="950" b="0">
+                <a:spcPts val="400"/>
+              </a:spcAft>
+              <a:defRPr sz="850" b="0">
                 <a:solidFill>
                   <a:srgbClr val="212121"/>
                 </a:solidFill>
@@ -6912,371 +6847,55 @@
               </a:defRPr>
             </a:pPr>
             <a:r>
-              <a:t>• Product Silos: Sales and field forces work in independent silos, missing cross-sell during low-decay, in-home technician visits.</a:t>
+              <a:t>• Channel Silos: Sales and field forces work in independent silos, missing cross-sell during low-decay in-home technician visits.</a:t>
             </a:r>
           </a:p>
         </p:txBody>
       </p:sp>
-    </p:spTree>
-  </p:cSld>
-  <p:clrMapOvr>
-    <a:masterClrMapping/>
-  </p:clrMapOvr>
-</p:sld>
-</file>
-
-<file path=ppt/slides/slide3.xml><?xml version="1.0" encoding="utf-8"?>
-<p:sld xmlns:a="http://schemas.openxmlformats.org/drawingml/2006/main" xmlns:r="http://schemas.openxmlformats.org/officeDocument/2006/relationships" xmlns:p="http://schemas.openxmlformats.org/presentationml/2006/main">
-  <p:cSld>
-    <p:spTree>
-      <p:nvGrpSpPr>
-        <p:cNvPr id="1" name="Shape 58">
-          <a:extLst>
-            <a:ext uri="{FF2B5EF4-FFF2-40B4-BE49-F238E27FC236}">
-              <a16:creationId xmlns:a16="http://schemas.microsoft.com/office/drawing/2014/main" id="{26976F6B-61BC-F3CF-C2E0-C7C0296A4D56}"/>
-            </a:ext>
-          </a:extLst>
-        </p:cNvPr>
-        <p:cNvGrpSpPr/>
-        <p:nvPr/>
-      </p:nvGrpSpPr>
-      <p:grpSpPr>
-        <a:xfrm>
-          <a:off x="0" y="0"/>
-          <a:ext cx="0" cy="0"/>
-          <a:chOff x="0" y="0"/>
-          <a:chExt cx="0" cy="0"/>
-        </a:xfrm>
-      </p:grpSpPr>
-      <p:pic>
-        <p:nvPicPr>
-          <p:cNvPr id="59" name="Google Shape;59;p14" title="Submission Template-02.jpg">
-            <a:extLst>
-              <a:ext uri="{FF2B5EF4-FFF2-40B4-BE49-F238E27FC236}">
-                <a16:creationId xmlns:a16="http://schemas.microsoft.com/office/drawing/2014/main" id="{BF979149-14EB-AA73-037B-56EF7FEC7567}"/>
-              </a:ext>
-            </a:extLst>
-          </p:cNvPr>
-          <p:cNvPicPr preferRelativeResize="0"/>
+      <p:sp>
+        <p:nvSpPr>
+          <p:cNvPr id="66" name="Rectangle 65"/>
+          <p:cNvSpPr/>
           <p:nvPr/>
-        </p:nvPicPr>
-        <p:blipFill>
-          <a:blip r:embed="rId3">
-            <a:alphaModFix/>
-          </a:blip>
-          <a:stretch>
-            <a:fillRect/>
-          </a:stretch>
-        </p:blipFill>
+        </p:nvSpPr>
         <p:spPr>
           <a:xfrm>
-            <a:off x="1" y="0"/>
-            <a:ext cx="9144000" cy="5143500"/>
+            <a:off x="6172200" y="1005840"/>
+            <a:ext cx="2377440" cy="73152"/>
           </a:xfrm>
           <a:prstGeom prst="rect">
             <a:avLst/>
           </a:prstGeom>
-          <a:noFill/>
+          <a:solidFill>
+            <a:srgbClr val="3498DB"/>
+          </a:solidFill>
           <a:ln>
             <a:noFill/>
           </a:ln>
         </p:spPr>
-      </p:pic>
-      <p:sp>
-        <p:nvSpPr>
-          <p:cNvPr id="60" name="TextBox 59">
-            <a:extLst>
-              <a:ext uri="{FF2B5EF4-FFF2-40B4-BE49-F238E27FC236}">
-                <a16:creationId xmlns:a16="http://schemas.microsoft.com/office/drawing/2014/main" id="{E75D3418-42E5-6285-F2F1-28AC5CF1E198}"/>
-              </a:ext>
-            </a:extLst>
-          </p:cNvPr>
-          <p:cNvSpPr txBox="1"/>
-          <p:nvPr/>
-        </p:nvSpPr>
-        <p:spPr>
-          <a:xfrm>
-            <a:off x="457200" y="388620"/>
-            <a:ext cx="8229600" cy="731520"/>
-          </a:xfrm>
-          <a:prstGeom prst="rect">
-            <a:avLst/>
-          </a:prstGeom>
-          <a:noFill/>
-        </p:spPr>
+        <p:style>
+          <a:lnRef idx="1">
+            <a:schemeClr val="accent1"/>
+          </a:lnRef>
+          <a:fillRef idx="3">
+            <a:schemeClr val="accent1"/>
+          </a:fillRef>
+          <a:effectRef idx="2">
+            <a:schemeClr val="accent1"/>
+          </a:effectRef>
+          <a:fontRef idx="minor">
+            <a:schemeClr val="lt1"/>
+          </a:fontRef>
+        </p:style>
         <p:txBody>
-          <a:bodyPr wrap="square" lIns="0" tIns="0">
-            <a:spAutoFit/>
-          </a:bodyPr>
+          <a:bodyPr rtlCol="0" anchor="ctr"/>
           <a:lstStyle/>
           <a:p>
-            <a:pPr>
-              <a:defRPr sz="2200" b="1">
-                <a:solidFill>
-                  <a:srgbClr val="ED1D24"/>
-                </a:solidFill>
-                <a:latin typeface="Arial"/>
-              </a:defRPr>
-            </a:pPr>
-            <a:r>
-              <a:t>Altura Home: Inbound Ecosystem &amp; AI-Enabled GTM</a:t>
-            </a:r>
-          </a:p>
-        </p:txBody>
-      </p:sp>
-      <p:sp>
-        <p:nvSpPr>
-          <p:cNvPr id="61" name="TextBox 60">
-            <a:extLst>
-              <a:ext uri="{FF2B5EF4-FFF2-40B4-BE49-F238E27FC236}">
-                <a16:creationId xmlns:a16="http://schemas.microsoft.com/office/drawing/2014/main" id="{F66AF7BD-8E64-0272-18D3-19EDAB3D8DA9}"/>
-              </a:ext>
-            </a:extLst>
-          </p:cNvPr>
-          <p:cNvSpPr txBox="1"/>
-          <p:nvPr/>
-        </p:nvSpPr>
-        <p:spPr>
-          <a:xfrm>
-            <a:off x="457200" y="1005840"/>
-            <a:ext cx="8229600" cy="1188720"/>
-          </a:xfrm>
-          <a:prstGeom prst="rect">
-            <a:avLst/>
-          </a:prstGeom>
-          <a:noFill/>
-        </p:spPr>
-        <p:txBody>
-          <a:bodyPr wrap="square" lIns="0" tIns="0">
-            <a:spAutoFit/>
-          </a:bodyPr>
-          <a:lstStyle/>
-          <a:p>
-            <a:pPr>
-              <a:spcAft>
-                <a:spcPts val="400"/>
-              </a:spcAft>
-              <a:defRPr sz="1200" b="1">
-                <a:solidFill>
-                  <a:srgbClr val="0F121C"/>
-                </a:solidFill>
-                <a:latin typeface="Arial"/>
-              </a:defRPr>
-            </a:pPr>
-            <a:r>
-              <a:t>1. Inbound Web, AirBot Chatbot &amp; Unified Bundling</a:t>
-            </a:r>
-          </a:p>
-          <a:p>
-            <a:pPr>
-              <a:spcAft>
-                <a:spcPts val="300"/>
-              </a:spcAft>
-              <a:defRPr sz="900" b="0">
-                <a:solidFill>
-                  <a:srgbClr val="212121"/>
-                </a:solidFill>
-                <a:latin typeface="Calibri"/>
-              </a:defRPr>
-            </a:pPr>
-            <a:r>
-              <a:t>• 4 Converged Plans: Starter (₹499/mo, 1 SIM + Xstream Play), Connect (₹999/mo, 40M Fiber + TV), Family Secure (₹999 promo, 100M Fiber + 2 SIMs + CCTV), Infinite (₹2,999/mo, 1G Fiber + 4 SIMs + 3 Cams).</a:t>
-            </a:r>
-          </a:p>
-          <a:p>
-            <a:pPr>
-              <a:spcAft>
-                <a:spcPts val="300"/>
-              </a:spcAft>
-              <a:defRPr sz="900" b="0">
-                <a:solidFill>
-                  <a:srgbClr val="212121"/>
-                </a:solidFill>
-                <a:latin typeface="Calibri"/>
-              </a:defRPr>
-            </a:pPr>
-            <a:r>
-              <a:t>• AirBot Digital Concierge: Web interactive bot using multi-select questionnaire filtering to route users to optimal bundles and reduce conversion friction.</a:t>
-            </a:r>
-          </a:p>
-          <a:p>
-            <a:pPr>
-              <a:spcAft>
-                <a:spcPts val="300"/>
-              </a:spcAft>
-              <a:defRPr sz="900" b="0">
-                <a:solidFill>
-                  <a:srgbClr val="212121"/>
-                </a:solidFill>
-                <a:latin typeface="Calibri"/>
-              </a:defRPr>
-            </a:pPr>
-            <a:r>
-              <a:t>• Autopay &amp; Coins Incentives: Instant ₹50/mo bill discount and monthly Thanks Coins points to secure loyalty, automate renewals, and reduce admin overhead.</a:t>
-            </a:r>
-          </a:p>
-        </p:txBody>
-      </p:sp>
-      <p:sp>
-        <p:nvSpPr>
-          <p:cNvPr id="62" name="TextBox 61">
-            <a:extLst>
-              <a:ext uri="{FF2B5EF4-FFF2-40B4-BE49-F238E27FC236}">
-                <a16:creationId xmlns:a16="http://schemas.microsoft.com/office/drawing/2014/main" id="{1E4728D8-8C70-103B-3CC3-50762A38B1F2}"/>
-              </a:ext>
-            </a:extLst>
-          </p:cNvPr>
-          <p:cNvSpPr txBox="1"/>
-          <p:nvPr/>
-        </p:nvSpPr>
-        <p:spPr>
-          <a:xfrm>
-            <a:off x="457200" y="2286000"/>
-            <a:ext cx="8229600" cy="1188720"/>
-          </a:xfrm>
-          <a:prstGeom prst="rect">
-            <a:avLst/>
-          </a:prstGeom>
-          <a:noFill/>
-        </p:spPr>
-        <p:txBody>
-          <a:bodyPr wrap="square" lIns="0" tIns="0">
-            <a:spAutoFit/>
-          </a:bodyPr>
-          <a:lstStyle/>
-          <a:p>
-            <a:pPr>
-              <a:spcAft>
-                <a:spcPts val="400"/>
-              </a:spcAft>
-              <a:defRPr sz="1200" b="1">
-                <a:solidFill>
-                  <a:srgbClr val="0F121C"/>
-                </a:solidFill>
-                <a:latin typeface="Arial"/>
-              </a:defRPr>
-            </a:pPr>
-            <a:r>
-              <a:t>2. Operational Overhaul: Defeating SPOF &amp; Installation Friction</a:t>
-            </a:r>
-          </a:p>
-          <a:p>
-            <a:pPr>
-              <a:spcAft>
-                <a:spcPts val="300"/>
-              </a:spcAft>
-              <a:defRPr sz="900" b="0">
-                <a:solidFill>
-                  <a:srgbClr val="212121"/>
-                </a:solidFill>
-                <a:latin typeface="Calibri"/>
-              </a:defRPr>
-            </a:pPr>
-            <a:r>
-              <a:t>• Independent Network Failover: Countering the 'Single Point of Failure' fear by educating users that Fiber WiFi, Cellular Postpaid SIMs, and DTH satellite feeds run on physically separate grids. Xsafe cameras failover automatically to mobile hotspots during outages.</a:t>
-            </a:r>
-          </a:p>
-          <a:p>
-            <a:pPr>
-              <a:spcAft>
-                <a:spcPts val="300"/>
-              </a:spcAft>
-              <a:defRPr sz="900" b="0">
-                <a:solidFill>
-                  <a:srgbClr val="212121"/>
-                </a:solidFill>
-                <a:latin typeface="Calibri"/>
-              </a:defRPr>
-            </a:pPr>
-            <a:r>
-              <a:t>• Single-Visit Concierge Engineers: Eliminating installation dread by deploying a single engineering specialist who installs broadband fiber, activates TV boxes, mounts CCTV cameras, and ports family mobile numbers in a single visit.</a:t>
-            </a:r>
-          </a:p>
-        </p:txBody>
-      </p:sp>
-      <p:sp>
-        <p:nvSpPr>
-          <p:cNvPr id="63" name="TextBox 62">
-            <a:extLst>
-              <a:ext uri="{FF2B5EF4-FFF2-40B4-BE49-F238E27FC236}">
-                <a16:creationId xmlns:a16="http://schemas.microsoft.com/office/drawing/2014/main" id="{2D7E885B-553E-B240-24D7-F13E34D84DA2}"/>
-              </a:ext>
-            </a:extLst>
-          </p:cNvPr>
-          <p:cNvSpPr txBox="1"/>
-          <p:nvPr/>
-        </p:nvSpPr>
-        <p:spPr>
-          <a:xfrm>
-            <a:off x="457200" y="3566160"/>
-            <a:ext cx="8229600" cy="1188720"/>
-          </a:xfrm>
-          <a:prstGeom prst="rect">
-            <a:avLst/>
-          </a:prstGeom>
-          <a:noFill/>
-        </p:spPr>
-        <p:txBody>
-          <a:bodyPr wrap="square" lIns="0" tIns="0">
-            <a:spAutoFit/>
-          </a:bodyPr>
-          <a:lstStyle/>
-          <a:p>
-            <a:pPr>
-              <a:spcAft>
-                <a:spcPts val="400"/>
-              </a:spcAft>
-              <a:defRPr sz="1200" b="1">
-                <a:solidFill>
-                  <a:srgbClr val="0F121C"/>
-                </a:solidFill>
-                <a:latin typeface="Arial"/>
-              </a:defRPr>
-            </a:pPr>
-            <a:r>
-              <a:t>3. Outbound Target Cohorts &amp; Field Force AI Enablement</a:t>
-            </a:r>
-          </a:p>
-          <a:p>
-            <a:pPr>
-              <a:spcAft>
-                <a:spcPts val="300"/>
-              </a:spcAft>
-              <a:defRPr sz="900" b="0">
-                <a:solidFill>
-                  <a:srgbClr val="212121"/>
-                </a:solidFill>
-                <a:latin typeface="Calibri"/>
-              </a:defRPr>
-            </a:pPr>
-            <a:r>
-              <a:t>• AI Customer Targeting: Leverage customer overlap data (Exhibit 4) to automatically run SMS &amp; app bundle upgrade prompts for the 2.5M overlapping Broadband+DTH users and the 16M DTH-only accounts.</a:t>
-            </a:r>
-          </a:p>
-          <a:p>
-            <a:pPr>
-              <a:spcAft>
-                <a:spcPts val="300"/>
-              </a:spcAft>
-              <a:defRPr sz="900" b="0">
-                <a:solidFill>
-                  <a:srgbClr val="212121"/>
-                </a:solidFill>
-                <a:latin typeface="Calibri"/>
-              </a:defRPr>
-            </a:pPr>
-            <a:r>
-              <a:t>• Service Engineer Enablement: Equipping the field technician mobile app with a predictive recommendation engine, prompting them to pitch security cameras (Xsafe) during regular maintenance visits (capturing the 12% low decay rate).</a:t>
-            </a:r>
+            <a:pPr algn="ctr"/>
           </a:p>
         </p:txBody>
       </p:sp>
     </p:spTree>
-    <p:extLst>
-      <p:ext uri="{BB962C8B-B14F-4D97-AF65-F5344CB8AC3E}">
-        <p14:creationId xmlns:p14="http://schemas.microsoft.com/office/powerpoint/2010/main" val="355609039"/>
-      </p:ext>
-    </p:extLst>
   </p:cSld>
   <p:clrMapOvr>
     <a:masterClrMapping/>
@@ -7576,138 +7195,6 @@
           </a:prstGeom>
         </p:spPr>
       </p:pic>
-      <p:sp>
-        <p:nvSpPr>
-          <p:cNvPr id="4" name="TextBox 3"/>
-          <p:cNvSpPr txBox="1"/>
-          <p:nvPr/>
-        </p:nvSpPr>
-        <p:spPr>
-          <a:xfrm>
-            <a:off x="457200" y="535971"/>
-            <a:ext cx="8229600" cy="731520"/>
-          </a:xfrm>
-          <a:prstGeom prst="rect">
-            <a:avLst/>
-          </a:prstGeom>
-          <a:noFill/>
-        </p:spPr>
-        <p:txBody>
-          <a:bodyPr wrap="square" lIns="0" tIns="0">
-            <a:spAutoFit/>
-          </a:bodyPr>
-          <a:lstStyle/>
-          <a:p>
-            <a:pPr>
-              <a:defRPr sz="2100" b="1">
-                <a:solidFill>
-                  <a:srgbClr val="ED1D24"/>
-                </a:solidFill>
-                <a:latin typeface="Arial"/>
-              </a:defRPr>
-            </a:pPr>
-            <a:r>
-              <a:rPr dirty="0"/>
-              <a:t>Annexure 2: Inbound Customer Portal &amp; </a:t>
-            </a:r>
-            <a:r>
-              <a:rPr dirty="0" err="1"/>
-              <a:t>AirBot</a:t>
-            </a:r>
-            <a:r>
-              <a:rPr dirty="0"/>
-              <a:t> Interface</a:t>
-            </a:r>
-          </a:p>
-        </p:txBody>
-      </p:sp>
-      <p:sp>
-        <p:nvSpPr>
-          <p:cNvPr id="5" name="TextBox 4"/>
-          <p:cNvSpPr txBox="1"/>
-          <p:nvPr/>
-        </p:nvSpPr>
-        <p:spPr>
-          <a:xfrm>
-            <a:off x="457200" y="1005840"/>
-            <a:ext cx="3840480" cy="3657600"/>
-          </a:xfrm>
-          <a:prstGeom prst="rect">
-            <a:avLst/>
-          </a:prstGeom>
-          <a:noFill/>
-        </p:spPr>
-        <p:txBody>
-          <a:bodyPr wrap="square" lIns="0" tIns="0">
-            <a:spAutoFit/>
-          </a:bodyPr>
-          <a:lstStyle/>
-          <a:p>
-            <a:pPr>
-              <a:spcAft>
-                <a:spcPts val="800"/>
-              </a:spcAft>
-              <a:defRPr sz="1300" b="1">
-                <a:solidFill>
-                  <a:srgbClr val="0F121C"/>
-                </a:solidFill>
-                <a:latin typeface="Arial"/>
-              </a:defRPr>
-            </a:pPr>
-            <a:r>
-              <a:t>Digitizing the Onboarding Funnel</a:t>
-            </a:r>
-          </a:p>
-          <a:p>
-            <a:pPr>
-              <a:spcAft>
-                <a:spcPts val="600"/>
-              </a:spcAft>
-              <a:defRPr sz="950" b="0">
-                <a:solidFill>
-                  <a:srgbClr val="212121"/>
-                </a:solidFill>
-                <a:latin typeface="Arial"/>
-              </a:defRPr>
-            </a:pPr>
-            <a:r>
-              <a:t>• Website Re-architecting: Designed a premium tab-based structure instead of long scroll sheets, streamlining categories for different household priorities.</a:t>
-            </a:r>
-          </a:p>
-          <a:p>
-            <a:pPr>
-              <a:spcAft>
-                <a:spcPts val="600"/>
-              </a:spcAft>
-              <a:defRPr sz="950" b="0">
-                <a:solidFill>
-                  <a:srgbClr val="212121"/>
-                </a:solidFill>
-                <a:latin typeface="Arial"/>
-              </a:defRPr>
-            </a:pPr>
-            <a:r>
-              <a:t>• AirBot Integration: AirBot acts as a frictionless digital concierge. It replaces standard sales pitch dialogue with multi-select service checklists and contextual profiling.</a:t>
-            </a:r>
-          </a:p>
-          <a:p>
-            <a:pPr>
-              <a:spcAft>
-                <a:spcPts val="600"/>
-              </a:spcAft>
-              <a:defRPr sz="950" b="0">
-                <a:solidFill>
-                  <a:srgbClr val="212121"/>
-                </a:solidFill>
-                <a:latin typeface="Arial"/>
-              </a:defRPr>
-            </a:pPr>
-            <a:r>
-              <a:t>• Autopay &amp; Coin Loops: The online checkout dynamically demonstrates monthly savings (₹50 discount) and Thanks Coins loyalty accumulation to increase signup rates.</a:t>
-            </a:r>
-          </a:p>
-        </p:txBody>
-      </p:sp>
       <p:pic>
         <p:nvPicPr>
           <p:cNvPr id="6" name="Picture 5" descr="bundle_choice_card.jpg"/>
@@ -7730,6 +7217,236 @@
           <a:prstGeom prst="rect">
             <a:avLst/>
           </a:prstGeom>
+        </p:spPr>
+      </p:pic>
+      <p:sp>
+        <p:nvSpPr>
+          <p:cNvPr id="7" name="TextBox 6"/>
+          <p:cNvSpPr txBox="1"/>
+          <p:nvPr/>
+        </p:nvSpPr>
+        <p:spPr>
+          <a:xfrm>
+            <a:off x="457200" y="182880"/>
+            <a:ext cx="8229600" cy="731520"/>
+          </a:xfrm>
+          <a:prstGeom prst="rect">
+            <a:avLst/>
+          </a:prstGeom>
+          <a:noFill/>
+        </p:spPr>
+        <p:txBody>
+          <a:bodyPr wrap="square" lIns="0" tIns="0">
+            <a:spAutoFit/>
+          </a:bodyPr>
+          <a:lstStyle/>
+          <a:p>
+            <a:pPr>
+              <a:defRPr sz="2100" b="1">
+                <a:solidFill>
+                  <a:srgbClr val="ED1D24"/>
+                </a:solidFill>
+                <a:latin typeface="Calibri"/>
+              </a:defRPr>
+            </a:pPr>
+            <a:r>
+              <a:t>Annexure 1: Primary Research &amp; Conjoint Choice Cards</a:t>
+            </a:r>
+          </a:p>
+        </p:txBody>
+      </p:sp>
+      <p:sp>
+        <p:nvSpPr>
+          <p:cNvPr id="8" name="Rounded Rectangle 7"/>
+          <p:cNvSpPr/>
+          <p:nvPr/>
+        </p:nvSpPr>
+        <p:spPr>
+          <a:xfrm>
+            <a:off x="457200" y="1005840"/>
+            <a:ext cx="3840480" cy="3657600"/>
+          </a:xfrm>
+          <a:prstGeom prst="roundRect">
+            <a:avLst/>
+          </a:prstGeom>
+          <a:solidFill>
+            <a:srgbClr val="F8F9FA"/>
+          </a:solidFill>
+          <a:ln w="12700">
+            <a:solidFill>
+              <a:srgbClr val="E4E6EB"/>
+            </a:solidFill>
+          </a:ln>
+        </p:spPr>
+        <p:style>
+          <a:lnRef idx="1">
+            <a:schemeClr val="accent1"/>
+          </a:lnRef>
+          <a:fillRef idx="3">
+            <a:schemeClr val="accent1"/>
+          </a:fillRef>
+          <a:effectRef idx="2">
+            <a:schemeClr val="accent1"/>
+          </a:effectRef>
+          <a:fontRef idx="minor">
+            <a:schemeClr val="lt1"/>
+          </a:fontRef>
+        </p:style>
+        <p:txBody>
+          <a:bodyPr rtlCol="0" anchor="t" wrap="square" lIns="137160" rIns="137160" tIns="164592" bIns="137160"/>
+          <a:lstStyle/>
+          <a:p>
+            <a:pPr algn="ctr">
+              <a:spcAft>
+                <a:spcPts val="800"/>
+              </a:spcAft>
+              <a:defRPr sz="1300" b="1">
+                <a:solidFill>
+                  <a:srgbClr val="0F121C"/>
+                </a:solidFill>
+                <a:latin typeface="Calibri"/>
+              </a:defRPr>
+            </a:pPr>
+            <a:r>
+              <a:t>Research Methodology &amp; Conjoint Analysis</a:t>
+            </a:r>
+          </a:p>
+          <a:p>
+            <a:pPr>
+              <a:spcAft>
+                <a:spcPts val="500"/>
+              </a:spcAft>
+              <a:defRPr sz="880" b="0">
+                <a:solidFill>
+                  <a:srgbClr val="212121"/>
+                </a:solidFill>
+                <a:latin typeface="Arial"/>
+              </a:defRPr>
+            </a:pPr>
+            <a:r>
+              <a:t>• Conjoint Setup: We deployed 4 binary choice questions directly comparing individual utilities vs. their bundled Altura Home counterparts (Choice Card Starter, Connect, Family Secure, and Infinite).</a:t>
+            </a:r>
+          </a:p>
+          <a:p>
+            <a:pPr>
+              <a:spcAft>
+                <a:spcPts val="500"/>
+              </a:spcAft>
+              <a:defRPr sz="880" b="0">
+                <a:solidFill>
+                  <a:srgbClr val="212121"/>
+                </a:solidFill>
+                <a:latin typeface="Arial"/>
+              </a:defRPr>
+            </a:pPr>
+            <a:r>
+              <a:t>• Goal: This Discrete Choice Conjoint Experiment isolates exactly where price sensitivity breaks and maps household utility values.</a:t>
+            </a:r>
+          </a:p>
+          <a:p>
+            <a:pPr>
+              <a:spcAft>
+                <a:spcPts val="500"/>
+              </a:spcAft>
+              <a:defRPr sz="880" b="0">
+                <a:solidFill>
+                  <a:srgbClr val="212121"/>
+                </a:solidFill>
+                <a:latin typeface="Arial"/>
+              </a:defRPr>
+            </a:pPr>
+            <a:r>
+              <a:t>• Quantifying SPOF: Our survey includes agree/disagree statements to map network reliability concerns and data privacy barriers.</a:t>
+            </a:r>
+          </a:p>
+          <a:p>
+            <a:pPr>
+              <a:spcAft>
+                <a:spcPts val="500"/>
+              </a:spcAft>
+              <a:defRPr sz="880" b="0">
+                <a:solidFill>
+                  <a:srgbClr val="212121"/>
+                </a:solidFill>
+                <a:latin typeface="Arial"/>
+              </a:defRPr>
+            </a:pPr>
+            <a:r>
+              <a:t>• Uploading Cards: The generated card graphics (pictured right) help respondents visually compare price-to-benefit ratios.</a:t>
+            </a:r>
+          </a:p>
+        </p:txBody>
+      </p:sp>
+      <p:sp>
+        <p:nvSpPr>
+          <p:cNvPr id="9" name="Rectangle 8"/>
+          <p:cNvSpPr/>
+          <p:nvPr/>
+        </p:nvSpPr>
+        <p:spPr>
+          <a:xfrm>
+            <a:off x="502920" y="1005840"/>
+            <a:ext cx="3749040" cy="73152"/>
+          </a:xfrm>
+          <a:prstGeom prst="rect">
+            <a:avLst/>
+          </a:prstGeom>
+          <a:solidFill>
+            <a:srgbClr val="0F121C"/>
+          </a:solidFill>
+          <a:ln>
+            <a:noFill/>
+          </a:ln>
+        </p:spPr>
+        <p:style>
+          <a:lnRef idx="1">
+            <a:schemeClr val="accent1"/>
+          </a:lnRef>
+          <a:fillRef idx="3">
+            <a:schemeClr val="accent1"/>
+          </a:fillRef>
+          <a:effectRef idx="2">
+            <a:schemeClr val="accent1"/>
+          </a:effectRef>
+          <a:fontRef idx="minor">
+            <a:schemeClr val="lt1"/>
+          </a:fontRef>
+        </p:style>
+        <p:txBody>
+          <a:bodyPr rtlCol="0" anchor="ctr"/>
+          <a:lstStyle/>
+          <a:p>
+            <a:pPr algn="ctr"/>
+          </a:p>
+        </p:txBody>
+      </p:sp>
+      <p:pic>
+        <p:nvPicPr>
+          <p:cNvPr id="10" name="Picture 9" descr="image.jpg"/>
+          <p:cNvPicPr>
+            <a:picLocks noChangeAspect="1"/>
+          </p:cNvPicPr>
+          <p:nvPr/>
+        </p:nvPicPr>
+        <p:blipFill>
+          <a:blip r:embed="rId4"/>
+          <a:stretch>
+            <a:fillRect/>
+          </a:stretch>
+        </p:blipFill>
+        <p:spPr>
+          <a:xfrm>
+            <a:off x="4572000" y="1188720"/>
+            <a:ext cx="4114800" cy="3086100"/>
+          </a:xfrm>
+          <a:prstGeom prst="rect">
+            <a:avLst/>
+          </a:prstGeom>
+          <a:ln w="12700">
+            <a:solidFill>
+              <a:srgbClr val="E4E6EB"/>
+            </a:solidFill>
+          </a:ln>
         </p:spPr>
       </p:pic>
     </p:spTree>
@@ -7808,7 +7525,7 @@
         </p:nvSpPr>
         <p:spPr>
           <a:xfrm>
-            <a:off x="457200" y="602550"/>
+            <a:off x="457200" y="182880"/>
             <a:ext cx="8229600" cy="731520"/>
           </a:xfrm>
           <a:prstGeom prst="rect">
@@ -7827,39 +7544,57 @@
                 <a:solidFill>
                   <a:srgbClr val="ED1D24"/>
                 </a:solidFill>
-                <a:latin typeface="Arial"/>
+                <a:latin typeface="Calibri"/>
               </a:defRPr>
             </a:pPr>
             <a:r>
-              <a:rPr dirty="0"/>
-              <a:t>Annexure 3: Data-Driven Target Cohorts &amp; Economics</a:t>
+              <a:t>Annexure 2: Inbound Customer Portal &amp; Choice Matrices</a:t>
             </a:r>
           </a:p>
         </p:txBody>
       </p:sp>
       <p:sp>
         <p:nvSpPr>
-          <p:cNvPr id="5" name="TextBox 4"/>
-          <p:cNvSpPr txBox="1"/>
+          <p:cNvPr id="5" name="Rounded Rectangle 4"/>
+          <p:cNvSpPr/>
           <p:nvPr/>
         </p:nvSpPr>
         <p:spPr>
           <a:xfrm>
             <a:off x="457200" y="1005840"/>
-            <a:ext cx="8229600" cy="3657600"/>
+            <a:ext cx="3840480" cy="3657600"/>
           </a:xfrm>
-          <a:prstGeom prst="rect">
+          <a:prstGeom prst="roundRect">
             <a:avLst/>
           </a:prstGeom>
-          <a:noFill/>
+          <a:solidFill>
+            <a:srgbClr val="F8F9FA"/>
+          </a:solidFill>
+          <a:ln w="12700">
+            <a:solidFill>
+              <a:srgbClr val="E4E6EB"/>
+            </a:solidFill>
+          </a:ln>
         </p:spPr>
+        <p:style>
+          <a:lnRef idx="1">
+            <a:schemeClr val="accent1"/>
+          </a:lnRef>
+          <a:fillRef idx="3">
+            <a:schemeClr val="accent1"/>
+          </a:fillRef>
+          <a:effectRef idx="2">
+            <a:schemeClr val="accent1"/>
+          </a:effectRef>
+          <a:fontRef idx="minor">
+            <a:schemeClr val="lt1"/>
+          </a:fontRef>
+        </p:style>
         <p:txBody>
-          <a:bodyPr wrap="square" lIns="0" tIns="0">
-            <a:spAutoFit/>
-          </a:bodyPr>
+          <a:bodyPr rtlCol="0" anchor="t" wrap="square" lIns="137160" rIns="137160" tIns="164592" bIns="137160"/>
           <a:lstStyle/>
           <a:p>
-            <a:pPr>
+            <a:pPr algn="ctr">
               <a:spcAft>
                 <a:spcPts val="800"/>
               </a:spcAft>
@@ -7867,19 +7602,19 @@
                 <a:solidFill>
                   <a:srgbClr val="0F121C"/>
                 </a:solidFill>
-                <a:latin typeface="Arial"/>
+                <a:latin typeface="Calibri"/>
               </a:defRPr>
             </a:pPr>
             <a:r>
-              <a:t>AI-Targeted Cross-Sell Opportunities (Exhibits 4 &amp; 5)</a:t>
+              <a:t>Digitizing the Onboarding Funnel</a:t>
             </a:r>
           </a:p>
           <a:p>
             <a:pPr>
               <a:spcAft>
-                <a:spcPts val="600"/>
-              </a:spcAft>
-              <a:defRPr sz="950" b="0">
+                <a:spcPts val="500"/>
+              </a:spcAft>
+              <a:defRPr sz="880" b="0">
                 <a:solidFill>
                   <a:srgbClr val="212121"/>
                 </a:solidFill>
@@ -7887,15 +7622,15 @@
               </a:defRPr>
             </a:pPr>
             <a:r>
-              <a:t>• Cohort A: High-Intent Overlaps (2.5M Users): Target the 2.5 million households subscribing to both Broadband and DTH. Since they are already double-billed, they represent low-hanging fruit for the 'Connect' or 'Family Secure' bundles.</a:t>
+              <a:t>• Website Re-architecting: Designed a premium tab-based structure instead of long scroll sheets, streamlining categories for different household priorities.</a:t>
             </a:r>
           </a:p>
           <a:p>
             <a:pPr>
               <a:spcAft>
-                <a:spcPts val="600"/>
-              </a:spcAft>
-              <a:defRPr sz="950" b="0">
+                <a:spcPts val="500"/>
+              </a:spcAft>
+              <a:defRPr sz="880" b="0">
                 <a:solidFill>
                   <a:srgbClr val="212121"/>
                 </a:solidFill>
@@ -7903,15 +7638,15 @@
               </a:defRPr>
             </a:pPr>
             <a:r>
-              <a:t>• Cohort B: DTH-Only Accounts (16M Users): DTH is expected to decline due to streaming (Exhibit 2). Transitioning these 16 million siloed accounts into converged Fiber+SIM+TV bundles saves them money while preventing DTH cord-cutting.</a:t>
+              <a:t>• AirBot Integration: AirBot acts as a frictionless digital concierge. It replaces standard sales pitch dialogue with multi-select service checklists and contextual profiling.</a:t>
             </a:r>
           </a:p>
           <a:p>
             <a:pPr>
               <a:spcAft>
-                <a:spcPts val="600"/>
-              </a:spcAft>
-              <a:defRPr sz="950" b="0">
+                <a:spcPts val="500"/>
+              </a:spcAft>
+              <a:defRPr sz="880" b="0">
                 <a:solidFill>
                   <a:srgbClr val="212121"/>
                 </a:solidFill>
@@ -7919,11 +7654,83 @@
               </a:defRPr>
             </a:pPr>
             <a:r>
-              <a:t>• Channel Optimization: Digital channel CAC is 50% lower than direct sales (Broadband: ₹220 vs ₹450), but direct sales secure higher Month-4 retention. We route online AirBot leads directly to concierge field technicians to optimize conversion.</a:t>
+              <a:t>• Autopay &amp; Coin Loops: The online checkout dynamically demonstrates monthly savings (₹50 discount) and Thanks Coins loyalty accumulation to increase signup rates.</a:t>
             </a:r>
           </a:p>
         </p:txBody>
       </p:sp>
+      <p:sp>
+        <p:nvSpPr>
+          <p:cNvPr id="6" name="Rectangle 5"/>
+          <p:cNvSpPr/>
+          <p:nvPr/>
+        </p:nvSpPr>
+        <p:spPr>
+          <a:xfrm>
+            <a:off x="502920" y="1005840"/>
+            <a:ext cx="3749040" cy="73152"/>
+          </a:xfrm>
+          <a:prstGeom prst="rect">
+            <a:avLst/>
+          </a:prstGeom>
+          <a:solidFill>
+            <a:srgbClr val="3498DB"/>
+          </a:solidFill>
+          <a:ln>
+            <a:noFill/>
+          </a:ln>
+        </p:spPr>
+        <p:style>
+          <a:lnRef idx="1">
+            <a:schemeClr val="accent1"/>
+          </a:lnRef>
+          <a:fillRef idx="3">
+            <a:schemeClr val="accent1"/>
+          </a:fillRef>
+          <a:effectRef idx="2">
+            <a:schemeClr val="accent1"/>
+          </a:effectRef>
+          <a:fontRef idx="minor">
+            <a:schemeClr val="lt1"/>
+          </a:fontRef>
+        </p:style>
+        <p:txBody>
+          <a:bodyPr rtlCol="0" anchor="ctr"/>
+          <a:lstStyle/>
+          <a:p>
+            <a:pPr algn="ctr"/>
+          </a:p>
+        </p:txBody>
+      </p:sp>
+      <p:pic>
+        <p:nvPicPr>
+          <p:cNvPr id="7" name="Picture 6" descr="image.jpg"/>
+          <p:cNvPicPr>
+            <a:picLocks noChangeAspect="1"/>
+          </p:cNvPicPr>
+          <p:nvPr/>
+        </p:nvPicPr>
+        <p:blipFill>
+          <a:blip r:embed="rId3"/>
+          <a:stretch>
+            <a:fillRect/>
+          </a:stretch>
+        </p:blipFill>
+        <p:spPr>
+          <a:xfrm>
+            <a:off x="4572000" y="1188720"/>
+            <a:ext cx="4114800" cy="3086100"/>
+          </a:xfrm>
+          <a:prstGeom prst="rect">
+            <a:avLst/>
+          </a:prstGeom>
+          <a:ln w="12700">
+            <a:solidFill>
+              <a:srgbClr val="E4E6EB"/>
+            </a:solidFill>
+          </a:ln>
+        </p:spPr>
+      </p:pic>
     </p:spTree>
   </p:cSld>
   <p:clrMapOvr>
@@ -8000,7 +7807,7 @@
         </p:nvSpPr>
         <p:spPr>
           <a:xfrm>
-            <a:off x="424150" y="602550"/>
+            <a:off x="457200" y="182880"/>
             <a:ext cx="8229600" cy="731520"/>
           </a:xfrm>
           <a:prstGeom prst="rect">
@@ -8019,19 +7826,19 @@
                 <a:solidFill>
                   <a:srgbClr val="ED1D24"/>
                 </a:solidFill>
-                <a:latin typeface="Arial"/>
+                <a:latin typeface="Calibri"/>
               </a:defRPr>
             </a:pPr>
             <a:r>
-              <a:t>Annexure 4: Bundle Pricing Model &amp; EBITDA Accretion</a:t>
+              <a:t>Annexure 3: Data-Driven Target Cohorts &amp; Economics</a:t>
             </a:r>
           </a:p>
         </p:txBody>
       </p:sp>
       <p:sp>
         <p:nvSpPr>
-          <p:cNvPr id="5" name="TextBox 4"/>
-          <p:cNvSpPr txBox="1"/>
+          <p:cNvPr id="5" name="Rounded Rectangle 4"/>
+          <p:cNvSpPr/>
           <p:nvPr/>
         </p:nvSpPr>
         <p:spPr>
@@ -8039,18 +7846,37 @@
             <a:off x="457200" y="1005840"/>
             <a:ext cx="8229600" cy="3657600"/>
           </a:xfrm>
-          <a:prstGeom prst="rect">
+          <a:prstGeom prst="roundRect">
             <a:avLst/>
           </a:prstGeom>
-          <a:noFill/>
+          <a:solidFill>
+            <a:srgbClr val="F8F9FA"/>
+          </a:solidFill>
+          <a:ln w="12700">
+            <a:solidFill>
+              <a:srgbClr val="E4E6EB"/>
+            </a:solidFill>
+          </a:ln>
         </p:spPr>
+        <p:style>
+          <a:lnRef idx="1">
+            <a:schemeClr val="accent1"/>
+          </a:lnRef>
+          <a:fillRef idx="3">
+            <a:schemeClr val="accent1"/>
+          </a:fillRef>
+          <a:effectRef idx="2">
+            <a:schemeClr val="accent1"/>
+          </a:effectRef>
+          <a:fontRef idx="minor">
+            <a:schemeClr val="lt1"/>
+          </a:fontRef>
+        </p:style>
         <p:txBody>
-          <a:bodyPr wrap="square" lIns="0" tIns="0">
-            <a:spAutoFit/>
-          </a:bodyPr>
+          <a:bodyPr rtlCol="0" anchor="t" wrap="square" lIns="137160" rIns="137160" tIns="164592" bIns="137160"/>
           <a:lstStyle/>
           <a:p>
-            <a:pPr>
+            <a:pPr algn="ctr">
               <a:spcAft>
                 <a:spcPts val="800"/>
               </a:spcAft>
@@ -8058,11 +7884,11 @@
                 <a:solidFill>
                   <a:srgbClr val="0F121C"/>
                 </a:solidFill>
-                <a:latin typeface="Arial"/>
+                <a:latin typeface="Calibri"/>
               </a:defRPr>
             </a:pPr>
             <a:r>
-              <a:t>Converged Pricing Sheets &amp; EBITDA Margins (Exhibits 1 &amp; 2)</a:t>
+              <a:t>AI-Targeted Cross-Sell Opportunities (Exhibits 4 &amp; 5)</a:t>
             </a:r>
           </a:p>
           <a:p>
@@ -8070,7 +7896,7 @@
               <a:spcAft>
                 <a:spcPts val="600"/>
               </a:spcAft>
-              <a:defRPr sz="950" b="0">
+              <a:defRPr sz="900" b="0">
                 <a:solidFill>
                   <a:srgbClr val="212121"/>
                 </a:solidFill>
@@ -8078,7 +7904,7 @@
               </a:defRPr>
             </a:pPr>
             <a:r>
-              <a:t>• Individual vs. Bundle Price Matrix:</a:t>
+              <a:t>• Cohort A: High-Intent Overlaps (2.5M Users): Target the 2.5 million households subscribing to both Broadband and DTH. Since they are already double-billed, they represent low-hanging fruit for the 'Connect' or 'Family Secure' bundles.</a:t>
             </a:r>
           </a:p>
           <a:p>
@@ -8086,7 +7912,7 @@
               <a:spcAft>
                 <a:spcPts val="600"/>
               </a:spcAft>
-              <a:defRPr sz="950" b="0">
+              <a:defRPr sz="900" b="0">
                 <a:solidFill>
                   <a:srgbClr val="212121"/>
                 </a:solidFill>
@@ -8094,7 +7920,7 @@
               </a:defRPr>
             </a:pPr>
             <a:r>
-              <a:t>   - Standalone Sum: Broadband (₹599) + 2 SIMs (₹700) + Xstream Box (₹250) + Google One (₹209) + Xsafe CCTV (₹150) + Bank (₹99) = ₹2,006/mo.</a:t>
+              <a:t>• Cohort B: DTH-Only Accounts (16M Users): DTH is expected to decline due to streaming (Exhibit 2). Transitioning these 16 million siloed accounts into converged Fiber+SIM+TV bundles saves them money while preventing DTH cord-cutting.</a:t>
             </a:r>
           </a:p>
           <a:p>
@@ -8102,7 +7928,7 @@
               <a:spcAft>
                 <a:spcPts val="600"/>
               </a:spcAft>
-              <a:defRPr sz="950" b="0">
+              <a:defRPr sz="900" b="0">
                 <a:solidFill>
                   <a:srgbClr val="212121"/>
                 </a:solidFill>
@@ -8110,40 +7936,51 @@
               </a:defRPr>
             </a:pPr>
             <a:r>
-              <a:t>   - Consolidated Family Secure: ₹1,499/mo (Saves ₹507/mo or 25% discount). Promoted at ₹999/mo for the first 3 months to destroy switching inertia.</a:t>
+              <a:t>• Channel Optimization: Digital channel CAC is 50% lower than direct sales (Broadband: ₹220 vs ₹450), but direct sales secure higher Month-4 retention. We route online AirBot leads directly to concierge field technicians to optimize conversion.</a:t>
             </a:r>
           </a:p>
-          <a:p>
-            <a:pPr>
-              <a:spcAft>
-                <a:spcPts val="600"/>
-              </a:spcAft>
-              <a:defRPr sz="950" b="0">
-                <a:solidFill>
-                  <a:srgbClr val="212121"/>
-                </a:solidFill>
-                <a:latin typeface="Arial"/>
-              </a:defRPr>
-            </a:pPr>
-            <a:r>
-              <a:t>• Margin Protection: Home Surveillance holds the highest EBITDA margin at 35% (Exhibit 1) and is growing at 35.7% CAGR (Exhibit 2). By bundling Xsafe cameras into Family Secure and Infinite tiers, we offset lower TV margins (12% EBITDA) and drive net margin expansion.</a:t>
-            </a:r>
-          </a:p>
-          <a:p>
-            <a:pPr>
-              <a:spcAft>
-                <a:spcPts val="600"/>
-              </a:spcAft>
-              <a:defRPr sz="950" b="0">
-                <a:solidFill>
-                  <a:srgbClr val="212121"/>
-                </a:solidFill>
-                <a:latin typeface="Arial"/>
-              </a:defRPr>
-            </a:pPr>
-            <a:r>
-              <a:t>• Retention Leverage: Reducing household churn from 22% down to 5% lifts customer lifetime value (LTV) by over 400%, easily amortizing the initial ₹999/mo introductory launch promo cost.</a:t>
-            </a:r>
+        </p:txBody>
+      </p:sp>
+      <p:sp>
+        <p:nvSpPr>
+          <p:cNvPr id="6" name="Rectangle 5"/>
+          <p:cNvSpPr/>
+          <p:nvPr/>
+        </p:nvSpPr>
+        <p:spPr>
+          <a:xfrm>
+            <a:off x="502920" y="1005840"/>
+            <a:ext cx="8138160" cy="73152"/>
+          </a:xfrm>
+          <a:prstGeom prst="rect">
+            <a:avLst/>
+          </a:prstGeom>
+          <a:solidFill>
+            <a:srgbClr val="0F121C"/>
+          </a:solidFill>
+          <a:ln>
+            <a:noFill/>
+          </a:ln>
+        </p:spPr>
+        <p:style>
+          <a:lnRef idx="1">
+            <a:schemeClr val="accent1"/>
+          </a:lnRef>
+          <a:fillRef idx="3">
+            <a:schemeClr val="accent1"/>
+          </a:fillRef>
+          <a:effectRef idx="2">
+            <a:schemeClr val="accent1"/>
+          </a:effectRef>
+          <a:fontRef idx="minor">
+            <a:schemeClr val="lt1"/>
+          </a:fontRef>
+        </p:style>
+        <p:txBody>
+          <a:bodyPr rtlCol="0" anchor="ctr"/>
+          <a:lstStyle/>
+          <a:p>
+            <a:pPr algn="ctr"/>
           </a:p>
         </p:txBody>
       </p:sp>
@@ -8206,145 +8043,6 @@
           </a:prstGeom>
         </p:spPr>
       </p:pic>
-      <p:sp>
-        <p:nvSpPr>
-          <p:cNvPr id="4" name="TextBox 3"/>
-          <p:cNvSpPr txBox="1"/>
-          <p:nvPr/>
-        </p:nvSpPr>
-        <p:spPr>
-          <a:xfrm>
-            <a:off x="457200" y="182880"/>
-            <a:ext cx="8229600" cy="731520"/>
-          </a:xfrm>
-          <a:prstGeom prst="rect">
-            <a:avLst/>
-          </a:prstGeom>
-          <a:noFill/>
-        </p:spPr>
-        <p:txBody>
-          <a:bodyPr wrap="square" lIns="0" tIns="0">
-            <a:spAutoFit/>
-          </a:bodyPr>
-          <a:lstStyle/>
-          <a:p>
-            <a:pPr>
-              <a:defRPr sz="2100" b="1">
-                <a:solidFill>
-                  <a:srgbClr val="ED1D24"/>
-                </a:solidFill>
-                <a:latin typeface="Calibri"/>
-              </a:defRPr>
-            </a:pPr>
-            <a:r>
-              <a:t>Altura Home: Inbound GTM Strategy &amp; Onboarding Platform</a:t>
-            </a:r>
-          </a:p>
-        </p:txBody>
-      </p:sp>
-      <p:sp>
-        <p:nvSpPr>
-          <p:cNvPr id="5" name="TextBox 4"/>
-          <p:cNvSpPr txBox="1"/>
-          <p:nvPr/>
-        </p:nvSpPr>
-        <p:spPr>
-          <a:xfrm>
-            <a:off x="457200" y="1005840"/>
-            <a:ext cx="3657600" cy="3840480"/>
-          </a:xfrm>
-          <a:prstGeom prst="rect">
-            <a:avLst/>
-          </a:prstGeom>
-          <a:noFill/>
-        </p:spPr>
-        <p:txBody>
-          <a:bodyPr wrap="square" lIns="0" tIns="0">
-            <a:spAutoFit/>
-          </a:bodyPr>
-          <a:lstStyle/>
-          <a:p>
-            <a:pPr>
-              <a:spcAft>
-                <a:spcPts val="600"/>
-              </a:spcAft>
-              <a:defRPr sz="1300" b="1">
-                <a:solidFill>
-                  <a:srgbClr val="0F121C"/>
-                </a:solidFill>
-                <a:latin typeface="Calibri"/>
-              </a:defRPr>
-            </a:pPr>
-            <a:r>
-              <a:t>1. Inbound Strategy &amp; Pricing Psychology</a:t>
-            </a:r>
-          </a:p>
-          <a:p>
-            <a:pPr>
-              <a:spcAft>
-                <a:spcPts val="500"/>
-              </a:spcAft>
-              <a:defRPr sz="850" b="0">
-                <a:solidFill>
-                  <a:srgbClr val="212121"/>
-                </a:solidFill>
-                <a:latin typeface="Arial"/>
-              </a:defRPr>
-            </a:pPr>
-            <a:r>
-              <a:t>• Inbound Focus: Prioritize converting our existing 20 million active relationships (siloed accounts) to double wallet share, rather than high-CAC outbound acquisition.</a:t>
-            </a:r>
-          </a:p>
-          <a:p>
-            <a:pPr>
-              <a:spcAft>
-                <a:spcPts val="500"/>
-              </a:spcAft>
-              <a:defRPr sz="850" b="0">
-                <a:solidFill>
-                  <a:srgbClr val="212121"/>
-                </a:solidFill>
-                <a:latin typeface="Arial"/>
-              </a:defRPr>
-            </a:pPr>
-            <a:r>
-              <a:t>• 4 Bundle Portfolio: Altura Starter (₹499/mo), Altura Connect (₹999/mo), Family Secure (₹1,499/mo), and Altura Infinite (₹2,999/mo).</a:t>
-            </a:r>
-          </a:p>
-          <a:p>
-            <a:pPr>
-              <a:spcAft>
-                <a:spcPts val="500"/>
-              </a:spcAft>
-              <a:defRPr sz="850" b="0">
-                <a:solidFill>
-                  <a:srgbClr val="212121"/>
-                </a:solidFill>
-                <a:latin typeface="Arial"/>
-              </a:defRPr>
-            </a:pPr>
-            <a:r>
-              <a:t>• Bundle Psychology &amp; Habit Loop: We discounted the Family Secure bundle to ₹999/mo for the first 3 months, equating it to the price of the basic Connect bundle. Users choose the higher-tier plan due to price-equivalence. During the 3-month trial, they develop a habit around 100 Mbps fiber, smart TV, and Xsafe cameras. Post-trial, they continue at the ₹1,499/mo standard rate, lifting ARPU.</a:t>
-            </a:r>
-          </a:p>
-          <a:p>
-            <a:pPr>
-              <a:spcAft>
-                <a:spcPts val="500"/>
-              </a:spcAft>
-              <a:defRPr sz="850" b="0">
-                <a:solidFill>
-                  <a:srgbClr val="212121"/>
-                </a:solidFill>
-                <a:latin typeface="Arial"/>
-              </a:defRPr>
-            </a:pPr>
-            <a:r>
-              <a:t>• Outbound Note: Direct sales can utilize targeted SMS/App push to overlaps, but the core engine is inbound portal conversion.</a:t>
-            </a:r>
-          </a:p>
-        </p:txBody>
-      </p:sp>
       <p:pic>
         <p:nvPicPr>
           <p:cNvPr id="6" name="Picture 5" descr="screenshot_airbot.png"/>
@@ -8369,58 +8067,6 @@
           </a:prstGeom>
         </p:spPr>
       </p:pic>
-      <p:sp>
-        <p:nvSpPr>
-          <p:cNvPr id="7" name="TextBox 6"/>
-          <p:cNvSpPr txBox="1"/>
-          <p:nvPr/>
-        </p:nvSpPr>
-        <p:spPr>
-          <a:xfrm>
-            <a:off x="5486400" y="1005840"/>
-            <a:ext cx="3200400" cy="1097280"/>
-          </a:xfrm>
-          <a:prstGeom prst="rect">
-            <a:avLst/>
-          </a:prstGeom>
-          <a:noFill/>
-        </p:spPr>
-        <p:txBody>
-          <a:bodyPr wrap="square" lIns="0" tIns="0">
-            <a:spAutoFit/>
-          </a:bodyPr>
-          <a:lstStyle/>
-          <a:p>
-            <a:pPr>
-              <a:spcAft>
-                <a:spcPts val="200"/>
-              </a:spcAft>
-              <a:defRPr sz="1050" b="1">
-                <a:solidFill>
-                  <a:srgbClr val="0F121C"/>
-                </a:solidFill>
-                <a:latin typeface="Calibri"/>
-              </a:defRPr>
-            </a:pPr>
-            <a:r>
-              <a:t>AirBot AI Concierge</a:t>
-            </a:r>
-          </a:p>
-          <a:p>
-            <a:pPr>
-              <a:defRPr sz="850" b="0">
-                <a:solidFill>
-                  <a:srgbClr val="212121"/>
-                </a:solidFill>
-                <a:latin typeface="Arial"/>
-              </a:defRPr>
-            </a:pPr>
-            <a:r>
-              <a:t>Our integrated AI assistant dynamically profiles household sizes and service priorities using multi-select checklist filters, routing users to optimal packages and reducing funnel drop-off.</a:t>
-            </a:r>
-          </a:p>
-        </p:txBody>
-      </p:sp>
       <p:pic>
         <p:nvPicPr>
           <p:cNvPr id="8" name="Picture 7" descr="screenshot_packages.png"/>
@@ -8445,58 +8091,6 @@
           </a:prstGeom>
         </p:spPr>
       </p:pic>
-      <p:sp>
-        <p:nvSpPr>
-          <p:cNvPr id="9" name="TextBox 8"/>
-          <p:cNvSpPr txBox="1"/>
-          <p:nvPr/>
-        </p:nvSpPr>
-        <p:spPr>
-          <a:xfrm>
-            <a:off x="6309360" y="2286000"/>
-            <a:ext cx="2377440" cy="1033271"/>
-          </a:xfrm>
-          <a:prstGeom prst="rect">
-            <a:avLst/>
-          </a:prstGeom>
-          <a:noFill/>
-        </p:spPr>
-        <p:txBody>
-          <a:bodyPr wrap="square" lIns="0" tIns="0">
-            <a:spAutoFit/>
-          </a:bodyPr>
-          <a:lstStyle/>
-          <a:p>
-            <a:pPr>
-              <a:spcAft>
-                <a:spcPts val="200"/>
-              </a:spcAft>
-              <a:defRPr sz="1050" b="1">
-                <a:solidFill>
-                  <a:srgbClr val="0F121C"/>
-                </a:solidFill>
-                <a:latin typeface="Calibri"/>
-              </a:defRPr>
-            </a:pPr>
-            <a:r>
-              <a:t>Transparent Plans &amp; Packages</a:t>
-            </a:r>
-          </a:p>
-          <a:p>
-            <a:pPr>
-              <a:defRPr sz="850" b="0">
-                <a:solidFill>
-                  <a:srgbClr val="212121"/>
-                </a:solidFill>
-                <a:latin typeface="Arial"/>
-              </a:defRPr>
-            </a:pPr>
-            <a:r>
-              <a:t>Showcases pre-calculated tiers with clear highlight cards on the Family Secure ₹999/mo promo to trigger the price-equivalence purchase loop.</a:t>
-            </a:r>
-          </a:p>
-        </p:txBody>
-      </p:sp>
       <p:pic>
         <p:nvPicPr>
           <p:cNvPr id="10" name="Picture 9" descr="screenshot_customizer.png"/>
@@ -8529,8 +8123,8 @@
         </p:nvSpPr>
         <p:spPr>
           <a:xfrm>
-            <a:off x="6309360" y="3474720"/>
-            <a:ext cx="2377440" cy="1033271"/>
+            <a:off x="457200" y="182880"/>
+            <a:ext cx="8229600" cy="731520"/>
           </a:xfrm>
           <a:prstGeom prst="rect">
             <a:avLst/>
@@ -8544,10 +8138,65 @@
           <a:lstStyle/>
           <a:p>
             <a:pPr>
-              <a:spcAft>
-                <a:spcPts val="200"/>
-              </a:spcAft>
-              <a:defRPr sz="1050" b="1">
+              <a:defRPr sz="2100" b="1">
+                <a:solidFill>
+                  <a:srgbClr val="ED1D24"/>
+                </a:solidFill>
+                <a:latin typeface="Calibri"/>
+              </a:defRPr>
+            </a:pPr>
+            <a:r>
+              <a:t>Annexure 4: Bundle Pricing Model &amp; EBITDA Accretion</a:t>
+            </a:r>
+          </a:p>
+        </p:txBody>
+      </p:sp>
+      <p:sp>
+        <p:nvSpPr>
+          <p:cNvPr id="12" name="Rounded Rectangle 11"/>
+          <p:cNvSpPr/>
+          <p:nvPr/>
+        </p:nvSpPr>
+        <p:spPr>
+          <a:xfrm>
+            <a:off x="457200" y="1005840"/>
+            <a:ext cx="8229600" cy="3657600"/>
+          </a:xfrm>
+          <a:prstGeom prst="roundRect">
+            <a:avLst/>
+          </a:prstGeom>
+          <a:solidFill>
+            <a:srgbClr val="F8F9FA"/>
+          </a:solidFill>
+          <a:ln w="12700">
+            <a:solidFill>
+              <a:srgbClr val="E4E6EB"/>
+            </a:solidFill>
+          </a:ln>
+        </p:spPr>
+        <p:style>
+          <a:lnRef idx="1">
+            <a:schemeClr val="accent1"/>
+          </a:lnRef>
+          <a:fillRef idx="3">
+            <a:schemeClr val="accent1"/>
+          </a:fillRef>
+          <a:effectRef idx="2">
+            <a:schemeClr val="accent1"/>
+          </a:effectRef>
+          <a:fontRef idx="minor">
+            <a:schemeClr val="lt1"/>
+          </a:fontRef>
+        </p:style>
+        <p:txBody>
+          <a:bodyPr rtlCol="0" anchor="t" wrap="square" lIns="137160" rIns="137160" tIns="164592" bIns="137160"/>
+          <a:lstStyle/>
+          <a:p>
+            <a:pPr algn="ctr">
+              <a:spcAft>
+                <a:spcPts val="800"/>
+              </a:spcAft>
+              <a:defRPr sz="1300" b="1">
                 <a:solidFill>
                   <a:srgbClr val="0F121C"/>
                 </a:solidFill>
@@ -8555,12 +8204,15 @@
               </a:defRPr>
             </a:pPr>
             <a:r>
-              <a:t>Build Your Custom Bundle</a:t>
+              <a:t>Converged Pricing Sheets &amp; EBITDA Margins (Exhibits 1 &amp; 2)</a:t>
             </a:r>
           </a:p>
           <a:p>
             <a:pPr>
-              <a:defRPr sz="850" b="0">
+              <a:spcAft>
+                <a:spcPts val="600"/>
+              </a:spcAft>
+              <a:defRPr sz="900" b="0">
                 <a:solidFill>
                   <a:srgbClr val="212121"/>
                 </a:solidFill>
@@ -8568,8 +8220,115 @@
               </a:defRPr>
             </a:pPr>
             <a:r>
-              <a:t>Replaces rigid plans. Users pick only what they use (Fiber speed, SIM count, Cameras) and calculate dynamic costs, eliminating the utility waste of unused services.</a:t>
+              <a:t>• Individual vs. Bundle Price Matrix:</a:t>
             </a:r>
+          </a:p>
+          <a:p>
+            <a:pPr>
+              <a:spcAft>
+                <a:spcPts val="600"/>
+              </a:spcAft>
+              <a:defRPr sz="900" b="0">
+                <a:solidFill>
+                  <a:srgbClr val="212121"/>
+                </a:solidFill>
+                <a:latin typeface="Arial"/>
+              </a:defRPr>
+            </a:pPr>
+            <a:r>
+              <a:t>   - Standalone Sum: Broadband (₹599) + 2 SIMs (₹700) + Xstream Box (₹250) + Google One (₹209) + Xsafe CCTV (₹150) + Bank (₹99) = ₹2,006/mo.</a:t>
+            </a:r>
+          </a:p>
+          <a:p>
+            <a:pPr>
+              <a:spcAft>
+                <a:spcPts val="600"/>
+              </a:spcAft>
+              <a:defRPr sz="900" b="0">
+                <a:solidFill>
+                  <a:srgbClr val="212121"/>
+                </a:solidFill>
+                <a:latin typeface="Arial"/>
+              </a:defRPr>
+            </a:pPr>
+            <a:r>
+              <a:t>   - Consolidated Family Secure: ₹1,499/mo (Saves ₹507/mo or 25% discount). Promoted at ₹999/mo for the first 3 months to destroy switching inertia.</a:t>
+            </a:r>
+          </a:p>
+          <a:p>
+            <a:pPr>
+              <a:spcAft>
+                <a:spcPts val="600"/>
+              </a:spcAft>
+              <a:defRPr sz="900" b="0">
+                <a:solidFill>
+                  <a:srgbClr val="212121"/>
+                </a:solidFill>
+                <a:latin typeface="Arial"/>
+              </a:defRPr>
+            </a:pPr>
+            <a:r>
+              <a:t>• Margin Protection: Home Surveillance holds the highest EBITDA margin at 35% (Exhibit 1) and is growing at 35.7% CAGR (Exhibit 2). By bundling Xsafe cameras into Family Secure and Infinite tiers, we offset lower TV margins (12% EBITDA) and drive net margin expansion.</a:t>
+            </a:r>
+          </a:p>
+          <a:p>
+            <a:pPr>
+              <a:spcAft>
+                <a:spcPts val="600"/>
+              </a:spcAft>
+              <a:defRPr sz="900" b="0">
+                <a:solidFill>
+                  <a:srgbClr val="212121"/>
+                </a:solidFill>
+                <a:latin typeface="Arial"/>
+              </a:defRPr>
+            </a:pPr>
+            <a:r>
+              <a:t>• Churn Leverage: Reducing household churn from 22% down to 5% lifts customer lifetime value (LTV) by over 400%, easily amortizing the initial ₹999/mo introductory launch promo cost.</a:t>
+            </a:r>
+          </a:p>
+        </p:txBody>
+      </p:sp>
+      <p:sp>
+        <p:nvSpPr>
+          <p:cNvPr id="13" name="Rectangle 12"/>
+          <p:cNvSpPr/>
+          <p:nvPr/>
+        </p:nvSpPr>
+        <p:spPr>
+          <a:xfrm>
+            <a:off x="502920" y="1005840"/>
+            <a:ext cx="8138160" cy="73152"/>
+          </a:xfrm>
+          <a:prstGeom prst="rect">
+            <a:avLst/>
+          </a:prstGeom>
+          <a:solidFill>
+            <a:srgbClr val="ED1D24"/>
+          </a:solidFill>
+          <a:ln>
+            <a:noFill/>
+          </a:ln>
+        </p:spPr>
+        <p:style>
+          <a:lnRef idx="1">
+            <a:schemeClr val="accent1"/>
+          </a:lnRef>
+          <a:fillRef idx="3">
+            <a:schemeClr val="accent1"/>
+          </a:fillRef>
+          <a:effectRef idx="2">
+            <a:schemeClr val="accent1"/>
+          </a:effectRef>
+          <a:fontRef idx="minor">
+            <a:schemeClr val="lt1"/>
+          </a:fontRef>
+        </p:style>
+        <p:txBody>
+          <a:bodyPr rtlCol="0" anchor="ctr"/>
+          <a:lstStyle/>
+          <a:p>
+            <a:pPr algn="ctr"/>
           </a:p>
         </p:txBody>
       </p:sp>
@@ -8632,145 +8391,6 @@
           </a:prstGeom>
         </p:spPr>
       </p:pic>
-      <p:sp>
-        <p:nvSpPr>
-          <p:cNvPr id="4" name="TextBox 3"/>
-          <p:cNvSpPr txBox="1"/>
-          <p:nvPr/>
-        </p:nvSpPr>
-        <p:spPr>
-          <a:xfrm>
-            <a:off x="457200" y="182880"/>
-            <a:ext cx="8229600" cy="731520"/>
-          </a:xfrm>
-          <a:prstGeom prst="rect">
-            <a:avLst/>
-          </a:prstGeom>
-          <a:noFill/>
-        </p:spPr>
-        <p:txBody>
-          <a:bodyPr wrap="square" lIns="0" tIns="0">
-            <a:spAutoFit/>
-          </a:bodyPr>
-          <a:lstStyle/>
-          <a:p>
-            <a:pPr>
-              <a:defRPr sz="2100" b="1">
-                <a:solidFill>
-                  <a:srgbClr val="ED1D24"/>
-                </a:solidFill>
-                <a:latin typeface="Calibri"/>
-              </a:defRPr>
-            </a:pPr>
-            <a:r>
-              <a:t>Annexure 1: Primary Research &amp; Conjoint Choice Cards</a:t>
-            </a:r>
-          </a:p>
-        </p:txBody>
-      </p:sp>
-      <p:sp>
-        <p:nvSpPr>
-          <p:cNvPr id="5" name="TextBox 4"/>
-          <p:cNvSpPr txBox="1"/>
-          <p:nvPr/>
-        </p:nvSpPr>
-        <p:spPr>
-          <a:xfrm>
-            <a:off x="457200" y="1005840"/>
-            <a:ext cx="3840480" cy="3657600"/>
-          </a:xfrm>
-          <a:prstGeom prst="rect">
-            <a:avLst/>
-          </a:prstGeom>
-          <a:noFill/>
-        </p:spPr>
-        <p:txBody>
-          <a:bodyPr wrap="square" lIns="0" tIns="0">
-            <a:spAutoFit/>
-          </a:bodyPr>
-          <a:lstStyle/>
-          <a:p>
-            <a:pPr>
-              <a:spcAft>
-                <a:spcPts val="800"/>
-              </a:spcAft>
-              <a:defRPr sz="1300" b="1">
-                <a:solidFill>
-                  <a:srgbClr val="0F121C"/>
-                </a:solidFill>
-                <a:latin typeface="Calibri"/>
-              </a:defRPr>
-            </a:pPr>
-            <a:r>
-              <a:t>Research Methodology &amp; Conjoint Analysis</a:t>
-            </a:r>
-          </a:p>
-          <a:p>
-            <a:pPr>
-              <a:spcAft>
-                <a:spcPts val="600"/>
-              </a:spcAft>
-              <a:defRPr sz="950" b="0">
-                <a:solidFill>
-                  <a:srgbClr val="212121"/>
-                </a:solidFill>
-                <a:latin typeface="Arial"/>
-              </a:defRPr>
-            </a:pPr>
-            <a:r>
-              <a:t>• Conjoint Setup: We deployed 4 binary choice questions directly comparing individual utilities vs. their bundled Altura Home counterparts (Choice Card Starter, Connect, Family Secure, and Infinite).</a:t>
-            </a:r>
-          </a:p>
-          <a:p>
-            <a:pPr>
-              <a:spcAft>
-                <a:spcPts val="600"/>
-              </a:spcAft>
-              <a:defRPr sz="950" b="0">
-                <a:solidFill>
-                  <a:srgbClr val="212121"/>
-                </a:solidFill>
-                <a:latin typeface="Arial"/>
-              </a:defRPr>
-            </a:pPr>
-            <a:r>
-              <a:t>• Goal: This Discrete Choice Conjoint Experiment isolates exactly where price sensitivity breaks and maps household utility values.</a:t>
-            </a:r>
-          </a:p>
-          <a:p>
-            <a:pPr>
-              <a:spcAft>
-                <a:spcPts val="600"/>
-              </a:spcAft>
-              <a:defRPr sz="950" b="0">
-                <a:solidFill>
-                  <a:srgbClr val="212121"/>
-                </a:solidFill>
-                <a:latin typeface="Arial"/>
-              </a:defRPr>
-            </a:pPr>
-            <a:r>
-              <a:t>• Quantifying SPOF: Our survey includes agree/disagree statements to map network reliability concerns and data privacy barriers.</a:t>
-            </a:r>
-          </a:p>
-          <a:p>
-            <a:pPr>
-              <a:spcAft>
-                <a:spcPts val="600"/>
-              </a:spcAft>
-              <a:defRPr sz="950" b="0">
-                <a:solidFill>
-                  <a:srgbClr val="212121"/>
-                </a:solidFill>
-                <a:latin typeface="Arial"/>
-              </a:defRPr>
-            </a:pPr>
-            <a:r>
-              <a:t>• Uploading Cards: The generated card graphics (pictured right) help respondents visually compare price-to-benefit ratios.</a:t>
-            </a:r>
-          </a:p>
-        </p:txBody>
-      </p:sp>
       <p:pic>
         <p:nvPicPr>
           <p:cNvPr id="6" name="Picture 5" descr="image.jpg"/>

--- a/Altura_Household_Convergence_Strategy.pptx
+++ b/Altura_Household_Convergence_Strategy.pptx
@@ -5897,235 +5897,6 @@
           </a:prstGeom>
         </p:spPr>
       </p:pic>
-      <p:pic>
-        <p:nvPicPr>
-          <p:cNvPr id="6" name="Picture 5" descr="image.jpg"/>
-          <p:cNvPicPr>
-            <a:picLocks noChangeAspect="1"/>
-          </p:cNvPicPr>
-          <p:nvPr/>
-        </p:nvPicPr>
-        <p:blipFill>
-          <a:blip r:embed="rId3"/>
-          <a:stretch>
-            <a:fillRect/>
-          </a:stretch>
-        </p:blipFill>
-        <p:spPr>
-          <a:xfrm>
-            <a:off x="4572000" y="1188720"/>
-            <a:ext cx="4114800" cy="3086100"/>
-          </a:xfrm>
-          <a:prstGeom prst="rect">
-            <a:avLst/>
-          </a:prstGeom>
-        </p:spPr>
-      </p:pic>
-    </p:spTree>
-  </p:cSld>
-  <p:clrMapOvr>
-    <a:masterClrMapping/>
-  </p:clrMapOvr>
-</p:sld>
-</file>
-
-<file path=ppt/slides/slide11.xml><?xml version="1.0" encoding="utf-8"?>
-<p:sld xmlns:a="http://schemas.openxmlformats.org/drawingml/2006/main" xmlns:p="http://schemas.openxmlformats.org/presentationml/2006/main" xmlns:r="http://schemas.openxmlformats.org/officeDocument/2006/relationships">
-  <p:cSld>
-    <p:spTree>
-      <p:nvGrpSpPr>
-        <p:cNvPr id="1" name=""/>
-        <p:cNvGrpSpPr/>
-        <p:nvPr/>
-      </p:nvGrpSpPr>
-      <p:grpSpPr/>
-      <p:sp>
-        <p:nvSpPr>
-          <p:cNvPr id="2" name="Title 1"/>
-          <p:cNvSpPr>
-            <a:spLocks noGrp="1"/>
-          </p:cNvSpPr>
-          <p:nvPr>
-            <p:ph type="title"/>
-          </p:nvPr>
-        </p:nvSpPr>
-        <p:spPr/>
-        <p:txBody>
-          <a:bodyPr/>
-          <a:lstStyle/>
-          <a:p/>
-        </p:txBody>
-      </p:sp>
-      <p:pic>
-        <p:nvPicPr>
-          <p:cNvPr id="3" name="Picture 2" descr="image.jpg"/>
-          <p:cNvPicPr>
-            <a:picLocks noChangeAspect="1"/>
-          </p:cNvPicPr>
-          <p:nvPr/>
-        </p:nvPicPr>
-        <p:blipFill>
-          <a:blip r:embed="rId2"/>
-          <a:stretch>
-            <a:fillRect/>
-          </a:stretch>
-        </p:blipFill>
-        <p:spPr>
-          <a:xfrm>
-            <a:off x="1" y="0"/>
-            <a:ext cx="9144000" cy="5143500"/>
-          </a:xfrm>
-          <a:prstGeom prst="rect">
-            <a:avLst/>
-          </a:prstGeom>
-        </p:spPr>
-      </p:pic>
-    </p:spTree>
-  </p:cSld>
-  <p:clrMapOvr>
-    <a:masterClrMapping/>
-  </p:clrMapOvr>
-</p:sld>
-</file>
-
-<file path=ppt/slides/slide12.xml><?xml version="1.0" encoding="utf-8"?>
-<p:sld xmlns:a="http://schemas.openxmlformats.org/drawingml/2006/main" xmlns:p="http://schemas.openxmlformats.org/presentationml/2006/main" xmlns:r="http://schemas.openxmlformats.org/officeDocument/2006/relationships">
-  <p:cSld>
-    <p:spTree>
-      <p:nvGrpSpPr>
-        <p:cNvPr id="1" name=""/>
-        <p:cNvGrpSpPr/>
-        <p:nvPr/>
-      </p:nvGrpSpPr>
-      <p:grpSpPr/>
-      <p:sp>
-        <p:nvSpPr>
-          <p:cNvPr id="2" name="Title 1"/>
-          <p:cNvSpPr>
-            <a:spLocks noGrp="1"/>
-          </p:cNvSpPr>
-          <p:nvPr>
-            <p:ph type="title"/>
-          </p:nvPr>
-        </p:nvSpPr>
-        <p:spPr/>
-        <p:txBody>
-          <a:bodyPr/>
-          <a:lstStyle/>
-          <a:p/>
-        </p:txBody>
-      </p:sp>
-      <p:pic>
-        <p:nvPicPr>
-          <p:cNvPr id="3" name="Picture 2" descr="image.jpg"/>
-          <p:cNvPicPr>
-            <a:picLocks noChangeAspect="1"/>
-          </p:cNvPicPr>
-          <p:nvPr/>
-        </p:nvPicPr>
-        <p:blipFill>
-          <a:blip r:embed="rId2"/>
-          <a:stretch>
-            <a:fillRect/>
-          </a:stretch>
-        </p:blipFill>
-        <p:spPr>
-          <a:xfrm>
-            <a:off x="1" y="0"/>
-            <a:ext cx="9144000" cy="5143500"/>
-          </a:xfrm>
-          <a:prstGeom prst="rect">
-            <a:avLst/>
-          </a:prstGeom>
-        </p:spPr>
-      </p:pic>
-      <p:pic>
-        <p:nvPicPr>
-          <p:cNvPr id="7" name="Picture 6" descr="image.png"/>
-          <p:cNvPicPr>
-            <a:picLocks noChangeAspect="1"/>
-          </p:cNvPicPr>
-          <p:nvPr/>
-        </p:nvPicPr>
-        <p:blipFill>
-          <a:blip r:embed="rId3"/>
-          <a:stretch>
-            <a:fillRect/>
-          </a:stretch>
-        </p:blipFill>
-        <p:spPr>
-          <a:xfrm>
-            <a:off x="4389120" y="1005840"/>
-            <a:ext cx="1005840" cy="1097280"/>
-          </a:xfrm>
-          <a:prstGeom prst="rect">
-            <a:avLst/>
-          </a:prstGeom>
-          <a:ln w="12700">
-            <a:solidFill>
-              <a:srgbClr val="E4E6EB"/>
-            </a:solidFill>
-          </a:ln>
-        </p:spPr>
-      </p:pic>
-      <p:pic>
-        <p:nvPicPr>
-          <p:cNvPr id="9" name="Picture 8" descr="image.png"/>
-          <p:cNvPicPr>
-            <a:picLocks noChangeAspect="1"/>
-          </p:cNvPicPr>
-          <p:nvPr/>
-        </p:nvPicPr>
-        <p:blipFill>
-          <a:blip r:embed="rId4"/>
-          <a:stretch>
-            <a:fillRect/>
-          </a:stretch>
-        </p:blipFill>
-        <p:spPr>
-          <a:xfrm>
-            <a:off x="4389120" y="2286000"/>
-            <a:ext cx="1828800" cy="1033271"/>
-          </a:xfrm>
-          <a:prstGeom prst="rect">
-            <a:avLst/>
-          </a:prstGeom>
-          <a:ln w="12700">
-            <a:solidFill>
-              <a:srgbClr val="E4E6EB"/>
-            </a:solidFill>
-          </a:ln>
-        </p:spPr>
-      </p:pic>
-      <p:pic>
-        <p:nvPicPr>
-          <p:cNvPr id="11" name="Picture 10" descr="image.png"/>
-          <p:cNvPicPr>
-            <a:picLocks noChangeAspect="1"/>
-          </p:cNvPicPr>
-          <p:nvPr/>
-        </p:nvPicPr>
-        <p:blipFill>
-          <a:blip r:embed="rId5"/>
-          <a:stretch>
-            <a:fillRect/>
-          </a:stretch>
-        </p:blipFill>
-        <p:spPr>
-          <a:xfrm>
-            <a:off x="4389120" y="3474720"/>
-            <a:ext cx="1828800" cy="1033271"/>
-          </a:xfrm>
-          <a:prstGeom prst="rect">
-            <a:avLst/>
-          </a:prstGeom>
-          <a:ln w="12700">
-            <a:solidFill>
-              <a:srgbClr val="E4E6EB"/>
-            </a:solidFill>
-          </a:ln>
-        </p:spPr>
-      </p:pic>
     </p:spTree>
   </p:cSld>
   <p:clrMapOvr>
@@ -6333,8 +6104,8 @@
         </p:nvSpPr>
         <p:spPr>
           <a:xfrm>
-            <a:off x="457200" y="182880"/>
-            <a:ext cx="8229600" cy="731520"/>
+            <a:off x="1097280" y="164592"/>
+            <a:ext cx="6858000" cy="411480"/>
           </a:xfrm>
           <a:prstGeom prst="rect">
             <a:avLst/>
@@ -6342,45 +6113,81 @@
           <a:noFill/>
         </p:spPr>
         <p:txBody>
-          <a:bodyPr wrap="square" lIns="0" tIns="0">
+          <a:bodyPr wrap="none" lIns="0" tIns="0" bIns="0">
             <a:spAutoFit/>
           </a:bodyPr>
           <a:lstStyle/>
           <a:p>
             <a:pPr>
-              <a:defRPr sz="2100" b="1">
+              <a:defRPr sz="2400" b="1">
+                <a:solidFill>
+                  <a:srgbClr val="0F121C"/>
+                </a:solidFill>
+                <a:latin typeface="Calibri"/>
+              </a:defRPr>
+            </a:pPr>
+            <a:r>
+              <a:t>Diagnosing the Convergence Gap</a:t>
+            </a:r>
+          </a:p>
+        </p:txBody>
+      </p:sp>
+      <p:sp>
+        <p:nvSpPr>
+          <p:cNvPr id="61" name="TextBox 60"/>
+          <p:cNvSpPr txBox="1"/>
+          <p:nvPr/>
+        </p:nvSpPr>
+        <p:spPr>
+          <a:xfrm>
+            <a:off x="1097280" y="548640"/>
+            <a:ext cx="6858000" cy="274320"/>
+          </a:xfrm>
+          <a:prstGeom prst="rect">
+            <a:avLst/>
+          </a:prstGeom>
+          <a:noFill/>
+        </p:spPr>
+        <p:txBody>
+          <a:bodyPr wrap="square" lIns="0" tIns="0" bIns="0">
+            <a:spAutoFit/>
+          </a:bodyPr>
+          <a:lstStyle/>
+          <a:p>
+            <a:pPr>
+              <a:defRPr sz="850" b="0">
                 <a:solidFill>
                   <a:srgbClr val="ED1D24"/>
                 </a:solidFill>
-                <a:latin typeface="Calibri"/>
-              </a:defRPr>
-            </a:pPr>
-            <a:r>
-              <a:t>Altura Communications: Strategic Diagnosis &amp; Market Analysis</a:t>
-            </a:r>
-          </a:p>
-        </p:txBody>
-      </p:sp>
-      <p:sp>
-        <p:nvSpPr>
-          <p:cNvPr id="61" name="Rounded Rectangle 60"/>
+                <a:latin typeface="Arial"/>
+              </a:defRPr>
+            </a:pPr>
+            <a:r>
+              <a:t>Market, product portfolio, consumer psychology and competitive position - why Altura's households aren't consolidating, and what defends the business meanwhile.</a:t>
+            </a:r>
+          </a:p>
+        </p:txBody>
+      </p:sp>
+      <p:sp>
+        <p:nvSpPr>
+          <p:cNvPr id="62" name="Rounded Rectangle 61"/>
           <p:cNvSpPr/>
           <p:nvPr/>
         </p:nvSpPr>
         <p:spPr>
           <a:xfrm>
-            <a:off x="457200" y="1005840"/>
-            <a:ext cx="2468880" cy="3657600"/>
+            <a:off x="109728" y="1051560"/>
+            <a:ext cx="2880360" cy="1783080"/>
           </a:xfrm>
           <a:prstGeom prst="roundRect">
             <a:avLst/>
           </a:prstGeom>
           <a:solidFill>
-            <a:srgbClr val="F8F9FA"/>
+            <a:srgbClr val="FFFFFF"/>
           </a:solidFill>
           <a:ln w="12700">
             <a:solidFill>
-              <a:srgbClr val="E4E6EB"/>
+              <a:srgbClr val="DCDEE1"/>
             </a:solidFill>
           </a:ln>
         </p:spPr>
@@ -6399,113 +6206,23 @@
           </a:fontRef>
         </p:style>
         <p:txBody>
-          <a:bodyPr rtlCol="0" anchor="t" wrap="square" lIns="137160" rIns="137160" tIns="164592" bIns="137160"/>
+          <a:bodyPr rtlCol="0" anchor="ctr"/>
           <a:lstStyle/>
           <a:p>
-            <a:pPr algn="ctr">
-              <a:spcAft>
-                <a:spcPts val="400"/>
-              </a:spcAft>
-              <a:defRPr sz="1300" b="1">
-                <a:solidFill>
-                  <a:srgbClr val="0F121C"/>
-                </a:solidFill>
-                <a:latin typeface="Calibri"/>
-              </a:defRPr>
-            </a:pPr>
-            <a:r>
-              <a:t>1. Wallet Opportunity &amp; Moat</a:t>
-            </a:r>
-          </a:p>
-          <a:p>
-            <a:pPr>
-              <a:defRPr sz="3200" b="1">
-                <a:solidFill>
-                  <a:srgbClr val="ED1D24"/>
-                </a:solidFill>
-                <a:latin typeface="Calibri"/>
-              </a:defRPr>
-            </a:pPr>
-            <a:r>
-              <a:t>₹18,000</a:t>
-            </a:r>
-          </a:p>
-          <a:p>
-            <a:pPr>
-              <a:spcAft>
-                <a:spcPts val="800"/>
-              </a:spcAft>
-              <a:defRPr sz="850" b="1">
-                <a:solidFill>
-                  <a:srgbClr val="3498DB"/>
-                </a:solidFill>
-                <a:latin typeface="Arial"/>
-              </a:defRPr>
-            </a:pPr>
-            <a:r>
-              <a:t>Annual Wallet Opportunity per Home</a:t>
-            </a:r>
-          </a:p>
-          <a:p>
-            <a:pPr>
-              <a:spcAft>
-                <a:spcPts val="400"/>
-              </a:spcAft>
-              <a:defRPr sz="850" b="0">
-                <a:solidFill>
-                  <a:srgbClr val="212121"/>
-                </a:solidFill>
-                <a:latin typeface="Arial"/>
-              </a:defRPr>
-            </a:pPr>
-            <a:r>
-              <a:t>• Value White Spaces: Connectivity accounts for 35% of household spend, but adjacent services like Entertainment (12%) and Security (2%) represent massive white spaces (Exhibit 3).</a:t>
-            </a:r>
-          </a:p>
-          <a:p>
-            <a:pPr>
-              <a:spcAft>
-                <a:spcPts val="400"/>
-              </a:spcAft>
-              <a:defRPr sz="850" b="0">
-                <a:solidFill>
-                  <a:srgbClr val="212121"/>
-                </a:solidFill>
-                <a:latin typeface="Arial"/>
-              </a:defRPr>
-            </a:pPr>
-            <a:r>
-              <a:t>• Churn Moat: Moving a customer from 1 product to 3+ services drops annual churn from 22% to 5% (Exhibit 4).</a:t>
-            </a:r>
-          </a:p>
-          <a:p>
-            <a:pPr>
-              <a:spcAft>
-                <a:spcPts val="400"/>
-              </a:spcAft>
-              <a:defRPr sz="850" b="0">
-                <a:solidFill>
-                  <a:srgbClr val="212121"/>
-                </a:solidFill>
-                <a:latin typeface="Arial"/>
-              </a:defRPr>
-            </a:pPr>
-            <a:r>
-              <a:t>• Postpaid Lift: Postpaid SIMs deliver ₹100 higher ARPU and 50% stronger customer stickiness than prepaid, yet silos block migrations.</a:t>
-            </a:r>
-          </a:p>
-        </p:txBody>
-      </p:sp>
-      <p:sp>
-        <p:nvSpPr>
-          <p:cNvPr id="62" name="Rectangle 61"/>
+            <a:pPr algn="ctr"/>
+          </a:p>
+        </p:txBody>
+      </p:sp>
+      <p:sp>
+        <p:nvSpPr>
+          <p:cNvPr id="63" name="Rectangle 62"/>
           <p:cNvSpPr/>
           <p:nvPr/>
         </p:nvSpPr>
         <p:spPr>
           <a:xfrm>
-            <a:off x="502920" y="1005840"/>
-            <a:ext cx="2377440" cy="73152"/>
+            <a:off x="182880" y="1124712"/>
+            <a:ext cx="164592" cy="164592"/>
           </a:xfrm>
           <a:prstGeom prst="rect">
             <a:avLst/>
@@ -6532,34 +6249,221 @@
           </a:fontRef>
         </p:style>
         <p:txBody>
-          <a:bodyPr rtlCol="0" anchor="ctr"/>
+          <a:bodyPr rtlCol="0" anchor="ctr" wrap="none" lIns="0" rIns="0" tIns="0" bIns="0"/>
           <a:lstStyle/>
           <a:p>
-            <a:pPr algn="ctr"/>
-          </a:p>
-        </p:txBody>
-      </p:sp>
-      <p:sp>
-        <p:nvSpPr>
-          <p:cNvPr id="63" name="Rounded Rectangle 62"/>
+            <a:pPr algn="ctr">
+              <a:defRPr sz="850" b="1">
+                <a:solidFill>
+                  <a:srgbClr val="FFFFFF"/>
+                </a:solidFill>
+                <a:latin typeface="Calibri"/>
+              </a:defRPr>
+            </a:pPr>
+            <a:r>
+              <a:t>1</a:t>
+            </a:r>
+          </a:p>
+        </p:txBody>
+      </p:sp>
+      <p:sp>
+        <p:nvSpPr>
+          <p:cNvPr id="64" name="TextBox 63"/>
+          <p:cNvSpPr txBox="1"/>
+          <p:nvPr/>
+        </p:nvSpPr>
+        <p:spPr>
+          <a:xfrm>
+            <a:off x="402336" y="1097280"/>
+            <a:ext cx="2514600" cy="219456"/>
+          </a:xfrm>
+          <a:prstGeom prst="rect">
+            <a:avLst/>
+          </a:prstGeom>
+          <a:noFill/>
+        </p:spPr>
+        <p:txBody>
+          <a:bodyPr wrap="none" lIns="0" rIns="0" tIns="0" bIns="0">
+            <a:spAutoFit/>
+          </a:bodyPr>
+          <a:lstStyle/>
+          <a:p>
+            <a:pPr>
+              <a:defRPr sz="950" b="1">
+                <a:solidFill>
+                  <a:srgbClr val="ED1D24"/>
+                </a:solidFill>
+                <a:latin typeface="Calibri"/>
+              </a:defRPr>
+            </a:pPr>
+            <a:r>
+              <a:t>Market Landscape &amp; Wallet Opportunity</a:t>
+            </a:r>
+          </a:p>
+        </p:txBody>
+      </p:sp>
+      <p:sp>
+        <p:nvSpPr>
+          <p:cNvPr id="65" name="TextBox 64"/>
+          <p:cNvSpPr txBox="1"/>
+          <p:nvPr/>
+        </p:nvSpPr>
+        <p:spPr>
+          <a:xfrm>
+            <a:off x="402336" y="1271016"/>
+            <a:ext cx="2514600" cy="164592"/>
+          </a:xfrm>
+          <a:prstGeom prst="rect">
+            <a:avLst/>
+          </a:prstGeom>
+          <a:noFill/>
+        </p:spPr>
+        <p:txBody>
+          <a:bodyPr wrap="none" lIns="0" rIns="0" tIns="0" bIns="0">
+            <a:spAutoFit/>
+          </a:bodyPr>
+          <a:lstStyle/>
+          <a:p>
+            <a:pPr>
+              <a:defRPr sz="750" b="0" i="1">
+                <a:solidFill>
+                  <a:srgbClr val="787878"/>
+                </a:solidFill>
+                <a:latin typeface="Arial"/>
+              </a:defRPr>
+            </a:pPr>
+            <a:r>
+              <a:t>Where category growth and captured wallet share diverge</a:t>
+            </a:r>
+          </a:p>
+        </p:txBody>
+      </p:sp>
+      <p:sp>
+        <p:nvSpPr>
+          <p:cNvPr id="66" name="TextBox 65"/>
+          <p:cNvSpPr txBox="1"/>
+          <p:nvPr/>
+        </p:nvSpPr>
+        <p:spPr>
+          <a:xfrm>
+            <a:off x="182880" y="1453896"/>
+            <a:ext cx="2734056" cy="822960"/>
+          </a:xfrm>
+          <a:prstGeom prst="rect">
+            <a:avLst/>
+          </a:prstGeom>
+          <a:noFill/>
+        </p:spPr>
+        <p:txBody>
+          <a:bodyPr wrap="square" lIns="0" rIns="0" tIns="0" bIns="0">
+            <a:spAutoFit/>
+          </a:bodyPr>
+          <a:lstStyle/>
+          <a:p>
+            <a:pPr>
+              <a:spcAft>
+                <a:spcPts val="250"/>
+              </a:spcAft>
+              <a:defRPr sz="680" b="0">
+                <a:solidFill>
+                  <a:srgbClr val="212121"/>
+                </a:solidFill>
+                <a:latin typeface="Arial"/>
+              </a:defRPr>
+            </a:pPr>
+            <a:r>
+              <a:t>• India: ₹2.83L per-capita disposable income, 430M 5G subscribers, ~1B data users; industry mobility ARPU ₹194.57</a:t>
+            </a:r>
+          </a:p>
+          <a:p>
+            <a:pPr>
+              <a:spcAft>
+                <a:spcPts val="250"/>
+              </a:spcAft>
+              <a:defRPr sz="680" b="0">
+                <a:solidFill>
+                  <a:srgbClr val="212121"/>
+                </a:solidFill>
+                <a:latin typeface="Arial"/>
+              </a:defRPr>
+            </a:pPr>
+            <a:r>
+              <a:t>• Altura already leads the industry on ARPU (+₹40 vs. nearest rival) - but prepaid mobility growth is flat and pricing is capped</a:t>
+            </a:r>
+          </a:p>
+          <a:p>
+            <a:pPr>
+              <a:spcAft>
+                <a:spcPts val="250"/>
+              </a:spcAft>
+              <a:defRPr sz="680" b="0">
+                <a:solidFill>
+                  <a:srgbClr val="212121"/>
+                </a:solidFill>
+                <a:latin typeface="Arial"/>
+              </a:defRPr>
+            </a:pPr>
+            <a:r>
+              <a:t>• Computed CAGR, FY24–27: Broadband +22%, Surveillance +36%, DTH -2% - fastest-growing lines are where Altura's wallet share is lowest</a:t>
+            </a:r>
+          </a:p>
+        </p:txBody>
+      </p:sp>
+      <p:sp>
+        <p:nvSpPr>
+          <p:cNvPr id="67" name="TextBox 66"/>
+          <p:cNvSpPr txBox="1"/>
+          <p:nvPr/>
+        </p:nvSpPr>
+        <p:spPr>
+          <a:xfrm>
+            <a:off x="182880" y="2295144"/>
+            <a:ext cx="777240" cy="109728"/>
+          </a:xfrm>
+          <a:prstGeom prst="rect">
+            <a:avLst/>
+          </a:prstGeom>
+          <a:noFill/>
+        </p:spPr>
+        <p:txBody>
+          <a:bodyPr wrap="none" lIns="0" rIns="0" tIns="0" bIns="0">
+            <a:spAutoFit/>
+          </a:bodyPr>
+          <a:lstStyle/>
+          <a:p>
+            <a:pPr>
+              <a:defRPr sz="620" b="0">
+                <a:solidFill>
+                  <a:srgbClr val="212121"/>
+                </a:solidFill>
+                <a:latin typeface="Arial"/>
+              </a:defRPr>
+            </a:pPr>
+            <a:r>
+              <a:t>Connectivity</a:t>
+            </a:r>
+          </a:p>
+        </p:txBody>
+      </p:sp>
+      <p:sp>
+        <p:nvSpPr>
+          <p:cNvPr id="68" name="Rectangle 67"/>
           <p:cNvSpPr/>
           <p:nvPr/>
         </p:nvSpPr>
         <p:spPr>
           <a:xfrm>
-            <a:off x="3291840" y="1005840"/>
-            <a:ext cx="2468880" cy="3657600"/>
-          </a:xfrm>
-          <a:prstGeom prst="roundRect">
+            <a:off x="1005840" y="2322576"/>
+            <a:ext cx="1371600" cy="45720"/>
+          </a:xfrm>
+          <a:prstGeom prst="rect">
             <a:avLst/>
           </a:prstGeom>
           <a:solidFill>
-            <a:srgbClr val="F8F9FA"/>
+            <a:srgbClr val="F0F0F0"/>
           </a:solidFill>
-          <a:ln w="12700">
-            <a:solidFill>
-              <a:srgbClr val="E4E6EB"/>
-            </a:solidFill>
+          <a:ln>
+            <a:noFill/>
           </a:ln>
         </p:spPr>
         <p:style>
@@ -6577,119 +6481,29 @@
           </a:fontRef>
         </p:style>
         <p:txBody>
-          <a:bodyPr rtlCol="0" anchor="t" wrap="square" lIns="137160" rIns="137160" tIns="164592" bIns="137160"/>
+          <a:bodyPr rtlCol="0" anchor="ctr"/>
           <a:lstStyle/>
           <a:p>
-            <a:pPr algn="ctr">
-              <a:spcAft>
-                <a:spcPts val="400"/>
-              </a:spcAft>
-              <a:defRPr sz="1300" b="1">
-                <a:solidFill>
-                  <a:srgbClr val="0F121C"/>
-                </a:solidFill>
-                <a:latin typeface="Calibri"/>
-              </a:defRPr>
-            </a:pPr>
-            <a:r>
-              <a:t>2. Landscape &amp; Persona Triggers</a:t>
-            </a:r>
-          </a:p>
-          <a:p>
-            <a:pPr>
-              <a:defRPr sz="3200" b="1">
-                <a:solidFill>
-                  <a:srgbClr val="0F121C"/>
-                </a:solidFill>
-                <a:latin typeface="Calibri"/>
-              </a:defRPr>
-            </a:pPr>
-            <a:r>
-              <a:t>60%+</a:t>
-            </a:r>
-          </a:p>
-          <a:p>
-            <a:pPr>
-              <a:spcAft>
-                <a:spcPts val="800"/>
-              </a:spcAft>
-              <a:defRPr sz="850" b="1">
-                <a:solidFill>
-                  <a:srgbClr val="3498DB"/>
-                </a:solidFill>
-                <a:latin typeface="Arial"/>
-              </a:defRPr>
-            </a:pPr>
-            <a:r>
-              <a:t>Households Fear Single Point of Failure</a:t>
-            </a:r>
-          </a:p>
-          <a:p>
-            <a:pPr>
-              <a:spcAft>
-                <a:spcPts val="400"/>
-              </a:spcAft>
-              <a:defRPr sz="850" b="0">
-                <a:solidFill>
-                  <a:srgbClr val="212121"/>
-                </a:solidFill>
-                <a:latin typeface="Arial"/>
-              </a:defRPr>
-            </a:pPr>
-            <a:r>
-              <a:t>• Prepaid Saturation: Prepaid mobile markets are mature with high penetration and constrained pricing power. Growth must rely on adjacencies.</a:t>
-            </a:r>
-          </a:p>
-          <a:p>
-            <a:pPr>
-              <a:spcAft>
-                <a:spcPts val="400"/>
-              </a:spcAft>
-              <a:defRPr sz="850" b="0">
-                <a:solidFill>
-                  <a:srgbClr val="212121"/>
-                </a:solidFill>
-                <a:latin typeface="Arial"/>
-              </a:defRPr>
-            </a:pPr>
-            <a:r>
-              <a:t>• Cord-Cutting: DTH television revenues are shrinking globally due to cord-cutting pressures (Exhibit 1 &amp; 2).</a:t>
-            </a:r>
-          </a:p>
-          <a:p>
-            <a:pPr>
-              <a:spcAft>
-                <a:spcPts val="400"/>
-              </a:spcAft>
-              <a:defRPr sz="850" b="0">
-                <a:solidFill>
-                  <a:srgbClr val="212121"/>
-                </a:solidFill>
-                <a:latin typeface="Arial"/>
-              </a:defRPr>
-            </a:pPr>
-            <a:r>
-              <a:t>• Persona Triggers: High-value households value unified billing and reward points. Core motivators include automated convenience and brand security trust.</a:t>
-            </a:r>
-          </a:p>
-        </p:txBody>
-      </p:sp>
-      <p:sp>
-        <p:nvSpPr>
-          <p:cNvPr id="64" name="Rectangle 63"/>
+            <a:pPr algn="ctr"/>
+          </a:p>
+        </p:txBody>
+      </p:sp>
+      <p:sp>
+        <p:nvSpPr>
+          <p:cNvPr id="69" name="Rectangle 68"/>
           <p:cNvSpPr/>
           <p:nvPr/>
         </p:nvSpPr>
         <p:spPr>
           <a:xfrm>
-            <a:off x="3337560" y="1005840"/>
-            <a:ext cx="2377440" cy="73152"/>
+            <a:off x="1005840" y="2322576"/>
+            <a:ext cx="480059" cy="45720"/>
           </a:xfrm>
           <a:prstGeom prst="rect">
             <a:avLst/>
           </a:prstGeom>
           <a:solidFill>
-            <a:srgbClr val="0F121C"/>
+            <a:srgbClr val="ED1D24"/>
           </a:solidFill>
           <a:ln>
             <a:noFill/>
@@ -6719,25 +6533,95 @@
       </p:sp>
       <p:sp>
         <p:nvSpPr>
-          <p:cNvPr id="65" name="Rounded Rectangle 64"/>
+          <p:cNvPr id="70" name="TextBox 69"/>
+          <p:cNvSpPr txBox="1"/>
+          <p:nvPr/>
+        </p:nvSpPr>
+        <p:spPr>
+          <a:xfrm>
+            <a:off x="2414016" y="2295144"/>
+            <a:ext cx="365760" cy="109728"/>
+          </a:xfrm>
+          <a:prstGeom prst="rect">
+            <a:avLst/>
+          </a:prstGeom>
+          <a:noFill/>
+        </p:spPr>
+        <p:txBody>
+          <a:bodyPr wrap="none" lIns="0" rIns="0" tIns="0" bIns="0">
+            <a:spAutoFit/>
+          </a:bodyPr>
+          <a:lstStyle/>
+          <a:p>
+            <a:pPr>
+              <a:defRPr sz="620" b="1">
+                <a:solidFill>
+                  <a:srgbClr val="212121"/>
+                </a:solidFill>
+                <a:latin typeface="Arial"/>
+              </a:defRPr>
+            </a:pPr>
+            <a:r>
+              <a:t>35%</a:t>
+            </a:r>
+          </a:p>
+        </p:txBody>
+      </p:sp>
+      <p:sp>
+        <p:nvSpPr>
+          <p:cNvPr id="71" name="TextBox 70"/>
+          <p:cNvSpPr txBox="1"/>
+          <p:nvPr/>
+        </p:nvSpPr>
+        <p:spPr>
+          <a:xfrm>
+            <a:off x="182880" y="2404872"/>
+            <a:ext cx="777240" cy="109728"/>
+          </a:xfrm>
+          <a:prstGeom prst="rect">
+            <a:avLst/>
+          </a:prstGeom>
+          <a:noFill/>
+        </p:spPr>
+        <p:txBody>
+          <a:bodyPr wrap="none" lIns="0" rIns="0" tIns="0" bIns="0">
+            <a:spAutoFit/>
+          </a:bodyPr>
+          <a:lstStyle/>
+          <a:p>
+            <a:pPr>
+              <a:defRPr sz="620" b="0">
+                <a:solidFill>
+                  <a:srgbClr val="212121"/>
+                </a:solidFill>
+                <a:latin typeface="Arial"/>
+              </a:defRPr>
+            </a:pPr>
+            <a:r>
+              <a:t>Entertainment</a:t>
+            </a:r>
+          </a:p>
+        </p:txBody>
+      </p:sp>
+      <p:sp>
+        <p:nvSpPr>
+          <p:cNvPr id="72" name="Rectangle 71"/>
           <p:cNvSpPr/>
           <p:nvPr/>
         </p:nvSpPr>
         <p:spPr>
           <a:xfrm>
-            <a:off x="6126480" y="1005840"/>
-            <a:ext cx="2468880" cy="3657600"/>
-          </a:xfrm>
-          <a:prstGeom prst="roundRect">
+            <a:off x="1005840" y="2432304"/>
+            <a:ext cx="1371600" cy="45720"/>
+          </a:xfrm>
+          <a:prstGeom prst="rect">
             <a:avLst/>
           </a:prstGeom>
           <a:solidFill>
-            <a:srgbClr val="F8F9FA"/>
+            <a:srgbClr val="F0F0F0"/>
           </a:solidFill>
-          <a:ln w="12700">
-            <a:solidFill>
-              <a:srgbClr val="E4E6EB"/>
-            </a:solidFill>
+          <a:ln>
+            <a:noFill/>
           </a:ln>
         </p:spPr>
         <p:style>
@@ -6755,119 +6639,29 @@
           </a:fontRef>
         </p:style>
         <p:txBody>
-          <a:bodyPr rtlCol="0" anchor="t" wrap="square" lIns="137160" rIns="137160" tIns="164592" bIns="137160"/>
+          <a:bodyPr rtlCol="0" anchor="ctr"/>
           <a:lstStyle/>
           <a:p>
-            <a:pPr algn="ctr">
-              <a:spcAft>
-                <a:spcPts val="400"/>
-              </a:spcAft>
-              <a:defRPr sz="1300" b="1">
-                <a:solidFill>
-                  <a:srgbClr val="0F121C"/>
-                </a:solidFill>
-                <a:latin typeface="Calibri"/>
-              </a:defRPr>
-            </a:pPr>
-            <a:r>
-              <a:t>3. Core Strategic Problems</a:t>
-            </a:r>
-          </a:p>
-          <a:p>
-            <a:pPr>
-              <a:defRPr sz="3200" b="1">
-                <a:solidFill>
-                  <a:srgbClr val="3498DB"/>
-                </a:solidFill>
-                <a:latin typeface="Calibri"/>
-              </a:defRPr>
-            </a:pPr>
-            <a:r>
-              <a:t>12%</a:t>
-            </a:r>
-          </a:p>
-          <a:p>
-            <a:pPr>
-              <a:spcAft>
-                <a:spcPts val="800"/>
-              </a:spcAft>
-              <a:defRPr sz="850" b="1">
-                <a:solidFill>
-                  <a:srgbClr val="3498DB"/>
-                </a:solidFill>
-                <a:latin typeface="Arial"/>
-              </a:defRPr>
-            </a:pPr>
-            <a:r>
-              <a:t>Lowest Month-4 Customer Decay</a:t>
-            </a:r>
-          </a:p>
-          <a:p>
-            <a:pPr>
-              <a:spcAft>
-                <a:spcPts val="400"/>
-              </a:spcAft>
-              <a:defRPr sz="850" b="0">
-                <a:solidFill>
-                  <a:srgbClr val="212121"/>
-                </a:solidFill>
-                <a:latin typeface="Arial"/>
-              </a:defRPr>
-            </a:pPr>
-            <a:r>
-              <a:t>• Infrastructure Dread: Households fear putting mobile and fiber under one operator due to worry over complete connectivity blackout during fiber cuts.</a:t>
-            </a:r>
-          </a:p>
-          <a:p>
-            <a:pPr>
-              <a:spcAft>
-                <a:spcPts val="400"/>
-              </a:spcAft>
-              <a:defRPr sz="850" b="0">
-                <a:solidFill>
-                  <a:srgbClr val="212121"/>
-                </a:solidFill>
-                <a:latin typeface="Arial"/>
-              </a:defRPr>
-            </a:pPr>
-            <a:r>
-              <a:t>• Setup Friction: Customers dread porting numbers and coordinating multiple technician visits.</a:t>
-            </a:r>
-          </a:p>
-          <a:p>
-            <a:pPr>
-              <a:spcAft>
-                <a:spcPts val="400"/>
-              </a:spcAft>
-              <a:defRPr sz="850" b="0">
-                <a:solidFill>
-                  <a:srgbClr val="212121"/>
-                </a:solidFill>
-                <a:latin typeface="Arial"/>
-              </a:defRPr>
-            </a:pPr>
-            <a:r>
-              <a:t>• Channel Silos: Sales and field forces work in independent silos, missing cross-sell during low-decay in-home technician visits.</a:t>
-            </a:r>
-          </a:p>
-        </p:txBody>
-      </p:sp>
-      <p:sp>
-        <p:nvSpPr>
-          <p:cNvPr id="66" name="Rectangle 65"/>
+            <a:pPr algn="ctr"/>
+          </a:p>
+        </p:txBody>
+      </p:sp>
+      <p:sp>
+        <p:nvSpPr>
+          <p:cNvPr id="73" name="Rectangle 72"/>
           <p:cNvSpPr/>
           <p:nvPr/>
         </p:nvSpPr>
         <p:spPr>
           <a:xfrm>
-            <a:off x="6172200" y="1005840"/>
-            <a:ext cx="2377440" cy="73152"/>
+            <a:off x="1005840" y="2432304"/>
+            <a:ext cx="164592" cy="45720"/>
           </a:xfrm>
           <a:prstGeom prst="rect">
             <a:avLst/>
           </a:prstGeom>
           <a:solidFill>
-            <a:srgbClr val="3498DB"/>
+            <a:srgbClr val="ED1D24"/>
           </a:solidFill>
           <a:ln>
             <a:noFill/>
@@ -6895,6 +6689,3350 @@
           </a:p>
         </p:txBody>
       </p:sp>
+      <p:sp>
+        <p:nvSpPr>
+          <p:cNvPr id="74" name="TextBox 73"/>
+          <p:cNvSpPr txBox="1"/>
+          <p:nvPr/>
+        </p:nvSpPr>
+        <p:spPr>
+          <a:xfrm>
+            <a:off x="2414016" y="2404872"/>
+            <a:ext cx="365760" cy="109728"/>
+          </a:xfrm>
+          <a:prstGeom prst="rect">
+            <a:avLst/>
+          </a:prstGeom>
+          <a:noFill/>
+        </p:spPr>
+        <p:txBody>
+          <a:bodyPr wrap="none" lIns="0" rIns="0" tIns="0" bIns="0">
+            <a:spAutoFit/>
+          </a:bodyPr>
+          <a:lstStyle/>
+          <a:p>
+            <a:pPr>
+              <a:defRPr sz="620" b="1">
+                <a:solidFill>
+                  <a:srgbClr val="212121"/>
+                </a:solidFill>
+                <a:latin typeface="Arial"/>
+              </a:defRPr>
+            </a:pPr>
+            <a:r>
+              <a:t>12%</a:t>
+            </a:r>
+          </a:p>
+        </p:txBody>
+      </p:sp>
+      <p:sp>
+        <p:nvSpPr>
+          <p:cNvPr id="75" name="TextBox 74"/>
+          <p:cNvSpPr txBox="1"/>
+          <p:nvPr/>
+        </p:nvSpPr>
+        <p:spPr>
+          <a:xfrm>
+            <a:off x="182880" y="2514600"/>
+            <a:ext cx="777240" cy="109728"/>
+          </a:xfrm>
+          <a:prstGeom prst="rect">
+            <a:avLst/>
+          </a:prstGeom>
+          <a:noFill/>
+        </p:spPr>
+        <p:txBody>
+          <a:bodyPr wrap="none" lIns="0" rIns="0" tIns="0" bIns="0">
+            <a:spAutoFit/>
+          </a:bodyPr>
+          <a:lstStyle/>
+          <a:p>
+            <a:pPr>
+              <a:defRPr sz="620" b="0">
+                <a:solidFill>
+                  <a:srgbClr val="212121"/>
+                </a:solidFill>
+                <a:latin typeface="Arial"/>
+              </a:defRPr>
+            </a:pPr>
+            <a:r>
+              <a:t>Home Security</a:t>
+            </a:r>
+          </a:p>
+        </p:txBody>
+      </p:sp>
+      <p:sp>
+        <p:nvSpPr>
+          <p:cNvPr id="76" name="Rectangle 75"/>
+          <p:cNvSpPr/>
+          <p:nvPr/>
+        </p:nvSpPr>
+        <p:spPr>
+          <a:xfrm>
+            <a:off x="1005840" y="2542032"/>
+            <a:ext cx="1371600" cy="45720"/>
+          </a:xfrm>
+          <a:prstGeom prst="rect">
+            <a:avLst/>
+          </a:prstGeom>
+          <a:solidFill>
+            <a:srgbClr val="F0F0F0"/>
+          </a:solidFill>
+          <a:ln>
+            <a:noFill/>
+          </a:ln>
+        </p:spPr>
+        <p:style>
+          <a:lnRef idx="1">
+            <a:schemeClr val="accent1"/>
+          </a:lnRef>
+          <a:fillRef idx="3">
+            <a:schemeClr val="accent1"/>
+          </a:fillRef>
+          <a:effectRef idx="2">
+            <a:schemeClr val="accent1"/>
+          </a:effectRef>
+          <a:fontRef idx="minor">
+            <a:schemeClr val="lt1"/>
+          </a:fontRef>
+        </p:style>
+        <p:txBody>
+          <a:bodyPr rtlCol="0" anchor="ctr"/>
+          <a:lstStyle/>
+          <a:p>
+            <a:pPr algn="ctr"/>
+          </a:p>
+        </p:txBody>
+      </p:sp>
+      <p:sp>
+        <p:nvSpPr>
+          <p:cNvPr id="77" name="Rectangle 76"/>
+          <p:cNvSpPr/>
+          <p:nvPr/>
+        </p:nvSpPr>
+        <p:spPr>
+          <a:xfrm>
+            <a:off x="1005840" y="2542032"/>
+            <a:ext cx="27432" cy="45720"/>
+          </a:xfrm>
+          <a:prstGeom prst="rect">
+            <a:avLst/>
+          </a:prstGeom>
+          <a:solidFill>
+            <a:srgbClr val="ED1D24"/>
+          </a:solidFill>
+          <a:ln>
+            <a:noFill/>
+          </a:ln>
+        </p:spPr>
+        <p:style>
+          <a:lnRef idx="1">
+            <a:schemeClr val="accent1"/>
+          </a:lnRef>
+          <a:fillRef idx="3">
+            <a:schemeClr val="accent1"/>
+          </a:fillRef>
+          <a:effectRef idx="2">
+            <a:schemeClr val="accent1"/>
+          </a:effectRef>
+          <a:fontRef idx="minor">
+            <a:schemeClr val="lt1"/>
+          </a:fontRef>
+        </p:style>
+        <p:txBody>
+          <a:bodyPr rtlCol="0" anchor="ctr"/>
+          <a:lstStyle/>
+          <a:p>
+            <a:pPr algn="ctr"/>
+          </a:p>
+        </p:txBody>
+      </p:sp>
+      <p:sp>
+        <p:nvSpPr>
+          <p:cNvPr id="78" name="TextBox 77"/>
+          <p:cNvSpPr txBox="1"/>
+          <p:nvPr/>
+        </p:nvSpPr>
+        <p:spPr>
+          <a:xfrm>
+            <a:off x="2414016" y="2514600"/>
+            <a:ext cx="365760" cy="109728"/>
+          </a:xfrm>
+          <a:prstGeom prst="rect">
+            <a:avLst/>
+          </a:prstGeom>
+          <a:noFill/>
+        </p:spPr>
+        <p:txBody>
+          <a:bodyPr wrap="none" lIns="0" rIns="0" tIns="0" bIns="0">
+            <a:spAutoFit/>
+          </a:bodyPr>
+          <a:lstStyle/>
+          <a:p>
+            <a:pPr>
+              <a:defRPr sz="620" b="1">
+                <a:solidFill>
+                  <a:srgbClr val="212121"/>
+                </a:solidFill>
+                <a:latin typeface="Arial"/>
+              </a:defRPr>
+            </a:pPr>
+            <a:r>
+              <a:t>2%</a:t>
+            </a:r>
+          </a:p>
+        </p:txBody>
+      </p:sp>
+      <p:sp>
+        <p:nvSpPr>
+          <p:cNvPr id="79" name="TextBox 78"/>
+          <p:cNvSpPr txBox="1"/>
+          <p:nvPr/>
+        </p:nvSpPr>
+        <p:spPr>
+          <a:xfrm>
+            <a:off x="182880" y="2624328"/>
+            <a:ext cx="777240" cy="109728"/>
+          </a:xfrm>
+          <a:prstGeom prst="rect">
+            <a:avLst/>
+          </a:prstGeom>
+          <a:noFill/>
+        </p:spPr>
+        <p:txBody>
+          <a:bodyPr wrap="none" lIns="0" rIns="0" tIns="0" bIns="0">
+            <a:spAutoFit/>
+          </a:bodyPr>
+          <a:lstStyle/>
+          <a:p>
+            <a:pPr>
+              <a:defRPr sz="620" b="0">
+                <a:solidFill>
+                  <a:srgbClr val="212121"/>
+                </a:solidFill>
+                <a:latin typeface="Arial"/>
+              </a:defRPr>
+            </a:pPr>
+            <a:r>
+              <a:t>Emerging Digital</a:t>
+            </a:r>
+          </a:p>
+        </p:txBody>
+      </p:sp>
+      <p:sp>
+        <p:nvSpPr>
+          <p:cNvPr id="80" name="Rectangle 79"/>
+          <p:cNvSpPr/>
+          <p:nvPr/>
+        </p:nvSpPr>
+        <p:spPr>
+          <a:xfrm>
+            <a:off x="1005840" y="2651760"/>
+            <a:ext cx="1371600" cy="45720"/>
+          </a:xfrm>
+          <a:prstGeom prst="rect">
+            <a:avLst/>
+          </a:prstGeom>
+          <a:solidFill>
+            <a:srgbClr val="F0F0F0"/>
+          </a:solidFill>
+          <a:ln>
+            <a:noFill/>
+          </a:ln>
+        </p:spPr>
+        <p:style>
+          <a:lnRef idx="1">
+            <a:schemeClr val="accent1"/>
+          </a:lnRef>
+          <a:fillRef idx="3">
+            <a:schemeClr val="accent1"/>
+          </a:fillRef>
+          <a:effectRef idx="2">
+            <a:schemeClr val="accent1"/>
+          </a:effectRef>
+          <a:fontRef idx="minor">
+            <a:schemeClr val="lt1"/>
+          </a:fontRef>
+        </p:style>
+        <p:txBody>
+          <a:bodyPr rtlCol="0" anchor="ctr"/>
+          <a:lstStyle/>
+          <a:p>
+            <a:pPr algn="ctr"/>
+          </a:p>
+        </p:txBody>
+      </p:sp>
+      <p:sp>
+        <p:nvSpPr>
+          <p:cNvPr id="81" name="TextBox 80"/>
+          <p:cNvSpPr txBox="1"/>
+          <p:nvPr/>
+        </p:nvSpPr>
+        <p:spPr>
+          <a:xfrm>
+            <a:off x="2414016" y="2624328"/>
+            <a:ext cx="365760" cy="109728"/>
+          </a:xfrm>
+          <a:prstGeom prst="rect">
+            <a:avLst/>
+          </a:prstGeom>
+          <a:noFill/>
+        </p:spPr>
+        <p:txBody>
+          <a:bodyPr wrap="none" lIns="0" rIns="0" tIns="0" bIns="0">
+            <a:spAutoFit/>
+          </a:bodyPr>
+          <a:lstStyle/>
+          <a:p>
+            <a:pPr>
+              <a:defRPr sz="620" b="1">
+                <a:solidFill>
+                  <a:srgbClr val="212121"/>
+                </a:solidFill>
+                <a:latin typeface="Arial"/>
+              </a:defRPr>
+            </a:pPr>
+            <a:r>
+              <a:t>0%</a:t>
+            </a:r>
+          </a:p>
+        </p:txBody>
+      </p:sp>
+      <p:sp>
+        <p:nvSpPr>
+          <p:cNvPr id="82" name="TextBox 81"/>
+          <p:cNvSpPr txBox="1"/>
+          <p:nvPr/>
+        </p:nvSpPr>
+        <p:spPr>
+          <a:xfrm>
+            <a:off x="182880" y="2715768"/>
+            <a:ext cx="2734056" cy="109728"/>
+          </a:xfrm>
+          <a:prstGeom prst="rect">
+            <a:avLst/>
+          </a:prstGeom>
+          <a:noFill/>
+        </p:spPr>
+        <p:txBody>
+          <a:bodyPr wrap="none" lIns="0" rIns="0" tIns="0" bIns="0">
+            <a:spAutoFit/>
+          </a:bodyPr>
+          <a:lstStyle/>
+          <a:p>
+            <a:pPr>
+              <a:defRPr sz="550" b="0" i="1">
+                <a:solidFill>
+                  <a:srgbClr val="787878"/>
+                </a:solidFill>
+                <a:latin typeface="Arial"/>
+              </a:defRPr>
+            </a:pPr>
+            <a:r>
+              <a:t>Src: Case intro; Exhibits 2 &amp; 3, CAGR computed FY24–27</a:t>
+            </a:r>
+          </a:p>
+        </p:txBody>
+      </p:sp>
+      <p:sp>
+        <p:nvSpPr>
+          <p:cNvPr id="83" name="Rounded Rectangle 82"/>
+          <p:cNvSpPr/>
+          <p:nvPr/>
+        </p:nvSpPr>
+        <p:spPr>
+          <a:xfrm>
+            <a:off x="3090672" y="1051560"/>
+            <a:ext cx="2880360" cy="1783080"/>
+          </a:xfrm>
+          <a:prstGeom prst="roundRect">
+            <a:avLst/>
+          </a:prstGeom>
+          <a:solidFill>
+            <a:srgbClr val="FFFFFF"/>
+          </a:solidFill>
+          <a:ln w="12700">
+            <a:solidFill>
+              <a:srgbClr val="DCDEE1"/>
+            </a:solidFill>
+          </a:ln>
+        </p:spPr>
+        <p:style>
+          <a:lnRef idx="1">
+            <a:schemeClr val="accent1"/>
+          </a:lnRef>
+          <a:fillRef idx="3">
+            <a:schemeClr val="accent1"/>
+          </a:fillRef>
+          <a:effectRef idx="2">
+            <a:schemeClr val="accent1"/>
+          </a:effectRef>
+          <a:fontRef idx="minor">
+            <a:schemeClr val="lt1"/>
+          </a:fontRef>
+        </p:style>
+        <p:txBody>
+          <a:bodyPr rtlCol="0" anchor="ctr"/>
+          <a:lstStyle/>
+          <a:p>
+            <a:pPr algn="ctr"/>
+          </a:p>
+        </p:txBody>
+      </p:sp>
+      <p:sp>
+        <p:nvSpPr>
+          <p:cNvPr id="84" name="Rectangle 83"/>
+          <p:cNvSpPr/>
+          <p:nvPr/>
+        </p:nvSpPr>
+        <p:spPr>
+          <a:xfrm>
+            <a:off x="3163824" y="1124712"/>
+            <a:ext cx="164592" cy="164592"/>
+          </a:xfrm>
+          <a:prstGeom prst="rect">
+            <a:avLst/>
+          </a:prstGeom>
+          <a:solidFill>
+            <a:srgbClr val="ED1D24"/>
+          </a:solidFill>
+          <a:ln>
+            <a:noFill/>
+          </a:ln>
+        </p:spPr>
+        <p:style>
+          <a:lnRef idx="1">
+            <a:schemeClr val="accent1"/>
+          </a:lnRef>
+          <a:fillRef idx="3">
+            <a:schemeClr val="accent1"/>
+          </a:fillRef>
+          <a:effectRef idx="2">
+            <a:schemeClr val="accent1"/>
+          </a:effectRef>
+          <a:fontRef idx="minor">
+            <a:schemeClr val="lt1"/>
+          </a:fontRef>
+        </p:style>
+        <p:txBody>
+          <a:bodyPr rtlCol="0" anchor="ctr" wrap="none" lIns="0" rIns="0" tIns="0" bIns="0"/>
+          <a:lstStyle/>
+          <a:p>
+            <a:pPr algn="ctr">
+              <a:defRPr sz="850" b="1">
+                <a:solidFill>
+                  <a:srgbClr val="FFFFFF"/>
+                </a:solidFill>
+                <a:latin typeface="Calibri"/>
+              </a:defRPr>
+            </a:pPr>
+            <a:r>
+              <a:t>2</a:t>
+            </a:r>
+          </a:p>
+        </p:txBody>
+      </p:sp>
+      <p:sp>
+        <p:nvSpPr>
+          <p:cNvPr id="85" name="TextBox 84"/>
+          <p:cNvSpPr txBox="1"/>
+          <p:nvPr/>
+        </p:nvSpPr>
+        <p:spPr>
+          <a:xfrm>
+            <a:off x="3383280" y="1097280"/>
+            <a:ext cx="2514600" cy="219456"/>
+          </a:xfrm>
+          <a:prstGeom prst="rect">
+            <a:avLst/>
+          </a:prstGeom>
+          <a:noFill/>
+        </p:spPr>
+        <p:txBody>
+          <a:bodyPr wrap="none" lIns="0" rIns="0" tIns="0" bIns="0">
+            <a:spAutoFit/>
+          </a:bodyPr>
+          <a:lstStyle/>
+          <a:p>
+            <a:pPr>
+              <a:defRPr sz="950" b="1">
+                <a:solidFill>
+                  <a:srgbClr val="ED1D24"/>
+                </a:solidFill>
+                <a:latin typeface="Calibri"/>
+              </a:defRPr>
+            </a:pPr>
+            <a:r>
+              <a:t>Product Portfolio Today</a:t>
+            </a:r>
+          </a:p>
+        </p:txBody>
+      </p:sp>
+      <p:sp>
+        <p:nvSpPr>
+          <p:cNvPr id="86" name="TextBox 85"/>
+          <p:cNvSpPr txBox="1"/>
+          <p:nvPr/>
+        </p:nvSpPr>
+        <p:spPr>
+          <a:xfrm>
+            <a:off x="3383280" y="1271016"/>
+            <a:ext cx="2514600" cy="164592"/>
+          </a:xfrm>
+          <a:prstGeom prst="rect">
+            <a:avLst/>
+          </a:prstGeom>
+          <a:noFill/>
+        </p:spPr>
+        <p:txBody>
+          <a:bodyPr wrap="none" lIns="0" rIns="0" tIns="0" bIns="0">
+            <a:spAutoFit/>
+          </a:bodyPr>
+          <a:lstStyle/>
+          <a:p>
+            <a:pPr>
+              <a:defRPr sz="750" b="0" i="1">
+                <a:solidFill>
+                  <a:srgbClr val="787878"/>
+                </a:solidFill>
+                <a:latin typeface="Arial"/>
+              </a:defRPr>
+            </a:pPr>
+            <a:r>
+              <a:t>Five live product lines, sold and run in isolation</a:t>
+            </a:r>
+          </a:p>
+        </p:txBody>
+      </p:sp>
+      <p:sp>
+        <p:nvSpPr>
+          <p:cNvPr id="87" name="TextBox 86"/>
+          <p:cNvSpPr txBox="1"/>
+          <p:nvPr/>
+        </p:nvSpPr>
+        <p:spPr>
+          <a:xfrm>
+            <a:off x="3136392" y="1435608"/>
+            <a:ext cx="530352" cy="201168"/>
+          </a:xfrm>
+          <a:prstGeom prst="rect">
+            <a:avLst/>
+          </a:prstGeom>
+          <a:noFill/>
+        </p:spPr>
+        <p:txBody>
+          <a:bodyPr wrap="none" lIns="0" rIns="0" tIns="0" bIns="0">
+            <a:spAutoFit/>
+          </a:bodyPr>
+          <a:lstStyle/>
+          <a:p>
+            <a:pPr algn="ctr">
+              <a:defRPr sz="1300" b="0">
+                <a:solidFill>
+                  <a:srgbClr val="ED1D24"/>
+                </a:solidFill>
+                <a:latin typeface="Arial"/>
+              </a:defRPr>
+            </a:pPr>
+            <a:r>
+              <a:t>📞</a:t>
+            </a:r>
+          </a:p>
+        </p:txBody>
+      </p:sp>
+      <p:sp>
+        <p:nvSpPr>
+          <p:cNvPr id="88" name="TextBox 87"/>
+          <p:cNvSpPr txBox="1"/>
+          <p:nvPr/>
+        </p:nvSpPr>
+        <p:spPr>
+          <a:xfrm>
+            <a:off x="3136392" y="1655064"/>
+            <a:ext cx="530352" cy="292608"/>
+          </a:xfrm>
+          <a:prstGeom prst="rect">
+            <a:avLst/>
+          </a:prstGeom>
+          <a:noFill/>
+        </p:spPr>
+        <p:txBody>
+          <a:bodyPr wrap="none" lIns="0" rIns="0" tIns="0" bIns="0">
+            <a:spAutoFit/>
+          </a:bodyPr>
+          <a:lstStyle/>
+          <a:p>
+            <a:pPr algn="ctr">
+              <a:defRPr sz="550" b="1">
+                <a:solidFill>
+                  <a:srgbClr val="212121"/>
+                </a:solidFill>
+                <a:latin typeface="Arial"/>
+              </a:defRPr>
+            </a:pPr>
+            <a:r>
+              <a:t>Mobility</a:t>
+            </a:r>
+            <a:br/>
+            <a:r>
+              <a:t>(prepaid +</a:t>
+            </a:r>
+            <a:br/>
+            <a:r>
+              <a:t>postpaid)</a:t>
+            </a:r>
+          </a:p>
+        </p:txBody>
+      </p:sp>
+      <p:sp>
+        <p:nvSpPr>
+          <p:cNvPr id="89" name="TextBox 88"/>
+          <p:cNvSpPr txBox="1"/>
+          <p:nvPr/>
+        </p:nvSpPr>
+        <p:spPr>
+          <a:xfrm>
+            <a:off x="3685032" y="1435608"/>
+            <a:ext cx="530352" cy="201168"/>
+          </a:xfrm>
+          <a:prstGeom prst="rect">
+            <a:avLst/>
+          </a:prstGeom>
+          <a:noFill/>
+        </p:spPr>
+        <p:txBody>
+          <a:bodyPr wrap="none" lIns="0" rIns="0" tIns="0" bIns="0">
+            <a:spAutoFit/>
+          </a:bodyPr>
+          <a:lstStyle/>
+          <a:p>
+            <a:pPr algn="ctr">
+              <a:defRPr sz="1300" b="0">
+                <a:solidFill>
+                  <a:srgbClr val="ED1D24"/>
+                </a:solidFill>
+                <a:latin typeface="Arial"/>
+              </a:defRPr>
+            </a:pPr>
+            <a:r>
+              <a:t>📶</a:t>
+            </a:r>
+          </a:p>
+        </p:txBody>
+      </p:sp>
+      <p:sp>
+        <p:nvSpPr>
+          <p:cNvPr id="90" name="TextBox 89"/>
+          <p:cNvSpPr txBox="1"/>
+          <p:nvPr/>
+        </p:nvSpPr>
+        <p:spPr>
+          <a:xfrm>
+            <a:off x="3685032" y="1655064"/>
+            <a:ext cx="530352" cy="292608"/>
+          </a:xfrm>
+          <a:prstGeom prst="rect">
+            <a:avLst/>
+          </a:prstGeom>
+          <a:noFill/>
+        </p:spPr>
+        <p:txBody>
+          <a:bodyPr wrap="none" lIns="0" rIns="0" tIns="0" bIns="0">
+            <a:spAutoFit/>
+          </a:bodyPr>
+          <a:lstStyle/>
+          <a:p>
+            <a:pPr algn="ctr">
+              <a:defRPr sz="550" b="1">
+                <a:solidFill>
+                  <a:srgbClr val="212121"/>
+                </a:solidFill>
+                <a:latin typeface="Arial"/>
+              </a:defRPr>
+            </a:pPr>
+            <a:r>
+              <a:t>Broadband /</a:t>
+            </a:r>
+            <a:br/>
+            <a:r>
+              <a:t>WiFi</a:t>
+            </a:r>
+          </a:p>
+        </p:txBody>
+      </p:sp>
+      <p:sp>
+        <p:nvSpPr>
+          <p:cNvPr id="91" name="TextBox 90"/>
+          <p:cNvSpPr txBox="1"/>
+          <p:nvPr/>
+        </p:nvSpPr>
+        <p:spPr>
+          <a:xfrm>
+            <a:off x="4233672" y="1435608"/>
+            <a:ext cx="530352" cy="201168"/>
+          </a:xfrm>
+          <a:prstGeom prst="rect">
+            <a:avLst/>
+          </a:prstGeom>
+          <a:noFill/>
+        </p:spPr>
+        <p:txBody>
+          <a:bodyPr wrap="none" lIns="0" rIns="0" tIns="0" bIns="0">
+            <a:spAutoFit/>
+          </a:bodyPr>
+          <a:lstStyle/>
+          <a:p>
+            <a:pPr algn="ctr">
+              <a:defRPr sz="1300" b="0">
+                <a:solidFill>
+                  <a:srgbClr val="ED1D24"/>
+                </a:solidFill>
+                <a:latin typeface="Arial"/>
+              </a:defRPr>
+            </a:pPr>
+            <a:r>
+              <a:t>📺</a:t>
+            </a:r>
+          </a:p>
+        </p:txBody>
+      </p:sp>
+      <p:sp>
+        <p:nvSpPr>
+          <p:cNvPr id="92" name="TextBox 91"/>
+          <p:cNvSpPr txBox="1"/>
+          <p:nvPr/>
+        </p:nvSpPr>
+        <p:spPr>
+          <a:xfrm>
+            <a:off x="4233672" y="1655064"/>
+            <a:ext cx="530352" cy="292608"/>
+          </a:xfrm>
+          <a:prstGeom prst="rect">
+            <a:avLst/>
+          </a:prstGeom>
+          <a:noFill/>
+        </p:spPr>
+        <p:txBody>
+          <a:bodyPr wrap="none" lIns="0" rIns="0" tIns="0" bIns="0">
+            <a:spAutoFit/>
+          </a:bodyPr>
+          <a:lstStyle/>
+          <a:p>
+            <a:pPr algn="ctr">
+              <a:defRPr sz="550" b="1">
+                <a:solidFill>
+                  <a:srgbClr val="212121"/>
+                </a:solidFill>
+                <a:latin typeface="Arial"/>
+              </a:defRPr>
+            </a:pPr>
+            <a:r>
+              <a:t>OTT +</a:t>
+            </a:r>
+            <a:br/>
+            <a:r>
+              <a:t>TV</a:t>
+            </a:r>
+          </a:p>
+        </p:txBody>
+      </p:sp>
+      <p:sp>
+        <p:nvSpPr>
+          <p:cNvPr id="93" name="TextBox 92"/>
+          <p:cNvSpPr txBox="1"/>
+          <p:nvPr/>
+        </p:nvSpPr>
+        <p:spPr>
+          <a:xfrm>
+            <a:off x="4782311" y="1435608"/>
+            <a:ext cx="530352" cy="201168"/>
+          </a:xfrm>
+          <a:prstGeom prst="rect">
+            <a:avLst/>
+          </a:prstGeom>
+          <a:noFill/>
+        </p:spPr>
+        <p:txBody>
+          <a:bodyPr wrap="none" lIns="0" rIns="0" tIns="0" bIns="0">
+            <a:spAutoFit/>
+          </a:bodyPr>
+          <a:lstStyle/>
+          <a:p>
+            <a:pPr algn="ctr">
+              <a:defRPr sz="1300" b="0">
+                <a:solidFill>
+                  <a:srgbClr val="ED1D24"/>
+                </a:solidFill>
+                <a:latin typeface="Arial"/>
+              </a:defRPr>
+            </a:pPr>
+            <a:r>
+              <a:t>🛡️</a:t>
+            </a:r>
+          </a:p>
+        </p:txBody>
+      </p:sp>
+      <p:sp>
+        <p:nvSpPr>
+          <p:cNvPr id="94" name="TextBox 93"/>
+          <p:cNvSpPr txBox="1"/>
+          <p:nvPr/>
+        </p:nvSpPr>
+        <p:spPr>
+          <a:xfrm>
+            <a:off x="4782311" y="1655064"/>
+            <a:ext cx="530352" cy="292608"/>
+          </a:xfrm>
+          <a:prstGeom prst="rect">
+            <a:avLst/>
+          </a:prstGeom>
+          <a:noFill/>
+        </p:spPr>
+        <p:txBody>
+          <a:bodyPr wrap="none" lIns="0" rIns="0" tIns="0" bIns="0">
+            <a:spAutoFit/>
+          </a:bodyPr>
+          <a:lstStyle/>
+          <a:p>
+            <a:pPr algn="ctr">
+              <a:defRPr sz="550" b="1">
+                <a:solidFill>
+                  <a:srgbClr val="212121"/>
+                </a:solidFill>
+                <a:latin typeface="Arial"/>
+              </a:defRPr>
+            </a:pPr>
+            <a:r>
+              <a:t>Home</a:t>
+            </a:r>
+            <a:br/>
+            <a:r>
+              <a:t>Security</a:t>
+            </a:r>
+            <a:br/>
+            <a:r>
+              <a:t>(Xsafe)</a:t>
+            </a:r>
+          </a:p>
+        </p:txBody>
+      </p:sp>
+      <p:sp>
+        <p:nvSpPr>
+          <p:cNvPr id="95" name="TextBox 94"/>
+          <p:cNvSpPr txBox="1"/>
+          <p:nvPr/>
+        </p:nvSpPr>
+        <p:spPr>
+          <a:xfrm>
+            <a:off x="5330951" y="1435608"/>
+            <a:ext cx="530352" cy="201168"/>
+          </a:xfrm>
+          <a:prstGeom prst="rect">
+            <a:avLst/>
+          </a:prstGeom>
+          <a:noFill/>
+        </p:spPr>
+        <p:txBody>
+          <a:bodyPr wrap="none" lIns="0" rIns="0" tIns="0" bIns="0">
+            <a:spAutoFit/>
+          </a:bodyPr>
+          <a:lstStyle/>
+          <a:p>
+            <a:pPr algn="ctr">
+              <a:defRPr sz="1300" b="0">
+                <a:solidFill>
+                  <a:srgbClr val="ED1D24"/>
+                </a:solidFill>
+                <a:latin typeface="Arial"/>
+              </a:defRPr>
+            </a:pPr>
+            <a:r>
+              <a:t>🏦</a:t>
+            </a:r>
+          </a:p>
+        </p:txBody>
+      </p:sp>
+      <p:sp>
+        <p:nvSpPr>
+          <p:cNvPr id="96" name="TextBox 95"/>
+          <p:cNvSpPr txBox="1"/>
+          <p:nvPr/>
+        </p:nvSpPr>
+        <p:spPr>
+          <a:xfrm>
+            <a:off x="5330951" y="1655064"/>
+            <a:ext cx="530352" cy="292608"/>
+          </a:xfrm>
+          <a:prstGeom prst="rect">
+            <a:avLst/>
+          </a:prstGeom>
+          <a:noFill/>
+        </p:spPr>
+        <p:txBody>
+          <a:bodyPr wrap="none" lIns="0" rIns="0" tIns="0" bIns="0">
+            <a:spAutoFit/>
+          </a:bodyPr>
+          <a:lstStyle/>
+          <a:p>
+            <a:pPr algn="ctr">
+              <a:defRPr sz="550" b="1">
+                <a:solidFill>
+                  <a:srgbClr val="212121"/>
+                </a:solidFill>
+                <a:latin typeface="Arial"/>
+              </a:defRPr>
+            </a:pPr>
+            <a:r>
+              <a:t>Payments</a:t>
+            </a:r>
+            <a:br/>
+            <a:r>
+              <a:t>Bank</a:t>
+            </a:r>
+          </a:p>
+        </p:txBody>
+      </p:sp>
+      <p:sp>
+        <p:nvSpPr>
+          <p:cNvPr id="97" name="TextBox 96"/>
+          <p:cNvSpPr txBox="1"/>
+          <p:nvPr/>
+        </p:nvSpPr>
+        <p:spPr>
+          <a:xfrm>
+            <a:off x="3163824" y="2011680"/>
+            <a:ext cx="2734056" cy="658368"/>
+          </a:xfrm>
+          <a:prstGeom prst="rect">
+            <a:avLst/>
+          </a:prstGeom>
+          <a:noFill/>
+        </p:spPr>
+        <p:txBody>
+          <a:bodyPr wrap="square" lIns="0" rIns="0" tIns="0" bIns="0">
+            <a:spAutoFit/>
+          </a:bodyPr>
+          <a:lstStyle/>
+          <a:p>
+            <a:pPr>
+              <a:spcAft>
+                <a:spcPts val="250"/>
+              </a:spcAft>
+              <a:defRPr sz="680" b="0">
+                <a:solidFill>
+                  <a:srgbClr val="212121"/>
+                </a:solidFill>
+                <a:latin typeface="Arial"/>
+              </a:defRPr>
+            </a:pPr>
+            <a:r>
+              <a:t>• Each runs as an independent silo: separate sales teams, separate onboarding, separate billing</a:t>
+            </a:r>
+          </a:p>
+          <a:p>
+            <a:pPr>
+              <a:spcAft>
+                <a:spcPts val="250"/>
+              </a:spcAft>
+              <a:defRPr sz="680" b="0">
+                <a:solidFill>
+                  <a:srgbClr val="212121"/>
+                </a:solidFill>
+                <a:latin typeface="Arial"/>
+              </a:defRPr>
+            </a:pPr>
+            <a:r>
+              <a:t>• Channels: DTC (high-value, postpaid, ₹449 entry) · Distributor (mass-market, prepaid, ₹349) · Payments Bank (₹99) - each sells one product, rarely cross-sells</a:t>
+            </a:r>
+          </a:p>
+          <a:p>
+            <a:pPr>
+              <a:spcAft>
+                <a:spcPts val="250"/>
+              </a:spcAft>
+              <a:defRPr sz="680" b="0">
+                <a:solidFill>
+                  <a:srgbClr val="212121"/>
+                </a:solidFill>
+                <a:latin typeface="Arial"/>
+              </a:defRPr>
+            </a:pPr>
+            <a:r>
+              <a:t>• Only a fraction of Altura's ~100M high-value households hold more than one product today</a:t>
+            </a:r>
+          </a:p>
+        </p:txBody>
+      </p:sp>
+      <p:sp>
+        <p:nvSpPr>
+          <p:cNvPr id="98" name="TextBox 97"/>
+          <p:cNvSpPr txBox="1"/>
+          <p:nvPr/>
+        </p:nvSpPr>
+        <p:spPr>
+          <a:xfrm>
+            <a:off x="3163824" y="2715768"/>
+            <a:ext cx="2734056" cy="109728"/>
+          </a:xfrm>
+          <a:prstGeom prst="rect">
+            <a:avLst/>
+          </a:prstGeom>
+          <a:noFill/>
+        </p:spPr>
+        <p:txBody>
+          <a:bodyPr wrap="none" lIns="0" rIns="0" tIns="0" bIns="0">
+            <a:spAutoFit/>
+          </a:bodyPr>
+          <a:lstStyle/>
+          <a:p>
+            <a:pPr>
+              <a:defRPr sz="550" b="0" i="1">
+                <a:solidFill>
+                  <a:srgbClr val="787878"/>
+                </a:solidFill>
+                <a:latin typeface="Arial"/>
+              </a:defRPr>
+            </a:pPr>
+            <a:r>
+              <a:t>Src: Case Appendix 2, channel structure</a:t>
+            </a:r>
+          </a:p>
+        </p:txBody>
+      </p:sp>
+      <p:sp>
+        <p:nvSpPr>
+          <p:cNvPr id="99" name="Rounded Rectangle 98"/>
+          <p:cNvSpPr/>
+          <p:nvPr/>
+        </p:nvSpPr>
+        <p:spPr>
+          <a:xfrm>
+            <a:off x="6071616" y="1051560"/>
+            <a:ext cx="2962656" cy="1783080"/>
+          </a:xfrm>
+          <a:prstGeom prst="roundRect">
+            <a:avLst/>
+          </a:prstGeom>
+          <a:solidFill>
+            <a:srgbClr val="FFFFFF"/>
+          </a:solidFill>
+          <a:ln w="12700">
+            <a:solidFill>
+              <a:srgbClr val="DCDEE1"/>
+            </a:solidFill>
+          </a:ln>
+        </p:spPr>
+        <p:style>
+          <a:lnRef idx="1">
+            <a:schemeClr val="accent1"/>
+          </a:lnRef>
+          <a:fillRef idx="3">
+            <a:schemeClr val="accent1"/>
+          </a:fillRef>
+          <a:effectRef idx="2">
+            <a:schemeClr val="accent1"/>
+          </a:effectRef>
+          <a:fontRef idx="minor">
+            <a:schemeClr val="lt1"/>
+          </a:fontRef>
+        </p:style>
+        <p:txBody>
+          <a:bodyPr rtlCol="0" anchor="ctr"/>
+          <a:lstStyle/>
+          <a:p>
+            <a:pPr algn="ctr"/>
+          </a:p>
+        </p:txBody>
+      </p:sp>
+      <p:sp>
+        <p:nvSpPr>
+          <p:cNvPr id="100" name="Rectangle 99"/>
+          <p:cNvSpPr/>
+          <p:nvPr/>
+        </p:nvSpPr>
+        <p:spPr>
+          <a:xfrm>
+            <a:off x="6144768" y="1124712"/>
+            <a:ext cx="164592" cy="164592"/>
+          </a:xfrm>
+          <a:prstGeom prst="rect">
+            <a:avLst/>
+          </a:prstGeom>
+          <a:solidFill>
+            <a:srgbClr val="ED1D24"/>
+          </a:solidFill>
+          <a:ln>
+            <a:noFill/>
+          </a:ln>
+        </p:spPr>
+        <p:style>
+          <a:lnRef idx="1">
+            <a:schemeClr val="accent1"/>
+          </a:lnRef>
+          <a:fillRef idx="3">
+            <a:schemeClr val="accent1"/>
+          </a:fillRef>
+          <a:effectRef idx="2">
+            <a:schemeClr val="accent1"/>
+          </a:effectRef>
+          <a:fontRef idx="minor">
+            <a:schemeClr val="lt1"/>
+          </a:fontRef>
+        </p:style>
+        <p:txBody>
+          <a:bodyPr rtlCol="0" anchor="ctr" wrap="none" lIns="0" rIns="0" tIns="0" bIns="0"/>
+          <a:lstStyle/>
+          <a:p>
+            <a:pPr algn="ctr">
+              <a:defRPr sz="850" b="1">
+                <a:solidFill>
+                  <a:srgbClr val="FFFFFF"/>
+                </a:solidFill>
+                <a:latin typeface="Calibri"/>
+              </a:defRPr>
+            </a:pPr>
+            <a:r>
+              <a:t>3</a:t>
+            </a:r>
+          </a:p>
+        </p:txBody>
+      </p:sp>
+      <p:sp>
+        <p:nvSpPr>
+          <p:cNvPr id="101" name="TextBox 100"/>
+          <p:cNvSpPr txBox="1"/>
+          <p:nvPr/>
+        </p:nvSpPr>
+        <p:spPr>
+          <a:xfrm>
+            <a:off x="6364224" y="1097280"/>
+            <a:ext cx="2596896" cy="219456"/>
+          </a:xfrm>
+          <a:prstGeom prst="rect">
+            <a:avLst/>
+          </a:prstGeom>
+          <a:noFill/>
+        </p:spPr>
+        <p:txBody>
+          <a:bodyPr wrap="none" lIns="0" rIns="0" tIns="0" bIns="0">
+            <a:spAutoFit/>
+          </a:bodyPr>
+          <a:lstStyle/>
+          <a:p>
+            <a:pPr>
+              <a:defRPr sz="950" b="1">
+                <a:solidFill>
+                  <a:srgbClr val="ED1D24"/>
+                </a:solidFill>
+                <a:latin typeface="Calibri"/>
+              </a:defRPr>
+            </a:pPr>
+            <a:r>
+              <a:t>Competitive Landscape &amp; Altura's Moat</a:t>
+            </a:r>
+          </a:p>
+        </p:txBody>
+      </p:sp>
+      <p:sp>
+        <p:nvSpPr>
+          <p:cNvPr id="102" name="TextBox 101"/>
+          <p:cNvSpPr txBox="1"/>
+          <p:nvPr/>
+        </p:nvSpPr>
+        <p:spPr>
+          <a:xfrm>
+            <a:off x="6364224" y="1271016"/>
+            <a:ext cx="2596896" cy="164592"/>
+          </a:xfrm>
+          <a:prstGeom prst="rect">
+            <a:avLst/>
+          </a:prstGeom>
+          <a:noFill/>
+        </p:spPr>
+        <p:txBody>
+          <a:bodyPr wrap="none" lIns="0" rIns="0" tIns="0" bIns="0">
+            <a:spAutoFit/>
+          </a:bodyPr>
+          <a:lstStyle/>
+          <a:p>
+            <a:pPr>
+              <a:defRPr sz="750" b="0" i="1">
+                <a:solidFill>
+                  <a:srgbClr val="787878"/>
+                </a:solidFill>
+                <a:latin typeface="Arial"/>
+              </a:defRPr>
+            </a:pPr>
+            <a:r>
+              <a:t>Where Altura already wins, and what defends it</a:t>
+            </a:r>
+          </a:p>
+        </p:txBody>
+      </p:sp>
+      <p:graphicFrame>
+        <p:nvGraphicFramePr>
+          <p:cNvPr id="103" name="Table 102"/>
+          <p:cNvGraphicFramePr>
+            <a:graphicFrameLocks noGrp="1"/>
+          </p:cNvGraphicFramePr>
+          <p:nvPr/>
+        </p:nvGraphicFramePr>
+        <p:xfrm>
+          <a:off x="6126480" y="1435608"/>
+          <a:ext cx="2834640" cy="621792"/>
+        </p:xfrm>
+        <a:graphic>
+          <a:graphicData uri="http://schemas.openxmlformats.org/drawingml/2006/table">
+            <a:tbl>
+              <a:tblPr firstRow="1" bandRow="1">
+                <a:tableStyleId>{5C22544A-7EE6-4342-B048-85BDC9FD1C3A}</a:tableStyleId>
+              </a:tblPr>
+              <a:tblGrid>
+                <a:gridCol w="1005840"/>
+                <a:gridCol w="548640"/>
+                <a:gridCol w="640080"/>
+                <a:gridCol w="640080"/>
+              </a:tblGrid>
+              <a:tr h="155448">
+                <a:tc>
+                  <a:txBody>
+                    <a:bodyPr lIns="9144" rIns="9144" tIns="9144" bIns="9144"/>
+                    <a:lstStyle/>
+                    <a:p>
+                      <a:pPr algn="l">
+                        <a:defRPr sz="620" b="0">
+                          <a:solidFill>
+                            <a:srgbClr val="212121"/>
+                          </a:solidFill>
+                          <a:latin typeface="Arial"/>
+                        </a:defRPr>
+                      </a:pPr>
+                    </a:p>
+                  </a:txBody>
+                  <a:tcPr>
+                    <a:solidFill>
+                      <a:srgbClr val="FFFFFF"/>
+                    </a:solidFill>
+                  </a:tcPr>
+                </a:tc>
+                <a:tc>
+                  <a:txBody>
+                    <a:bodyPr lIns="9144" rIns="9144" tIns="9144" bIns="9144"/>
+                    <a:lstStyle/>
+                    <a:p>
+                      <a:pPr algn="ctr">
+                        <a:defRPr sz="620" b="1">
+                          <a:solidFill>
+                            <a:srgbClr val="0F121C"/>
+                          </a:solidFill>
+                          <a:latin typeface="Arial"/>
+                        </a:defRPr>
+                      </a:pPr>
+                      <a:r>
+                        <a:t>Altura</a:t>
+                      </a:r>
+                    </a:p>
+                  </a:txBody>
+                  <a:tcPr>
+                    <a:solidFill>
+                      <a:srgbClr val="FFFFFF"/>
+                    </a:solidFill>
+                  </a:tcPr>
+                </a:tc>
+                <a:tc>
+                  <a:txBody>
+                    <a:bodyPr lIns="9144" rIns="9144" tIns="9144" bIns="9144"/>
+                    <a:lstStyle/>
+                    <a:p>
+                      <a:pPr algn="ctr">
+                        <a:defRPr sz="620" b="1">
+                          <a:solidFill>
+                            <a:srgbClr val="212121"/>
+                          </a:solidFill>
+                          <a:latin typeface="Arial"/>
+                        </a:defRPr>
+                      </a:pPr>
+                      <a:r>
+                        <a:t>Scale Rival</a:t>
+                      </a:r>
+                    </a:p>
+                  </a:txBody>
+                  <a:tcPr>
+                    <a:solidFill>
+                      <a:srgbClr val="FFFFFF"/>
+                    </a:solidFill>
+                  </a:tcPr>
+                </a:tc>
+                <a:tc>
+                  <a:txBody>
+                    <a:bodyPr lIns="9144" rIns="9144" tIns="9144" bIns="9144"/>
+                    <a:lstStyle/>
+                    <a:p>
+                      <a:pPr algn="ctr">
+                        <a:defRPr sz="620" b="1">
+                          <a:solidFill>
+                            <a:srgbClr val="212121"/>
+                          </a:solidFill>
+                          <a:latin typeface="Arial"/>
+                        </a:defRPr>
+                      </a:pPr>
+                      <a:r>
+                        <a:t>Value Chall.</a:t>
+                      </a:r>
+                    </a:p>
+                  </a:txBody>
+                  <a:tcPr>
+                    <a:solidFill>
+                      <a:srgbClr val="FFFFFF"/>
+                    </a:solidFill>
+                  </a:tcPr>
+                </a:tc>
+              </a:tr>
+              <a:tr h="155448">
+                <a:tc>
+                  <a:txBody>
+                    <a:bodyPr lIns="9144" rIns="9144" tIns="9144" bIns="9144"/>
+                    <a:lstStyle/>
+                    <a:p>
+                      <a:pPr algn="l">
+                        <a:defRPr sz="650" b="0">
+                          <a:solidFill>
+                            <a:srgbClr val="212121"/>
+                          </a:solidFill>
+                          <a:latin typeface="Arial"/>
+                        </a:defRPr>
+                      </a:pPr>
+                      <a:r>
+                        <a:t>ARPU (₹)</a:t>
+                      </a:r>
+                    </a:p>
+                  </a:txBody>
+                  <a:tcPr>
+                    <a:solidFill>
+                      <a:srgbClr val="FFFFFF"/>
+                    </a:solidFill>
+                  </a:tcPr>
+                </a:tc>
+                <a:tc>
+                  <a:txBody>
+                    <a:bodyPr lIns="9144" rIns="9144" tIns="9144" bIns="9144"/>
+                    <a:lstStyle/>
+                    <a:p>
+                      <a:pPr algn="ctr">
+                        <a:defRPr sz="650" b="1">
+                          <a:solidFill>
+                            <a:srgbClr val="ED1D24"/>
+                          </a:solidFill>
+                          <a:latin typeface="Arial"/>
+                        </a:defRPr>
+                      </a:pPr>
+                      <a:r>
+                        <a:t>257</a:t>
+                      </a:r>
+                    </a:p>
+                  </a:txBody>
+                  <a:tcPr>
+                    <a:solidFill>
+                      <a:srgbClr val="FFFFFF"/>
+                    </a:solidFill>
+                  </a:tcPr>
+                </a:tc>
+                <a:tc>
+                  <a:txBody>
+                    <a:bodyPr lIns="9144" rIns="9144" tIns="9144" bIns="9144"/>
+                    <a:lstStyle/>
+                    <a:p>
+                      <a:pPr algn="ctr">
+                        <a:defRPr sz="650" b="0">
+                          <a:solidFill>
+                            <a:srgbClr val="212121"/>
+                          </a:solidFill>
+                          <a:latin typeface="Arial"/>
+                        </a:defRPr>
+                      </a:pPr>
+                      <a:r>
+                        <a:t>214</a:t>
+                      </a:r>
+                    </a:p>
+                  </a:txBody>
+                  <a:tcPr>
+                    <a:solidFill>
+                      <a:srgbClr val="FFFFFF"/>
+                    </a:solidFill>
+                  </a:tcPr>
+                </a:tc>
+                <a:tc>
+                  <a:txBody>
+                    <a:bodyPr lIns="9144" rIns="9144" tIns="9144" bIns="9144"/>
+                    <a:lstStyle/>
+                    <a:p>
+                      <a:pPr algn="ctr">
+                        <a:defRPr sz="650" b="0">
+                          <a:solidFill>
+                            <a:srgbClr val="212121"/>
+                          </a:solidFill>
+                          <a:latin typeface="Arial"/>
+                        </a:defRPr>
+                      </a:pPr>
+                      <a:r>
+                        <a:t>190</a:t>
+                      </a:r>
+                    </a:p>
+                  </a:txBody>
+                  <a:tcPr>
+                    <a:solidFill>
+                      <a:srgbClr val="FFFFFF"/>
+                    </a:solidFill>
+                  </a:tcPr>
+                </a:tc>
+              </a:tr>
+              <a:tr h="155448">
+                <a:tc>
+                  <a:txBody>
+                    <a:bodyPr lIns="9144" rIns="9144" tIns="9144" bIns="9144"/>
+                    <a:lstStyle/>
+                    <a:p>
+                      <a:pPr algn="l">
+                        <a:defRPr sz="650" b="0">
+                          <a:solidFill>
+                            <a:srgbClr val="212121"/>
+                          </a:solidFill>
+                          <a:latin typeface="Arial"/>
+                        </a:defRPr>
+                      </a:pPr>
+                      <a:r>
+                        <a:t>Subscribers (Mn)</a:t>
+                      </a:r>
+                    </a:p>
+                  </a:txBody>
+                  <a:tcPr>
+                    <a:solidFill>
+                      <a:srgbClr val="FFFFFF"/>
+                    </a:solidFill>
+                  </a:tcPr>
+                </a:tc>
+                <a:tc>
+                  <a:txBody>
+                    <a:bodyPr lIns="9144" rIns="9144" tIns="9144" bIns="9144"/>
+                    <a:lstStyle/>
+                    <a:p>
+                      <a:pPr algn="ctr">
+                        <a:defRPr sz="650" b="1">
+                          <a:solidFill>
+                            <a:srgbClr val="ED1D24"/>
+                          </a:solidFill>
+                          <a:latin typeface="Arial"/>
+                        </a:defRPr>
+                      </a:pPr>
+                      <a:r>
+                        <a:t>373</a:t>
+                      </a:r>
+                    </a:p>
+                  </a:txBody>
+                  <a:tcPr>
+                    <a:solidFill>
+                      <a:srgbClr val="FFFFFF"/>
+                    </a:solidFill>
+                  </a:tcPr>
+                </a:tc>
+                <a:tc>
+                  <a:txBody>
+                    <a:bodyPr lIns="9144" rIns="9144" tIns="9144" bIns="9144"/>
+                    <a:lstStyle/>
+                    <a:p>
+                      <a:pPr algn="ctr">
+                        <a:defRPr sz="650" b="0">
+                          <a:solidFill>
+                            <a:srgbClr val="212121"/>
+                          </a:solidFill>
+                          <a:latin typeface="Arial"/>
+                        </a:defRPr>
+                      </a:pPr>
+                      <a:r>
+                        <a:t>524</a:t>
+                      </a:r>
+                    </a:p>
+                  </a:txBody>
+                  <a:tcPr>
+                    <a:solidFill>
+                      <a:srgbClr val="FFFFFF"/>
+                    </a:solidFill>
+                  </a:tcPr>
+                </a:tc>
+                <a:tc>
+                  <a:txBody>
+                    <a:bodyPr lIns="9144" rIns="9144" tIns="9144" bIns="9144"/>
+                    <a:lstStyle/>
+                    <a:p>
+                      <a:pPr algn="ctr">
+                        <a:defRPr sz="650" b="0">
+                          <a:solidFill>
+                            <a:srgbClr val="212121"/>
+                          </a:solidFill>
+                          <a:latin typeface="Arial"/>
+                        </a:defRPr>
+                      </a:pPr>
+                      <a:r>
+                        <a:t>198</a:t>
+                      </a:r>
+                    </a:p>
+                  </a:txBody>
+                  <a:tcPr>
+                    <a:solidFill>
+                      <a:srgbClr val="FFFFFF"/>
+                    </a:solidFill>
+                  </a:tcPr>
+                </a:tc>
+              </a:tr>
+              <a:tr h="155448">
+                <a:tc>
+                  <a:txBody>
+                    <a:bodyPr lIns="9144" rIns="9144" tIns="9144" bIns="9144"/>
+                    <a:lstStyle/>
+                    <a:p>
+                      <a:pPr algn="l">
+                        <a:defRPr sz="650" b="0">
+                          <a:solidFill>
+                            <a:srgbClr val="212121"/>
+                          </a:solidFill>
+                          <a:latin typeface="Arial"/>
+                        </a:defRPr>
+                      </a:pPr>
+                      <a:r>
+                        <a:t>Monthly churn</a:t>
+                      </a:r>
+                    </a:p>
+                  </a:txBody>
+                  <a:tcPr>
+                    <a:solidFill>
+                      <a:srgbClr val="FFFFFF"/>
+                    </a:solidFill>
+                  </a:tcPr>
+                </a:tc>
+                <a:tc>
+                  <a:txBody>
+                    <a:bodyPr lIns="9144" rIns="9144" tIns="9144" bIns="9144"/>
+                    <a:lstStyle/>
+                    <a:p>
+                      <a:pPr algn="ctr">
+                        <a:defRPr sz="650" b="1">
+                          <a:solidFill>
+                            <a:srgbClr val="ED1D24"/>
+                          </a:solidFill>
+                          <a:latin typeface="Arial"/>
+                        </a:defRPr>
+                      </a:pPr>
+                      <a:r>
+                        <a:t>~2%</a:t>
+                      </a:r>
+                    </a:p>
+                  </a:txBody>
+                  <a:tcPr>
+                    <a:solidFill>
+                      <a:srgbClr val="FFFFFF"/>
+                    </a:solidFill>
+                  </a:tcPr>
+                </a:tc>
+                <a:tc>
+                  <a:txBody>
+                    <a:bodyPr lIns="9144" rIns="9144" tIns="9144" bIns="9144"/>
+                    <a:lstStyle/>
+                    <a:p>
+                      <a:pPr algn="ctr">
+                        <a:defRPr sz="650" b="0">
+                          <a:solidFill>
+                            <a:srgbClr val="212121"/>
+                          </a:solidFill>
+                          <a:latin typeface="Arial"/>
+                        </a:defRPr>
+                      </a:pPr>
+                      <a:r>
+                        <a:t>1.7%</a:t>
+                      </a:r>
+                    </a:p>
+                  </a:txBody>
+                  <a:tcPr>
+                    <a:solidFill>
+                      <a:srgbClr val="FFFFFF"/>
+                    </a:solidFill>
+                  </a:tcPr>
+                </a:tc>
+                <a:tc>
+                  <a:txBody>
+                    <a:bodyPr lIns="9144" rIns="9144" tIns="9144" bIns="9144"/>
+                    <a:lstStyle/>
+                    <a:p>
+                      <a:pPr algn="ctr">
+                        <a:defRPr sz="650" b="0">
+                          <a:solidFill>
+                            <a:srgbClr val="212121"/>
+                          </a:solidFill>
+                          <a:latin typeface="Arial"/>
+                        </a:defRPr>
+                      </a:pPr>
+                      <a:r>
+                        <a:t>~4%</a:t>
+                      </a:r>
+                    </a:p>
+                  </a:txBody>
+                  <a:tcPr>
+                    <a:solidFill>
+                      <a:srgbClr val="FFFFFF"/>
+                    </a:solidFill>
+                  </a:tcPr>
+                </a:tc>
+              </a:tr>
+            </a:tbl>
+          </a:graphicData>
+        </a:graphic>
+      </p:graphicFrame>
+      <p:sp>
+        <p:nvSpPr>
+          <p:cNvPr id="104" name="Rounded Rectangle 103"/>
+          <p:cNvSpPr/>
+          <p:nvPr/>
+        </p:nvSpPr>
+        <p:spPr>
+          <a:xfrm>
+            <a:off x="6144768" y="2103120"/>
+            <a:ext cx="2816352" cy="585216"/>
+          </a:xfrm>
+          <a:prstGeom prst="roundRect">
+            <a:avLst/>
+          </a:prstGeom>
+          <a:solidFill>
+            <a:srgbClr val="FEF3F3"/>
+          </a:solidFill>
+          <a:ln>
+            <a:noFill/>
+          </a:ln>
+        </p:spPr>
+        <p:style>
+          <a:lnRef idx="1">
+            <a:schemeClr val="accent1"/>
+          </a:lnRef>
+          <a:fillRef idx="3">
+            <a:schemeClr val="accent1"/>
+          </a:fillRef>
+          <a:effectRef idx="2">
+            <a:schemeClr val="accent1"/>
+          </a:effectRef>
+          <a:fontRef idx="minor">
+            <a:schemeClr val="lt1"/>
+          </a:fontRef>
+        </p:style>
+        <p:txBody>
+          <a:bodyPr rtlCol="0" anchor="ctr" wrap="square" lIns="274320" rIns="73152" tIns="36576" bIns="36576"/>
+          <a:lstStyle/>
+          <a:p>
+            <a:pPr algn="ctr">
+              <a:defRPr sz="600" b="0">
+                <a:solidFill>
+                  <a:srgbClr val="212121"/>
+                </a:solidFill>
+                <a:latin typeface="Arial"/>
+              </a:defRPr>
+            </a:pPr>
+            <a:r>
+              <a:t>The Moat: not price - it's highest ARPU + a live multi-service footprint (mobility, broadband, DTH, security, banking) + an existing field-force relationship in millions of homes. Convergence turns that footprint into switching cost.</a:t>
+            </a:r>
+          </a:p>
+        </p:txBody>
+      </p:sp>
+      <p:sp>
+        <p:nvSpPr>
+          <p:cNvPr id="105" name="TextBox 104"/>
+          <p:cNvSpPr txBox="1"/>
+          <p:nvPr/>
+        </p:nvSpPr>
+        <p:spPr>
+          <a:xfrm>
+            <a:off x="6181344" y="2221992"/>
+            <a:ext cx="219456" cy="292608"/>
+          </a:xfrm>
+          <a:prstGeom prst="rect">
+            <a:avLst/>
+          </a:prstGeom>
+          <a:noFill/>
+        </p:spPr>
+        <p:txBody>
+          <a:bodyPr wrap="none" lIns="0" rIns="0" tIns="0" bIns="0">
+            <a:spAutoFit/>
+          </a:bodyPr>
+          <a:lstStyle/>
+          <a:p>
+            <a:pPr>
+              <a:defRPr sz="1000" b="0">
+                <a:solidFill>
+                  <a:srgbClr val="ED1D24"/>
+                </a:solidFill>
+                <a:latin typeface="Arial"/>
+              </a:defRPr>
+            </a:pPr>
+            <a:r>
+              <a:t>🛡️</a:t>
+            </a:r>
+          </a:p>
+        </p:txBody>
+      </p:sp>
+      <p:sp>
+        <p:nvSpPr>
+          <p:cNvPr id="106" name="TextBox 105"/>
+          <p:cNvSpPr txBox="1"/>
+          <p:nvPr/>
+        </p:nvSpPr>
+        <p:spPr>
+          <a:xfrm>
+            <a:off x="6144768" y="2715768"/>
+            <a:ext cx="2816352" cy="109728"/>
+          </a:xfrm>
+          <a:prstGeom prst="rect">
+            <a:avLst/>
+          </a:prstGeom>
+          <a:noFill/>
+        </p:spPr>
+        <p:txBody>
+          <a:bodyPr wrap="none" lIns="0" rIns="0" tIns="0" bIns="0">
+            <a:spAutoFit/>
+          </a:bodyPr>
+          <a:lstStyle/>
+          <a:p>
+            <a:pPr>
+              <a:defRPr sz="550" b="0" i="1">
+                <a:solidFill>
+                  <a:srgbClr val="787878"/>
+                </a:solidFill>
+                <a:latin typeface="Arial"/>
+              </a:defRPr>
+            </a:pPr>
+            <a:r>
+              <a:t>Src: Competitive Benchmark, Q4 FY26 disclosures</a:t>
+            </a:r>
+          </a:p>
+        </p:txBody>
+      </p:sp>
+      <p:sp>
+        <p:nvSpPr>
+          <p:cNvPr id="107" name="Rounded Rectangle 106"/>
+          <p:cNvSpPr/>
+          <p:nvPr/>
+        </p:nvSpPr>
+        <p:spPr>
+          <a:xfrm>
+            <a:off x="109728" y="2944368"/>
+            <a:ext cx="2880360" cy="1700784"/>
+          </a:xfrm>
+          <a:prstGeom prst="roundRect">
+            <a:avLst/>
+          </a:prstGeom>
+          <a:solidFill>
+            <a:srgbClr val="FFFFFF"/>
+          </a:solidFill>
+          <a:ln w="12700">
+            <a:solidFill>
+              <a:srgbClr val="DCDEE1"/>
+            </a:solidFill>
+          </a:ln>
+        </p:spPr>
+        <p:style>
+          <a:lnRef idx="1">
+            <a:schemeClr val="accent1"/>
+          </a:lnRef>
+          <a:fillRef idx="3">
+            <a:schemeClr val="accent1"/>
+          </a:fillRef>
+          <a:effectRef idx="2">
+            <a:schemeClr val="accent1"/>
+          </a:effectRef>
+          <a:fontRef idx="minor">
+            <a:schemeClr val="lt1"/>
+          </a:fontRef>
+        </p:style>
+        <p:txBody>
+          <a:bodyPr rtlCol="0" anchor="ctr"/>
+          <a:lstStyle/>
+          <a:p>
+            <a:pPr algn="ctr"/>
+          </a:p>
+        </p:txBody>
+      </p:sp>
+      <p:sp>
+        <p:nvSpPr>
+          <p:cNvPr id="108" name="Rectangle 107"/>
+          <p:cNvSpPr/>
+          <p:nvPr/>
+        </p:nvSpPr>
+        <p:spPr>
+          <a:xfrm>
+            <a:off x="182880" y="3017520"/>
+            <a:ext cx="164592" cy="164592"/>
+          </a:xfrm>
+          <a:prstGeom prst="rect">
+            <a:avLst/>
+          </a:prstGeom>
+          <a:solidFill>
+            <a:srgbClr val="ED1D24"/>
+          </a:solidFill>
+          <a:ln>
+            <a:noFill/>
+          </a:ln>
+        </p:spPr>
+        <p:style>
+          <a:lnRef idx="1">
+            <a:schemeClr val="accent1"/>
+          </a:lnRef>
+          <a:fillRef idx="3">
+            <a:schemeClr val="accent1"/>
+          </a:fillRef>
+          <a:effectRef idx="2">
+            <a:schemeClr val="accent1"/>
+          </a:effectRef>
+          <a:fontRef idx="minor">
+            <a:schemeClr val="lt1"/>
+          </a:fontRef>
+        </p:style>
+        <p:txBody>
+          <a:bodyPr rtlCol="0" anchor="ctr" wrap="none" lIns="0" rIns="0" tIns="0" bIns="0"/>
+          <a:lstStyle/>
+          <a:p>
+            <a:pPr algn="ctr">
+              <a:defRPr sz="850" b="1">
+                <a:solidFill>
+                  <a:srgbClr val="FFFFFF"/>
+                </a:solidFill>
+                <a:latin typeface="Calibri"/>
+              </a:defRPr>
+            </a:pPr>
+            <a:r>
+              <a:t>4</a:t>
+            </a:r>
+          </a:p>
+        </p:txBody>
+      </p:sp>
+      <p:sp>
+        <p:nvSpPr>
+          <p:cNvPr id="109" name="TextBox 108"/>
+          <p:cNvSpPr txBox="1"/>
+          <p:nvPr/>
+        </p:nvSpPr>
+        <p:spPr>
+          <a:xfrm>
+            <a:off x="402336" y="2990088"/>
+            <a:ext cx="2514600" cy="219456"/>
+          </a:xfrm>
+          <a:prstGeom prst="rect">
+            <a:avLst/>
+          </a:prstGeom>
+          <a:noFill/>
+        </p:spPr>
+        <p:txBody>
+          <a:bodyPr wrap="none" lIns="0" rIns="0" tIns="0" bIns="0">
+            <a:spAutoFit/>
+          </a:bodyPr>
+          <a:lstStyle/>
+          <a:p>
+            <a:pPr>
+              <a:defRPr sz="950" b="1">
+                <a:solidFill>
+                  <a:srgbClr val="ED1D24"/>
+                </a:solidFill>
+                <a:latin typeface="Calibri"/>
+              </a:defRPr>
+            </a:pPr>
+            <a:r>
+              <a:t>Core Problems I: Structural Barriers</a:t>
+            </a:r>
+          </a:p>
+        </p:txBody>
+      </p:sp>
+      <p:sp>
+        <p:nvSpPr>
+          <p:cNvPr id="110" name="TextBox 109"/>
+          <p:cNvSpPr txBox="1"/>
+          <p:nvPr/>
+        </p:nvSpPr>
+        <p:spPr>
+          <a:xfrm>
+            <a:off x="402336" y="3163824"/>
+            <a:ext cx="2514600" cy="164592"/>
+          </a:xfrm>
+          <a:prstGeom prst="rect">
+            <a:avLst/>
+          </a:prstGeom>
+          <a:noFill/>
+        </p:spPr>
+        <p:txBody>
+          <a:bodyPr wrap="none" lIns="0" rIns="0" tIns="0" bIns="0">
+            <a:spAutoFit/>
+          </a:bodyPr>
+          <a:lstStyle/>
+          <a:p>
+            <a:pPr>
+              <a:defRPr sz="750" b="0" i="1">
+                <a:solidFill>
+                  <a:srgbClr val="787878"/>
+                </a:solidFill>
+                <a:latin typeface="Arial"/>
+              </a:defRPr>
+            </a:pPr>
+            <a:r>
+              <a:t>From secondary research - what the case data shows is broken</a:t>
+            </a:r>
+          </a:p>
+        </p:txBody>
+      </p:sp>
+      <p:sp>
+        <p:nvSpPr>
+          <p:cNvPr id="111" name="TextBox 110"/>
+          <p:cNvSpPr txBox="1"/>
+          <p:nvPr/>
+        </p:nvSpPr>
+        <p:spPr>
+          <a:xfrm>
+            <a:off x="182880" y="3328416"/>
+            <a:ext cx="2734056" cy="1188720"/>
+          </a:xfrm>
+          <a:prstGeom prst="rect">
+            <a:avLst/>
+          </a:prstGeom>
+          <a:noFill/>
+        </p:spPr>
+        <p:txBody>
+          <a:bodyPr wrap="square" lIns="0" rIns="0" tIns="0" bIns="0">
+            <a:spAutoFit/>
+          </a:bodyPr>
+          <a:lstStyle/>
+          <a:p>
+            <a:pPr>
+              <a:spcAft>
+                <a:spcPts val="250"/>
+              </a:spcAft>
+              <a:defRPr sz="650" b="1">
+                <a:solidFill>
+                  <a:srgbClr val="ED1D24"/>
+                </a:solidFill>
+                <a:latin typeface="Arial"/>
+              </a:defRPr>
+            </a:pPr>
+            <a:r>
+              <a:t>📉 ① </a:t>
+            </a:r>
+            <a:r>
+              <a:rPr sz="650" b="1">
+                <a:solidFill>
+                  <a:srgbClr val="212121"/>
+                </a:solidFill>
+                <a:latin typeface="Arial"/>
+              </a:rPr>
+              <a:t>Saturated prepaid mobility -</a:t>
+            </a:r>
+            <a:r>
+              <a:rPr sz="650" b="0">
+                <a:solidFill>
+                  <a:srgbClr val="212121"/>
+                </a:solidFill>
+                <a:latin typeface="Arial"/>
+              </a:rPr>
+              <a:t> Flat subscriber growth, pricing power constrained</a:t>
+            </a:r>
+          </a:p>
+          <a:p>
+            <a:pPr>
+              <a:spcAft>
+                <a:spcPts val="250"/>
+              </a:spcAft>
+              <a:defRPr sz="650" b="1">
+                <a:solidFill>
+                  <a:srgbClr val="ED1D24"/>
+                </a:solidFill>
+                <a:latin typeface="Arial"/>
+              </a:defRPr>
+            </a:pPr>
+            <a:r>
+              <a:t>👥 ② </a:t>
+            </a:r>
+            <a:r>
+              <a:rPr sz="650" b="1">
+                <a:solidFill>
+                  <a:srgbClr val="212121"/>
+                </a:solidFill>
+                <a:latin typeface="Arial"/>
+              </a:rPr>
+              <a:t>Independent product silos -</a:t>
+            </a:r>
+            <a:r>
+              <a:rPr sz="650" b="0">
+                <a:solidFill>
+                  <a:srgbClr val="212121"/>
+                </a:solidFill>
+                <a:latin typeface="Arial"/>
+              </a:rPr>
+              <a:t> Disjointed onboarding, missed cross-sell</a:t>
+            </a:r>
+          </a:p>
+          <a:p>
+            <a:pPr>
+              <a:spcAft>
+                <a:spcPts val="250"/>
+              </a:spcAft>
+              <a:defRPr sz="650" b="1">
+                <a:solidFill>
+                  <a:srgbClr val="ED1D24"/>
+                </a:solidFill>
+                <a:latin typeface="Arial"/>
+              </a:defRPr>
+            </a:pPr>
+            <a:r>
+              <a:t>🔄 ③ </a:t>
+            </a:r>
+            <a:r>
+              <a:rPr sz="650" b="1">
+                <a:solidFill>
+                  <a:srgbClr val="212121"/>
+                </a:solidFill>
+                <a:latin typeface="Arial"/>
+              </a:rPr>
+              <a:t>Single-product churn drain -</a:t>
+            </a:r>
+            <a:r>
+              <a:rPr sz="650" b="0">
+                <a:solidFill>
+                  <a:srgbClr val="212121"/>
+                </a:solidFill>
+                <a:latin typeface="Arial"/>
+              </a:rPr>
+              <a:t> 22% annual churn vs. 5% for 3+ bundled services</a:t>
+            </a:r>
+          </a:p>
+          <a:p>
+            <a:pPr>
+              <a:spcAft>
+                <a:spcPts val="250"/>
+              </a:spcAft>
+              <a:defRPr sz="650" b="1">
+                <a:solidFill>
+                  <a:srgbClr val="ED1D24"/>
+                </a:solidFill>
+                <a:latin typeface="Arial"/>
+              </a:defRPr>
+            </a:pPr>
+            <a:r>
+              <a:t>📺 ④ </a:t>
+            </a:r>
+            <a:r>
+              <a:rPr sz="650" b="1">
+                <a:solidFill>
+                  <a:srgbClr val="212121"/>
+                </a:solidFill>
+                <a:latin typeface="Arial"/>
+              </a:rPr>
+              <a:t>DTH revenue contracting -</a:t>
+            </a:r>
+            <a:r>
+              <a:rPr sz="650" b="0">
+                <a:solidFill>
+                  <a:srgbClr val="212121"/>
+                </a:solidFill>
+                <a:latin typeface="Arial"/>
+              </a:rPr>
+              <a:t> ₹2,520 Cr (FY20) → ₹2,350 Cr (FY24) as OTT grows</a:t>
+            </a:r>
+          </a:p>
+          <a:p>
+            <a:pPr>
+              <a:spcAft>
+                <a:spcPts val="250"/>
+              </a:spcAft>
+              <a:defRPr sz="650" b="1">
+                <a:solidFill>
+                  <a:srgbClr val="ED1D24"/>
+                </a:solidFill>
+                <a:latin typeface="Arial"/>
+              </a:defRPr>
+            </a:pPr>
+            <a:r>
+              <a:t>🔧 ⑤ </a:t>
+            </a:r>
+            <a:r>
+              <a:rPr sz="650" b="1">
+                <a:solidFill>
+                  <a:srgbClr val="212121"/>
+                </a:solidFill>
+                <a:latin typeface="Arial"/>
+              </a:rPr>
+              <a:t>Field force under-used -</a:t>
+            </a:r>
+            <a:r>
+              <a:rPr sz="650" b="0">
+                <a:solidFill>
+                  <a:srgbClr val="212121"/>
+                </a:solidFill>
+                <a:latin typeface="Arial"/>
+              </a:rPr>
+              <a:t> Lowest decay (12–25%) of any channel, no cross-sell mandate</a:t>
+            </a:r>
+          </a:p>
+        </p:txBody>
+      </p:sp>
+      <p:sp>
+        <p:nvSpPr>
+          <p:cNvPr id="112" name="TextBox 111"/>
+          <p:cNvSpPr txBox="1"/>
+          <p:nvPr/>
+        </p:nvSpPr>
+        <p:spPr>
+          <a:xfrm>
+            <a:off x="182880" y="4517136"/>
+            <a:ext cx="2734056" cy="109728"/>
+          </a:xfrm>
+          <a:prstGeom prst="rect">
+            <a:avLst/>
+          </a:prstGeom>
+          <a:noFill/>
+        </p:spPr>
+        <p:txBody>
+          <a:bodyPr wrap="none" lIns="0" rIns="0" tIns="0" bIns="0">
+            <a:spAutoFit/>
+          </a:bodyPr>
+          <a:lstStyle/>
+          <a:p>
+            <a:pPr>
+              <a:defRPr sz="550" b="0" i="1">
+                <a:solidFill>
+                  <a:srgbClr val="787878"/>
+                </a:solidFill>
+                <a:latin typeface="Arial"/>
+              </a:defRPr>
+            </a:pPr>
+            <a:r>
+              <a:t>Src: Case pp.2–3; Exhibits 1, 2, 4 &amp; 5</a:t>
+            </a:r>
+          </a:p>
+        </p:txBody>
+      </p:sp>
+      <p:sp>
+        <p:nvSpPr>
+          <p:cNvPr id="113" name="Rounded Rectangle 112"/>
+          <p:cNvSpPr/>
+          <p:nvPr/>
+        </p:nvSpPr>
+        <p:spPr>
+          <a:xfrm>
+            <a:off x="3090672" y="2944368"/>
+            <a:ext cx="2880360" cy="1700784"/>
+          </a:xfrm>
+          <a:prstGeom prst="roundRect">
+            <a:avLst/>
+          </a:prstGeom>
+          <a:solidFill>
+            <a:srgbClr val="FFFFFF"/>
+          </a:solidFill>
+          <a:ln w="12700">
+            <a:solidFill>
+              <a:srgbClr val="DCDEE1"/>
+            </a:solidFill>
+          </a:ln>
+        </p:spPr>
+        <p:style>
+          <a:lnRef idx="1">
+            <a:schemeClr val="accent1"/>
+          </a:lnRef>
+          <a:fillRef idx="3">
+            <a:schemeClr val="accent1"/>
+          </a:fillRef>
+          <a:effectRef idx="2">
+            <a:schemeClr val="accent1"/>
+          </a:effectRef>
+          <a:fontRef idx="minor">
+            <a:schemeClr val="lt1"/>
+          </a:fontRef>
+        </p:style>
+        <p:txBody>
+          <a:bodyPr rtlCol="0" anchor="ctr"/>
+          <a:lstStyle/>
+          <a:p>
+            <a:pPr algn="ctr"/>
+          </a:p>
+        </p:txBody>
+      </p:sp>
+      <p:sp>
+        <p:nvSpPr>
+          <p:cNvPr id="114" name="Rectangle 113"/>
+          <p:cNvSpPr/>
+          <p:nvPr/>
+        </p:nvSpPr>
+        <p:spPr>
+          <a:xfrm>
+            <a:off x="3163824" y="3017520"/>
+            <a:ext cx="164592" cy="164592"/>
+          </a:xfrm>
+          <a:prstGeom prst="rect">
+            <a:avLst/>
+          </a:prstGeom>
+          <a:solidFill>
+            <a:srgbClr val="ED1D24"/>
+          </a:solidFill>
+          <a:ln>
+            <a:noFill/>
+          </a:ln>
+        </p:spPr>
+        <p:style>
+          <a:lnRef idx="1">
+            <a:schemeClr val="accent1"/>
+          </a:lnRef>
+          <a:fillRef idx="3">
+            <a:schemeClr val="accent1"/>
+          </a:fillRef>
+          <a:effectRef idx="2">
+            <a:schemeClr val="accent1"/>
+          </a:effectRef>
+          <a:fontRef idx="minor">
+            <a:schemeClr val="lt1"/>
+          </a:fontRef>
+        </p:style>
+        <p:txBody>
+          <a:bodyPr rtlCol="0" anchor="ctr" wrap="none" lIns="0" rIns="0" tIns="0" bIns="0"/>
+          <a:lstStyle/>
+          <a:p>
+            <a:pPr algn="ctr">
+              <a:defRPr sz="850" b="1">
+                <a:solidFill>
+                  <a:srgbClr val="FFFFFF"/>
+                </a:solidFill>
+                <a:latin typeface="Calibri"/>
+              </a:defRPr>
+            </a:pPr>
+            <a:r>
+              <a:t>5</a:t>
+            </a:r>
+          </a:p>
+        </p:txBody>
+      </p:sp>
+      <p:sp>
+        <p:nvSpPr>
+          <p:cNvPr id="115" name="TextBox 114"/>
+          <p:cNvSpPr txBox="1"/>
+          <p:nvPr/>
+        </p:nvSpPr>
+        <p:spPr>
+          <a:xfrm>
+            <a:off x="3383280" y="2990088"/>
+            <a:ext cx="2514600" cy="219456"/>
+          </a:xfrm>
+          <a:prstGeom prst="rect">
+            <a:avLst/>
+          </a:prstGeom>
+          <a:noFill/>
+        </p:spPr>
+        <p:txBody>
+          <a:bodyPr wrap="none" lIns="0" rIns="0" tIns="0" bIns="0">
+            <a:spAutoFit/>
+          </a:bodyPr>
+          <a:lstStyle/>
+          <a:p>
+            <a:pPr>
+              <a:defRPr sz="950" b="1">
+                <a:solidFill>
+                  <a:srgbClr val="ED1D24"/>
+                </a:solidFill>
+                <a:latin typeface="Calibri"/>
+              </a:defRPr>
+            </a:pPr>
+            <a:r>
+              <a:t>Core Problems II: Psychological Barriers</a:t>
+            </a:r>
+          </a:p>
+        </p:txBody>
+      </p:sp>
+      <p:sp>
+        <p:nvSpPr>
+          <p:cNvPr id="116" name="TextBox 115"/>
+          <p:cNvSpPr txBox="1"/>
+          <p:nvPr/>
+        </p:nvSpPr>
+        <p:spPr>
+          <a:xfrm>
+            <a:off x="3383280" y="3163824"/>
+            <a:ext cx="2514600" cy="164592"/>
+          </a:xfrm>
+          <a:prstGeom prst="rect">
+            <a:avLst/>
+          </a:prstGeom>
+          <a:noFill/>
+        </p:spPr>
+        <p:txBody>
+          <a:bodyPr wrap="none" lIns="0" rIns="0" tIns="0" bIns="0">
+            <a:spAutoFit/>
+          </a:bodyPr>
+          <a:lstStyle/>
+          <a:p>
+            <a:pPr>
+              <a:defRPr sz="750" b="0" i="1">
+                <a:solidFill>
+                  <a:srgbClr val="787878"/>
+                </a:solidFill>
+                <a:latin typeface="Arial"/>
+              </a:defRPr>
+            </a:pPr>
+            <a:r>
+              <a:t>From primary research - why households resist consolidating</a:t>
+            </a:r>
+          </a:p>
+        </p:txBody>
+      </p:sp>
+      <p:sp>
+        <p:nvSpPr>
+          <p:cNvPr id="117" name="TextBox 116"/>
+          <p:cNvSpPr txBox="1"/>
+          <p:nvPr/>
+        </p:nvSpPr>
+        <p:spPr>
+          <a:xfrm>
+            <a:off x="3163824" y="3328416"/>
+            <a:ext cx="2734056" cy="1188720"/>
+          </a:xfrm>
+          <a:prstGeom prst="rect">
+            <a:avLst/>
+          </a:prstGeom>
+          <a:noFill/>
+        </p:spPr>
+        <p:txBody>
+          <a:bodyPr wrap="square" lIns="0" rIns="0" tIns="0" bIns="0">
+            <a:spAutoFit/>
+          </a:bodyPr>
+          <a:lstStyle/>
+          <a:p>
+            <a:pPr>
+              <a:spcAft>
+                <a:spcPts val="250"/>
+              </a:spcAft>
+              <a:defRPr sz="650" b="1">
+                <a:solidFill>
+                  <a:srgbClr val="ED1D24"/>
+                </a:solidFill>
+                <a:latin typeface="Arial"/>
+              </a:defRPr>
+            </a:pPr>
+            <a:r>
+              <a:t>⚠️ </a:t>
+            </a:r>
+            <a:r>
+              <a:rPr sz="650" b="1">
+                <a:solidFill>
+                  <a:srgbClr val="212121"/>
+                </a:solidFill>
+                <a:latin typeface="Arial"/>
+              </a:rPr>
+              <a:t>SPOF anxiety:</a:t>
+            </a:r>
+            <a:r>
+              <a:rPr sz="650" b="0">
+                <a:solidFill>
+                  <a:srgbClr val="212121"/>
+                </a:solidFill>
+                <a:latin typeface="Arial"/>
+              </a:rPr>
+              <a:t> 60%+ fear one outage kills fibre + mobile + TV together</a:t>
+            </a:r>
+          </a:p>
+          <a:p>
+            <a:pPr>
+              <a:spcAft>
+                <a:spcPts val="250"/>
+              </a:spcAft>
+              <a:defRPr sz="650" b="1">
+                <a:solidFill>
+                  <a:srgbClr val="ED1D24"/>
+                </a:solidFill>
+                <a:latin typeface="Arial"/>
+              </a:defRPr>
+            </a:pPr>
+            <a:r>
+              <a:t>📶 </a:t>
+            </a:r>
+            <a:r>
+              <a:rPr sz="650" b="1">
+                <a:solidFill>
+                  <a:srgbClr val="212121"/>
+                </a:solidFill>
+                <a:latin typeface="Arial"/>
+              </a:rPr>
+              <a:t>Migration dread:</a:t>
+            </a:r>
+            <a:r>
+              <a:rPr sz="650" b="0">
+                <a:solidFill>
+                  <a:srgbClr val="212121"/>
+                </a:solidFill>
+                <a:latin typeface="Arial"/>
+              </a:rPr>
+              <a:t> Porting SIMs, installing router/TV-box/cameras, coordinating setup dates</a:t>
+            </a:r>
+          </a:p>
+          <a:p>
+            <a:pPr>
+              <a:spcAft>
+                <a:spcPts val="250"/>
+              </a:spcAft>
+              <a:defRPr sz="650" b="1">
+                <a:solidFill>
+                  <a:srgbClr val="ED1D24"/>
+                </a:solidFill>
+                <a:latin typeface="Arial"/>
+              </a:defRPr>
+            </a:pPr>
+            <a:r>
+              <a:t>🪙 </a:t>
+            </a:r>
+            <a:r>
+              <a:rPr sz="650" b="1">
+                <a:solidFill>
+                  <a:srgbClr val="212121"/>
+                </a:solidFill>
+                <a:latin typeface="Arial"/>
+              </a:rPr>
+              <a:t>Utility-arbitrage bias:</a:t>
+            </a:r>
+            <a:r>
+              <a:rPr sz="650" b="0">
+                <a:solidFill>
+                  <a:srgbClr val="212121"/>
+                </a:solidFill>
+                <a:latin typeface="Arial"/>
+              </a:rPr>
+              <a:t> Belief that separate "cheap" services beat a bundle - ignoring hidden fees (₹2,006 standalone vs. ₹999 bundle promo)</a:t>
+            </a:r>
+          </a:p>
+          <a:p>
+            <a:pPr>
+              <a:spcAft>
+                <a:spcPts val="250"/>
+              </a:spcAft>
+              <a:defRPr sz="650" b="1">
+                <a:solidFill>
+                  <a:srgbClr val="ED1D24"/>
+                </a:solidFill>
+                <a:latin typeface="Arial"/>
+              </a:defRPr>
+            </a:pPr>
+            <a:r>
+              <a:t>📷 </a:t>
+            </a:r>
+            <a:r>
+              <a:rPr sz="650" b="1">
+                <a:solidFill>
+                  <a:srgbClr val="212121"/>
+                </a:solidFill>
+                <a:latin typeface="Arial"/>
+              </a:rPr>
+              <a:t>Security-camera trust gap:</a:t>
+            </a:r>
+            <a:r>
+              <a:rPr sz="650" b="0">
+                <a:solidFill>
+                  <a:srgbClr val="212121"/>
+                </a:solidFill>
+                <a:latin typeface="Arial"/>
+              </a:rPr>
+              <a:t> Only 2% wallet share - no confidence in unbranded CCTV cloud backup or apps</a:t>
+            </a:r>
+          </a:p>
+        </p:txBody>
+      </p:sp>
+      <p:sp>
+        <p:nvSpPr>
+          <p:cNvPr id="118" name="TextBox 117"/>
+          <p:cNvSpPr txBox="1"/>
+          <p:nvPr/>
+        </p:nvSpPr>
+        <p:spPr>
+          <a:xfrm>
+            <a:off x="3163824" y="4517136"/>
+            <a:ext cx="2734056" cy="109728"/>
+          </a:xfrm>
+          <a:prstGeom prst="rect">
+            <a:avLst/>
+          </a:prstGeom>
+          <a:noFill/>
+        </p:spPr>
+        <p:txBody>
+          <a:bodyPr wrap="none" lIns="0" rIns="0" tIns="0" bIns="0">
+            <a:spAutoFit/>
+          </a:bodyPr>
+          <a:lstStyle/>
+          <a:p>
+            <a:pPr>
+              <a:defRPr sz="550" b="0" i="1">
+                <a:solidFill>
+                  <a:srgbClr val="787878"/>
+                </a:solidFill>
+                <a:latin typeface="Arial"/>
+              </a:defRPr>
+            </a:pPr>
+            <a:r>
+              <a:t>Src: Primary consumer survey</a:t>
+            </a:r>
+          </a:p>
+        </p:txBody>
+      </p:sp>
+      <p:sp>
+        <p:nvSpPr>
+          <p:cNvPr id="119" name="Rounded Rectangle 118"/>
+          <p:cNvSpPr/>
+          <p:nvPr/>
+        </p:nvSpPr>
+        <p:spPr>
+          <a:xfrm>
+            <a:off x="6071616" y="2944368"/>
+            <a:ext cx="2962656" cy="1700784"/>
+          </a:xfrm>
+          <a:prstGeom prst="roundRect">
+            <a:avLst/>
+          </a:prstGeom>
+          <a:solidFill>
+            <a:srgbClr val="FFFFFF"/>
+          </a:solidFill>
+          <a:ln w="12700">
+            <a:solidFill>
+              <a:srgbClr val="DCDEE1"/>
+            </a:solidFill>
+          </a:ln>
+        </p:spPr>
+        <p:style>
+          <a:lnRef idx="1">
+            <a:schemeClr val="accent1"/>
+          </a:lnRef>
+          <a:fillRef idx="3">
+            <a:schemeClr val="accent1"/>
+          </a:fillRef>
+          <a:effectRef idx="2">
+            <a:schemeClr val="accent1"/>
+          </a:effectRef>
+          <a:fontRef idx="minor">
+            <a:schemeClr val="lt1"/>
+          </a:fontRef>
+        </p:style>
+        <p:txBody>
+          <a:bodyPr rtlCol="0" anchor="ctr"/>
+          <a:lstStyle/>
+          <a:p>
+            <a:pPr algn="ctr"/>
+          </a:p>
+        </p:txBody>
+      </p:sp>
+      <p:sp>
+        <p:nvSpPr>
+          <p:cNvPr id="120" name="Rectangle 119"/>
+          <p:cNvSpPr/>
+          <p:nvPr/>
+        </p:nvSpPr>
+        <p:spPr>
+          <a:xfrm>
+            <a:off x="6144768" y="3017520"/>
+            <a:ext cx="164592" cy="164592"/>
+          </a:xfrm>
+          <a:prstGeom prst="rect">
+            <a:avLst/>
+          </a:prstGeom>
+          <a:solidFill>
+            <a:srgbClr val="ED1D24"/>
+          </a:solidFill>
+          <a:ln>
+            <a:noFill/>
+          </a:ln>
+        </p:spPr>
+        <p:style>
+          <a:lnRef idx="1">
+            <a:schemeClr val="accent1"/>
+          </a:lnRef>
+          <a:fillRef idx="3">
+            <a:schemeClr val="accent1"/>
+          </a:fillRef>
+          <a:effectRef idx="2">
+            <a:schemeClr val="accent1"/>
+          </a:effectRef>
+          <a:fontRef idx="minor">
+            <a:schemeClr val="lt1"/>
+          </a:fontRef>
+        </p:style>
+        <p:txBody>
+          <a:bodyPr rtlCol="0" anchor="ctr" wrap="none" lIns="0" rIns="0" tIns="0" bIns="0"/>
+          <a:lstStyle/>
+          <a:p>
+            <a:pPr algn="ctr">
+              <a:defRPr sz="850" b="1">
+                <a:solidFill>
+                  <a:srgbClr val="FFFFFF"/>
+                </a:solidFill>
+                <a:latin typeface="Calibri"/>
+              </a:defRPr>
+            </a:pPr>
+            <a:r>
+              <a:t>6</a:t>
+            </a:r>
+          </a:p>
+        </p:txBody>
+      </p:sp>
+      <p:sp>
+        <p:nvSpPr>
+          <p:cNvPr id="121" name="TextBox 120"/>
+          <p:cNvSpPr txBox="1"/>
+          <p:nvPr/>
+        </p:nvSpPr>
+        <p:spPr>
+          <a:xfrm>
+            <a:off x="6364224" y="2990088"/>
+            <a:ext cx="2596896" cy="219456"/>
+          </a:xfrm>
+          <a:prstGeom prst="rect">
+            <a:avLst/>
+          </a:prstGeom>
+          <a:noFill/>
+        </p:spPr>
+        <p:txBody>
+          <a:bodyPr wrap="none" lIns="0" rIns="0" tIns="0" bIns="0">
+            <a:spAutoFit/>
+          </a:bodyPr>
+          <a:lstStyle/>
+          <a:p>
+            <a:pPr>
+              <a:defRPr sz="950" b="1">
+                <a:solidFill>
+                  <a:srgbClr val="ED1D24"/>
+                </a:solidFill>
+                <a:latin typeface="Calibri"/>
+              </a:defRPr>
+            </a:pPr>
+            <a:r>
+              <a:t>Personas &amp; Behavioural Triggers</a:t>
+            </a:r>
+          </a:p>
+        </p:txBody>
+      </p:sp>
+      <p:sp>
+        <p:nvSpPr>
+          <p:cNvPr id="122" name="TextBox 121"/>
+          <p:cNvSpPr txBox="1"/>
+          <p:nvPr/>
+        </p:nvSpPr>
+        <p:spPr>
+          <a:xfrm>
+            <a:off x="6364224" y="3163824"/>
+            <a:ext cx="2596896" cy="164592"/>
+          </a:xfrm>
+          <a:prstGeom prst="rect">
+            <a:avLst/>
+          </a:prstGeom>
+          <a:noFill/>
+        </p:spPr>
+        <p:txBody>
+          <a:bodyPr wrap="none" lIns="0" rIns="0" tIns="0" bIns="0">
+            <a:spAutoFit/>
+          </a:bodyPr>
+          <a:lstStyle/>
+          <a:p>
+            <a:pPr>
+              <a:defRPr sz="750" b="0" i="1">
+                <a:solidFill>
+                  <a:srgbClr val="787878"/>
+                </a:solidFill>
+                <a:latin typeface="Arial"/>
+              </a:defRPr>
+            </a:pPr>
+            <a:r>
+              <a:t>Three households, three different reasons to say no</a:t>
+            </a:r>
+          </a:p>
+        </p:txBody>
+      </p:sp>
+      <p:sp>
+        <p:nvSpPr>
+          <p:cNvPr id="123" name="Oval 122"/>
+          <p:cNvSpPr/>
+          <p:nvPr/>
+        </p:nvSpPr>
+        <p:spPr>
+          <a:xfrm>
+            <a:off x="6144768" y="3355848"/>
+            <a:ext cx="219456" cy="219456"/>
+          </a:xfrm>
+          <a:prstGeom prst="ellipse">
+            <a:avLst/>
+          </a:prstGeom>
+          <a:solidFill>
+            <a:srgbClr val="FFFFFF"/>
+          </a:solidFill>
+          <a:ln w="12700">
+            <a:solidFill>
+              <a:srgbClr val="ED1D24"/>
+            </a:solidFill>
+          </a:ln>
+        </p:spPr>
+        <p:style>
+          <a:lnRef idx="1">
+            <a:schemeClr val="accent1"/>
+          </a:lnRef>
+          <a:fillRef idx="3">
+            <a:schemeClr val="accent1"/>
+          </a:fillRef>
+          <a:effectRef idx="2">
+            <a:schemeClr val="accent1"/>
+          </a:effectRef>
+          <a:fontRef idx="minor">
+            <a:schemeClr val="lt1"/>
+          </a:fontRef>
+        </p:style>
+        <p:txBody>
+          <a:bodyPr rtlCol="0" anchor="ctr" lIns="0" rIns="0" tIns="0" bIns="0"/>
+          <a:lstStyle/>
+          <a:p>
+            <a:pPr algn="ctr">
+              <a:defRPr sz="800" b="1">
+                <a:solidFill>
+                  <a:srgbClr val="ED1D24"/>
+                </a:solidFill>
+                <a:latin typeface="Calibri"/>
+              </a:defRPr>
+            </a:pPr>
+            <a:r>
+              <a:t>R</a:t>
+            </a:r>
+          </a:p>
+        </p:txBody>
+      </p:sp>
+      <p:sp>
+        <p:nvSpPr>
+          <p:cNvPr id="124" name="TextBox 123"/>
+          <p:cNvSpPr txBox="1"/>
+          <p:nvPr/>
+        </p:nvSpPr>
+        <p:spPr>
+          <a:xfrm>
+            <a:off x="6419088" y="3328416"/>
+            <a:ext cx="2267712" cy="329184"/>
+          </a:xfrm>
+          <a:prstGeom prst="rect">
+            <a:avLst/>
+          </a:prstGeom>
+          <a:noFill/>
+        </p:spPr>
+        <p:txBody>
+          <a:bodyPr wrap="square" lIns="0" rIns="0" tIns="0" bIns="0">
+            <a:spAutoFit/>
+          </a:bodyPr>
+          <a:lstStyle/>
+          <a:p>
+            <a:pPr>
+              <a:defRPr sz="650" b="1">
+                <a:solidFill>
+                  <a:srgbClr val="212121"/>
+                </a:solidFill>
+                <a:latin typeface="Arial"/>
+              </a:defRPr>
+            </a:pPr>
+            <a:r>
+              <a:t>REVA · 34 · Metro · High-Value · DTC channel</a:t>
+            </a:r>
+          </a:p>
+          <a:p>
+            <a:pPr>
+              <a:defRPr sz="650" b="0" i="1">
+                <a:solidFill>
+                  <a:srgbClr val="212121"/>
+                </a:solidFill>
+                <a:latin typeface="Arial"/>
+              </a:defRPr>
+            </a:pPr>
+            <a:r>
+              <a:t>"I'll pay for one relationship if it won't go dark."</a:t>
+            </a:r>
+          </a:p>
+        </p:txBody>
+      </p:sp>
+      <p:sp>
+        <p:nvSpPr>
+          <p:cNvPr id="125" name="TextBox 124"/>
+          <p:cNvSpPr txBox="1"/>
+          <p:nvPr/>
+        </p:nvSpPr>
+        <p:spPr>
+          <a:xfrm>
+            <a:off x="8723376" y="3346704"/>
+            <a:ext cx="219456" cy="219456"/>
+          </a:xfrm>
+          <a:prstGeom prst="rect">
+            <a:avLst/>
+          </a:prstGeom>
+          <a:noFill/>
+        </p:spPr>
+        <p:txBody>
+          <a:bodyPr wrap="none" lIns="0" rIns="0" tIns="0" bIns="0">
+            <a:spAutoFit/>
+          </a:bodyPr>
+          <a:lstStyle/>
+          <a:p>
+            <a:pPr algn="ctr">
+              <a:defRPr sz="950" b="0">
+                <a:solidFill>
+                  <a:srgbClr val="787878"/>
+                </a:solidFill>
+                <a:latin typeface="Arial"/>
+              </a:defRPr>
+            </a:pPr>
+            <a:r>
+              <a:t>👥</a:t>
+            </a:r>
+          </a:p>
+        </p:txBody>
+      </p:sp>
+      <p:sp>
+        <p:nvSpPr>
+          <p:cNvPr id="126" name="Oval 125"/>
+          <p:cNvSpPr/>
+          <p:nvPr/>
+        </p:nvSpPr>
+        <p:spPr>
+          <a:xfrm>
+            <a:off x="6144768" y="3739896"/>
+            <a:ext cx="219456" cy="219456"/>
+          </a:xfrm>
+          <a:prstGeom prst="ellipse">
+            <a:avLst/>
+          </a:prstGeom>
+          <a:solidFill>
+            <a:srgbClr val="FFFFFF"/>
+          </a:solidFill>
+          <a:ln w="12700">
+            <a:solidFill>
+              <a:srgbClr val="ED1D24"/>
+            </a:solidFill>
+          </a:ln>
+        </p:spPr>
+        <p:style>
+          <a:lnRef idx="1">
+            <a:schemeClr val="accent1"/>
+          </a:lnRef>
+          <a:fillRef idx="3">
+            <a:schemeClr val="accent1"/>
+          </a:fillRef>
+          <a:effectRef idx="2">
+            <a:schemeClr val="accent1"/>
+          </a:effectRef>
+          <a:fontRef idx="minor">
+            <a:schemeClr val="lt1"/>
+          </a:fontRef>
+        </p:style>
+        <p:txBody>
+          <a:bodyPr rtlCol="0" anchor="ctr" lIns="0" rIns="0" tIns="0" bIns="0"/>
+          <a:lstStyle/>
+          <a:p>
+            <a:pPr algn="ctr">
+              <a:defRPr sz="800" b="1">
+                <a:solidFill>
+                  <a:srgbClr val="ED1D24"/>
+                </a:solidFill>
+                <a:latin typeface="Calibri"/>
+              </a:defRPr>
+            </a:pPr>
+            <a:r>
+              <a:t>S</a:t>
+            </a:r>
+          </a:p>
+        </p:txBody>
+      </p:sp>
+      <p:sp>
+        <p:nvSpPr>
+          <p:cNvPr id="127" name="TextBox 126"/>
+          <p:cNvSpPr txBox="1"/>
+          <p:nvPr/>
+        </p:nvSpPr>
+        <p:spPr>
+          <a:xfrm>
+            <a:off x="6419088" y="3712464"/>
+            <a:ext cx="2267712" cy="329184"/>
+          </a:xfrm>
+          <a:prstGeom prst="rect">
+            <a:avLst/>
+          </a:prstGeom>
+          <a:noFill/>
+        </p:spPr>
+        <p:txBody>
+          <a:bodyPr wrap="square" lIns="0" rIns="0" tIns="0" bIns="0">
+            <a:spAutoFit/>
+          </a:bodyPr>
+          <a:lstStyle/>
+          <a:p>
+            <a:pPr>
+              <a:defRPr sz="650" b="1">
+                <a:solidFill>
+                  <a:srgbClr val="212121"/>
+                </a:solidFill>
+                <a:latin typeface="Arial"/>
+              </a:defRPr>
+            </a:pPr>
+            <a:r>
+              <a:t>SURESH · 41 · Semi-Urban · Distributor channel</a:t>
+            </a:r>
+          </a:p>
+          <a:p>
+            <a:pPr>
+              <a:defRPr sz="650" b="0" i="1">
+                <a:solidFill>
+                  <a:srgbClr val="212121"/>
+                </a:solidFill>
+                <a:latin typeface="Arial"/>
+              </a:defRPr>
+            </a:pPr>
+            <a:r>
+              <a:t>"Show me the saving in rupees, not a percentage."</a:t>
+            </a:r>
+          </a:p>
+        </p:txBody>
+      </p:sp>
+      <p:sp>
+        <p:nvSpPr>
+          <p:cNvPr id="128" name="TextBox 127"/>
+          <p:cNvSpPr txBox="1"/>
+          <p:nvPr/>
+        </p:nvSpPr>
+        <p:spPr>
+          <a:xfrm>
+            <a:off x="8723376" y="3730752"/>
+            <a:ext cx="219456" cy="219456"/>
+          </a:xfrm>
+          <a:prstGeom prst="rect">
+            <a:avLst/>
+          </a:prstGeom>
+          <a:noFill/>
+        </p:spPr>
+        <p:txBody>
+          <a:bodyPr wrap="none" lIns="0" rIns="0" tIns="0" bIns="0">
+            <a:spAutoFit/>
+          </a:bodyPr>
+          <a:lstStyle/>
+          <a:p>
+            <a:pPr algn="ctr">
+              <a:defRPr sz="950" b="0">
+                <a:solidFill>
+                  <a:srgbClr val="787878"/>
+                </a:solidFill>
+                <a:latin typeface="Arial"/>
+              </a:defRPr>
+            </a:pPr>
+            <a:r>
+              <a:t>🏪</a:t>
+            </a:r>
+          </a:p>
+        </p:txBody>
+      </p:sp>
+      <p:sp>
+        <p:nvSpPr>
+          <p:cNvPr id="129" name="Oval 128"/>
+          <p:cNvSpPr/>
+          <p:nvPr/>
+        </p:nvSpPr>
+        <p:spPr>
+          <a:xfrm>
+            <a:off x="6144768" y="4123944"/>
+            <a:ext cx="219456" cy="219456"/>
+          </a:xfrm>
+          <a:prstGeom prst="ellipse">
+            <a:avLst/>
+          </a:prstGeom>
+          <a:solidFill>
+            <a:srgbClr val="FFFFFF"/>
+          </a:solidFill>
+          <a:ln w="12700">
+            <a:solidFill>
+              <a:srgbClr val="ED1D24"/>
+            </a:solidFill>
+          </a:ln>
+        </p:spPr>
+        <p:style>
+          <a:lnRef idx="1">
+            <a:schemeClr val="accent1"/>
+          </a:lnRef>
+          <a:fillRef idx="3">
+            <a:schemeClr val="accent1"/>
+          </a:fillRef>
+          <a:effectRef idx="2">
+            <a:schemeClr val="accent1"/>
+          </a:effectRef>
+          <a:fontRef idx="minor">
+            <a:schemeClr val="lt1"/>
+          </a:fontRef>
+        </p:style>
+        <p:txBody>
+          <a:bodyPr rtlCol="0" anchor="ctr" lIns="0" rIns="0" tIns="0" bIns="0"/>
+          <a:lstStyle/>
+          <a:p>
+            <a:pPr algn="ctr">
+              <a:defRPr sz="800" b="1">
+                <a:solidFill>
+                  <a:srgbClr val="ED1D24"/>
+                </a:solidFill>
+                <a:latin typeface="Calibri"/>
+              </a:defRPr>
+            </a:pPr>
+            <a:r>
+              <a:t>A</a:t>
+            </a:r>
+          </a:p>
+        </p:txBody>
+      </p:sp>
+      <p:sp>
+        <p:nvSpPr>
+          <p:cNvPr id="130" name="TextBox 129"/>
+          <p:cNvSpPr txBox="1"/>
+          <p:nvPr/>
+        </p:nvSpPr>
+        <p:spPr>
+          <a:xfrm>
+            <a:off x="6419088" y="4096512"/>
+            <a:ext cx="2267712" cy="329184"/>
+          </a:xfrm>
+          <a:prstGeom prst="rect">
+            <a:avLst/>
+          </a:prstGeom>
+          <a:noFill/>
+        </p:spPr>
+        <p:txBody>
+          <a:bodyPr wrap="square" lIns="0" rIns="0" tIns="0" bIns="0">
+            <a:spAutoFit/>
+          </a:bodyPr>
+          <a:lstStyle/>
+          <a:p>
+            <a:pPr>
+              <a:defRPr sz="650" b="1">
+                <a:solidFill>
+                  <a:srgbClr val="212121"/>
+                </a:solidFill>
+                <a:latin typeface="Arial"/>
+              </a:defRPr>
+            </a:pPr>
+            <a:r>
+              <a:t>ANIKA · 24 · Metro · Digital-first, prepaid</a:t>
+            </a:r>
+          </a:p>
+          <a:p>
+            <a:pPr>
+              <a:defRPr sz="650" b="0" i="1">
+                <a:solidFill>
+                  <a:srgbClr val="212121"/>
+                </a:solidFill>
+                <a:latin typeface="Arial"/>
+              </a:defRPr>
+            </a:pPr>
+            <a:r>
+              <a:t>"I compare four apps before I commit to one."</a:t>
+            </a:r>
+          </a:p>
+        </p:txBody>
+      </p:sp>
+      <p:sp>
+        <p:nvSpPr>
+          <p:cNvPr id="131" name="TextBox 130"/>
+          <p:cNvSpPr txBox="1"/>
+          <p:nvPr/>
+        </p:nvSpPr>
+        <p:spPr>
+          <a:xfrm>
+            <a:off x="8723376" y="4114800"/>
+            <a:ext cx="219456" cy="219456"/>
+          </a:xfrm>
+          <a:prstGeom prst="rect">
+            <a:avLst/>
+          </a:prstGeom>
+          <a:noFill/>
+        </p:spPr>
+        <p:txBody>
+          <a:bodyPr wrap="none" lIns="0" rIns="0" tIns="0" bIns="0">
+            <a:spAutoFit/>
+          </a:bodyPr>
+          <a:lstStyle/>
+          <a:p>
+            <a:pPr algn="ctr">
+              <a:defRPr sz="950" b="0">
+                <a:solidFill>
+                  <a:srgbClr val="787878"/>
+                </a:solidFill>
+                <a:latin typeface="Arial"/>
+              </a:defRPr>
+            </a:pPr>
+            <a:r>
+              <a:t>📱</a:t>
+            </a:r>
+          </a:p>
+        </p:txBody>
+      </p:sp>
+      <p:sp>
+        <p:nvSpPr>
+          <p:cNvPr id="132" name="TextBox 131"/>
+          <p:cNvSpPr txBox="1"/>
+          <p:nvPr/>
+        </p:nvSpPr>
+        <p:spPr>
+          <a:xfrm>
+            <a:off x="6144768" y="4517136"/>
+            <a:ext cx="2816352" cy="109728"/>
+          </a:xfrm>
+          <a:prstGeom prst="rect">
+            <a:avLst/>
+          </a:prstGeom>
+          <a:noFill/>
+        </p:spPr>
+        <p:txBody>
+          <a:bodyPr wrap="none" lIns="0" rIns="0" tIns="0" bIns="0">
+            <a:spAutoFit/>
+          </a:bodyPr>
+          <a:lstStyle/>
+          <a:p>
+            <a:pPr>
+              <a:defRPr sz="550" b="0" i="1">
+                <a:solidFill>
+                  <a:srgbClr val="787878"/>
+                </a:solidFill>
+                <a:latin typeface="Arial"/>
+              </a:defRPr>
+            </a:pPr>
+            <a:r>
+              <a:t>Src: synthesised from Appendix 2 + primary survey</a:t>
+            </a:r>
+          </a:p>
+        </p:txBody>
+      </p:sp>
+    </p:spTree>
+  </p:cSld>
+  <p:clrMapOvr>
+    <a:masterClrMapping/>
+  </p:clrMapOvr>
+</p:sld>
+</file>
+
+<file path=ppt/slides/slide3.xml><?xml version="1.0" encoding="utf-8"?>
+<p:sld xmlns:a="http://schemas.openxmlformats.org/drawingml/2006/main" xmlns:r="http://schemas.openxmlformats.org/officeDocument/2006/relationships" xmlns:p="http://schemas.openxmlformats.org/presentationml/2006/main">
+  <p:cSld>
+    <p:spTree>
+      <p:nvGrpSpPr>
+        <p:cNvPr id="1" name=""/>
+        <p:cNvGrpSpPr/>
+        <p:nvPr/>
+      </p:nvGrpSpPr>
+      <p:grpSpPr>
+        <a:xfrm>
+          <a:off x="0" y="0"/>
+          <a:ext cx="0" cy="0"/>
+          <a:chOff x="0" y="0"/>
+          <a:chExt cx="0" cy="0"/>
+        </a:xfrm>
+      </p:grpSpPr>
+      <p:sp>
+        <p:nvSpPr>
+          <p:cNvPr id="2" name="Title 1"/>
+          <p:cNvSpPr>
+            <a:spLocks noGrp="1"/>
+          </p:cNvSpPr>
+          <p:nvPr>
+            <p:ph type="title"/>
+          </p:nvPr>
+        </p:nvSpPr>
+        <p:spPr/>
+        <p:txBody>
+          <a:bodyPr/>
+          <a:lstStyle/>
+          <a:p>
+            <a:endParaRPr/>
+          </a:p>
+        </p:txBody>
+      </p:sp>
+      <p:pic>
+        <p:nvPicPr>
+          <p:cNvPr id="3" name="Picture 2" descr="image.jpg"/>
+          <p:cNvPicPr>
+            <a:picLocks noChangeAspect="1"/>
+          </p:cNvPicPr>
+          <p:nvPr/>
+        </p:nvPicPr>
+        <p:blipFill>
+          <a:blip r:embed="rId2"/>
+          <a:stretch>
+            <a:fillRect/>
+          </a:stretch>
+        </p:blipFill>
+        <p:spPr>
+          <a:xfrm>
+            <a:off x="1" y="0"/>
+            <a:ext cx="9144000" cy="5143500"/>
+          </a:xfrm>
+          <a:prstGeom prst="rect">
+            <a:avLst/>
+          </a:prstGeom>
+        </p:spPr>
+      </p:pic>
+      <p:sp>
+        <p:nvSpPr>
+          <p:cNvPr id="4" name="TextBox 3"/>
+          <p:cNvSpPr txBox="1"/>
+          <p:nvPr/>
+        </p:nvSpPr>
+        <p:spPr>
+          <a:xfrm>
+            <a:off x="424150" y="579597"/>
+            <a:ext cx="8229600" cy="731520"/>
+          </a:xfrm>
+          <a:prstGeom prst="rect">
+            <a:avLst/>
+          </a:prstGeom>
+          <a:noFill/>
+        </p:spPr>
+        <p:txBody>
+          <a:bodyPr wrap="square" lIns="0" tIns="0">
+            <a:spAutoFit/>
+          </a:bodyPr>
+          <a:lstStyle/>
+          <a:p>
+            <a:pPr>
+              <a:defRPr sz="2100" b="1">
+                <a:solidFill>
+                  <a:srgbClr val="ED1D24"/>
+                </a:solidFill>
+                <a:latin typeface="Arial"/>
+              </a:defRPr>
+            </a:pPr>
+            <a:r>
+              <a:rPr dirty="0"/>
+              <a:t>Annexure 1: Primary Research &amp; Conjoint Choice Cards</a:t>
+            </a:r>
+          </a:p>
+        </p:txBody>
+      </p:sp>
+      <p:sp>
+        <p:nvSpPr>
+          <p:cNvPr id="5" name="TextBox 4"/>
+          <p:cNvSpPr txBox="1"/>
+          <p:nvPr/>
+        </p:nvSpPr>
+        <p:spPr>
+          <a:xfrm>
+            <a:off x="457200" y="1005840"/>
+            <a:ext cx="3840480" cy="3657600"/>
+          </a:xfrm>
+          <a:prstGeom prst="rect">
+            <a:avLst/>
+          </a:prstGeom>
+          <a:noFill/>
+        </p:spPr>
+        <p:txBody>
+          <a:bodyPr wrap="square" lIns="0" tIns="0">
+            <a:spAutoFit/>
+          </a:bodyPr>
+          <a:lstStyle/>
+          <a:p>
+            <a:pPr>
+              <a:spcAft>
+                <a:spcPts val="800"/>
+              </a:spcAft>
+              <a:defRPr sz="1300" b="1">
+                <a:solidFill>
+                  <a:srgbClr val="0F121C"/>
+                </a:solidFill>
+                <a:latin typeface="Arial"/>
+              </a:defRPr>
+            </a:pPr>
+            <a:r>
+              <a:t>Research Methodology &amp; Conjoint Analysis</a:t>
+            </a:r>
+          </a:p>
+          <a:p>
+            <a:pPr>
+              <a:spcAft>
+                <a:spcPts val="600"/>
+              </a:spcAft>
+              <a:defRPr sz="950" b="0">
+                <a:solidFill>
+                  <a:srgbClr val="212121"/>
+                </a:solidFill>
+                <a:latin typeface="Arial"/>
+              </a:defRPr>
+            </a:pPr>
+            <a:r>
+              <a:t>• Conjoint Setup: We deployed 4 binary choice questions directly comparing individual utilities vs. their bundled Altura Home counterparts (Choice Card Starter, Connect, Family Secure, and Infinite).</a:t>
+            </a:r>
+          </a:p>
+          <a:p>
+            <a:pPr>
+              <a:spcAft>
+                <a:spcPts val="600"/>
+              </a:spcAft>
+              <a:defRPr sz="950" b="0">
+                <a:solidFill>
+                  <a:srgbClr val="212121"/>
+                </a:solidFill>
+                <a:latin typeface="Arial"/>
+              </a:defRPr>
+            </a:pPr>
+            <a:r>
+              <a:t>• Goal: This Discrete Choice Conjoint Experiment isolates exactly where price sensitivity breaks and maps household utility values.</a:t>
+            </a:r>
+          </a:p>
+          <a:p>
+            <a:pPr>
+              <a:spcAft>
+                <a:spcPts val="600"/>
+              </a:spcAft>
+              <a:defRPr sz="950" b="0">
+                <a:solidFill>
+                  <a:srgbClr val="212121"/>
+                </a:solidFill>
+                <a:latin typeface="Arial"/>
+              </a:defRPr>
+            </a:pPr>
+            <a:r>
+              <a:t>• Quantifying SPOF: Our survey includes agree/disagree statements to map network reliability concerns and data privacy barriers.</a:t>
+            </a:r>
+          </a:p>
+          <a:p>
+            <a:pPr>
+              <a:spcAft>
+                <a:spcPts val="600"/>
+              </a:spcAft>
+              <a:defRPr sz="950" b="0">
+                <a:solidFill>
+                  <a:srgbClr val="212121"/>
+                </a:solidFill>
+                <a:latin typeface="Arial"/>
+              </a:defRPr>
+            </a:pPr>
+            <a:r>
+              <a:t>• Uploading Cards: The generated card graphics (pictured right) help respondents visually compare price-to-benefit ratios.</a:t>
+            </a:r>
+          </a:p>
+        </p:txBody>
+      </p:sp>
+      <p:pic>
+        <p:nvPicPr>
+          <p:cNvPr id="6" name="Picture 5" descr="choice_card_family.jpg"/>
+          <p:cNvPicPr>
+            <a:picLocks noChangeAspect="1"/>
+          </p:cNvPicPr>
+          <p:nvPr/>
+        </p:nvPicPr>
+        <p:blipFill>
+          <a:blip r:embed="rId3"/>
+          <a:stretch>
+            <a:fillRect/>
+          </a:stretch>
+        </p:blipFill>
+        <p:spPr>
+          <a:xfrm>
+            <a:off x="4572000" y="1188720"/>
+            <a:ext cx="4114800" cy="3086100"/>
+          </a:xfrm>
+          <a:prstGeom prst="rect">
+            <a:avLst/>
+          </a:prstGeom>
+        </p:spPr>
+      </p:pic>
     </p:spTree>
   </p:cSld>
   <p:clrMapOvr>
@@ -6963,149 +10101,9 @@
           </a:prstGeom>
         </p:spPr>
       </p:pic>
-      <p:sp>
-        <p:nvSpPr>
-          <p:cNvPr id="4" name="TextBox 3"/>
-          <p:cNvSpPr txBox="1"/>
-          <p:nvPr/>
-        </p:nvSpPr>
-        <p:spPr>
-          <a:xfrm>
-            <a:off x="424150" y="579597"/>
-            <a:ext cx="8229600" cy="731520"/>
-          </a:xfrm>
-          <a:prstGeom prst="rect">
-            <a:avLst/>
-          </a:prstGeom>
-          <a:noFill/>
-        </p:spPr>
-        <p:txBody>
-          <a:bodyPr wrap="square" lIns="0" tIns="0">
-            <a:spAutoFit/>
-          </a:bodyPr>
-          <a:lstStyle/>
-          <a:p>
-            <a:pPr>
-              <a:defRPr sz="2100" b="1">
-                <a:solidFill>
-                  <a:srgbClr val="ED1D24"/>
-                </a:solidFill>
-                <a:latin typeface="Arial"/>
-              </a:defRPr>
-            </a:pPr>
-            <a:r>
-              <a:rPr dirty="0"/>
-              <a:t>Annexure 1: Primary Research &amp; Conjoint Choice Cards</a:t>
-            </a:r>
-          </a:p>
-        </p:txBody>
-      </p:sp>
-      <p:sp>
-        <p:nvSpPr>
-          <p:cNvPr id="5" name="TextBox 4"/>
-          <p:cNvSpPr txBox="1"/>
-          <p:nvPr/>
-        </p:nvSpPr>
-        <p:spPr>
-          <a:xfrm>
-            <a:off x="457200" y="1005840"/>
-            <a:ext cx="3840480" cy="3657600"/>
-          </a:xfrm>
-          <a:prstGeom prst="rect">
-            <a:avLst/>
-          </a:prstGeom>
-          <a:noFill/>
-        </p:spPr>
-        <p:txBody>
-          <a:bodyPr wrap="square" lIns="0" tIns="0">
-            <a:spAutoFit/>
-          </a:bodyPr>
-          <a:lstStyle/>
-          <a:p>
-            <a:pPr>
-              <a:spcAft>
-                <a:spcPts val="800"/>
-              </a:spcAft>
-              <a:defRPr sz="1300" b="1">
-                <a:solidFill>
-                  <a:srgbClr val="0F121C"/>
-                </a:solidFill>
-                <a:latin typeface="Arial"/>
-              </a:defRPr>
-            </a:pPr>
-            <a:r>
-              <a:t>Research Methodology &amp; Conjoint Analysis</a:t>
-            </a:r>
-          </a:p>
-          <a:p>
-            <a:pPr>
-              <a:spcAft>
-                <a:spcPts val="600"/>
-              </a:spcAft>
-              <a:defRPr sz="950" b="0">
-                <a:solidFill>
-                  <a:srgbClr val="212121"/>
-                </a:solidFill>
-                <a:latin typeface="Arial"/>
-              </a:defRPr>
-            </a:pPr>
-            <a:r>
-              <a:t>• Conjoint Setup: We deployed 4 binary choice questions directly comparing individual utilities vs. their bundled Altura Home counterparts (Choice Card Starter, Connect, Family Secure, and Infinite).</a:t>
-            </a:r>
-          </a:p>
-          <a:p>
-            <a:pPr>
-              <a:spcAft>
-                <a:spcPts val="600"/>
-              </a:spcAft>
-              <a:defRPr sz="950" b="0">
-                <a:solidFill>
-                  <a:srgbClr val="212121"/>
-                </a:solidFill>
-                <a:latin typeface="Arial"/>
-              </a:defRPr>
-            </a:pPr>
-            <a:r>
-              <a:t>• Goal: This Discrete Choice Conjoint Experiment isolates exactly where price sensitivity breaks and maps household utility values.</a:t>
-            </a:r>
-          </a:p>
-          <a:p>
-            <a:pPr>
-              <a:spcAft>
-                <a:spcPts val="600"/>
-              </a:spcAft>
-              <a:defRPr sz="950" b="0">
-                <a:solidFill>
-                  <a:srgbClr val="212121"/>
-                </a:solidFill>
-                <a:latin typeface="Arial"/>
-              </a:defRPr>
-            </a:pPr>
-            <a:r>
-              <a:t>• Quantifying SPOF: Our survey includes agree/disagree statements to map network reliability concerns and data privacy barriers.</a:t>
-            </a:r>
-          </a:p>
-          <a:p>
-            <a:pPr>
-              <a:spcAft>
-                <a:spcPts val="600"/>
-              </a:spcAft>
-              <a:defRPr sz="950" b="0">
-                <a:solidFill>
-                  <a:srgbClr val="212121"/>
-                </a:solidFill>
-                <a:latin typeface="Arial"/>
-              </a:defRPr>
-            </a:pPr>
-            <a:r>
-              <a:t>• Uploading Cards: The generated card graphics (pictured right) help respondents visually compare price-to-benefit ratios.</a:t>
-            </a:r>
-          </a:p>
-        </p:txBody>
-      </p:sp>
       <p:pic>
         <p:nvPicPr>
-          <p:cNvPr id="6" name="Picture 5" descr="choice_card_family.jpg"/>
+          <p:cNvPr id="6" name="Picture 5" descr="bundle_choice_card.jpg"/>
           <p:cNvPicPr>
             <a:picLocks noChangeAspect="1"/>
           </p:cNvPicPr>
@@ -7125,6 +10123,236 @@
           <a:prstGeom prst="rect">
             <a:avLst/>
           </a:prstGeom>
+        </p:spPr>
+      </p:pic>
+      <p:sp>
+        <p:nvSpPr>
+          <p:cNvPr id="7" name="TextBox 6"/>
+          <p:cNvSpPr txBox="1"/>
+          <p:nvPr/>
+        </p:nvSpPr>
+        <p:spPr>
+          <a:xfrm>
+            <a:off x="457200" y="182880"/>
+            <a:ext cx="8229600" cy="731520"/>
+          </a:xfrm>
+          <a:prstGeom prst="rect">
+            <a:avLst/>
+          </a:prstGeom>
+          <a:noFill/>
+        </p:spPr>
+        <p:txBody>
+          <a:bodyPr wrap="square" lIns="0" tIns="0">
+            <a:spAutoFit/>
+          </a:bodyPr>
+          <a:lstStyle/>
+          <a:p>
+            <a:pPr>
+              <a:defRPr sz="2100" b="1">
+                <a:solidFill>
+                  <a:srgbClr val="ED1D24"/>
+                </a:solidFill>
+                <a:latin typeface="Calibri"/>
+              </a:defRPr>
+            </a:pPr>
+            <a:r>
+              <a:t>Annexure 1: Primary Research &amp; Conjoint Choice Cards</a:t>
+            </a:r>
+          </a:p>
+        </p:txBody>
+      </p:sp>
+      <p:sp>
+        <p:nvSpPr>
+          <p:cNvPr id="8" name="Rounded Rectangle 7"/>
+          <p:cNvSpPr/>
+          <p:nvPr/>
+        </p:nvSpPr>
+        <p:spPr>
+          <a:xfrm>
+            <a:off x="457200" y="1005840"/>
+            <a:ext cx="3840480" cy="3657600"/>
+          </a:xfrm>
+          <a:prstGeom prst="roundRect">
+            <a:avLst/>
+          </a:prstGeom>
+          <a:solidFill>
+            <a:srgbClr val="F8F9FA"/>
+          </a:solidFill>
+          <a:ln w="12700">
+            <a:solidFill>
+              <a:srgbClr val="E4E6EB"/>
+            </a:solidFill>
+          </a:ln>
+        </p:spPr>
+        <p:style>
+          <a:lnRef idx="1">
+            <a:schemeClr val="accent1"/>
+          </a:lnRef>
+          <a:fillRef idx="3">
+            <a:schemeClr val="accent1"/>
+          </a:fillRef>
+          <a:effectRef idx="2">
+            <a:schemeClr val="accent1"/>
+          </a:effectRef>
+          <a:fontRef idx="minor">
+            <a:schemeClr val="lt1"/>
+          </a:fontRef>
+        </p:style>
+        <p:txBody>
+          <a:bodyPr rtlCol="0" anchor="t" wrap="square" lIns="137160" rIns="137160" tIns="164592" bIns="137160"/>
+          <a:lstStyle/>
+          <a:p>
+            <a:pPr algn="ctr">
+              <a:spcAft>
+                <a:spcPts val="800"/>
+              </a:spcAft>
+              <a:defRPr sz="1300" b="1">
+                <a:solidFill>
+                  <a:srgbClr val="0F121C"/>
+                </a:solidFill>
+                <a:latin typeface="Calibri"/>
+              </a:defRPr>
+            </a:pPr>
+            <a:r>
+              <a:t>Research Methodology &amp; Conjoint Analysis</a:t>
+            </a:r>
+          </a:p>
+          <a:p>
+            <a:pPr>
+              <a:spcAft>
+                <a:spcPts val="500"/>
+              </a:spcAft>
+              <a:defRPr sz="880" b="0">
+                <a:solidFill>
+                  <a:srgbClr val="212121"/>
+                </a:solidFill>
+                <a:latin typeface="Arial"/>
+              </a:defRPr>
+            </a:pPr>
+            <a:r>
+              <a:t>• Conjoint Setup: We deployed 4 binary choice questions directly comparing individual utilities vs. their bundled Altura Home counterparts (Choice Card Starter, Connect, Family Secure, and Infinite).</a:t>
+            </a:r>
+          </a:p>
+          <a:p>
+            <a:pPr>
+              <a:spcAft>
+                <a:spcPts val="500"/>
+              </a:spcAft>
+              <a:defRPr sz="880" b="0">
+                <a:solidFill>
+                  <a:srgbClr val="212121"/>
+                </a:solidFill>
+                <a:latin typeface="Arial"/>
+              </a:defRPr>
+            </a:pPr>
+            <a:r>
+              <a:t>• Goal: This Discrete Choice Conjoint Experiment isolates exactly where price sensitivity breaks and maps household utility values.</a:t>
+            </a:r>
+          </a:p>
+          <a:p>
+            <a:pPr>
+              <a:spcAft>
+                <a:spcPts val="500"/>
+              </a:spcAft>
+              <a:defRPr sz="880" b="0">
+                <a:solidFill>
+                  <a:srgbClr val="212121"/>
+                </a:solidFill>
+                <a:latin typeface="Arial"/>
+              </a:defRPr>
+            </a:pPr>
+            <a:r>
+              <a:t>• Quantifying SPOF: Our survey includes agree/disagree statements to map network reliability concerns and data privacy barriers.</a:t>
+            </a:r>
+          </a:p>
+          <a:p>
+            <a:pPr>
+              <a:spcAft>
+                <a:spcPts val="500"/>
+              </a:spcAft>
+              <a:defRPr sz="880" b="0">
+                <a:solidFill>
+                  <a:srgbClr val="212121"/>
+                </a:solidFill>
+                <a:latin typeface="Arial"/>
+              </a:defRPr>
+            </a:pPr>
+            <a:r>
+              <a:t>• Uploading Cards: The generated card graphics (pictured right) help respondents visually compare price-to-benefit ratios.</a:t>
+            </a:r>
+          </a:p>
+        </p:txBody>
+      </p:sp>
+      <p:sp>
+        <p:nvSpPr>
+          <p:cNvPr id="9" name="Rectangle 8"/>
+          <p:cNvSpPr/>
+          <p:nvPr/>
+        </p:nvSpPr>
+        <p:spPr>
+          <a:xfrm>
+            <a:off x="502920" y="1005840"/>
+            <a:ext cx="3749040" cy="73152"/>
+          </a:xfrm>
+          <a:prstGeom prst="rect">
+            <a:avLst/>
+          </a:prstGeom>
+          <a:solidFill>
+            <a:srgbClr val="0F121C"/>
+          </a:solidFill>
+          <a:ln>
+            <a:noFill/>
+          </a:ln>
+        </p:spPr>
+        <p:style>
+          <a:lnRef idx="1">
+            <a:schemeClr val="accent1"/>
+          </a:lnRef>
+          <a:fillRef idx="3">
+            <a:schemeClr val="accent1"/>
+          </a:fillRef>
+          <a:effectRef idx="2">
+            <a:schemeClr val="accent1"/>
+          </a:effectRef>
+          <a:fontRef idx="minor">
+            <a:schemeClr val="lt1"/>
+          </a:fontRef>
+        </p:style>
+        <p:txBody>
+          <a:bodyPr rtlCol="0" anchor="ctr"/>
+          <a:lstStyle/>
+          <a:p>
+            <a:pPr algn="ctr"/>
+          </a:p>
+        </p:txBody>
+      </p:sp>
+      <p:pic>
+        <p:nvPicPr>
+          <p:cNvPr id="10" name="Picture 9" descr="image.jpg"/>
+          <p:cNvPicPr>
+            <a:picLocks noChangeAspect="1"/>
+          </p:cNvPicPr>
+          <p:nvPr/>
+        </p:nvPicPr>
+        <p:blipFill>
+          <a:blip r:embed="rId4"/>
+          <a:stretch>
+            <a:fillRect/>
+          </a:stretch>
+        </p:blipFill>
+        <p:spPr>
+          <a:xfrm>
+            <a:off x="4572000" y="1188720"/>
+            <a:ext cx="4114800" cy="3086100"/>
+          </a:xfrm>
+          <a:prstGeom prst="rect">
+            <a:avLst/>
+          </a:prstGeom>
+          <a:ln w="12700">
+            <a:solidFill>
+              <a:srgbClr val="E4E6EB"/>
+            </a:solidFill>
+          </a:ln>
         </p:spPr>
       </p:pic>
     </p:spTree>
@@ -7195,33 +10423,9 @@
           </a:prstGeom>
         </p:spPr>
       </p:pic>
-      <p:pic>
-        <p:nvPicPr>
-          <p:cNvPr id="6" name="Picture 5" descr="bundle_choice_card.jpg"/>
-          <p:cNvPicPr>
-            <a:picLocks noChangeAspect="1"/>
-          </p:cNvPicPr>
-          <p:nvPr/>
-        </p:nvPicPr>
-        <p:blipFill>
-          <a:blip r:embed="rId3"/>
-          <a:stretch>
-            <a:fillRect/>
-          </a:stretch>
-        </p:blipFill>
-        <p:spPr>
-          <a:xfrm>
-            <a:off x="4572000" y="1188720"/>
-            <a:ext cx="4114800" cy="3086100"/>
-          </a:xfrm>
-          <a:prstGeom prst="rect">
-            <a:avLst/>
-          </a:prstGeom>
-        </p:spPr>
-      </p:pic>
-      <p:sp>
-        <p:nvSpPr>
-          <p:cNvPr id="7" name="TextBox 6"/>
+      <p:sp>
+        <p:nvSpPr>
+          <p:cNvPr id="4" name="TextBox 3"/>
           <p:cNvSpPr txBox="1"/>
           <p:nvPr/>
         </p:nvSpPr>
@@ -7250,14 +10454,14 @@
               </a:defRPr>
             </a:pPr>
             <a:r>
-              <a:t>Annexure 1: Primary Research &amp; Conjoint Choice Cards</a:t>
-            </a:r>
-          </a:p>
-        </p:txBody>
-      </p:sp>
-      <p:sp>
-        <p:nvSpPr>
-          <p:cNvPr id="8" name="Rounded Rectangle 7"/>
+              <a:t>Annexure 2: Inbound Customer Portal &amp; Choice Matrices</a:t>
+            </a:r>
+          </a:p>
+        </p:txBody>
+      </p:sp>
+      <p:sp>
+        <p:nvSpPr>
+          <p:cNvPr id="5" name="Rounded Rectangle 4"/>
           <p:cNvSpPr/>
           <p:nvPr/>
         </p:nvSpPr>
@@ -7308,7 +10512,7 @@
               </a:defRPr>
             </a:pPr>
             <a:r>
-              <a:t>Research Methodology &amp; Conjoint Analysis</a:t>
+              <a:t>Digitizing the Onboarding Funnel</a:t>
             </a:r>
           </a:p>
           <a:p>
@@ -7324,7 +10528,7 @@
               </a:defRPr>
             </a:pPr>
             <a:r>
-              <a:t>• Conjoint Setup: We deployed 4 binary choice questions directly comparing individual utilities vs. their bundled Altura Home counterparts (Choice Card Starter, Connect, Family Secure, and Infinite).</a:t>
+              <a:t>• Website Re-architecting: Designed a premium tab-based structure instead of long scroll sheets, streamlining categories for different household priorities.</a:t>
             </a:r>
           </a:p>
           <a:p>
@@ -7340,7 +10544,7 @@
               </a:defRPr>
             </a:pPr>
             <a:r>
-              <a:t>• Goal: This Discrete Choice Conjoint Experiment isolates exactly where price sensitivity breaks and maps household utility values.</a:t>
+              <a:t>• AirBot Integration: AirBot acts as a frictionless digital concierge. It replaces standard sales pitch dialogue with multi-select service checklists and contextual profiling.</a:t>
             </a:r>
           </a:p>
           <a:p>
@@ -7356,30 +10560,14 @@
               </a:defRPr>
             </a:pPr>
             <a:r>
-              <a:t>• Quantifying SPOF: Our survey includes agree/disagree statements to map network reliability concerns and data privacy barriers.</a:t>
-            </a:r>
-          </a:p>
-          <a:p>
-            <a:pPr>
-              <a:spcAft>
-                <a:spcPts val="500"/>
-              </a:spcAft>
-              <a:defRPr sz="880" b="0">
-                <a:solidFill>
-                  <a:srgbClr val="212121"/>
-                </a:solidFill>
-                <a:latin typeface="Arial"/>
-              </a:defRPr>
-            </a:pPr>
-            <a:r>
-              <a:t>• Uploading Cards: The generated card graphics (pictured right) help respondents visually compare price-to-benefit ratios.</a:t>
-            </a:r>
-          </a:p>
-        </p:txBody>
-      </p:sp>
-      <p:sp>
-        <p:nvSpPr>
-          <p:cNvPr id="9" name="Rectangle 8"/>
+              <a:t>• Autopay &amp; Coin Loops: The online checkout dynamically demonstrates monthly savings (₹50 discount) and Thanks Coins loyalty accumulation to increase signup rates.</a:t>
+            </a:r>
+          </a:p>
+        </p:txBody>
+      </p:sp>
+      <p:sp>
+        <p:nvSpPr>
+          <p:cNvPr id="6" name="Rectangle 5"/>
           <p:cNvSpPr/>
           <p:nvPr/>
         </p:nvSpPr>
@@ -7392,7 +10580,7 @@
             <a:avLst/>
           </a:prstGeom>
           <a:solidFill>
-            <a:srgbClr val="0F121C"/>
+            <a:srgbClr val="3498DB"/>
           </a:solidFill>
           <a:ln>
             <a:noFill/>
@@ -7422,14 +10610,14 @@
       </p:sp>
       <p:pic>
         <p:nvPicPr>
-          <p:cNvPr id="10" name="Picture 9" descr="image.jpg"/>
+          <p:cNvPr id="7" name="Picture 6" descr="image.jpg"/>
           <p:cNvPicPr>
             <a:picLocks noChangeAspect="1"/>
           </p:cNvPicPr>
           <p:nvPr/>
         </p:nvPicPr>
         <p:blipFill>
-          <a:blip r:embed="rId4"/>
+          <a:blip r:embed="rId3"/>
           <a:stretch>
             <a:fillRect/>
           </a:stretch>
@@ -7548,7 +10736,7 @@
               </a:defRPr>
             </a:pPr>
             <a:r>
-              <a:t>Annexure 2: Inbound Customer Portal &amp; Choice Matrices</a:t>
+              <a:t>Annexure 3: Data-Driven Target Cohorts &amp; Economics</a:t>
             </a:r>
           </a:p>
         </p:txBody>
@@ -7562,7 +10750,7 @@
         <p:spPr>
           <a:xfrm>
             <a:off x="457200" y="1005840"/>
-            <a:ext cx="3840480" cy="3657600"/>
+            <a:ext cx="8229600" cy="3657600"/>
           </a:xfrm>
           <a:prstGeom prst="roundRect">
             <a:avLst/>
@@ -7606,15 +10794,15 @@
               </a:defRPr>
             </a:pPr>
             <a:r>
-              <a:t>Digitizing the Onboarding Funnel</a:t>
+              <a:t>AI-Targeted Cross-Sell Opportunities (Exhibits 4 &amp; 5)</a:t>
             </a:r>
           </a:p>
           <a:p>
             <a:pPr>
               <a:spcAft>
-                <a:spcPts val="500"/>
-              </a:spcAft>
-              <a:defRPr sz="880" b="0">
+                <a:spcPts val="600"/>
+              </a:spcAft>
+              <a:defRPr sz="900" b="0">
                 <a:solidFill>
                   <a:srgbClr val="212121"/>
                 </a:solidFill>
@@ -7622,15 +10810,15 @@
               </a:defRPr>
             </a:pPr>
             <a:r>
-              <a:t>• Website Re-architecting: Designed a premium tab-based structure instead of long scroll sheets, streamlining categories for different household priorities.</a:t>
+              <a:t>• Cohort A: High-Intent Overlaps (2.5M Users): Target the 2.5 million households subscribing to both Broadband and DTH. Since they are already double-billed, they represent low-hanging fruit for the 'Connect' or 'Family Secure' bundles.</a:t>
             </a:r>
           </a:p>
           <a:p>
             <a:pPr>
               <a:spcAft>
-                <a:spcPts val="500"/>
-              </a:spcAft>
-              <a:defRPr sz="880" b="0">
+                <a:spcPts val="600"/>
+              </a:spcAft>
+              <a:defRPr sz="900" b="0">
                 <a:solidFill>
                   <a:srgbClr val="212121"/>
                 </a:solidFill>
@@ -7638,15 +10826,15 @@
               </a:defRPr>
             </a:pPr>
             <a:r>
-              <a:t>• AirBot Integration: AirBot acts as a frictionless digital concierge. It replaces standard sales pitch dialogue with multi-select service checklists and contextual profiling.</a:t>
+              <a:t>• Cohort B: DTH-Only Accounts (16M Users): DTH is expected to decline due to streaming (Exhibit 2). Transitioning these 16 million siloed accounts into converged Fiber+SIM+TV bundles saves them money while preventing DTH cord-cutting.</a:t>
             </a:r>
           </a:p>
           <a:p>
             <a:pPr>
               <a:spcAft>
-                <a:spcPts val="500"/>
-              </a:spcAft>
-              <a:defRPr sz="880" b="0">
+                <a:spcPts val="600"/>
+              </a:spcAft>
+              <a:defRPr sz="900" b="0">
                 <a:solidFill>
                   <a:srgbClr val="212121"/>
                 </a:solidFill>
@@ -7654,7 +10842,7 @@
               </a:defRPr>
             </a:pPr>
             <a:r>
-              <a:t>• Autopay &amp; Coin Loops: The online checkout dynamically demonstrates monthly savings (₹50 discount) and Thanks Coins loyalty accumulation to increase signup rates.</a:t>
+              <a:t>• Channel Optimization: Digital channel CAC is 50% lower than direct sales (Broadband: ₹220 vs ₹450), but direct sales secure higher Month-4 retention. We route online AirBot leads directly to concierge field technicians to optimize conversion.</a:t>
             </a:r>
           </a:p>
         </p:txBody>
@@ -7668,13 +10856,13 @@
         <p:spPr>
           <a:xfrm>
             <a:off x="502920" y="1005840"/>
-            <a:ext cx="3749040" cy="73152"/>
+            <a:ext cx="8138160" cy="73152"/>
           </a:xfrm>
           <a:prstGeom prst="rect">
             <a:avLst/>
           </a:prstGeom>
           <a:solidFill>
-            <a:srgbClr val="3498DB"/>
+            <a:srgbClr val="0F121C"/>
           </a:solidFill>
           <a:ln>
             <a:noFill/>
@@ -7702,35 +10890,6 @@
           </a:p>
         </p:txBody>
       </p:sp>
-      <p:pic>
-        <p:nvPicPr>
-          <p:cNvPr id="7" name="Picture 6" descr="image.jpg"/>
-          <p:cNvPicPr>
-            <a:picLocks noChangeAspect="1"/>
-          </p:cNvPicPr>
-          <p:nvPr/>
-        </p:nvPicPr>
-        <p:blipFill>
-          <a:blip r:embed="rId3"/>
-          <a:stretch>
-            <a:fillRect/>
-          </a:stretch>
-        </p:blipFill>
-        <p:spPr>
-          <a:xfrm>
-            <a:off x="4572000" y="1188720"/>
-            <a:ext cx="4114800" cy="3086100"/>
-          </a:xfrm>
-          <a:prstGeom prst="rect">
-            <a:avLst/>
-          </a:prstGeom>
-          <a:ln w="12700">
-            <a:solidFill>
-              <a:srgbClr val="E4E6EB"/>
-            </a:solidFill>
-          </a:ln>
-        </p:spPr>
-      </p:pic>
     </p:spTree>
   </p:cSld>
   <p:clrMapOvr>
@@ -7740,7 +10899,7 @@
 </file>
 
 <file path=ppt/slides/slide7.xml><?xml version="1.0" encoding="utf-8"?>
-<p:sld xmlns:a="http://schemas.openxmlformats.org/drawingml/2006/main" xmlns:r="http://schemas.openxmlformats.org/officeDocument/2006/relationships" xmlns:p="http://schemas.openxmlformats.org/presentationml/2006/main">
+<p:sld xmlns:a="http://schemas.openxmlformats.org/drawingml/2006/main" xmlns:p="http://schemas.openxmlformats.org/presentationml/2006/main" xmlns:r="http://schemas.openxmlformats.org/officeDocument/2006/relationships">
   <p:cSld>
     <p:spTree>
       <p:nvGrpSpPr>
@@ -7748,14 +10907,7 @@
         <p:cNvGrpSpPr/>
         <p:nvPr/>
       </p:nvGrpSpPr>
-      <p:grpSpPr>
-        <a:xfrm>
-          <a:off x="0" y="0"/>
-          <a:ext cx="0" cy="0"/>
-          <a:chOff x="0" y="0"/>
-          <a:chExt cx="0" cy="0"/>
-        </a:xfrm>
-      </p:grpSpPr>
+      <p:grpSpPr/>
       <p:sp>
         <p:nvSpPr>
           <p:cNvPr id="2" name="Title 1"/>
@@ -7770,9 +10922,7 @@
         <p:txBody>
           <a:bodyPr/>
           <a:lstStyle/>
-          <a:p>
-            <a:endParaRPr/>
-          </a:p>
+          <a:p/>
         </p:txBody>
       </p:sp>
       <p:pic>
@@ -7799,9 +10949,81 @@
           </a:prstGeom>
         </p:spPr>
       </p:pic>
-      <p:sp>
-        <p:nvSpPr>
-          <p:cNvPr id="4" name="TextBox 3"/>
+      <p:pic>
+        <p:nvPicPr>
+          <p:cNvPr id="6" name="Picture 5" descr="screenshot_airbot.png"/>
+          <p:cNvPicPr>
+            <a:picLocks noChangeAspect="1"/>
+          </p:cNvPicPr>
+          <p:nvPr/>
+        </p:nvPicPr>
+        <p:blipFill>
+          <a:blip r:embed="rId3"/>
+          <a:stretch>
+            <a:fillRect/>
+          </a:stretch>
+        </p:blipFill>
+        <p:spPr>
+          <a:xfrm>
+            <a:off x="4389120" y="1005840"/>
+            <a:ext cx="1005840" cy="1097280"/>
+          </a:xfrm>
+          <a:prstGeom prst="rect">
+            <a:avLst/>
+          </a:prstGeom>
+        </p:spPr>
+      </p:pic>
+      <p:pic>
+        <p:nvPicPr>
+          <p:cNvPr id="8" name="Picture 7" descr="screenshot_packages.png"/>
+          <p:cNvPicPr>
+            <a:picLocks noChangeAspect="1"/>
+          </p:cNvPicPr>
+          <p:nvPr/>
+        </p:nvPicPr>
+        <p:blipFill>
+          <a:blip r:embed="rId4"/>
+          <a:stretch>
+            <a:fillRect/>
+          </a:stretch>
+        </p:blipFill>
+        <p:spPr>
+          <a:xfrm>
+            <a:off x="4389120" y="2286000"/>
+            <a:ext cx="1828800" cy="1033271"/>
+          </a:xfrm>
+          <a:prstGeom prst="rect">
+            <a:avLst/>
+          </a:prstGeom>
+        </p:spPr>
+      </p:pic>
+      <p:pic>
+        <p:nvPicPr>
+          <p:cNvPr id="10" name="Picture 9" descr="screenshot_customizer.png"/>
+          <p:cNvPicPr>
+            <a:picLocks noChangeAspect="1"/>
+          </p:cNvPicPr>
+          <p:nvPr/>
+        </p:nvPicPr>
+        <p:blipFill>
+          <a:blip r:embed="rId5"/>
+          <a:stretch>
+            <a:fillRect/>
+          </a:stretch>
+        </p:blipFill>
+        <p:spPr>
+          <a:xfrm>
+            <a:off x="4389120" y="3474720"/>
+            <a:ext cx="1828800" cy="1033271"/>
+          </a:xfrm>
+          <a:prstGeom prst="rect">
+            <a:avLst/>
+          </a:prstGeom>
+        </p:spPr>
+      </p:pic>
+      <p:sp>
+        <p:nvSpPr>
+          <p:cNvPr id="11" name="TextBox 10"/>
           <p:cNvSpPr txBox="1"/>
           <p:nvPr/>
         </p:nvSpPr>
@@ -7830,14 +11052,14 @@
               </a:defRPr>
             </a:pPr>
             <a:r>
-              <a:t>Annexure 3: Data-Driven Target Cohorts &amp; Economics</a:t>
-            </a:r>
-          </a:p>
-        </p:txBody>
-      </p:sp>
-      <p:sp>
-        <p:nvSpPr>
-          <p:cNvPr id="5" name="Rounded Rectangle 4"/>
+              <a:t>Annexure 4: Bundle Pricing Model &amp; EBITDA Accretion</a:t>
+            </a:r>
+          </a:p>
+        </p:txBody>
+      </p:sp>
+      <p:sp>
+        <p:nvSpPr>
+          <p:cNvPr id="12" name="Rounded Rectangle 11"/>
           <p:cNvSpPr/>
           <p:nvPr/>
         </p:nvSpPr>
@@ -7888,7 +11110,7 @@
               </a:defRPr>
             </a:pPr>
             <a:r>
-              <a:t>AI-Targeted Cross-Sell Opportunities (Exhibits 4 &amp; 5)</a:t>
+              <a:t>Converged Pricing Sheets &amp; EBITDA Margins (Exhibits 1 &amp; 2)</a:t>
             </a:r>
           </a:p>
           <a:p>
@@ -7904,7 +11126,7 @@
               </a:defRPr>
             </a:pPr>
             <a:r>
-              <a:t>• Cohort A: High-Intent Overlaps (2.5M Users): Target the 2.5 million households subscribing to both Broadband and DTH. Since they are already double-billed, they represent low-hanging fruit for the 'Connect' or 'Family Secure' bundles.</a:t>
+              <a:t>• Individual vs. Bundle Price Matrix:</a:t>
             </a:r>
           </a:p>
           <a:p>
@@ -7920,7 +11142,7 @@
               </a:defRPr>
             </a:pPr>
             <a:r>
-              <a:t>• Cohort B: DTH-Only Accounts (16M Users): DTH is expected to decline due to streaming (Exhibit 2). Transitioning these 16 million siloed accounts into converged Fiber+SIM+TV bundles saves them money while preventing DTH cord-cutting.</a:t>
+              <a:t>   - Standalone Sum: Broadband (₹599) + 2 SIMs (₹700) + Xstream Box (₹250) + Google One (₹209) + Xsafe CCTV (₹150) + Bank (₹99) = ₹2,006/mo.</a:t>
             </a:r>
           </a:p>
           <a:p>
@@ -7936,14 +11158,46 @@
               </a:defRPr>
             </a:pPr>
             <a:r>
-              <a:t>• Channel Optimization: Digital channel CAC is 50% lower than direct sales (Broadband: ₹220 vs ₹450), but direct sales secure higher Month-4 retention. We route online AirBot leads directly to concierge field technicians to optimize conversion.</a:t>
-            </a:r>
-          </a:p>
-        </p:txBody>
-      </p:sp>
-      <p:sp>
-        <p:nvSpPr>
-          <p:cNvPr id="6" name="Rectangle 5"/>
+              <a:t>   - Consolidated Family Secure: ₹1,499/mo (Saves ₹507/mo or 25% discount). Promoted at ₹999/mo for the first 3 months to destroy switching inertia.</a:t>
+            </a:r>
+          </a:p>
+          <a:p>
+            <a:pPr>
+              <a:spcAft>
+                <a:spcPts val="600"/>
+              </a:spcAft>
+              <a:defRPr sz="900" b="0">
+                <a:solidFill>
+                  <a:srgbClr val="212121"/>
+                </a:solidFill>
+                <a:latin typeface="Arial"/>
+              </a:defRPr>
+            </a:pPr>
+            <a:r>
+              <a:t>• Margin Protection: Home Surveillance holds the highest EBITDA margin at 35% (Exhibit 1) and is growing at 35.7% CAGR (Exhibit 2). By bundling Xsafe cameras into Family Secure and Infinite tiers, we offset lower TV margins (12% EBITDA) and drive net margin expansion.</a:t>
+            </a:r>
+          </a:p>
+          <a:p>
+            <a:pPr>
+              <a:spcAft>
+                <a:spcPts val="600"/>
+              </a:spcAft>
+              <a:defRPr sz="900" b="0">
+                <a:solidFill>
+                  <a:srgbClr val="212121"/>
+                </a:solidFill>
+                <a:latin typeface="Arial"/>
+              </a:defRPr>
+            </a:pPr>
+            <a:r>
+              <a:t>• Churn Leverage: Reducing household churn from 22% down to 5% lifts customer lifetime value (LTV) by over 400%, easily amortizing the initial ₹999/mo introductory launch promo cost.</a:t>
+            </a:r>
+          </a:p>
+        </p:txBody>
+      </p:sp>
+      <p:sp>
+        <p:nvSpPr>
+          <p:cNvPr id="13" name="Rectangle 12"/>
           <p:cNvSpPr/>
           <p:nvPr/>
         </p:nvSpPr>
@@ -7956,7 +11210,7 @@
             <a:avLst/>
           </a:prstGeom>
           <a:solidFill>
-            <a:srgbClr val="0F121C"/>
+            <a:srgbClr val="ED1D24"/>
           </a:solidFill>
           <a:ln>
             <a:noFill/>
@@ -8045,7 +11299,7 @@
       </p:pic>
       <p:pic>
         <p:nvPicPr>
-          <p:cNvPr id="6" name="Picture 5" descr="screenshot_airbot.png"/>
+          <p:cNvPr id="6" name="Picture 5" descr="image.jpg"/>
           <p:cNvPicPr>
             <a:picLocks noChangeAspect="1"/>
           </p:cNvPicPr>
@@ -8059,279 +11313,14 @@
         </p:blipFill>
         <p:spPr>
           <a:xfrm>
-            <a:off x="4389120" y="1005840"/>
-            <a:ext cx="1005840" cy="1097280"/>
+            <a:off x="4572000" y="1188720"/>
+            <a:ext cx="4114800" cy="3086100"/>
           </a:xfrm>
           <a:prstGeom prst="rect">
             <a:avLst/>
           </a:prstGeom>
         </p:spPr>
       </p:pic>
-      <p:pic>
-        <p:nvPicPr>
-          <p:cNvPr id="8" name="Picture 7" descr="screenshot_packages.png"/>
-          <p:cNvPicPr>
-            <a:picLocks noChangeAspect="1"/>
-          </p:cNvPicPr>
-          <p:nvPr/>
-        </p:nvPicPr>
-        <p:blipFill>
-          <a:blip r:embed="rId4"/>
-          <a:stretch>
-            <a:fillRect/>
-          </a:stretch>
-        </p:blipFill>
-        <p:spPr>
-          <a:xfrm>
-            <a:off x="4389120" y="2286000"/>
-            <a:ext cx="1828800" cy="1033271"/>
-          </a:xfrm>
-          <a:prstGeom prst="rect">
-            <a:avLst/>
-          </a:prstGeom>
-        </p:spPr>
-      </p:pic>
-      <p:pic>
-        <p:nvPicPr>
-          <p:cNvPr id="10" name="Picture 9" descr="screenshot_customizer.png"/>
-          <p:cNvPicPr>
-            <a:picLocks noChangeAspect="1"/>
-          </p:cNvPicPr>
-          <p:nvPr/>
-        </p:nvPicPr>
-        <p:blipFill>
-          <a:blip r:embed="rId5"/>
-          <a:stretch>
-            <a:fillRect/>
-          </a:stretch>
-        </p:blipFill>
-        <p:spPr>
-          <a:xfrm>
-            <a:off x="4389120" y="3474720"/>
-            <a:ext cx="1828800" cy="1033271"/>
-          </a:xfrm>
-          <a:prstGeom prst="rect">
-            <a:avLst/>
-          </a:prstGeom>
-        </p:spPr>
-      </p:pic>
-      <p:sp>
-        <p:nvSpPr>
-          <p:cNvPr id="11" name="TextBox 10"/>
-          <p:cNvSpPr txBox="1"/>
-          <p:nvPr/>
-        </p:nvSpPr>
-        <p:spPr>
-          <a:xfrm>
-            <a:off x="457200" y="182880"/>
-            <a:ext cx="8229600" cy="731520"/>
-          </a:xfrm>
-          <a:prstGeom prst="rect">
-            <a:avLst/>
-          </a:prstGeom>
-          <a:noFill/>
-        </p:spPr>
-        <p:txBody>
-          <a:bodyPr wrap="square" lIns="0" tIns="0">
-            <a:spAutoFit/>
-          </a:bodyPr>
-          <a:lstStyle/>
-          <a:p>
-            <a:pPr>
-              <a:defRPr sz="2100" b="1">
-                <a:solidFill>
-                  <a:srgbClr val="ED1D24"/>
-                </a:solidFill>
-                <a:latin typeface="Calibri"/>
-              </a:defRPr>
-            </a:pPr>
-            <a:r>
-              <a:t>Annexure 4: Bundle Pricing Model &amp; EBITDA Accretion</a:t>
-            </a:r>
-          </a:p>
-        </p:txBody>
-      </p:sp>
-      <p:sp>
-        <p:nvSpPr>
-          <p:cNvPr id="12" name="Rounded Rectangle 11"/>
-          <p:cNvSpPr/>
-          <p:nvPr/>
-        </p:nvSpPr>
-        <p:spPr>
-          <a:xfrm>
-            <a:off x="457200" y="1005840"/>
-            <a:ext cx="8229600" cy="3657600"/>
-          </a:xfrm>
-          <a:prstGeom prst="roundRect">
-            <a:avLst/>
-          </a:prstGeom>
-          <a:solidFill>
-            <a:srgbClr val="F8F9FA"/>
-          </a:solidFill>
-          <a:ln w="12700">
-            <a:solidFill>
-              <a:srgbClr val="E4E6EB"/>
-            </a:solidFill>
-          </a:ln>
-        </p:spPr>
-        <p:style>
-          <a:lnRef idx="1">
-            <a:schemeClr val="accent1"/>
-          </a:lnRef>
-          <a:fillRef idx="3">
-            <a:schemeClr val="accent1"/>
-          </a:fillRef>
-          <a:effectRef idx="2">
-            <a:schemeClr val="accent1"/>
-          </a:effectRef>
-          <a:fontRef idx="minor">
-            <a:schemeClr val="lt1"/>
-          </a:fontRef>
-        </p:style>
-        <p:txBody>
-          <a:bodyPr rtlCol="0" anchor="t" wrap="square" lIns="137160" rIns="137160" tIns="164592" bIns="137160"/>
-          <a:lstStyle/>
-          <a:p>
-            <a:pPr algn="ctr">
-              <a:spcAft>
-                <a:spcPts val="800"/>
-              </a:spcAft>
-              <a:defRPr sz="1300" b="1">
-                <a:solidFill>
-                  <a:srgbClr val="0F121C"/>
-                </a:solidFill>
-                <a:latin typeface="Calibri"/>
-              </a:defRPr>
-            </a:pPr>
-            <a:r>
-              <a:t>Converged Pricing Sheets &amp; EBITDA Margins (Exhibits 1 &amp; 2)</a:t>
-            </a:r>
-          </a:p>
-          <a:p>
-            <a:pPr>
-              <a:spcAft>
-                <a:spcPts val="600"/>
-              </a:spcAft>
-              <a:defRPr sz="900" b="0">
-                <a:solidFill>
-                  <a:srgbClr val="212121"/>
-                </a:solidFill>
-                <a:latin typeface="Arial"/>
-              </a:defRPr>
-            </a:pPr>
-            <a:r>
-              <a:t>• Individual vs. Bundle Price Matrix:</a:t>
-            </a:r>
-          </a:p>
-          <a:p>
-            <a:pPr>
-              <a:spcAft>
-                <a:spcPts val="600"/>
-              </a:spcAft>
-              <a:defRPr sz="900" b="0">
-                <a:solidFill>
-                  <a:srgbClr val="212121"/>
-                </a:solidFill>
-                <a:latin typeface="Arial"/>
-              </a:defRPr>
-            </a:pPr>
-            <a:r>
-              <a:t>   - Standalone Sum: Broadband (₹599) + 2 SIMs (₹700) + Xstream Box (₹250) + Google One (₹209) + Xsafe CCTV (₹150) + Bank (₹99) = ₹2,006/mo.</a:t>
-            </a:r>
-          </a:p>
-          <a:p>
-            <a:pPr>
-              <a:spcAft>
-                <a:spcPts val="600"/>
-              </a:spcAft>
-              <a:defRPr sz="900" b="0">
-                <a:solidFill>
-                  <a:srgbClr val="212121"/>
-                </a:solidFill>
-                <a:latin typeface="Arial"/>
-              </a:defRPr>
-            </a:pPr>
-            <a:r>
-              <a:t>   - Consolidated Family Secure: ₹1,499/mo (Saves ₹507/mo or 25% discount). Promoted at ₹999/mo for the first 3 months to destroy switching inertia.</a:t>
-            </a:r>
-          </a:p>
-          <a:p>
-            <a:pPr>
-              <a:spcAft>
-                <a:spcPts val="600"/>
-              </a:spcAft>
-              <a:defRPr sz="900" b="0">
-                <a:solidFill>
-                  <a:srgbClr val="212121"/>
-                </a:solidFill>
-                <a:latin typeface="Arial"/>
-              </a:defRPr>
-            </a:pPr>
-            <a:r>
-              <a:t>• Margin Protection: Home Surveillance holds the highest EBITDA margin at 35% (Exhibit 1) and is growing at 35.7% CAGR (Exhibit 2). By bundling Xsafe cameras into Family Secure and Infinite tiers, we offset lower TV margins (12% EBITDA) and drive net margin expansion.</a:t>
-            </a:r>
-          </a:p>
-          <a:p>
-            <a:pPr>
-              <a:spcAft>
-                <a:spcPts val="600"/>
-              </a:spcAft>
-              <a:defRPr sz="900" b="0">
-                <a:solidFill>
-                  <a:srgbClr val="212121"/>
-                </a:solidFill>
-                <a:latin typeface="Arial"/>
-              </a:defRPr>
-            </a:pPr>
-            <a:r>
-              <a:t>• Churn Leverage: Reducing household churn from 22% down to 5% lifts customer lifetime value (LTV) by over 400%, easily amortizing the initial ₹999/mo introductory launch promo cost.</a:t>
-            </a:r>
-          </a:p>
-        </p:txBody>
-      </p:sp>
-      <p:sp>
-        <p:nvSpPr>
-          <p:cNvPr id="13" name="Rectangle 12"/>
-          <p:cNvSpPr/>
-          <p:nvPr/>
-        </p:nvSpPr>
-        <p:spPr>
-          <a:xfrm>
-            <a:off x="502920" y="1005840"/>
-            <a:ext cx="8138160" cy="73152"/>
-          </a:xfrm>
-          <a:prstGeom prst="rect">
-            <a:avLst/>
-          </a:prstGeom>
-          <a:solidFill>
-            <a:srgbClr val="ED1D24"/>
-          </a:solidFill>
-          <a:ln>
-            <a:noFill/>
-          </a:ln>
-        </p:spPr>
-        <p:style>
-          <a:lnRef idx="1">
-            <a:schemeClr val="accent1"/>
-          </a:lnRef>
-          <a:fillRef idx="3">
-            <a:schemeClr val="accent1"/>
-          </a:fillRef>
-          <a:effectRef idx="2">
-            <a:schemeClr val="accent1"/>
-          </a:effectRef>
-          <a:fontRef idx="minor">
-            <a:schemeClr val="lt1"/>
-          </a:fontRef>
-        </p:style>
-        <p:txBody>
-          <a:bodyPr rtlCol="0" anchor="ctr"/>
-          <a:lstStyle/>
-          <a:p>
-            <a:pPr algn="ctr"/>
-          </a:p>
-        </p:txBody>
-      </p:sp>
     </p:spTree>
   </p:cSld>
   <p:clrMapOvr>

--- a/Altura_Household_Convergence_Strategy.pptx
+++ b/Altura_Household_Convergence_Strategy.pptx
@@ -11,15 +11,7 @@
     <p:sldId id="256" r:id="rId2"/>
     <p:sldId id="257" r:id="rId3"/>
     <p:sldId id="260" r:id="rId5"/>
-    <p:sldId id="261" r:id="rId6"/>
-    <p:sldId id="262" r:id="rId7"/>
-    <p:sldId id="263" r:id="rId8"/>
-    <p:sldId id="264" r:id="rId14"/>
-    <p:sldId id="265" r:id="rId15"/>
-    <p:sldId id="266" r:id="rId16"/>
-    <p:sldId id="267" r:id="rId17"/>
-    <p:sldId id="268" r:id="rId18"/>
-    <p:sldId id="269" r:id="rId4"/>
+    <p:sldId id="261" r:id="rId8"/>
   </p:sldIdLst>
   <p:sldSz cx="9144000" cy="5143500" type="screen16x9"/>
   <p:notesSz cx="6858000" cy="9144000"/>
@@ -5846,211 +5838,6 @@
 </p:sld>
 </file>
 
-<file path=ppt/slides/slide10.xml><?xml version="1.0" encoding="utf-8"?>
-<p:sld xmlns:a="http://schemas.openxmlformats.org/drawingml/2006/main" xmlns:p="http://schemas.openxmlformats.org/presentationml/2006/main" xmlns:r="http://schemas.openxmlformats.org/officeDocument/2006/relationships">
-  <p:cSld>
-    <p:spTree>
-      <p:nvGrpSpPr>
-        <p:cNvPr id="1" name=""/>
-        <p:cNvGrpSpPr/>
-        <p:nvPr/>
-      </p:nvGrpSpPr>
-      <p:grpSpPr/>
-      <p:sp>
-        <p:nvSpPr>
-          <p:cNvPr id="2" name="Title 1"/>
-          <p:cNvSpPr>
-            <a:spLocks noGrp="1"/>
-          </p:cNvSpPr>
-          <p:nvPr>
-            <p:ph type="title"/>
-          </p:nvPr>
-        </p:nvSpPr>
-        <p:spPr/>
-        <p:txBody>
-          <a:bodyPr/>
-          <a:lstStyle/>
-          <a:p/>
-        </p:txBody>
-      </p:sp>
-      <p:pic>
-        <p:nvPicPr>
-          <p:cNvPr id="3" name="Picture 2" descr="image.jpg"/>
-          <p:cNvPicPr>
-            <a:picLocks noChangeAspect="1"/>
-          </p:cNvPicPr>
-          <p:nvPr/>
-        </p:nvPicPr>
-        <p:blipFill>
-          <a:blip r:embed="rId2"/>
-          <a:stretch>
-            <a:fillRect/>
-          </a:stretch>
-        </p:blipFill>
-        <p:spPr>
-          <a:xfrm>
-            <a:off x="1" y="0"/>
-            <a:ext cx="9144000" cy="5143500"/>
-          </a:xfrm>
-          <a:prstGeom prst="rect">
-            <a:avLst/>
-          </a:prstGeom>
-        </p:spPr>
-      </p:pic>
-    </p:spTree>
-  </p:cSld>
-  <p:clrMapOvr>
-    <a:masterClrMapping/>
-  </p:clrMapOvr>
-</p:sld>
-</file>
-
-<file path=ppt/slides/slide12.xml><?xml version="1.0" encoding="utf-8"?>
-<p:sld xmlns:a="http://schemas.openxmlformats.org/drawingml/2006/main" xmlns:p="http://schemas.openxmlformats.org/presentationml/2006/main" xmlns:r="http://schemas.openxmlformats.org/officeDocument/2006/relationships">
-  <p:cSld>
-    <p:spTree>
-      <p:nvGrpSpPr>
-        <p:cNvPr id="1" name=""/>
-        <p:cNvGrpSpPr/>
-        <p:nvPr/>
-      </p:nvGrpSpPr>
-      <p:grpSpPr/>
-      <p:sp>
-        <p:nvSpPr>
-          <p:cNvPr id="2" name="Title 1"/>
-          <p:cNvSpPr>
-            <a:spLocks noGrp="1"/>
-          </p:cNvSpPr>
-          <p:nvPr>
-            <p:ph type="title"/>
-          </p:nvPr>
-        </p:nvSpPr>
-        <p:spPr/>
-        <p:txBody>
-          <a:bodyPr/>
-          <a:lstStyle/>
-          <a:p/>
-        </p:txBody>
-      </p:sp>
-      <p:pic>
-        <p:nvPicPr>
-          <p:cNvPr id="3" name="Picture 2" descr="image.jpg"/>
-          <p:cNvPicPr>
-            <a:picLocks noChangeAspect="1"/>
-          </p:cNvPicPr>
-          <p:nvPr/>
-        </p:nvPicPr>
-        <p:blipFill>
-          <a:blip r:embed="rId2"/>
-          <a:stretch>
-            <a:fillRect/>
-          </a:stretch>
-        </p:blipFill>
-        <p:spPr>
-          <a:xfrm>
-            <a:off x="1" y="0"/>
-            <a:ext cx="9144000" cy="5143500"/>
-          </a:xfrm>
-          <a:prstGeom prst="rect">
-            <a:avLst/>
-          </a:prstGeom>
-        </p:spPr>
-      </p:pic>
-      <p:pic>
-        <p:nvPicPr>
-          <p:cNvPr id="7" name="Picture 6" descr="image.png"/>
-          <p:cNvPicPr>
-            <a:picLocks noChangeAspect="1"/>
-          </p:cNvPicPr>
-          <p:nvPr/>
-        </p:nvPicPr>
-        <p:blipFill>
-          <a:blip r:embed="rId3"/>
-          <a:stretch>
-            <a:fillRect/>
-          </a:stretch>
-        </p:blipFill>
-        <p:spPr>
-          <a:xfrm>
-            <a:off x="4389120" y="1005840"/>
-            <a:ext cx="1005840" cy="1097280"/>
-          </a:xfrm>
-          <a:prstGeom prst="rect">
-            <a:avLst/>
-          </a:prstGeom>
-          <a:ln w="12700">
-            <a:solidFill>
-              <a:srgbClr val="E4E6EB"/>
-            </a:solidFill>
-          </a:ln>
-        </p:spPr>
-      </p:pic>
-      <p:pic>
-        <p:nvPicPr>
-          <p:cNvPr id="9" name="Picture 8" descr="image.png"/>
-          <p:cNvPicPr>
-            <a:picLocks noChangeAspect="1"/>
-          </p:cNvPicPr>
-          <p:nvPr/>
-        </p:nvPicPr>
-        <p:blipFill>
-          <a:blip r:embed="rId4"/>
-          <a:stretch>
-            <a:fillRect/>
-          </a:stretch>
-        </p:blipFill>
-        <p:spPr>
-          <a:xfrm>
-            <a:off x="4389120" y="2286000"/>
-            <a:ext cx="1828800" cy="1033271"/>
-          </a:xfrm>
-          <a:prstGeom prst="rect">
-            <a:avLst/>
-          </a:prstGeom>
-          <a:ln w="12700">
-            <a:solidFill>
-              <a:srgbClr val="E4E6EB"/>
-            </a:solidFill>
-          </a:ln>
-        </p:spPr>
-      </p:pic>
-      <p:pic>
-        <p:nvPicPr>
-          <p:cNvPr id="11" name="Picture 10" descr="image.png"/>
-          <p:cNvPicPr>
-            <a:picLocks noChangeAspect="1"/>
-          </p:cNvPicPr>
-          <p:nvPr/>
-        </p:nvPicPr>
-        <p:blipFill>
-          <a:blip r:embed="rId5"/>
-          <a:stretch>
-            <a:fillRect/>
-          </a:stretch>
-        </p:blipFill>
-        <p:spPr>
-          <a:xfrm>
-            <a:off x="4389120" y="3474720"/>
-            <a:ext cx="1828800" cy="1033271"/>
-          </a:xfrm>
-          <a:prstGeom prst="rect">
-            <a:avLst/>
-          </a:prstGeom>
-          <a:ln w="12700">
-            <a:solidFill>
-              <a:srgbClr val="E4E6EB"/>
-            </a:solidFill>
-          </a:ln>
-        </p:spPr>
-      </p:pic>
-    </p:spTree>
-  </p:cSld>
-  <p:clrMapOvr>
-    <a:masterClrMapping/>
-  </p:clrMapOvr>
-</p:sld>
-</file>
-
 <file path=ppt/slides/slide2.xml><?xml version="1.0" encoding="utf-8"?>
 <p:sld xmlns:a="http://schemas.openxmlformats.org/drawingml/2006/main" xmlns:r="http://schemas.openxmlformats.org/officeDocument/2006/relationships" xmlns:p="http://schemas.openxmlformats.org/presentationml/2006/main">
   <p:cSld>
@@ -6176,8 +5963,8 @@
         </p:nvSpPr>
         <p:spPr>
           <a:xfrm>
-            <a:off x="109728" y="1051560"/>
-            <a:ext cx="2880360" cy="1783080"/>
+            <a:off x="109728" y="822960"/>
+            <a:ext cx="6858000" cy="438912"/>
           </a:xfrm>
           <a:prstGeom prst="roundRect">
             <a:avLst/>
@@ -6215,16 +6002,252 @@
       </p:sp>
       <p:sp>
         <p:nvSpPr>
-          <p:cNvPr id="63" name="Rectangle 62"/>
+          <p:cNvPr id="63" name="TextBox 62"/>
+          <p:cNvSpPr txBox="1"/>
+          <p:nvPr/>
+        </p:nvSpPr>
+        <p:spPr>
+          <a:xfrm>
+            <a:off x="146304" y="896112"/>
+            <a:ext cx="640080" cy="292608"/>
+          </a:xfrm>
+          <a:prstGeom prst="rect">
+            <a:avLst/>
+          </a:prstGeom>
+          <a:noFill/>
+        </p:spPr>
+        <p:txBody>
+          <a:bodyPr wrap="square" lIns="0" rIns="0" tIns="0" bIns="0">
+            <a:spAutoFit/>
+          </a:bodyPr>
+          <a:lstStyle/>
+          <a:p>
+            <a:pPr>
+              <a:defRPr sz="550" b="1">
+                <a:solidFill>
+                  <a:srgbClr val="787878"/>
+                </a:solidFill>
+                <a:latin typeface="Arial"/>
+              </a:defRPr>
+            </a:pPr>
+            <a:r>
+              <a:t>MARKET</a:t>
+            </a:r>
+            <a:br/>
+            <a:r>
+              <a:t>SNAPSHOT</a:t>
+            </a:r>
+          </a:p>
+        </p:txBody>
+      </p:sp>
+      <p:sp>
+        <p:nvSpPr>
+          <p:cNvPr id="64" name="TextBox 63"/>
+          <p:cNvSpPr txBox="1"/>
+          <p:nvPr/>
+        </p:nvSpPr>
+        <p:spPr>
+          <a:xfrm>
+            <a:off x="868680" y="859536"/>
+            <a:ext cx="1371600" cy="365760"/>
+          </a:xfrm>
+          <a:prstGeom prst="rect">
+            <a:avLst/>
+          </a:prstGeom>
+          <a:noFill/>
+        </p:spPr>
+        <p:txBody>
+          <a:bodyPr wrap="none" lIns="0" rIns="0" tIns="0" bIns="0">
+            <a:spAutoFit/>
+          </a:bodyPr>
+          <a:lstStyle/>
+          <a:p>
+            <a:pPr>
+              <a:defRPr sz="1100" b="1">
+                <a:solidFill>
+                  <a:srgbClr val="ED1D24"/>
+                </a:solidFill>
+                <a:latin typeface="Calibri"/>
+              </a:defRPr>
+            </a:pPr>
+            <a:r>
+              <a:t>👥 100 Mn+</a:t>
+            </a:r>
+          </a:p>
+          <a:p>
+            <a:pPr>
+              <a:defRPr sz="580" b="0">
+                <a:solidFill>
+                  <a:srgbClr val="787878"/>
+                </a:solidFill>
+                <a:latin typeface="Arial"/>
+              </a:defRPr>
+            </a:pPr>
+            <a:r>
+              <a:t>High-value connected households in India</a:t>
+            </a:r>
+          </a:p>
+        </p:txBody>
+      </p:sp>
+      <p:sp>
+        <p:nvSpPr>
+          <p:cNvPr id="65" name="TextBox 64"/>
+          <p:cNvSpPr txBox="1"/>
+          <p:nvPr/>
+        </p:nvSpPr>
+        <p:spPr>
+          <a:xfrm>
+            <a:off x="2377440" y="859536"/>
+            <a:ext cx="1371600" cy="365760"/>
+          </a:xfrm>
+          <a:prstGeom prst="rect">
+            <a:avLst/>
+          </a:prstGeom>
+          <a:noFill/>
+        </p:spPr>
+        <p:txBody>
+          <a:bodyPr wrap="none" lIns="0" rIns="0" tIns="0" bIns="0">
+            <a:spAutoFit/>
+          </a:bodyPr>
+          <a:lstStyle/>
+          <a:p>
+            <a:pPr>
+              <a:defRPr sz="1100" b="1">
+                <a:solidFill>
+                  <a:srgbClr val="ED1D24"/>
+                </a:solidFill>
+                <a:latin typeface="Calibri"/>
+              </a:defRPr>
+            </a:pPr>
+            <a:r>
+              <a:t>📈 ₹2.83 Lakh</a:t>
+            </a:r>
+          </a:p>
+          <a:p>
+            <a:pPr>
+              <a:defRPr sz="580" b="0">
+                <a:solidFill>
+                  <a:srgbClr val="787878"/>
+                </a:solidFill>
+                <a:latin typeface="Arial"/>
+              </a:defRPr>
+            </a:pPr>
+            <a:r>
+              <a:t>Per-capita disposable income in India</a:t>
+            </a:r>
+          </a:p>
+        </p:txBody>
+      </p:sp>
+      <p:sp>
+        <p:nvSpPr>
+          <p:cNvPr id="66" name="TextBox 65"/>
+          <p:cNvSpPr txBox="1"/>
+          <p:nvPr/>
+        </p:nvSpPr>
+        <p:spPr>
+          <a:xfrm>
+            <a:off x="3886200" y="859536"/>
+            <a:ext cx="1371600" cy="365760"/>
+          </a:xfrm>
+          <a:prstGeom prst="rect">
+            <a:avLst/>
+          </a:prstGeom>
+          <a:noFill/>
+        </p:spPr>
+        <p:txBody>
+          <a:bodyPr wrap="none" lIns="0" rIns="0" tIns="0" bIns="0">
+            <a:spAutoFit/>
+          </a:bodyPr>
+          <a:lstStyle/>
+          <a:p>
+            <a:pPr>
+              <a:defRPr sz="1100" b="1">
+                <a:solidFill>
+                  <a:srgbClr val="ED1D24"/>
+                </a:solidFill>
+                <a:latin typeface="Calibri"/>
+              </a:defRPr>
+            </a:pPr>
+            <a:r>
+              <a:t>📱 430 Mn</a:t>
+            </a:r>
+          </a:p>
+          <a:p>
+            <a:pPr>
+              <a:defRPr sz="580" b="0">
+                <a:solidFill>
+                  <a:srgbClr val="787878"/>
+                </a:solidFill>
+                <a:latin typeface="Arial"/>
+              </a:defRPr>
+            </a:pPr>
+            <a:r>
+              <a:t>5G subscribers; ~1B data users</a:t>
+            </a:r>
+          </a:p>
+        </p:txBody>
+      </p:sp>
+      <p:sp>
+        <p:nvSpPr>
+          <p:cNvPr id="67" name="TextBox 66"/>
+          <p:cNvSpPr txBox="1"/>
+          <p:nvPr/>
+        </p:nvSpPr>
+        <p:spPr>
+          <a:xfrm>
+            <a:off x="5394960" y="859536"/>
+            <a:ext cx="1463040" cy="365760"/>
+          </a:xfrm>
+          <a:prstGeom prst="rect">
+            <a:avLst/>
+          </a:prstGeom>
+          <a:noFill/>
+        </p:spPr>
+        <p:txBody>
+          <a:bodyPr wrap="none" lIns="0" rIns="0" tIns="0" bIns="0">
+            <a:spAutoFit/>
+          </a:bodyPr>
+          <a:lstStyle/>
+          <a:p>
+            <a:pPr>
+              <a:defRPr sz="1100" b="1">
+                <a:solidFill>
+                  <a:srgbClr val="ED1D24"/>
+                </a:solidFill>
+                <a:latin typeface="Calibri"/>
+              </a:defRPr>
+            </a:pPr>
+            <a:r>
+              <a:t>🪙 ₹194.57</a:t>
+            </a:r>
+          </a:p>
+          <a:p>
+            <a:pPr>
+              <a:defRPr sz="580" b="0">
+                <a:solidFill>
+                  <a:srgbClr val="787878"/>
+                </a:solidFill>
+                <a:latin typeface="Arial"/>
+              </a:defRPr>
+            </a:pPr>
+            <a:r>
+              <a:t>Industry mobility ARPU</a:t>
+            </a:r>
+          </a:p>
+        </p:txBody>
+      </p:sp>
+      <p:sp>
+        <p:nvSpPr>
+          <p:cNvPr id="68" name="Rounded Rectangle 67"/>
           <p:cNvSpPr/>
           <p:nvPr/>
         </p:nvSpPr>
         <p:spPr>
           <a:xfrm>
-            <a:off x="182880" y="1124712"/>
-            <a:ext cx="164592" cy="164592"/>
-          </a:xfrm>
-          <a:prstGeom prst="rect">
+            <a:off x="7059168" y="822960"/>
+            <a:ext cx="1975104" cy="438912"/>
+          </a:xfrm>
+          <a:prstGeom prst="roundRect">
             <a:avLst/>
           </a:prstGeom>
           <a:solidFill>
@@ -6249,801 +6272,33 @@
           </a:fontRef>
         </p:style>
         <p:txBody>
-          <a:bodyPr rtlCol="0" anchor="ctr" wrap="none" lIns="0" rIns="0" tIns="0" bIns="0"/>
+          <a:bodyPr rtlCol="0" anchor="ctr" wrap="square" lIns="73152" rIns="73152" tIns="18288" bIns="18288"/>
           <a:lstStyle/>
           <a:p>
             <a:pPr algn="ctr">
-              <a:defRPr sz="850" b="1">
+              <a:defRPr sz="650" b="1">
                 <a:solidFill>
                   <a:srgbClr val="FFFFFF"/>
                 </a:solidFill>
-                <a:latin typeface="Calibri"/>
+                <a:latin typeface="Arial"/>
               </a:defRPr>
             </a:pPr>
             <a:r>
-              <a:t>1</a:t>
-            </a:r>
-          </a:p>
-        </p:txBody>
-      </p:sp>
-      <p:sp>
-        <p:nvSpPr>
-          <p:cNvPr id="64" name="TextBox 63"/>
-          <p:cNvSpPr txBox="1"/>
-          <p:nvPr/>
-        </p:nvSpPr>
-        <p:spPr>
-          <a:xfrm>
-            <a:off x="402336" y="1097280"/>
-            <a:ext cx="2514600" cy="219456"/>
-          </a:xfrm>
-          <a:prstGeom prst="rect">
-            <a:avLst/>
-          </a:prstGeom>
-          <a:noFill/>
-        </p:spPr>
-        <p:txBody>
-          <a:bodyPr wrap="none" lIns="0" rIns="0" tIns="0" bIns="0">
-            <a:spAutoFit/>
-          </a:bodyPr>
-          <a:lstStyle/>
-          <a:p>
-            <a:pPr>
-              <a:defRPr sz="950" b="1">
-                <a:solidFill>
-                  <a:srgbClr val="ED1D24"/>
-                </a:solidFill>
-                <a:latin typeface="Calibri"/>
-              </a:defRPr>
-            </a:pPr>
-            <a:r>
-              <a:t>Market Landscape &amp; Wallet Opportunity</a:t>
-            </a:r>
-          </a:p>
-        </p:txBody>
-      </p:sp>
-      <p:sp>
-        <p:nvSpPr>
-          <p:cNvPr id="65" name="TextBox 64"/>
-          <p:cNvSpPr txBox="1"/>
-          <p:nvPr/>
-        </p:nvSpPr>
-        <p:spPr>
-          <a:xfrm>
-            <a:off x="402336" y="1271016"/>
-            <a:ext cx="2514600" cy="164592"/>
-          </a:xfrm>
-          <a:prstGeom prst="rect">
-            <a:avLst/>
-          </a:prstGeom>
-          <a:noFill/>
-        </p:spPr>
-        <p:txBody>
-          <a:bodyPr wrap="none" lIns="0" rIns="0" tIns="0" bIns="0">
-            <a:spAutoFit/>
-          </a:bodyPr>
-          <a:lstStyle/>
-          <a:p>
-            <a:pPr>
-              <a:defRPr sz="750" b="0" i="1">
-                <a:solidFill>
-                  <a:srgbClr val="787878"/>
-                </a:solidFill>
-                <a:latin typeface="Arial"/>
-              </a:defRPr>
-            </a:pPr>
-            <a:r>
-              <a:t>Where category growth and captured wallet share diverge</a:t>
-            </a:r>
-          </a:p>
-        </p:txBody>
-      </p:sp>
-      <p:sp>
-        <p:nvSpPr>
-          <p:cNvPr id="66" name="TextBox 65"/>
-          <p:cNvSpPr txBox="1"/>
-          <p:nvPr/>
-        </p:nvSpPr>
-        <p:spPr>
-          <a:xfrm>
-            <a:off x="182880" y="1453896"/>
-            <a:ext cx="2734056" cy="822960"/>
-          </a:xfrm>
-          <a:prstGeom prst="rect">
-            <a:avLst/>
-          </a:prstGeom>
-          <a:noFill/>
-        </p:spPr>
-        <p:txBody>
-          <a:bodyPr wrap="square" lIns="0" rIns="0" tIns="0" bIns="0">
-            <a:spAutoFit/>
-          </a:bodyPr>
-          <a:lstStyle/>
-          <a:p>
-            <a:pPr>
-              <a:spcAft>
-                <a:spcPts val="250"/>
-              </a:spcAft>
-              <a:defRPr sz="680" b="0">
-                <a:solidFill>
-                  <a:srgbClr val="212121"/>
-                </a:solidFill>
-                <a:latin typeface="Arial"/>
-              </a:defRPr>
-            </a:pPr>
-            <a:r>
-              <a:t>• India: ₹2.83L per-capita disposable income, 430M 5G subscribers, ~1B data users; industry mobility ARPU ₹194.57</a:t>
-            </a:r>
-          </a:p>
-          <a:p>
-            <a:pPr>
-              <a:spcAft>
-                <a:spcPts val="250"/>
-              </a:spcAft>
-              <a:defRPr sz="680" b="0">
-                <a:solidFill>
-                  <a:srgbClr val="212121"/>
-                </a:solidFill>
-                <a:latin typeface="Arial"/>
-              </a:defRPr>
-            </a:pPr>
-            <a:r>
-              <a:t>• Altura already leads the industry on ARPU (+₹40 vs. nearest rival) - but prepaid mobility growth is flat and pricing is capped</a:t>
-            </a:r>
-          </a:p>
-          <a:p>
-            <a:pPr>
-              <a:spcAft>
-                <a:spcPts val="250"/>
-              </a:spcAft>
-              <a:defRPr sz="680" b="0">
-                <a:solidFill>
-                  <a:srgbClr val="212121"/>
-                </a:solidFill>
-                <a:latin typeface="Arial"/>
-              </a:defRPr>
-            </a:pPr>
-            <a:r>
-              <a:t>• Computed CAGR, FY24–27: Broadband +22%, Surveillance +36%, DTH -2% - fastest-growing lines are where Altura's wallet share is lowest</a:t>
-            </a:r>
-          </a:p>
-        </p:txBody>
-      </p:sp>
-      <p:sp>
-        <p:nvSpPr>
-          <p:cNvPr id="67" name="TextBox 66"/>
-          <p:cNvSpPr txBox="1"/>
-          <p:nvPr/>
-        </p:nvSpPr>
-        <p:spPr>
-          <a:xfrm>
-            <a:off x="182880" y="2295144"/>
-            <a:ext cx="777240" cy="109728"/>
-          </a:xfrm>
-          <a:prstGeom prst="rect">
-            <a:avLst/>
-          </a:prstGeom>
-          <a:noFill/>
-        </p:spPr>
-        <p:txBody>
-          <a:bodyPr wrap="none" lIns="0" rIns="0" tIns="0" bIns="0">
-            <a:spAutoFit/>
-          </a:bodyPr>
-          <a:lstStyle/>
-          <a:p>
-            <a:pPr>
-              <a:defRPr sz="620" b="0">
-                <a:solidFill>
-                  <a:srgbClr val="212121"/>
-                </a:solidFill>
-                <a:latin typeface="Arial"/>
-              </a:defRPr>
-            </a:pPr>
-            <a:r>
-              <a:t>Connectivity</a:t>
-            </a:r>
-          </a:p>
-        </p:txBody>
-      </p:sp>
-      <p:sp>
-        <p:nvSpPr>
-          <p:cNvPr id="68" name="Rectangle 67"/>
+              <a:t>🎯 India is growing fast. Altura is built strong. But households still don't converge.</a:t>
+            </a:r>
+          </a:p>
+        </p:txBody>
+      </p:sp>
+      <p:sp>
+        <p:nvSpPr>
+          <p:cNvPr id="69" name="Rounded Rectangle 68"/>
           <p:cNvSpPr/>
           <p:nvPr/>
         </p:nvSpPr>
         <p:spPr>
           <a:xfrm>
-            <a:off x="1005840" y="2322576"/>
-            <a:ext cx="1371600" cy="45720"/>
-          </a:xfrm>
-          <a:prstGeom prst="rect">
-            <a:avLst/>
-          </a:prstGeom>
-          <a:solidFill>
-            <a:srgbClr val="F0F0F0"/>
-          </a:solidFill>
-          <a:ln>
-            <a:noFill/>
-          </a:ln>
-        </p:spPr>
-        <p:style>
-          <a:lnRef idx="1">
-            <a:schemeClr val="accent1"/>
-          </a:lnRef>
-          <a:fillRef idx="3">
-            <a:schemeClr val="accent1"/>
-          </a:fillRef>
-          <a:effectRef idx="2">
-            <a:schemeClr val="accent1"/>
-          </a:effectRef>
-          <a:fontRef idx="minor">
-            <a:schemeClr val="lt1"/>
-          </a:fontRef>
-        </p:style>
-        <p:txBody>
-          <a:bodyPr rtlCol="0" anchor="ctr"/>
-          <a:lstStyle/>
-          <a:p>
-            <a:pPr algn="ctr"/>
-          </a:p>
-        </p:txBody>
-      </p:sp>
-      <p:sp>
-        <p:nvSpPr>
-          <p:cNvPr id="69" name="Rectangle 68"/>
-          <p:cNvSpPr/>
-          <p:nvPr/>
-        </p:nvSpPr>
-        <p:spPr>
-          <a:xfrm>
-            <a:off x="1005840" y="2322576"/>
-            <a:ext cx="480059" cy="45720"/>
-          </a:xfrm>
-          <a:prstGeom prst="rect">
-            <a:avLst/>
-          </a:prstGeom>
-          <a:solidFill>
-            <a:srgbClr val="ED1D24"/>
-          </a:solidFill>
-          <a:ln>
-            <a:noFill/>
-          </a:ln>
-        </p:spPr>
-        <p:style>
-          <a:lnRef idx="1">
-            <a:schemeClr val="accent1"/>
-          </a:lnRef>
-          <a:fillRef idx="3">
-            <a:schemeClr val="accent1"/>
-          </a:fillRef>
-          <a:effectRef idx="2">
-            <a:schemeClr val="accent1"/>
-          </a:effectRef>
-          <a:fontRef idx="minor">
-            <a:schemeClr val="lt1"/>
-          </a:fontRef>
-        </p:style>
-        <p:txBody>
-          <a:bodyPr rtlCol="0" anchor="ctr"/>
-          <a:lstStyle/>
-          <a:p>
-            <a:pPr algn="ctr"/>
-          </a:p>
-        </p:txBody>
-      </p:sp>
-      <p:sp>
-        <p:nvSpPr>
-          <p:cNvPr id="70" name="TextBox 69"/>
-          <p:cNvSpPr txBox="1"/>
-          <p:nvPr/>
-        </p:nvSpPr>
-        <p:spPr>
-          <a:xfrm>
-            <a:off x="2414016" y="2295144"/>
-            <a:ext cx="365760" cy="109728"/>
-          </a:xfrm>
-          <a:prstGeom prst="rect">
-            <a:avLst/>
-          </a:prstGeom>
-          <a:noFill/>
-        </p:spPr>
-        <p:txBody>
-          <a:bodyPr wrap="none" lIns="0" rIns="0" tIns="0" bIns="0">
-            <a:spAutoFit/>
-          </a:bodyPr>
-          <a:lstStyle/>
-          <a:p>
-            <a:pPr>
-              <a:defRPr sz="620" b="1">
-                <a:solidFill>
-                  <a:srgbClr val="212121"/>
-                </a:solidFill>
-                <a:latin typeface="Arial"/>
-              </a:defRPr>
-            </a:pPr>
-            <a:r>
-              <a:t>35%</a:t>
-            </a:r>
-          </a:p>
-        </p:txBody>
-      </p:sp>
-      <p:sp>
-        <p:nvSpPr>
-          <p:cNvPr id="71" name="TextBox 70"/>
-          <p:cNvSpPr txBox="1"/>
-          <p:nvPr/>
-        </p:nvSpPr>
-        <p:spPr>
-          <a:xfrm>
-            <a:off x="182880" y="2404872"/>
-            <a:ext cx="777240" cy="109728"/>
-          </a:xfrm>
-          <a:prstGeom prst="rect">
-            <a:avLst/>
-          </a:prstGeom>
-          <a:noFill/>
-        </p:spPr>
-        <p:txBody>
-          <a:bodyPr wrap="none" lIns="0" rIns="0" tIns="0" bIns="0">
-            <a:spAutoFit/>
-          </a:bodyPr>
-          <a:lstStyle/>
-          <a:p>
-            <a:pPr>
-              <a:defRPr sz="620" b="0">
-                <a:solidFill>
-                  <a:srgbClr val="212121"/>
-                </a:solidFill>
-                <a:latin typeface="Arial"/>
-              </a:defRPr>
-            </a:pPr>
-            <a:r>
-              <a:t>Entertainment</a:t>
-            </a:r>
-          </a:p>
-        </p:txBody>
-      </p:sp>
-      <p:sp>
-        <p:nvSpPr>
-          <p:cNvPr id="72" name="Rectangle 71"/>
-          <p:cNvSpPr/>
-          <p:nvPr/>
-        </p:nvSpPr>
-        <p:spPr>
-          <a:xfrm>
-            <a:off x="1005840" y="2432304"/>
-            <a:ext cx="1371600" cy="45720"/>
-          </a:xfrm>
-          <a:prstGeom prst="rect">
-            <a:avLst/>
-          </a:prstGeom>
-          <a:solidFill>
-            <a:srgbClr val="F0F0F0"/>
-          </a:solidFill>
-          <a:ln>
-            <a:noFill/>
-          </a:ln>
-        </p:spPr>
-        <p:style>
-          <a:lnRef idx="1">
-            <a:schemeClr val="accent1"/>
-          </a:lnRef>
-          <a:fillRef idx="3">
-            <a:schemeClr val="accent1"/>
-          </a:fillRef>
-          <a:effectRef idx="2">
-            <a:schemeClr val="accent1"/>
-          </a:effectRef>
-          <a:fontRef idx="minor">
-            <a:schemeClr val="lt1"/>
-          </a:fontRef>
-        </p:style>
-        <p:txBody>
-          <a:bodyPr rtlCol="0" anchor="ctr"/>
-          <a:lstStyle/>
-          <a:p>
-            <a:pPr algn="ctr"/>
-          </a:p>
-        </p:txBody>
-      </p:sp>
-      <p:sp>
-        <p:nvSpPr>
-          <p:cNvPr id="73" name="Rectangle 72"/>
-          <p:cNvSpPr/>
-          <p:nvPr/>
-        </p:nvSpPr>
-        <p:spPr>
-          <a:xfrm>
-            <a:off x="1005840" y="2432304"/>
-            <a:ext cx="164592" cy="45720"/>
-          </a:xfrm>
-          <a:prstGeom prst="rect">
-            <a:avLst/>
-          </a:prstGeom>
-          <a:solidFill>
-            <a:srgbClr val="ED1D24"/>
-          </a:solidFill>
-          <a:ln>
-            <a:noFill/>
-          </a:ln>
-        </p:spPr>
-        <p:style>
-          <a:lnRef idx="1">
-            <a:schemeClr val="accent1"/>
-          </a:lnRef>
-          <a:fillRef idx="3">
-            <a:schemeClr val="accent1"/>
-          </a:fillRef>
-          <a:effectRef idx="2">
-            <a:schemeClr val="accent1"/>
-          </a:effectRef>
-          <a:fontRef idx="minor">
-            <a:schemeClr val="lt1"/>
-          </a:fontRef>
-        </p:style>
-        <p:txBody>
-          <a:bodyPr rtlCol="0" anchor="ctr"/>
-          <a:lstStyle/>
-          <a:p>
-            <a:pPr algn="ctr"/>
-          </a:p>
-        </p:txBody>
-      </p:sp>
-      <p:sp>
-        <p:nvSpPr>
-          <p:cNvPr id="74" name="TextBox 73"/>
-          <p:cNvSpPr txBox="1"/>
-          <p:nvPr/>
-        </p:nvSpPr>
-        <p:spPr>
-          <a:xfrm>
-            <a:off x="2414016" y="2404872"/>
-            <a:ext cx="365760" cy="109728"/>
-          </a:xfrm>
-          <a:prstGeom prst="rect">
-            <a:avLst/>
-          </a:prstGeom>
-          <a:noFill/>
-        </p:spPr>
-        <p:txBody>
-          <a:bodyPr wrap="none" lIns="0" rIns="0" tIns="0" bIns="0">
-            <a:spAutoFit/>
-          </a:bodyPr>
-          <a:lstStyle/>
-          <a:p>
-            <a:pPr>
-              <a:defRPr sz="620" b="1">
-                <a:solidFill>
-                  <a:srgbClr val="212121"/>
-                </a:solidFill>
-                <a:latin typeface="Arial"/>
-              </a:defRPr>
-            </a:pPr>
-            <a:r>
-              <a:t>12%</a:t>
-            </a:r>
-          </a:p>
-        </p:txBody>
-      </p:sp>
-      <p:sp>
-        <p:nvSpPr>
-          <p:cNvPr id="75" name="TextBox 74"/>
-          <p:cNvSpPr txBox="1"/>
-          <p:nvPr/>
-        </p:nvSpPr>
-        <p:spPr>
-          <a:xfrm>
-            <a:off x="182880" y="2514600"/>
-            <a:ext cx="777240" cy="109728"/>
-          </a:xfrm>
-          <a:prstGeom prst="rect">
-            <a:avLst/>
-          </a:prstGeom>
-          <a:noFill/>
-        </p:spPr>
-        <p:txBody>
-          <a:bodyPr wrap="none" lIns="0" rIns="0" tIns="0" bIns="0">
-            <a:spAutoFit/>
-          </a:bodyPr>
-          <a:lstStyle/>
-          <a:p>
-            <a:pPr>
-              <a:defRPr sz="620" b="0">
-                <a:solidFill>
-                  <a:srgbClr val="212121"/>
-                </a:solidFill>
-                <a:latin typeface="Arial"/>
-              </a:defRPr>
-            </a:pPr>
-            <a:r>
-              <a:t>Home Security</a:t>
-            </a:r>
-          </a:p>
-        </p:txBody>
-      </p:sp>
-      <p:sp>
-        <p:nvSpPr>
-          <p:cNvPr id="76" name="Rectangle 75"/>
-          <p:cNvSpPr/>
-          <p:nvPr/>
-        </p:nvSpPr>
-        <p:spPr>
-          <a:xfrm>
-            <a:off x="1005840" y="2542032"/>
-            <a:ext cx="1371600" cy="45720"/>
-          </a:xfrm>
-          <a:prstGeom prst="rect">
-            <a:avLst/>
-          </a:prstGeom>
-          <a:solidFill>
-            <a:srgbClr val="F0F0F0"/>
-          </a:solidFill>
-          <a:ln>
-            <a:noFill/>
-          </a:ln>
-        </p:spPr>
-        <p:style>
-          <a:lnRef idx="1">
-            <a:schemeClr val="accent1"/>
-          </a:lnRef>
-          <a:fillRef idx="3">
-            <a:schemeClr val="accent1"/>
-          </a:fillRef>
-          <a:effectRef idx="2">
-            <a:schemeClr val="accent1"/>
-          </a:effectRef>
-          <a:fontRef idx="minor">
-            <a:schemeClr val="lt1"/>
-          </a:fontRef>
-        </p:style>
-        <p:txBody>
-          <a:bodyPr rtlCol="0" anchor="ctr"/>
-          <a:lstStyle/>
-          <a:p>
-            <a:pPr algn="ctr"/>
-          </a:p>
-        </p:txBody>
-      </p:sp>
-      <p:sp>
-        <p:nvSpPr>
-          <p:cNvPr id="77" name="Rectangle 76"/>
-          <p:cNvSpPr/>
-          <p:nvPr/>
-        </p:nvSpPr>
-        <p:spPr>
-          <a:xfrm>
-            <a:off x="1005840" y="2542032"/>
-            <a:ext cx="27432" cy="45720"/>
-          </a:xfrm>
-          <a:prstGeom prst="rect">
-            <a:avLst/>
-          </a:prstGeom>
-          <a:solidFill>
-            <a:srgbClr val="ED1D24"/>
-          </a:solidFill>
-          <a:ln>
-            <a:noFill/>
-          </a:ln>
-        </p:spPr>
-        <p:style>
-          <a:lnRef idx="1">
-            <a:schemeClr val="accent1"/>
-          </a:lnRef>
-          <a:fillRef idx="3">
-            <a:schemeClr val="accent1"/>
-          </a:fillRef>
-          <a:effectRef idx="2">
-            <a:schemeClr val="accent1"/>
-          </a:effectRef>
-          <a:fontRef idx="minor">
-            <a:schemeClr val="lt1"/>
-          </a:fontRef>
-        </p:style>
-        <p:txBody>
-          <a:bodyPr rtlCol="0" anchor="ctr"/>
-          <a:lstStyle/>
-          <a:p>
-            <a:pPr algn="ctr"/>
-          </a:p>
-        </p:txBody>
-      </p:sp>
-      <p:sp>
-        <p:nvSpPr>
-          <p:cNvPr id="78" name="TextBox 77"/>
-          <p:cNvSpPr txBox="1"/>
-          <p:nvPr/>
-        </p:nvSpPr>
-        <p:spPr>
-          <a:xfrm>
-            <a:off x="2414016" y="2514600"/>
-            <a:ext cx="365760" cy="109728"/>
-          </a:xfrm>
-          <a:prstGeom prst="rect">
-            <a:avLst/>
-          </a:prstGeom>
-          <a:noFill/>
-        </p:spPr>
-        <p:txBody>
-          <a:bodyPr wrap="none" lIns="0" rIns="0" tIns="0" bIns="0">
-            <a:spAutoFit/>
-          </a:bodyPr>
-          <a:lstStyle/>
-          <a:p>
-            <a:pPr>
-              <a:defRPr sz="620" b="1">
-                <a:solidFill>
-                  <a:srgbClr val="212121"/>
-                </a:solidFill>
-                <a:latin typeface="Arial"/>
-              </a:defRPr>
-            </a:pPr>
-            <a:r>
-              <a:t>2%</a:t>
-            </a:r>
-          </a:p>
-        </p:txBody>
-      </p:sp>
-      <p:sp>
-        <p:nvSpPr>
-          <p:cNvPr id="79" name="TextBox 78"/>
-          <p:cNvSpPr txBox="1"/>
-          <p:nvPr/>
-        </p:nvSpPr>
-        <p:spPr>
-          <a:xfrm>
-            <a:off x="182880" y="2624328"/>
-            <a:ext cx="777240" cy="109728"/>
-          </a:xfrm>
-          <a:prstGeom prst="rect">
-            <a:avLst/>
-          </a:prstGeom>
-          <a:noFill/>
-        </p:spPr>
-        <p:txBody>
-          <a:bodyPr wrap="none" lIns="0" rIns="0" tIns="0" bIns="0">
-            <a:spAutoFit/>
-          </a:bodyPr>
-          <a:lstStyle/>
-          <a:p>
-            <a:pPr>
-              <a:defRPr sz="620" b="0">
-                <a:solidFill>
-                  <a:srgbClr val="212121"/>
-                </a:solidFill>
-                <a:latin typeface="Arial"/>
-              </a:defRPr>
-            </a:pPr>
-            <a:r>
-              <a:t>Emerging Digital</a:t>
-            </a:r>
-          </a:p>
-        </p:txBody>
-      </p:sp>
-      <p:sp>
-        <p:nvSpPr>
-          <p:cNvPr id="80" name="Rectangle 79"/>
-          <p:cNvSpPr/>
-          <p:nvPr/>
-        </p:nvSpPr>
-        <p:spPr>
-          <a:xfrm>
-            <a:off x="1005840" y="2651760"/>
-            <a:ext cx="1371600" cy="45720"/>
-          </a:xfrm>
-          <a:prstGeom prst="rect">
-            <a:avLst/>
-          </a:prstGeom>
-          <a:solidFill>
-            <a:srgbClr val="F0F0F0"/>
-          </a:solidFill>
-          <a:ln>
-            <a:noFill/>
-          </a:ln>
-        </p:spPr>
-        <p:style>
-          <a:lnRef idx="1">
-            <a:schemeClr val="accent1"/>
-          </a:lnRef>
-          <a:fillRef idx="3">
-            <a:schemeClr val="accent1"/>
-          </a:fillRef>
-          <a:effectRef idx="2">
-            <a:schemeClr val="accent1"/>
-          </a:effectRef>
-          <a:fontRef idx="minor">
-            <a:schemeClr val="lt1"/>
-          </a:fontRef>
-        </p:style>
-        <p:txBody>
-          <a:bodyPr rtlCol="0" anchor="ctr"/>
-          <a:lstStyle/>
-          <a:p>
-            <a:pPr algn="ctr"/>
-          </a:p>
-        </p:txBody>
-      </p:sp>
-      <p:sp>
-        <p:nvSpPr>
-          <p:cNvPr id="81" name="TextBox 80"/>
-          <p:cNvSpPr txBox="1"/>
-          <p:nvPr/>
-        </p:nvSpPr>
-        <p:spPr>
-          <a:xfrm>
-            <a:off x="2414016" y="2624328"/>
-            <a:ext cx="365760" cy="109728"/>
-          </a:xfrm>
-          <a:prstGeom prst="rect">
-            <a:avLst/>
-          </a:prstGeom>
-          <a:noFill/>
-        </p:spPr>
-        <p:txBody>
-          <a:bodyPr wrap="none" lIns="0" rIns="0" tIns="0" bIns="0">
-            <a:spAutoFit/>
-          </a:bodyPr>
-          <a:lstStyle/>
-          <a:p>
-            <a:pPr>
-              <a:defRPr sz="620" b="1">
-                <a:solidFill>
-                  <a:srgbClr val="212121"/>
-                </a:solidFill>
-                <a:latin typeface="Arial"/>
-              </a:defRPr>
-            </a:pPr>
-            <a:r>
-              <a:t>0%</a:t>
-            </a:r>
-          </a:p>
-        </p:txBody>
-      </p:sp>
-      <p:sp>
-        <p:nvSpPr>
-          <p:cNvPr id="82" name="TextBox 81"/>
-          <p:cNvSpPr txBox="1"/>
-          <p:nvPr/>
-        </p:nvSpPr>
-        <p:spPr>
-          <a:xfrm>
-            <a:off x="182880" y="2715768"/>
-            <a:ext cx="2734056" cy="109728"/>
-          </a:xfrm>
-          <a:prstGeom prst="rect">
-            <a:avLst/>
-          </a:prstGeom>
-          <a:noFill/>
-        </p:spPr>
-        <p:txBody>
-          <a:bodyPr wrap="none" lIns="0" rIns="0" tIns="0" bIns="0">
-            <a:spAutoFit/>
-          </a:bodyPr>
-          <a:lstStyle/>
-          <a:p>
-            <a:pPr>
-              <a:defRPr sz="550" b="0" i="1">
-                <a:solidFill>
-                  <a:srgbClr val="787878"/>
-                </a:solidFill>
-                <a:latin typeface="Arial"/>
-              </a:defRPr>
-            </a:pPr>
-            <a:r>
-              <a:t>Src: Case intro; Exhibits 2 &amp; 3, CAGR computed FY24–27</a:t>
-            </a:r>
-          </a:p>
-        </p:txBody>
-      </p:sp>
-      <p:sp>
-        <p:nvSpPr>
-          <p:cNvPr id="83" name="Rounded Rectangle 82"/>
-          <p:cNvSpPr/>
-          <p:nvPr/>
-        </p:nvSpPr>
-        <p:spPr>
-          <a:xfrm>
-            <a:off x="3090672" y="1051560"/>
-            <a:ext cx="2880360" cy="1783080"/>
+            <a:off x="109728" y="1353312"/>
+            <a:ext cx="2880360" cy="1627632"/>
           </a:xfrm>
           <a:prstGeom prst="roundRect">
             <a:avLst/>
@@ -7081,13 +6336,13 @@
       </p:sp>
       <p:sp>
         <p:nvSpPr>
-          <p:cNvPr id="84" name="Rectangle 83"/>
+          <p:cNvPr id="70" name="Rectangle 69"/>
           <p:cNvSpPr/>
           <p:nvPr/>
         </p:nvSpPr>
         <p:spPr>
           <a:xfrm>
-            <a:off x="3163824" y="1124712"/>
+            <a:off x="182880" y="1426464"/>
             <a:ext cx="164592" cy="164592"/>
           </a:xfrm>
           <a:prstGeom prst="rect">
@@ -7115,7 +6370,7 @@
           </a:fontRef>
         </p:style>
         <p:txBody>
-          <a:bodyPr rtlCol="0" anchor="ctr" wrap="none" lIns="0" rIns="0" tIns="0" bIns="0"/>
+          <a:bodyPr rtlCol="0" anchor="ctr" lIns="0" rIns="0" tIns="0" bIns="0"/>
           <a:lstStyle/>
           <a:p>
             <a:pPr algn="ctr">
@@ -7127,20 +6382,20 @@
               </a:defRPr>
             </a:pPr>
             <a:r>
-              <a:t>2</a:t>
-            </a:r>
-          </a:p>
-        </p:txBody>
-      </p:sp>
-      <p:sp>
-        <p:nvSpPr>
-          <p:cNvPr id="85" name="TextBox 84"/>
+              <a:t>1</a:t>
+            </a:r>
+          </a:p>
+        </p:txBody>
+      </p:sp>
+      <p:sp>
+        <p:nvSpPr>
+          <p:cNvPr id="71" name="TextBox 70"/>
           <p:cNvSpPr txBox="1"/>
           <p:nvPr/>
         </p:nvSpPr>
         <p:spPr>
           <a:xfrm>
-            <a:off x="3383280" y="1097280"/>
+            <a:off x="402336" y="1399032"/>
             <a:ext cx="2514600" cy="219456"/>
           </a:xfrm>
           <a:prstGeom prst="rect">
@@ -7163,20 +6418,20 @@
               </a:defRPr>
             </a:pPr>
             <a:r>
-              <a:t>Product Portfolio Today</a:t>
-            </a:r>
-          </a:p>
-        </p:txBody>
-      </p:sp>
-      <p:sp>
-        <p:nvSpPr>
-          <p:cNvPr id="86" name="TextBox 85"/>
+              <a:t>Market Landscape &amp; Wallet Opportunity</a:t>
+            </a:r>
+          </a:p>
+        </p:txBody>
+      </p:sp>
+      <p:sp>
+        <p:nvSpPr>
+          <p:cNvPr id="72" name="TextBox 71"/>
           <p:cNvSpPr txBox="1"/>
           <p:nvPr/>
         </p:nvSpPr>
         <p:spPr>
           <a:xfrm>
-            <a:off x="3383280" y="1271016"/>
+            <a:off x="402336" y="1572768"/>
             <a:ext cx="2514600" cy="164592"/>
           </a:xfrm>
           <a:prstGeom prst="rect">
@@ -7199,21 +6454,92 @@
               </a:defRPr>
             </a:pPr>
             <a:r>
-              <a:t>Five live product lines, sold and run in isolation</a:t>
-            </a:r>
-          </a:p>
-        </p:txBody>
-      </p:sp>
-      <p:sp>
-        <p:nvSpPr>
-          <p:cNvPr id="87" name="TextBox 86"/>
+              <a:t>Where category growth and captured wallet share diverge</a:t>
+            </a:r>
+          </a:p>
+        </p:txBody>
+      </p:sp>
+      <p:sp>
+        <p:nvSpPr>
+          <p:cNvPr id="73" name="TextBox 72"/>
           <p:cNvSpPr txBox="1"/>
           <p:nvPr/>
         </p:nvSpPr>
         <p:spPr>
           <a:xfrm>
-            <a:off x="3136392" y="1435608"/>
-            <a:ext cx="530352" cy="201168"/>
+            <a:off x="182880" y="1737360"/>
+            <a:ext cx="2734056" cy="685800"/>
+          </a:xfrm>
+          <a:prstGeom prst="rect">
+            <a:avLst/>
+          </a:prstGeom>
+          <a:noFill/>
+        </p:spPr>
+        <p:txBody>
+          <a:bodyPr wrap="square" lIns="0" rIns="0" tIns="0" bIns="0">
+            <a:spAutoFit/>
+          </a:bodyPr>
+          <a:lstStyle/>
+          <a:p>
+            <a:pPr>
+              <a:spcAft>
+                <a:spcPts val="200"/>
+              </a:spcAft>
+              <a:defRPr sz="650" b="0">
+                <a:solidFill>
+                  <a:srgbClr val="212121"/>
+                </a:solidFill>
+                <a:latin typeface="Arial"/>
+              </a:defRPr>
+            </a:pPr>
+            <a:r>
+              <a:t>• India: ₹2.83L per-capita disposable income, 430M 5G subscribers, ~1B data users; industry mobility ARPU ₹194.57</a:t>
+            </a:r>
+          </a:p>
+          <a:p>
+            <a:pPr>
+              <a:spcAft>
+                <a:spcPts val="200"/>
+              </a:spcAft>
+              <a:defRPr sz="650" b="0">
+                <a:solidFill>
+                  <a:srgbClr val="212121"/>
+                </a:solidFill>
+                <a:latin typeface="Arial"/>
+              </a:defRPr>
+            </a:pPr>
+            <a:r>
+              <a:t>• Altura already leads the industry on ARPU (+₹40 vs. nearest rival) - but prepaid mobility growth is flat and pricing is capped</a:t>
+            </a:r>
+          </a:p>
+          <a:p>
+            <a:pPr>
+              <a:spcAft>
+                <a:spcPts val="200"/>
+              </a:spcAft>
+              <a:defRPr sz="650" b="0">
+                <a:solidFill>
+                  <a:srgbClr val="212121"/>
+                </a:solidFill>
+                <a:latin typeface="Arial"/>
+              </a:defRPr>
+            </a:pPr>
+            <a:r>
+              <a:t>• Computed CAGR, FY24–27: Broadband +22%, Surveillance +36%, DTH -2% - fastest-growing lines are where Altura's wallet share is lowest</a:t>
+            </a:r>
+          </a:p>
+        </p:txBody>
+      </p:sp>
+      <p:sp>
+        <p:nvSpPr>
+          <p:cNvPr id="74" name="TextBox 73"/>
+          <p:cNvSpPr txBox="1"/>
+          <p:nvPr/>
+        </p:nvSpPr>
+        <p:spPr>
+          <a:xfrm>
+            <a:off x="182880" y="2468880"/>
+            <a:ext cx="777240" cy="100584"/>
           </a:xfrm>
           <a:prstGeom prst="rect">
             <a:avLst/>
@@ -7226,30 +6552,116 @@
           </a:bodyPr>
           <a:lstStyle/>
           <a:p>
-            <a:pPr algn="ctr">
-              <a:defRPr sz="1300" b="0">
-                <a:solidFill>
-                  <a:srgbClr val="ED1D24"/>
+            <a:pPr>
+              <a:defRPr sz="600" b="0">
+                <a:solidFill>
+                  <a:srgbClr val="212121"/>
                 </a:solidFill>
                 <a:latin typeface="Arial"/>
               </a:defRPr>
             </a:pPr>
             <a:r>
-              <a:t>📞</a:t>
-            </a:r>
-          </a:p>
-        </p:txBody>
-      </p:sp>
-      <p:sp>
-        <p:nvSpPr>
-          <p:cNvPr id="88" name="TextBox 87"/>
+              <a:t>Connectivity</a:t>
+            </a:r>
+          </a:p>
+        </p:txBody>
+      </p:sp>
+      <p:sp>
+        <p:nvSpPr>
+          <p:cNvPr id="75" name="Rectangle 74"/>
+          <p:cNvSpPr/>
+          <p:nvPr/>
+        </p:nvSpPr>
+        <p:spPr>
+          <a:xfrm>
+            <a:off x="1005840" y="2496312"/>
+            <a:ext cx="1371600" cy="36576"/>
+          </a:xfrm>
+          <a:prstGeom prst="rect">
+            <a:avLst/>
+          </a:prstGeom>
+          <a:solidFill>
+            <a:srgbClr val="F0F0F0"/>
+          </a:solidFill>
+          <a:ln>
+            <a:noFill/>
+          </a:ln>
+        </p:spPr>
+        <p:style>
+          <a:lnRef idx="1">
+            <a:schemeClr val="accent1"/>
+          </a:lnRef>
+          <a:fillRef idx="3">
+            <a:schemeClr val="accent1"/>
+          </a:fillRef>
+          <a:effectRef idx="2">
+            <a:schemeClr val="accent1"/>
+          </a:effectRef>
+          <a:fontRef idx="minor">
+            <a:schemeClr val="lt1"/>
+          </a:fontRef>
+        </p:style>
+        <p:txBody>
+          <a:bodyPr rtlCol="0" anchor="ctr"/>
+          <a:lstStyle/>
+          <a:p>
+            <a:pPr algn="ctr"/>
+          </a:p>
+        </p:txBody>
+      </p:sp>
+      <p:sp>
+        <p:nvSpPr>
+          <p:cNvPr id="76" name="Rectangle 75"/>
+          <p:cNvSpPr/>
+          <p:nvPr/>
+        </p:nvSpPr>
+        <p:spPr>
+          <a:xfrm>
+            <a:off x="1005840" y="2496312"/>
+            <a:ext cx="480059" cy="36576"/>
+          </a:xfrm>
+          <a:prstGeom prst="rect">
+            <a:avLst/>
+          </a:prstGeom>
+          <a:solidFill>
+            <a:srgbClr val="ED1D24"/>
+          </a:solidFill>
+          <a:ln>
+            <a:noFill/>
+          </a:ln>
+        </p:spPr>
+        <p:style>
+          <a:lnRef idx="1">
+            <a:schemeClr val="accent1"/>
+          </a:lnRef>
+          <a:fillRef idx="3">
+            <a:schemeClr val="accent1"/>
+          </a:fillRef>
+          <a:effectRef idx="2">
+            <a:schemeClr val="accent1"/>
+          </a:effectRef>
+          <a:fontRef idx="minor">
+            <a:schemeClr val="lt1"/>
+          </a:fontRef>
+        </p:style>
+        <p:txBody>
+          <a:bodyPr rtlCol="0" anchor="ctr"/>
+          <a:lstStyle/>
+          <a:p>
+            <a:pPr algn="ctr"/>
+          </a:p>
+        </p:txBody>
+      </p:sp>
+      <p:sp>
+        <p:nvSpPr>
+          <p:cNvPr id="77" name="TextBox 76"/>
           <p:cNvSpPr txBox="1"/>
           <p:nvPr/>
         </p:nvSpPr>
         <p:spPr>
           <a:xfrm>
-            <a:off x="3136392" y="1655064"/>
-            <a:ext cx="530352" cy="292608"/>
+            <a:off x="2414016" y="2468880"/>
+            <a:ext cx="365760" cy="100584"/>
           </a:xfrm>
           <a:prstGeom prst="rect">
             <a:avLst/>
@@ -7262,8 +6674,8 @@
           </a:bodyPr>
           <a:lstStyle/>
           <a:p>
-            <a:pPr algn="ctr">
-              <a:defRPr sz="550" b="1">
+            <a:pPr>
+              <a:defRPr sz="600" b="1">
                 <a:solidFill>
                   <a:srgbClr val="212121"/>
                 </a:solidFill>
@@ -7271,29 +6683,21 @@
               </a:defRPr>
             </a:pPr>
             <a:r>
-              <a:t>Mobility</a:t>
-            </a:r>
-            <a:br/>
-            <a:r>
-              <a:t>(prepaid +</a:t>
-            </a:r>
-            <a:br/>
-            <a:r>
-              <a:t>postpaid)</a:t>
-            </a:r>
-          </a:p>
-        </p:txBody>
-      </p:sp>
-      <p:sp>
-        <p:nvSpPr>
-          <p:cNvPr id="89" name="TextBox 88"/>
+              <a:t>35%</a:t>
+            </a:r>
+          </a:p>
+        </p:txBody>
+      </p:sp>
+      <p:sp>
+        <p:nvSpPr>
+          <p:cNvPr id="78" name="TextBox 77"/>
           <p:cNvSpPr txBox="1"/>
           <p:nvPr/>
         </p:nvSpPr>
         <p:spPr>
           <a:xfrm>
-            <a:off x="3685032" y="1435608"/>
-            <a:ext cx="530352" cy="201168"/>
+            <a:off x="182880" y="2569464"/>
+            <a:ext cx="777240" cy="100584"/>
           </a:xfrm>
           <a:prstGeom prst="rect">
             <a:avLst/>
@@ -7306,30 +6710,116 @@
           </a:bodyPr>
           <a:lstStyle/>
           <a:p>
-            <a:pPr algn="ctr">
-              <a:defRPr sz="1300" b="0">
-                <a:solidFill>
-                  <a:srgbClr val="ED1D24"/>
+            <a:pPr>
+              <a:defRPr sz="600" b="0">
+                <a:solidFill>
+                  <a:srgbClr val="212121"/>
                 </a:solidFill>
                 <a:latin typeface="Arial"/>
               </a:defRPr>
             </a:pPr>
             <a:r>
-              <a:t>📶</a:t>
-            </a:r>
-          </a:p>
-        </p:txBody>
-      </p:sp>
-      <p:sp>
-        <p:nvSpPr>
-          <p:cNvPr id="90" name="TextBox 89"/>
+              <a:t>Entertainment</a:t>
+            </a:r>
+          </a:p>
+        </p:txBody>
+      </p:sp>
+      <p:sp>
+        <p:nvSpPr>
+          <p:cNvPr id="79" name="Rectangle 78"/>
+          <p:cNvSpPr/>
+          <p:nvPr/>
+        </p:nvSpPr>
+        <p:spPr>
+          <a:xfrm>
+            <a:off x="1005840" y="2596896"/>
+            <a:ext cx="1371600" cy="36576"/>
+          </a:xfrm>
+          <a:prstGeom prst="rect">
+            <a:avLst/>
+          </a:prstGeom>
+          <a:solidFill>
+            <a:srgbClr val="F0F0F0"/>
+          </a:solidFill>
+          <a:ln>
+            <a:noFill/>
+          </a:ln>
+        </p:spPr>
+        <p:style>
+          <a:lnRef idx="1">
+            <a:schemeClr val="accent1"/>
+          </a:lnRef>
+          <a:fillRef idx="3">
+            <a:schemeClr val="accent1"/>
+          </a:fillRef>
+          <a:effectRef idx="2">
+            <a:schemeClr val="accent1"/>
+          </a:effectRef>
+          <a:fontRef idx="minor">
+            <a:schemeClr val="lt1"/>
+          </a:fontRef>
+        </p:style>
+        <p:txBody>
+          <a:bodyPr rtlCol="0" anchor="ctr"/>
+          <a:lstStyle/>
+          <a:p>
+            <a:pPr algn="ctr"/>
+          </a:p>
+        </p:txBody>
+      </p:sp>
+      <p:sp>
+        <p:nvSpPr>
+          <p:cNvPr id="80" name="Rectangle 79"/>
+          <p:cNvSpPr/>
+          <p:nvPr/>
+        </p:nvSpPr>
+        <p:spPr>
+          <a:xfrm>
+            <a:off x="1005840" y="2596896"/>
+            <a:ext cx="164592" cy="36576"/>
+          </a:xfrm>
+          <a:prstGeom prst="rect">
+            <a:avLst/>
+          </a:prstGeom>
+          <a:solidFill>
+            <a:srgbClr val="ED1D24"/>
+          </a:solidFill>
+          <a:ln>
+            <a:noFill/>
+          </a:ln>
+        </p:spPr>
+        <p:style>
+          <a:lnRef idx="1">
+            <a:schemeClr val="accent1"/>
+          </a:lnRef>
+          <a:fillRef idx="3">
+            <a:schemeClr val="accent1"/>
+          </a:fillRef>
+          <a:effectRef idx="2">
+            <a:schemeClr val="accent1"/>
+          </a:effectRef>
+          <a:fontRef idx="minor">
+            <a:schemeClr val="lt1"/>
+          </a:fontRef>
+        </p:style>
+        <p:txBody>
+          <a:bodyPr rtlCol="0" anchor="ctr"/>
+          <a:lstStyle/>
+          <a:p>
+            <a:pPr algn="ctr"/>
+          </a:p>
+        </p:txBody>
+      </p:sp>
+      <p:sp>
+        <p:nvSpPr>
+          <p:cNvPr id="81" name="TextBox 80"/>
           <p:cNvSpPr txBox="1"/>
           <p:nvPr/>
         </p:nvSpPr>
         <p:spPr>
           <a:xfrm>
-            <a:off x="3685032" y="1655064"/>
-            <a:ext cx="530352" cy="292608"/>
+            <a:off x="2414016" y="2569464"/>
+            <a:ext cx="365760" cy="100584"/>
           </a:xfrm>
           <a:prstGeom prst="rect">
             <a:avLst/>
@@ -7342,8 +6832,8 @@
           </a:bodyPr>
           <a:lstStyle/>
           <a:p>
-            <a:pPr algn="ctr">
-              <a:defRPr sz="550" b="1">
+            <a:pPr>
+              <a:defRPr sz="600" b="1">
                 <a:solidFill>
                   <a:srgbClr val="212121"/>
                 </a:solidFill>
@@ -7351,25 +6841,21 @@
               </a:defRPr>
             </a:pPr>
             <a:r>
-              <a:t>Broadband /</a:t>
-            </a:r>
-            <a:br/>
-            <a:r>
-              <a:t>WiFi</a:t>
-            </a:r>
-          </a:p>
-        </p:txBody>
-      </p:sp>
-      <p:sp>
-        <p:nvSpPr>
-          <p:cNvPr id="91" name="TextBox 90"/>
+              <a:t>12%</a:t>
+            </a:r>
+          </a:p>
+        </p:txBody>
+      </p:sp>
+      <p:sp>
+        <p:nvSpPr>
+          <p:cNvPr id="82" name="TextBox 81"/>
           <p:cNvSpPr txBox="1"/>
           <p:nvPr/>
         </p:nvSpPr>
         <p:spPr>
           <a:xfrm>
-            <a:off x="4233672" y="1435608"/>
-            <a:ext cx="530352" cy="201168"/>
+            <a:off x="182880" y="2670048"/>
+            <a:ext cx="777240" cy="100584"/>
           </a:xfrm>
           <a:prstGeom prst="rect">
             <a:avLst/>
@@ -7382,30 +6868,116 @@
           </a:bodyPr>
           <a:lstStyle/>
           <a:p>
-            <a:pPr algn="ctr">
-              <a:defRPr sz="1300" b="0">
-                <a:solidFill>
-                  <a:srgbClr val="ED1D24"/>
+            <a:pPr>
+              <a:defRPr sz="600" b="0">
+                <a:solidFill>
+                  <a:srgbClr val="212121"/>
                 </a:solidFill>
                 <a:latin typeface="Arial"/>
               </a:defRPr>
             </a:pPr>
             <a:r>
-              <a:t>📺</a:t>
-            </a:r>
-          </a:p>
-        </p:txBody>
-      </p:sp>
-      <p:sp>
-        <p:nvSpPr>
-          <p:cNvPr id="92" name="TextBox 91"/>
+              <a:t>Home Security</a:t>
+            </a:r>
+          </a:p>
+        </p:txBody>
+      </p:sp>
+      <p:sp>
+        <p:nvSpPr>
+          <p:cNvPr id="83" name="Rectangle 82"/>
+          <p:cNvSpPr/>
+          <p:nvPr/>
+        </p:nvSpPr>
+        <p:spPr>
+          <a:xfrm>
+            <a:off x="1005840" y="2697480"/>
+            <a:ext cx="1371600" cy="36576"/>
+          </a:xfrm>
+          <a:prstGeom prst="rect">
+            <a:avLst/>
+          </a:prstGeom>
+          <a:solidFill>
+            <a:srgbClr val="F0F0F0"/>
+          </a:solidFill>
+          <a:ln>
+            <a:noFill/>
+          </a:ln>
+        </p:spPr>
+        <p:style>
+          <a:lnRef idx="1">
+            <a:schemeClr val="accent1"/>
+          </a:lnRef>
+          <a:fillRef idx="3">
+            <a:schemeClr val="accent1"/>
+          </a:fillRef>
+          <a:effectRef idx="2">
+            <a:schemeClr val="accent1"/>
+          </a:effectRef>
+          <a:fontRef idx="minor">
+            <a:schemeClr val="lt1"/>
+          </a:fontRef>
+        </p:style>
+        <p:txBody>
+          <a:bodyPr rtlCol="0" anchor="ctr"/>
+          <a:lstStyle/>
+          <a:p>
+            <a:pPr algn="ctr"/>
+          </a:p>
+        </p:txBody>
+      </p:sp>
+      <p:sp>
+        <p:nvSpPr>
+          <p:cNvPr id="84" name="Rectangle 83"/>
+          <p:cNvSpPr/>
+          <p:nvPr/>
+        </p:nvSpPr>
+        <p:spPr>
+          <a:xfrm>
+            <a:off x="1005840" y="2697480"/>
+            <a:ext cx="27432" cy="36576"/>
+          </a:xfrm>
+          <a:prstGeom prst="rect">
+            <a:avLst/>
+          </a:prstGeom>
+          <a:solidFill>
+            <a:srgbClr val="ED1D24"/>
+          </a:solidFill>
+          <a:ln>
+            <a:noFill/>
+          </a:ln>
+        </p:spPr>
+        <p:style>
+          <a:lnRef idx="1">
+            <a:schemeClr val="accent1"/>
+          </a:lnRef>
+          <a:fillRef idx="3">
+            <a:schemeClr val="accent1"/>
+          </a:fillRef>
+          <a:effectRef idx="2">
+            <a:schemeClr val="accent1"/>
+          </a:effectRef>
+          <a:fontRef idx="minor">
+            <a:schemeClr val="lt1"/>
+          </a:fontRef>
+        </p:style>
+        <p:txBody>
+          <a:bodyPr rtlCol="0" anchor="ctr"/>
+          <a:lstStyle/>
+          <a:p>
+            <a:pPr algn="ctr"/>
+          </a:p>
+        </p:txBody>
+      </p:sp>
+      <p:sp>
+        <p:nvSpPr>
+          <p:cNvPr id="85" name="TextBox 84"/>
           <p:cNvSpPr txBox="1"/>
           <p:nvPr/>
         </p:nvSpPr>
         <p:spPr>
           <a:xfrm>
-            <a:off x="4233672" y="1655064"/>
-            <a:ext cx="530352" cy="292608"/>
+            <a:off x="2414016" y="2670048"/>
+            <a:ext cx="365760" cy="100584"/>
           </a:xfrm>
           <a:prstGeom prst="rect">
             <a:avLst/>
@@ -7418,8 +6990,8 @@
           </a:bodyPr>
           <a:lstStyle/>
           <a:p>
-            <a:pPr algn="ctr">
-              <a:defRPr sz="550" b="1">
+            <a:pPr>
+              <a:defRPr sz="600" b="1">
                 <a:solidFill>
                   <a:srgbClr val="212121"/>
                 </a:solidFill>
@@ -7427,25 +6999,21 @@
               </a:defRPr>
             </a:pPr>
             <a:r>
-              <a:t>OTT +</a:t>
-            </a:r>
-            <a:br/>
-            <a:r>
-              <a:t>TV</a:t>
-            </a:r>
-          </a:p>
-        </p:txBody>
-      </p:sp>
-      <p:sp>
-        <p:nvSpPr>
-          <p:cNvPr id="93" name="TextBox 92"/>
+              <a:t>2%</a:t>
+            </a:r>
+          </a:p>
+        </p:txBody>
+      </p:sp>
+      <p:sp>
+        <p:nvSpPr>
+          <p:cNvPr id="86" name="TextBox 85"/>
           <p:cNvSpPr txBox="1"/>
           <p:nvPr/>
         </p:nvSpPr>
         <p:spPr>
           <a:xfrm>
-            <a:off x="4782311" y="1435608"/>
-            <a:ext cx="530352" cy="201168"/>
+            <a:off x="182880" y="2770632"/>
+            <a:ext cx="777240" cy="100584"/>
           </a:xfrm>
           <a:prstGeom prst="rect">
             <a:avLst/>
@@ -7458,30 +7026,73 @@
           </a:bodyPr>
           <a:lstStyle/>
           <a:p>
-            <a:pPr algn="ctr">
-              <a:defRPr sz="1300" b="0">
-                <a:solidFill>
-                  <a:srgbClr val="ED1D24"/>
+            <a:pPr>
+              <a:defRPr sz="600" b="0">
+                <a:solidFill>
+                  <a:srgbClr val="212121"/>
                 </a:solidFill>
                 <a:latin typeface="Arial"/>
               </a:defRPr>
             </a:pPr>
             <a:r>
-              <a:t>🛡️</a:t>
-            </a:r>
-          </a:p>
-        </p:txBody>
-      </p:sp>
-      <p:sp>
-        <p:nvSpPr>
-          <p:cNvPr id="94" name="TextBox 93"/>
+              <a:t>Emerging Digital</a:t>
+            </a:r>
+          </a:p>
+        </p:txBody>
+      </p:sp>
+      <p:sp>
+        <p:nvSpPr>
+          <p:cNvPr id="87" name="Rectangle 86"/>
+          <p:cNvSpPr/>
+          <p:nvPr/>
+        </p:nvSpPr>
+        <p:spPr>
+          <a:xfrm>
+            <a:off x="1005840" y="2798064"/>
+            <a:ext cx="1371600" cy="36576"/>
+          </a:xfrm>
+          <a:prstGeom prst="rect">
+            <a:avLst/>
+          </a:prstGeom>
+          <a:solidFill>
+            <a:srgbClr val="F0F0F0"/>
+          </a:solidFill>
+          <a:ln>
+            <a:noFill/>
+          </a:ln>
+        </p:spPr>
+        <p:style>
+          <a:lnRef idx="1">
+            <a:schemeClr val="accent1"/>
+          </a:lnRef>
+          <a:fillRef idx="3">
+            <a:schemeClr val="accent1"/>
+          </a:fillRef>
+          <a:effectRef idx="2">
+            <a:schemeClr val="accent1"/>
+          </a:effectRef>
+          <a:fontRef idx="minor">
+            <a:schemeClr val="lt1"/>
+          </a:fontRef>
+        </p:style>
+        <p:txBody>
+          <a:bodyPr rtlCol="0" anchor="ctr"/>
+          <a:lstStyle/>
+          <a:p>
+            <a:pPr algn="ctr"/>
+          </a:p>
+        </p:txBody>
+      </p:sp>
+      <p:sp>
+        <p:nvSpPr>
+          <p:cNvPr id="88" name="TextBox 87"/>
           <p:cNvSpPr txBox="1"/>
           <p:nvPr/>
         </p:nvSpPr>
         <p:spPr>
           <a:xfrm>
-            <a:off x="4782311" y="1655064"/>
-            <a:ext cx="530352" cy="292608"/>
+            <a:off x="2414016" y="2770632"/>
+            <a:ext cx="365760" cy="100584"/>
           </a:xfrm>
           <a:prstGeom prst="rect">
             <a:avLst/>
@@ -7494,8 +7105,8 @@
           </a:bodyPr>
           <a:lstStyle/>
           <a:p>
-            <a:pPr algn="ctr">
-              <a:defRPr sz="550" b="1">
+            <a:pPr>
+              <a:defRPr sz="600" b="1">
                 <a:solidFill>
                   <a:srgbClr val="212121"/>
                 </a:solidFill>
@@ -7503,29 +7114,21 @@
               </a:defRPr>
             </a:pPr>
             <a:r>
-              <a:t>Home</a:t>
-            </a:r>
-            <a:br/>
-            <a:r>
-              <a:t>Security</a:t>
-            </a:r>
-            <a:br/>
-            <a:r>
-              <a:t>(Xsafe)</a:t>
-            </a:r>
-          </a:p>
-        </p:txBody>
-      </p:sp>
-      <p:sp>
-        <p:nvSpPr>
-          <p:cNvPr id="95" name="TextBox 94"/>
+              <a:t>0%</a:t>
+            </a:r>
+          </a:p>
+        </p:txBody>
+      </p:sp>
+      <p:sp>
+        <p:nvSpPr>
+          <p:cNvPr id="89" name="TextBox 88"/>
           <p:cNvSpPr txBox="1"/>
           <p:nvPr/>
         </p:nvSpPr>
         <p:spPr>
           <a:xfrm>
-            <a:off x="5330951" y="1435608"/>
-            <a:ext cx="530352" cy="201168"/>
+            <a:off x="182880" y="2871216"/>
+            <a:ext cx="2734056" cy="109728"/>
           </a:xfrm>
           <a:prstGeom prst="rect">
             <a:avLst/>
@@ -7538,177 +7141,30 @@
           </a:bodyPr>
           <a:lstStyle/>
           <a:p>
-            <a:pPr algn="ctr">
-              <a:defRPr sz="1300" b="0">
-                <a:solidFill>
-                  <a:srgbClr val="ED1D24"/>
+            <a:pPr>
+              <a:defRPr sz="520" b="0" i="1">
+                <a:solidFill>
+                  <a:srgbClr val="787878"/>
                 </a:solidFill>
                 <a:latin typeface="Arial"/>
               </a:defRPr>
             </a:pPr>
             <a:r>
-              <a:t>🏦</a:t>
-            </a:r>
-          </a:p>
-        </p:txBody>
-      </p:sp>
-      <p:sp>
-        <p:nvSpPr>
-          <p:cNvPr id="96" name="TextBox 95"/>
-          <p:cNvSpPr txBox="1"/>
-          <p:nvPr/>
-        </p:nvSpPr>
-        <p:spPr>
-          <a:xfrm>
-            <a:off x="5330951" y="1655064"/>
-            <a:ext cx="530352" cy="292608"/>
-          </a:xfrm>
-          <a:prstGeom prst="rect">
-            <a:avLst/>
-          </a:prstGeom>
-          <a:noFill/>
-        </p:spPr>
-        <p:txBody>
-          <a:bodyPr wrap="none" lIns="0" rIns="0" tIns="0" bIns="0">
-            <a:spAutoFit/>
-          </a:bodyPr>
-          <a:lstStyle/>
-          <a:p>
-            <a:pPr algn="ctr">
-              <a:defRPr sz="550" b="1">
-                <a:solidFill>
-                  <a:srgbClr val="212121"/>
-                </a:solidFill>
-                <a:latin typeface="Arial"/>
-              </a:defRPr>
-            </a:pPr>
-            <a:r>
-              <a:t>Payments</a:t>
-            </a:r>
-            <a:br/>
-            <a:r>
-              <a:t>Bank</a:t>
-            </a:r>
-          </a:p>
-        </p:txBody>
-      </p:sp>
-      <p:sp>
-        <p:nvSpPr>
-          <p:cNvPr id="97" name="TextBox 96"/>
-          <p:cNvSpPr txBox="1"/>
-          <p:nvPr/>
-        </p:nvSpPr>
-        <p:spPr>
-          <a:xfrm>
-            <a:off x="3163824" y="2011680"/>
-            <a:ext cx="2734056" cy="658368"/>
-          </a:xfrm>
-          <a:prstGeom prst="rect">
-            <a:avLst/>
-          </a:prstGeom>
-          <a:noFill/>
-        </p:spPr>
-        <p:txBody>
-          <a:bodyPr wrap="square" lIns="0" rIns="0" tIns="0" bIns="0">
-            <a:spAutoFit/>
-          </a:bodyPr>
-          <a:lstStyle/>
-          <a:p>
-            <a:pPr>
-              <a:spcAft>
-                <a:spcPts val="250"/>
-              </a:spcAft>
-              <a:defRPr sz="680" b="0">
-                <a:solidFill>
-                  <a:srgbClr val="212121"/>
-                </a:solidFill>
-                <a:latin typeface="Arial"/>
-              </a:defRPr>
-            </a:pPr>
-            <a:r>
-              <a:t>• Each runs as an independent silo: separate sales teams, separate onboarding, separate billing</a:t>
-            </a:r>
-          </a:p>
-          <a:p>
-            <a:pPr>
-              <a:spcAft>
-                <a:spcPts val="250"/>
-              </a:spcAft>
-              <a:defRPr sz="680" b="0">
-                <a:solidFill>
-                  <a:srgbClr val="212121"/>
-                </a:solidFill>
-                <a:latin typeface="Arial"/>
-              </a:defRPr>
-            </a:pPr>
-            <a:r>
-              <a:t>• Channels: DTC (high-value, postpaid, ₹449 entry) · Distributor (mass-market, prepaid, ₹349) · Payments Bank (₹99) - each sells one product, rarely cross-sells</a:t>
-            </a:r>
-          </a:p>
-          <a:p>
-            <a:pPr>
-              <a:spcAft>
-                <a:spcPts val="250"/>
-              </a:spcAft>
-              <a:defRPr sz="680" b="0">
-                <a:solidFill>
-                  <a:srgbClr val="212121"/>
-                </a:solidFill>
-                <a:latin typeface="Arial"/>
-              </a:defRPr>
-            </a:pPr>
-            <a:r>
-              <a:t>• Only a fraction of Altura's ~100M high-value households hold more than one product today</a:t>
-            </a:r>
-          </a:p>
-        </p:txBody>
-      </p:sp>
-      <p:sp>
-        <p:nvSpPr>
-          <p:cNvPr id="98" name="TextBox 97"/>
-          <p:cNvSpPr txBox="1"/>
-          <p:nvPr/>
-        </p:nvSpPr>
-        <p:spPr>
-          <a:xfrm>
-            <a:off x="3163824" y="2715768"/>
-            <a:ext cx="2734056" cy="109728"/>
-          </a:xfrm>
-          <a:prstGeom prst="rect">
-            <a:avLst/>
-          </a:prstGeom>
-          <a:noFill/>
-        </p:spPr>
-        <p:txBody>
-          <a:bodyPr wrap="none" lIns="0" rIns="0" tIns="0" bIns="0">
-            <a:spAutoFit/>
-          </a:bodyPr>
-          <a:lstStyle/>
-          <a:p>
-            <a:pPr>
-              <a:defRPr sz="550" b="0" i="1">
-                <a:solidFill>
-                  <a:srgbClr val="787878"/>
-                </a:solidFill>
-                <a:latin typeface="Arial"/>
-              </a:defRPr>
-            </a:pPr>
-            <a:r>
-              <a:t>Src: Case Appendix 2, channel structure</a:t>
-            </a:r>
-          </a:p>
-        </p:txBody>
-      </p:sp>
-      <p:sp>
-        <p:nvSpPr>
-          <p:cNvPr id="99" name="Rounded Rectangle 98"/>
+              <a:t>Src: Case intro; Exhibits 2 &amp; 3, CAGR computed FY24–27</a:t>
+            </a:r>
+          </a:p>
+        </p:txBody>
+      </p:sp>
+      <p:sp>
+        <p:nvSpPr>
+          <p:cNvPr id="90" name="Rounded Rectangle 89"/>
           <p:cNvSpPr/>
           <p:nvPr/>
         </p:nvSpPr>
         <p:spPr>
           <a:xfrm>
-            <a:off x="6071616" y="1051560"/>
-            <a:ext cx="2962656" cy="1783080"/>
+            <a:off x="3090672" y="1353312"/>
+            <a:ext cx="2880360" cy="1627632"/>
           </a:xfrm>
           <a:prstGeom prst="roundRect">
             <a:avLst/>
@@ -7746,13 +7202,13 @@
       </p:sp>
       <p:sp>
         <p:nvSpPr>
-          <p:cNvPr id="100" name="Rectangle 99"/>
+          <p:cNvPr id="91" name="Rectangle 90"/>
           <p:cNvSpPr/>
           <p:nvPr/>
         </p:nvSpPr>
         <p:spPr>
           <a:xfrm>
-            <a:off x="6144768" y="1124712"/>
+            <a:off x="3163824" y="1426464"/>
             <a:ext cx="164592" cy="164592"/>
           </a:xfrm>
           <a:prstGeom prst="rect">
@@ -7780,7 +7236,7 @@
           </a:fontRef>
         </p:style>
         <p:txBody>
-          <a:bodyPr rtlCol="0" anchor="ctr" wrap="none" lIns="0" rIns="0" tIns="0" bIns="0"/>
+          <a:bodyPr rtlCol="0" anchor="ctr" lIns="0" rIns="0" tIns="0" bIns="0"/>
           <a:lstStyle/>
           <a:p>
             <a:pPr algn="ctr">
@@ -7792,21 +7248,21 @@
               </a:defRPr>
             </a:pPr>
             <a:r>
-              <a:t>3</a:t>
-            </a:r>
-          </a:p>
-        </p:txBody>
-      </p:sp>
-      <p:sp>
-        <p:nvSpPr>
-          <p:cNvPr id="101" name="TextBox 100"/>
+              <a:t>2</a:t>
+            </a:r>
+          </a:p>
+        </p:txBody>
+      </p:sp>
+      <p:sp>
+        <p:nvSpPr>
+          <p:cNvPr id="92" name="TextBox 91"/>
           <p:cNvSpPr txBox="1"/>
           <p:nvPr/>
         </p:nvSpPr>
         <p:spPr>
           <a:xfrm>
-            <a:off x="6364224" y="1097280"/>
-            <a:ext cx="2596896" cy="219456"/>
+            <a:off x="3383280" y="1399032"/>
+            <a:ext cx="2514600" cy="219456"/>
           </a:xfrm>
           <a:prstGeom prst="rect">
             <a:avLst/>
@@ -7828,21 +7284,21 @@
               </a:defRPr>
             </a:pPr>
             <a:r>
-              <a:t>Competitive Landscape &amp; Altura's Moat</a:t>
-            </a:r>
-          </a:p>
-        </p:txBody>
-      </p:sp>
-      <p:sp>
-        <p:nvSpPr>
-          <p:cNvPr id="102" name="TextBox 101"/>
+              <a:t>Product Portfolio Today</a:t>
+            </a:r>
+          </a:p>
+        </p:txBody>
+      </p:sp>
+      <p:sp>
+        <p:nvSpPr>
+          <p:cNvPr id="93" name="TextBox 92"/>
           <p:cNvSpPr txBox="1"/>
           <p:nvPr/>
         </p:nvSpPr>
         <p:spPr>
           <a:xfrm>
-            <a:off x="6364224" y="1271016"/>
-            <a:ext cx="2596896" cy="164592"/>
+            <a:off x="3383280" y="1572768"/>
+            <a:ext cx="2514600" cy="164592"/>
           </a:xfrm>
           <a:prstGeom prst="rect">
             <a:avLst/>
@@ -7864,6 +7320,671 @@
               </a:defRPr>
             </a:pPr>
             <a:r>
+              <a:t>Five live product lines, sold and run in isolation</a:t>
+            </a:r>
+          </a:p>
+        </p:txBody>
+      </p:sp>
+      <p:sp>
+        <p:nvSpPr>
+          <p:cNvPr id="94" name="TextBox 93"/>
+          <p:cNvSpPr txBox="1"/>
+          <p:nvPr/>
+        </p:nvSpPr>
+        <p:spPr>
+          <a:xfrm>
+            <a:off x="3136392" y="1700784"/>
+            <a:ext cx="530352" cy="182880"/>
+          </a:xfrm>
+          <a:prstGeom prst="rect">
+            <a:avLst/>
+          </a:prstGeom>
+          <a:noFill/>
+        </p:spPr>
+        <p:txBody>
+          <a:bodyPr wrap="none" lIns="0" rIns="0" tIns="0" bIns="0">
+            <a:spAutoFit/>
+          </a:bodyPr>
+          <a:lstStyle/>
+          <a:p>
+            <a:pPr algn="ctr">
+              <a:defRPr sz="1200" b="0">
+                <a:solidFill>
+                  <a:srgbClr val="ED1D24"/>
+                </a:solidFill>
+                <a:latin typeface="Arial"/>
+              </a:defRPr>
+            </a:pPr>
+            <a:r>
+              <a:t>📞</a:t>
+            </a:r>
+          </a:p>
+        </p:txBody>
+      </p:sp>
+      <p:sp>
+        <p:nvSpPr>
+          <p:cNvPr id="95" name="TextBox 94"/>
+          <p:cNvSpPr txBox="1"/>
+          <p:nvPr/>
+        </p:nvSpPr>
+        <p:spPr>
+          <a:xfrm>
+            <a:off x="3136392" y="1901952"/>
+            <a:ext cx="530352" cy="256032"/>
+          </a:xfrm>
+          <a:prstGeom prst="rect">
+            <a:avLst/>
+          </a:prstGeom>
+          <a:noFill/>
+        </p:spPr>
+        <p:txBody>
+          <a:bodyPr wrap="none" lIns="0" rIns="0" tIns="0" bIns="0">
+            <a:spAutoFit/>
+          </a:bodyPr>
+          <a:lstStyle/>
+          <a:p>
+            <a:pPr algn="ctr">
+              <a:defRPr sz="520" b="1">
+                <a:solidFill>
+                  <a:srgbClr val="212121"/>
+                </a:solidFill>
+                <a:latin typeface="Arial"/>
+              </a:defRPr>
+            </a:pPr>
+            <a:r>
+              <a:t>Mobility</a:t>
+            </a:r>
+            <a:br/>
+            <a:r>
+              <a:t>(prepaid +</a:t>
+            </a:r>
+            <a:br/>
+            <a:r>
+              <a:t>postpaid)</a:t>
+            </a:r>
+          </a:p>
+        </p:txBody>
+      </p:sp>
+      <p:sp>
+        <p:nvSpPr>
+          <p:cNvPr id="96" name="TextBox 95"/>
+          <p:cNvSpPr txBox="1"/>
+          <p:nvPr/>
+        </p:nvSpPr>
+        <p:spPr>
+          <a:xfrm>
+            <a:off x="3685032" y="1700784"/>
+            <a:ext cx="530352" cy="182880"/>
+          </a:xfrm>
+          <a:prstGeom prst="rect">
+            <a:avLst/>
+          </a:prstGeom>
+          <a:noFill/>
+        </p:spPr>
+        <p:txBody>
+          <a:bodyPr wrap="none" lIns="0" rIns="0" tIns="0" bIns="0">
+            <a:spAutoFit/>
+          </a:bodyPr>
+          <a:lstStyle/>
+          <a:p>
+            <a:pPr algn="ctr">
+              <a:defRPr sz="1200" b="0">
+                <a:solidFill>
+                  <a:srgbClr val="ED1D24"/>
+                </a:solidFill>
+                <a:latin typeface="Arial"/>
+              </a:defRPr>
+            </a:pPr>
+            <a:r>
+              <a:t>📶</a:t>
+            </a:r>
+          </a:p>
+        </p:txBody>
+      </p:sp>
+      <p:sp>
+        <p:nvSpPr>
+          <p:cNvPr id="97" name="TextBox 96"/>
+          <p:cNvSpPr txBox="1"/>
+          <p:nvPr/>
+        </p:nvSpPr>
+        <p:spPr>
+          <a:xfrm>
+            <a:off x="3685032" y="1901952"/>
+            <a:ext cx="530352" cy="256032"/>
+          </a:xfrm>
+          <a:prstGeom prst="rect">
+            <a:avLst/>
+          </a:prstGeom>
+          <a:noFill/>
+        </p:spPr>
+        <p:txBody>
+          <a:bodyPr wrap="none" lIns="0" rIns="0" tIns="0" bIns="0">
+            <a:spAutoFit/>
+          </a:bodyPr>
+          <a:lstStyle/>
+          <a:p>
+            <a:pPr algn="ctr">
+              <a:defRPr sz="520" b="1">
+                <a:solidFill>
+                  <a:srgbClr val="212121"/>
+                </a:solidFill>
+                <a:latin typeface="Arial"/>
+              </a:defRPr>
+            </a:pPr>
+            <a:r>
+              <a:t>Broadband /</a:t>
+            </a:r>
+            <a:br/>
+            <a:r>
+              <a:t>WiFi</a:t>
+            </a:r>
+          </a:p>
+        </p:txBody>
+      </p:sp>
+      <p:sp>
+        <p:nvSpPr>
+          <p:cNvPr id="98" name="TextBox 97"/>
+          <p:cNvSpPr txBox="1"/>
+          <p:nvPr/>
+        </p:nvSpPr>
+        <p:spPr>
+          <a:xfrm>
+            <a:off x="4233672" y="1700784"/>
+            <a:ext cx="530352" cy="182880"/>
+          </a:xfrm>
+          <a:prstGeom prst="rect">
+            <a:avLst/>
+          </a:prstGeom>
+          <a:noFill/>
+        </p:spPr>
+        <p:txBody>
+          <a:bodyPr wrap="none" lIns="0" rIns="0" tIns="0" bIns="0">
+            <a:spAutoFit/>
+          </a:bodyPr>
+          <a:lstStyle/>
+          <a:p>
+            <a:pPr algn="ctr">
+              <a:defRPr sz="1200" b="0">
+                <a:solidFill>
+                  <a:srgbClr val="ED1D24"/>
+                </a:solidFill>
+                <a:latin typeface="Arial"/>
+              </a:defRPr>
+            </a:pPr>
+            <a:r>
+              <a:t>📺</a:t>
+            </a:r>
+          </a:p>
+        </p:txBody>
+      </p:sp>
+      <p:sp>
+        <p:nvSpPr>
+          <p:cNvPr id="99" name="TextBox 98"/>
+          <p:cNvSpPr txBox="1"/>
+          <p:nvPr/>
+        </p:nvSpPr>
+        <p:spPr>
+          <a:xfrm>
+            <a:off x="4233672" y="1901952"/>
+            <a:ext cx="530352" cy="256032"/>
+          </a:xfrm>
+          <a:prstGeom prst="rect">
+            <a:avLst/>
+          </a:prstGeom>
+          <a:noFill/>
+        </p:spPr>
+        <p:txBody>
+          <a:bodyPr wrap="none" lIns="0" rIns="0" tIns="0" bIns="0">
+            <a:spAutoFit/>
+          </a:bodyPr>
+          <a:lstStyle/>
+          <a:p>
+            <a:pPr algn="ctr">
+              <a:defRPr sz="520" b="1">
+                <a:solidFill>
+                  <a:srgbClr val="212121"/>
+                </a:solidFill>
+                <a:latin typeface="Arial"/>
+              </a:defRPr>
+            </a:pPr>
+            <a:r>
+              <a:t>OTT +</a:t>
+            </a:r>
+            <a:br/>
+            <a:r>
+              <a:t>TV</a:t>
+            </a:r>
+          </a:p>
+        </p:txBody>
+      </p:sp>
+      <p:sp>
+        <p:nvSpPr>
+          <p:cNvPr id="100" name="TextBox 99"/>
+          <p:cNvSpPr txBox="1"/>
+          <p:nvPr/>
+        </p:nvSpPr>
+        <p:spPr>
+          <a:xfrm>
+            <a:off x="4782311" y="1700784"/>
+            <a:ext cx="530352" cy="182880"/>
+          </a:xfrm>
+          <a:prstGeom prst="rect">
+            <a:avLst/>
+          </a:prstGeom>
+          <a:noFill/>
+        </p:spPr>
+        <p:txBody>
+          <a:bodyPr wrap="none" lIns="0" rIns="0" tIns="0" bIns="0">
+            <a:spAutoFit/>
+          </a:bodyPr>
+          <a:lstStyle/>
+          <a:p>
+            <a:pPr algn="ctr">
+              <a:defRPr sz="1200" b="0">
+                <a:solidFill>
+                  <a:srgbClr val="ED1D24"/>
+                </a:solidFill>
+                <a:latin typeface="Arial"/>
+              </a:defRPr>
+            </a:pPr>
+            <a:r>
+              <a:t>🛡️</a:t>
+            </a:r>
+          </a:p>
+        </p:txBody>
+      </p:sp>
+      <p:sp>
+        <p:nvSpPr>
+          <p:cNvPr id="101" name="TextBox 100"/>
+          <p:cNvSpPr txBox="1"/>
+          <p:nvPr/>
+        </p:nvSpPr>
+        <p:spPr>
+          <a:xfrm>
+            <a:off x="4782311" y="1901952"/>
+            <a:ext cx="530352" cy="256032"/>
+          </a:xfrm>
+          <a:prstGeom prst="rect">
+            <a:avLst/>
+          </a:prstGeom>
+          <a:noFill/>
+        </p:spPr>
+        <p:txBody>
+          <a:bodyPr wrap="none" lIns="0" rIns="0" tIns="0" bIns="0">
+            <a:spAutoFit/>
+          </a:bodyPr>
+          <a:lstStyle/>
+          <a:p>
+            <a:pPr algn="ctr">
+              <a:defRPr sz="520" b="1">
+                <a:solidFill>
+                  <a:srgbClr val="212121"/>
+                </a:solidFill>
+                <a:latin typeface="Arial"/>
+              </a:defRPr>
+            </a:pPr>
+            <a:r>
+              <a:t>Home</a:t>
+            </a:r>
+            <a:br/>
+            <a:r>
+              <a:t>Security</a:t>
+            </a:r>
+            <a:br/>
+            <a:r>
+              <a:t>(Xsafe)</a:t>
+            </a:r>
+          </a:p>
+        </p:txBody>
+      </p:sp>
+      <p:sp>
+        <p:nvSpPr>
+          <p:cNvPr id="102" name="TextBox 101"/>
+          <p:cNvSpPr txBox="1"/>
+          <p:nvPr/>
+        </p:nvSpPr>
+        <p:spPr>
+          <a:xfrm>
+            <a:off x="5330951" y="1700784"/>
+            <a:ext cx="530352" cy="182880"/>
+          </a:xfrm>
+          <a:prstGeom prst="rect">
+            <a:avLst/>
+          </a:prstGeom>
+          <a:noFill/>
+        </p:spPr>
+        <p:txBody>
+          <a:bodyPr wrap="none" lIns="0" rIns="0" tIns="0" bIns="0">
+            <a:spAutoFit/>
+          </a:bodyPr>
+          <a:lstStyle/>
+          <a:p>
+            <a:pPr algn="ctr">
+              <a:defRPr sz="1200" b="0">
+                <a:solidFill>
+                  <a:srgbClr val="ED1D24"/>
+                </a:solidFill>
+                <a:latin typeface="Arial"/>
+              </a:defRPr>
+            </a:pPr>
+            <a:r>
+              <a:t>🏦</a:t>
+            </a:r>
+          </a:p>
+        </p:txBody>
+      </p:sp>
+      <p:sp>
+        <p:nvSpPr>
+          <p:cNvPr id="103" name="TextBox 102"/>
+          <p:cNvSpPr txBox="1"/>
+          <p:nvPr/>
+        </p:nvSpPr>
+        <p:spPr>
+          <a:xfrm>
+            <a:off x="5330951" y="1901952"/>
+            <a:ext cx="530352" cy="256032"/>
+          </a:xfrm>
+          <a:prstGeom prst="rect">
+            <a:avLst/>
+          </a:prstGeom>
+          <a:noFill/>
+        </p:spPr>
+        <p:txBody>
+          <a:bodyPr wrap="none" lIns="0" rIns="0" tIns="0" bIns="0">
+            <a:spAutoFit/>
+          </a:bodyPr>
+          <a:lstStyle/>
+          <a:p>
+            <a:pPr algn="ctr">
+              <a:defRPr sz="520" b="1">
+                <a:solidFill>
+                  <a:srgbClr val="212121"/>
+                </a:solidFill>
+                <a:latin typeface="Arial"/>
+              </a:defRPr>
+            </a:pPr>
+            <a:r>
+              <a:t>Payments</a:t>
+            </a:r>
+            <a:br/>
+            <a:r>
+              <a:t>Bank</a:t>
+            </a:r>
+          </a:p>
+        </p:txBody>
+      </p:sp>
+      <p:sp>
+        <p:nvSpPr>
+          <p:cNvPr id="104" name="TextBox 103"/>
+          <p:cNvSpPr txBox="1"/>
+          <p:nvPr/>
+        </p:nvSpPr>
+        <p:spPr>
+          <a:xfrm>
+            <a:off x="3163824" y="2194560"/>
+            <a:ext cx="2734056" cy="640080"/>
+          </a:xfrm>
+          <a:prstGeom prst="rect">
+            <a:avLst/>
+          </a:prstGeom>
+          <a:noFill/>
+        </p:spPr>
+        <p:txBody>
+          <a:bodyPr wrap="square" lIns="0" rIns="0" tIns="0" bIns="0">
+            <a:spAutoFit/>
+          </a:bodyPr>
+          <a:lstStyle/>
+          <a:p>
+            <a:pPr>
+              <a:spcAft>
+                <a:spcPts val="200"/>
+              </a:spcAft>
+              <a:defRPr sz="650" b="0">
+                <a:solidFill>
+                  <a:srgbClr val="212121"/>
+                </a:solidFill>
+                <a:latin typeface="Arial"/>
+              </a:defRPr>
+            </a:pPr>
+            <a:r>
+              <a:t>• Each runs as an independent silo: separate sales teams, separate onboarding, separate billing</a:t>
+            </a:r>
+          </a:p>
+          <a:p>
+            <a:pPr>
+              <a:spcAft>
+                <a:spcPts val="200"/>
+              </a:spcAft>
+              <a:defRPr sz="650" b="0">
+                <a:solidFill>
+                  <a:srgbClr val="212121"/>
+                </a:solidFill>
+                <a:latin typeface="Arial"/>
+              </a:defRPr>
+            </a:pPr>
+            <a:r>
+              <a:t>• Channels: DTC (high-value, postpaid, ₹449 entry) · Distributor (mass-market, prepaid, ₹349) · Payments Bank (₹99) - each sells one product, rarely cross-sells</a:t>
+            </a:r>
+          </a:p>
+          <a:p>
+            <a:pPr>
+              <a:spcAft>
+                <a:spcPts val="200"/>
+              </a:spcAft>
+              <a:defRPr sz="650" b="0">
+                <a:solidFill>
+                  <a:srgbClr val="212121"/>
+                </a:solidFill>
+                <a:latin typeface="Arial"/>
+              </a:defRPr>
+            </a:pPr>
+            <a:r>
+              <a:t>• Only a fraction of Altura's ~100M high-value households hold more than one product today</a:t>
+            </a:r>
+          </a:p>
+        </p:txBody>
+      </p:sp>
+      <p:sp>
+        <p:nvSpPr>
+          <p:cNvPr id="105" name="TextBox 104"/>
+          <p:cNvSpPr txBox="1"/>
+          <p:nvPr/>
+        </p:nvSpPr>
+        <p:spPr>
+          <a:xfrm>
+            <a:off x="3163824" y="2871216"/>
+            <a:ext cx="2734056" cy="109728"/>
+          </a:xfrm>
+          <a:prstGeom prst="rect">
+            <a:avLst/>
+          </a:prstGeom>
+          <a:noFill/>
+        </p:spPr>
+        <p:txBody>
+          <a:bodyPr wrap="none" lIns="0" rIns="0" tIns="0" bIns="0">
+            <a:spAutoFit/>
+          </a:bodyPr>
+          <a:lstStyle/>
+          <a:p>
+            <a:pPr>
+              <a:defRPr sz="520" b="0" i="1">
+                <a:solidFill>
+                  <a:srgbClr val="787878"/>
+                </a:solidFill>
+                <a:latin typeface="Arial"/>
+              </a:defRPr>
+            </a:pPr>
+            <a:r>
+              <a:t>Src: Case Appendix 2, channel structure</a:t>
+            </a:r>
+          </a:p>
+        </p:txBody>
+      </p:sp>
+      <p:sp>
+        <p:nvSpPr>
+          <p:cNvPr id="106" name="Rounded Rectangle 105"/>
+          <p:cNvSpPr/>
+          <p:nvPr/>
+        </p:nvSpPr>
+        <p:spPr>
+          <a:xfrm>
+            <a:off x="6071616" y="1353312"/>
+            <a:ext cx="2962656" cy="1627632"/>
+          </a:xfrm>
+          <a:prstGeom prst="roundRect">
+            <a:avLst/>
+          </a:prstGeom>
+          <a:solidFill>
+            <a:srgbClr val="FFFFFF"/>
+          </a:solidFill>
+          <a:ln w="12700">
+            <a:solidFill>
+              <a:srgbClr val="DCDEE1"/>
+            </a:solidFill>
+          </a:ln>
+        </p:spPr>
+        <p:style>
+          <a:lnRef idx="1">
+            <a:schemeClr val="accent1"/>
+          </a:lnRef>
+          <a:fillRef idx="3">
+            <a:schemeClr val="accent1"/>
+          </a:fillRef>
+          <a:effectRef idx="2">
+            <a:schemeClr val="accent1"/>
+          </a:effectRef>
+          <a:fontRef idx="minor">
+            <a:schemeClr val="lt1"/>
+          </a:fontRef>
+        </p:style>
+        <p:txBody>
+          <a:bodyPr rtlCol="0" anchor="ctr"/>
+          <a:lstStyle/>
+          <a:p>
+            <a:pPr algn="ctr"/>
+          </a:p>
+        </p:txBody>
+      </p:sp>
+      <p:sp>
+        <p:nvSpPr>
+          <p:cNvPr id="107" name="Rectangle 106"/>
+          <p:cNvSpPr/>
+          <p:nvPr/>
+        </p:nvSpPr>
+        <p:spPr>
+          <a:xfrm>
+            <a:off x="6144768" y="1426464"/>
+            <a:ext cx="164592" cy="164592"/>
+          </a:xfrm>
+          <a:prstGeom prst="rect">
+            <a:avLst/>
+          </a:prstGeom>
+          <a:solidFill>
+            <a:srgbClr val="ED1D24"/>
+          </a:solidFill>
+          <a:ln>
+            <a:noFill/>
+          </a:ln>
+        </p:spPr>
+        <p:style>
+          <a:lnRef idx="1">
+            <a:schemeClr val="accent1"/>
+          </a:lnRef>
+          <a:fillRef idx="3">
+            <a:schemeClr val="accent1"/>
+          </a:fillRef>
+          <a:effectRef idx="2">
+            <a:schemeClr val="accent1"/>
+          </a:effectRef>
+          <a:fontRef idx="minor">
+            <a:schemeClr val="lt1"/>
+          </a:fontRef>
+        </p:style>
+        <p:txBody>
+          <a:bodyPr rtlCol="0" anchor="ctr" lIns="0" rIns="0" tIns="0" bIns="0"/>
+          <a:lstStyle/>
+          <a:p>
+            <a:pPr algn="ctr">
+              <a:defRPr sz="850" b="1">
+                <a:solidFill>
+                  <a:srgbClr val="FFFFFF"/>
+                </a:solidFill>
+                <a:latin typeface="Calibri"/>
+              </a:defRPr>
+            </a:pPr>
+            <a:r>
+              <a:t>3</a:t>
+            </a:r>
+          </a:p>
+        </p:txBody>
+      </p:sp>
+      <p:sp>
+        <p:nvSpPr>
+          <p:cNvPr id="108" name="TextBox 107"/>
+          <p:cNvSpPr txBox="1"/>
+          <p:nvPr/>
+        </p:nvSpPr>
+        <p:spPr>
+          <a:xfrm>
+            <a:off x="6364224" y="1399032"/>
+            <a:ext cx="2596896" cy="219456"/>
+          </a:xfrm>
+          <a:prstGeom prst="rect">
+            <a:avLst/>
+          </a:prstGeom>
+          <a:noFill/>
+        </p:spPr>
+        <p:txBody>
+          <a:bodyPr wrap="none" lIns="0" rIns="0" tIns="0" bIns="0">
+            <a:spAutoFit/>
+          </a:bodyPr>
+          <a:lstStyle/>
+          <a:p>
+            <a:pPr>
+              <a:defRPr sz="950" b="1">
+                <a:solidFill>
+                  <a:srgbClr val="ED1D24"/>
+                </a:solidFill>
+                <a:latin typeface="Calibri"/>
+              </a:defRPr>
+            </a:pPr>
+            <a:r>
+              <a:t>Competitive Landscape &amp; Altura's Moat</a:t>
+            </a:r>
+          </a:p>
+        </p:txBody>
+      </p:sp>
+      <p:sp>
+        <p:nvSpPr>
+          <p:cNvPr id="109" name="TextBox 108"/>
+          <p:cNvSpPr txBox="1"/>
+          <p:nvPr/>
+        </p:nvSpPr>
+        <p:spPr>
+          <a:xfrm>
+            <a:off x="6364224" y="1572768"/>
+            <a:ext cx="2596896" cy="164592"/>
+          </a:xfrm>
+          <a:prstGeom prst="rect">
+            <a:avLst/>
+          </a:prstGeom>
+          <a:noFill/>
+        </p:spPr>
+        <p:txBody>
+          <a:bodyPr wrap="none" lIns="0" rIns="0" tIns="0" bIns="0">
+            <a:spAutoFit/>
+          </a:bodyPr>
+          <a:lstStyle/>
+          <a:p>
+            <a:pPr>
+              <a:defRPr sz="750" b="0" i="1">
+                <a:solidFill>
+                  <a:srgbClr val="787878"/>
+                </a:solidFill>
+                <a:latin typeface="Arial"/>
+              </a:defRPr>
+            </a:pPr>
+            <a:r>
               <a:t>Where Altura already wins, and what defends it</a:t>
             </a:r>
           </a:p>
@@ -7871,15 +7992,15 @@
       </p:sp>
       <p:graphicFrame>
         <p:nvGraphicFramePr>
-          <p:cNvPr id="103" name="Table 102"/>
+          <p:cNvPr id="110" name="Table 109"/>
           <p:cNvGraphicFramePr>
             <a:graphicFrameLocks noGrp="1"/>
           </p:cNvGraphicFramePr>
           <p:nvPr/>
         </p:nvGraphicFramePr>
         <p:xfrm>
-          <a:off x="6126480" y="1435608"/>
-          <a:ext cx="2834640" cy="621792"/>
+          <a:off x="6126480" y="1700784"/>
+          <a:ext cx="2834640" cy="548640"/>
         </p:xfrm>
         <a:graphic>
           <a:graphicData uri="http://schemas.openxmlformats.org/drawingml/2006/table">
@@ -7893,14 +8014,14 @@
                 <a:gridCol w="640080"/>
                 <a:gridCol w="640080"/>
               </a:tblGrid>
-              <a:tr h="155448">
+              <a:tr h="137160">
                 <a:tc>
                   <a:txBody>
                     <a:bodyPr lIns="9144" rIns="9144" tIns="9144" bIns="9144"/>
                     <a:lstStyle/>
                     <a:p>
                       <a:pPr algn="l">
-                        <a:defRPr sz="620" b="0">
+                        <a:defRPr sz="600" b="0">
                           <a:solidFill>
                             <a:srgbClr val="212121"/>
                           </a:solidFill>
@@ -7921,7 +8042,7 @@
                     <a:lstStyle/>
                     <a:p>
                       <a:pPr algn="ctr">
-                        <a:defRPr sz="620" b="1">
+                        <a:defRPr sz="600" b="1">
                           <a:solidFill>
                             <a:srgbClr val="0F121C"/>
                           </a:solidFill>
@@ -7945,7 +8066,7 @@
                     <a:lstStyle/>
                     <a:p>
                       <a:pPr algn="ctr">
-                        <a:defRPr sz="620" b="1">
+                        <a:defRPr sz="600" b="1">
                           <a:solidFill>
                             <a:srgbClr val="212121"/>
                           </a:solidFill>
@@ -7969,7 +8090,7 @@
                     <a:lstStyle/>
                     <a:p>
                       <a:pPr algn="ctr">
-                        <a:defRPr sz="620" b="1">
+                        <a:defRPr sz="600" b="1">
                           <a:solidFill>
                             <a:srgbClr val="212121"/>
                           </a:solidFill>
@@ -7988,14 +8109,14 @@
                   </a:tcPr>
                 </a:tc>
               </a:tr>
-              <a:tr h="155448">
+              <a:tr h="137160">
                 <a:tc>
                   <a:txBody>
                     <a:bodyPr lIns="9144" rIns="9144" tIns="9144" bIns="9144"/>
                     <a:lstStyle/>
                     <a:p>
                       <a:pPr algn="l">
-                        <a:defRPr sz="650" b="0">
+                        <a:defRPr sz="600" b="0">
                           <a:solidFill>
                             <a:srgbClr val="212121"/>
                           </a:solidFill>
@@ -8019,7 +8140,7 @@
                     <a:lstStyle/>
                     <a:p>
                       <a:pPr algn="ctr">
-                        <a:defRPr sz="650" b="1">
+                        <a:defRPr sz="600" b="1">
                           <a:solidFill>
                             <a:srgbClr val="ED1D24"/>
                           </a:solidFill>
@@ -8043,7 +8164,7 @@
                     <a:lstStyle/>
                     <a:p>
                       <a:pPr algn="ctr">
-                        <a:defRPr sz="650" b="0">
+                        <a:defRPr sz="600" b="0">
                           <a:solidFill>
                             <a:srgbClr val="212121"/>
                           </a:solidFill>
@@ -8067,7 +8188,7 @@
                     <a:lstStyle/>
                     <a:p>
                       <a:pPr algn="ctr">
-                        <a:defRPr sz="650" b="0">
+                        <a:defRPr sz="600" b="0">
                           <a:solidFill>
                             <a:srgbClr val="212121"/>
                           </a:solidFill>
@@ -8086,14 +8207,14 @@
                   </a:tcPr>
                 </a:tc>
               </a:tr>
-              <a:tr h="155448">
+              <a:tr h="137160">
                 <a:tc>
                   <a:txBody>
                     <a:bodyPr lIns="9144" rIns="9144" tIns="9144" bIns="9144"/>
                     <a:lstStyle/>
                     <a:p>
                       <a:pPr algn="l">
-                        <a:defRPr sz="650" b="0">
+                        <a:defRPr sz="600" b="0">
                           <a:solidFill>
                             <a:srgbClr val="212121"/>
                           </a:solidFill>
@@ -8117,7 +8238,7 @@
                     <a:lstStyle/>
                     <a:p>
                       <a:pPr algn="ctr">
-                        <a:defRPr sz="650" b="1">
+                        <a:defRPr sz="600" b="1">
                           <a:solidFill>
                             <a:srgbClr val="ED1D24"/>
                           </a:solidFill>
@@ -8141,7 +8262,7 @@
                     <a:lstStyle/>
                     <a:p>
                       <a:pPr algn="ctr">
-                        <a:defRPr sz="650" b="0">
+                        <a:defRPr sz="600" b="0">
                           <a:solidFill>
                             <a:srgbClr val="212121"/>
                           </a:solidFill>
@@ -8165,7 +8286,7 @@
                     <a:lstStyle/>
                     <a:p>
                       <a:pPr algn="ctr">
-                        <a:defRPr sz="650" b="0">
+                        <a:defRPr sz="600" b="0">
                           <a:solidFill>
                             <a:srgbClr val="212121"/>
                           </a:solidFill>
@@ -8184,14 +8305,14 @@
                   </a:tcPr>
                 </a:tc>
               </a:tr>
-              <a:tr h="155448">
+              <a:tr h="137160">
                 <a:tc>
                   <a:txBody>
                     <a:bodyPr lIns="9144" rIns="9144" tIns="9144" bIns="9144"/>
                     <a:lstStyle/>
                     <a:p>
                       <a:pPr algn="l">
-                        <a:defRPr sz="650" b="0">
+                        <a:defRPr sz="600" b="0">
                           <a:solidFill>
                             <a:srgbClr val="212121"/>
                           </a:solidFill>
@@ -8215,7 +8336,7 @@
                     <a:lstStyle/>
                     <a:p>
                       <a:pPr algn="ctr">
-                        <a:defRPr sz="650" b="1">
+                        <a:defRPr sz="600" b="1">
                           <a:solidFill>
                             <a:srgbClr val="ED1D24"/>
                           </a:solidFill>
@@ -8239,7 +8360,7 @@
                     <a:lstStyle/>
                     <a:p>
                       <a:pPr algn="ctr">
-                        <a:defRPr sz="650" b="0">
+                        <a:defRPr sz="600" b="0">
                           <a:solidFill>
                             <a:srgbClr val="212121"/>
                           </a:solidFill>
@@ -8263,7 +8384,7 @@
                     <a:lstStyle/>
                     <a:p>
                       <a:pPr algn="ctr">
-                        <a:defRPr sz="650" b="0">
+                        <a:defRPr sz="600" b="0">
                           <a:solidFill>
                             <a:srgbClr val="212121"/>
                           </a:solidFill>
@@ -8288,14 +8409,14 @@
       </p:graphicFrame>
       <p:sp>
         <p:nvSpPr>
-          <p:cNvPr id="104" name="Rounded Rectangle 103"/>
+          <p:cNvPr id="111" name="Rounded Rectangle 110"/>
           <p:cNvSpPr/>
           <p:nvPr/>
         </p:nvSpPr>
         <p:spPr>
           <a:xfrm>
-            <a:off x="6144768" y="2103120"/>
-            <a:ext cx="2816352" cy="585216"/>
+            <a:off x="6144768" y="2286000"/>
+            <a:ext cx="2816352" cy="548640"/>
           </a:xfrm>
           <a:prstGeom prst="roundRect">
             <a:avLst/>
@@ -8322,11 +8443,11 @@
           </a:fontRef>
         </p:style>
         <p:txBody>
-          <a:bodyPr rtlCol="0" anchor="ctr" wrap="square" lIns="274320" rIns="73152" tIns="36576" bIns="36576"/>
+          <a:bodyPr rtlCol="0" anchor="ctr" wrap="square" lIns="274320" rIns="73152" tIns="18288" bIns="18288"/>
           <a:lstStyle/>
           <a:p>
             <a:pPr algn="ctr">
-              <a:defRPr sz="600" b="0">
+              <a:defRPr sz="580" b="0">
                 <a:solidFill>
                   <a:srgbClr val="212121"/>
                 </a:solidFill>
@@ -8341,13 +8462,13 @@
       </p:sp>
       <p:sp>
         <p:nvSpPr>
-          <p:cNvPr id="105" name="TextBox 104"/>
+          <p:cNvPr id="112" name="TextBox 111"/>
           <p:cNvSpPr txBox="1"/>
           <p:nvPr/>
         </p:nvSpPr>
         <p:spPr>
           <a:xfrm>
-            <a:off x="6181344" y="2221992"/>
+            <a:off x="6181344" y="2404872"/>
             <a:ext cx="219456" cy="292608"/>
           </a:xfrm>
           <a:prstGeom prst="rect">
@@ -8362,7 +8483,7 @@
           <a:lstStyle/>
           <a:p>
             <a:pPr>
-              <a:defRPr sz="1000" b="0">
+              <a:defRPr sz="900" b="0">
                 <a:solidFill>
                   <a:srgbClr val="ED1D24"/>
                 </a:solidFill>
@@ -8377,14 +8498,14 @@
       </p:sp>
       <p:sp>
         <p:nvSpPr>
-          <p:cNvPr id="106" name="TextBox 105"/>
+          <p:cNvPr id="113" name="TextBox 112"/>
           <p:cNvSpPr txBox="1"/>
           <p:nvPr/>
         </p:nvSpPr>
         <p:spPr>
           <a:xfrm>
-            <a:off x="6144768" y="2715768"/>
-            <a:ext cx="2816352" cy="109728"/>
+            <a:off x="6144768" y="2871216"/>
+            <a:ext cx="2734056" cy="109728"/>
           </a:xfrm>
           <a:prstGeom prst="rect">
             <a:avLst/>
@@ -8398,7 +8519,7 @@
           <a:lstStyle/>
           <a:p>
             <a:pPr>
-              <a:defRPr sz="550" b="0" i="1">
+              <a:defRPr sz="520" b="0" i="1">
                 <a:solidFill>
                   <a:srgbClr val="787878"/>
                 </a:solidFill>
@@ -8413,14 +8534,14 @@
       </p:sp>
       <p:sp>
         <p:nvSpPr>
-          <p:cNvPr id="107" name="Rounded Rectangle 106"/>
+          <p:cNvPr id="114" name="Rounded Rectangle 113"/>
           <p:cNvSpPr/>
           <p:nvPr/>
         </p:nvSpPr>
         <p:spPr>
           <a:xfrm>
-            <a:off x="109728" y="2944368"/>
-            <a:ext cx="2880360" cy="1700784"/>
+            <a:off x="109728" y="3017520"/>
+            <a:ext cx="2880360" cy="1627632"/>
           </a:xfrm>
           <a:prstGeom prst="roundRect">
             <a:avLst/>
@@ -8458,13 +8579,13 @@
       </p:sp>
       <p:sp>
         <p:nvSpPr>
-          <p:cNvPr id="108" name="Rectangle 107"/>
+          <p:cNvPr id="115" name="Rectangle 114"/>
           <p:cNvSpPr/>
           <p:nvPr/>
         </p:nvSpPr>
         <p:spPr>
           <a:xfrm>
-            <a:off x="182880" y="3017520"/>
+            <a:off x="182880" y="3090672"/>
             <a:ext cx="164592" cy="164592"/>
           </a:xfrm>
           <a:prstGeom prst="rect">
@@ -8492,7 +8613,7 @@
           </a:fontRef>
         </p:style>
         <p:txBody>
-          <a:bodyPr rtlCol="0" anchor="ctr" wrap="none" lIns="0" rIns="0" tIns="0" bIns="0"/>
+          <a:bodyPr rtlCol="0" anchor="ctr" lIns="0" rIns="0" tIns="0" bIns="0"/>
           <a:lstStyle/>
           <a:p>
             <a:pPr algn="ctr">
@@ -8511,13 +8632,13 @@
       </p:sp>
       <p:sp>
         <p:nvSpPr>
-          <p:cNvPr id="109" name="TextBox 108"/>
+          <p:cNvPr id="116" name="TextBox 115"/>
           <p:cNvSpPr txBox="1"/>
           <p:nvPr/>
         </p:nvSpPr>
         <p:spPr>
           <a:xfrm>
-            <a:off x="402336" y="2990088"/>
+            <a:off x="402336" y="3063240"/>
             <a:ext cx="2514600" cy="219456"/>
           </a:xfrm>
           <a:prstGeom prst="rect">
@@ -8547,13 +8668,13 @@
       </p:sp>
       <p:sp>
         <p:nvSpPr>
-          <p:cNvPr id="110" name="TextBox 109"/>
+          <p:cNvPr id="117" name="TextBox 116"/>
           <p:cNvSpPr txBox="1"/>
           <p:nvPr/>
         </p:nvSpPr>
         <p:spPr>
           <a:xfrm>
-            <a:off x="402336" y="3163824"/>
+            <a:off x="402336" y="3236976"/>
             <a:ext cx="2514600" cy="164592"/>
           </a:xfrm>
           <a:prstGeom prst="rect">
@@ -8583,14 +8704,14 @@
       </p:sp>
       <p:sp>
         <p:nvSpPr>
-          <p:cNvPr id="111" name="TextBox 110"/>
+          <p:cNvPr id="118" name="TextBox 117"/>
           <p:cNvSpPr txBox="1"/>
           <p:nvPr/>
         </p:nvSpPr>
         <p:spPr>
           <a:xfrm>
-            <a:off x="182880" y="3328416"/>
-            <a:ext cx="2734056" cy="1188720"/>
+            <a:off x="182880" y="3383280"/>
+            <a:ext cx="2734056" cy="1097280"/>
           </a:xfrm>
           <a:prstGeom prst="rect">
             <a:avLst/>
@@ -8605,9 +8726,9 @@
           <a:p>
             <a:pPr>
               <a:spcAft>
-                <a:spcPts val="250"/>
-              </a:spcAft>
-              <a:defRPr sz="650" b="1">
+                <a:spcPts val="200"/>
+              </a:spcAft>
+              <a:defRPr sz="620" b="1">
                 <a:solidFill>
                   <a:srgbClr val="ED1D24"/>
                 </a:solidFill>
@@ -8618,7 +8739,7 @@
               <a:t>📉 ① </a:t>
             </a:r>
             <a:r>
-              <a:rPr sz="650" b="1">
+              <a:rPr sz="620" b="1">
                 <a:solidFill>
                   <a:srgbClr val="212121"/>
                 </a:solidFill>
@@ -8627,7 +8748,7 @@
               <a:t>Saturated prepaid mobility -</a:t>
             </a:r>
             <a:r>
-              <a:rPr sz="650" b="0">
+              <a:rPr sz="620" b="0">
                 <a:solidFill>
                   <a:srgbClr val="212121"/>
                 </a:solidFill>
@@ -8639,9 +8760,9 @@
           <a:p>
             <a:pPr>
               <a:spcAft>
-                <a:spcPts val="250"/>
-              </a:spcAft>
-              <a:defRPr sz="650" b="1">
+                <a:spcPts val="200"/>
+              </a:spcAft>
+              <a:defRPr sz="620" b="1">
                 <a:solidFill>
                   <a:srgbClr val="ED1D24"/>
                 </a:solidFill>
@@ -8652,7 +8773,7 @@
               <a:t>👥 ② </a:t>
             </a:r>
             <a:r>
-              <a:rPr sz="650" b="1">
+              <a:rPr sz="620" b="1">
                 <a:solidFill>
                   <a:srgbClr val="212121"/>
                 </a:solidFill>
@@ -8661,7 +8782,7 @@
               <a:t>Independent product silos -</a:t>
             </a:r>
             <a:r>
-              <a:rPr sz="650" b="0">
+              <a:rPr sz="620" b="0">
                 <a:solidFill>
                   <a:srgbClr val="212121"/>
                 </a:solidFill>
@@ -8673,9 +8794,9 @@
           <a:p>
             <a:pPr>
               <a:spcAft>
-                <a:spcPts val="250"/>
-              </a:spcAft>
-              <a:defRPr sz="650" b="1">
+                <a:spcPts val="200"/>
+              </a:spcAft>
+              <a:defRPr sz="620" b="1">
                 <a:solidFill>
                   <a:srgbClr val="ED1D24"/>
                 </a:solidFill>
@@ -8686,7 +8807,7 @@
               <a:t>🔄 ③ </a:t>
             </a:r>
             <a:r>
-              <a:rPr sz="650" b="1">
+              <a:rPr sz="620" b="1">
                 <a:solidFill>
                   <a:srgbClr val="212121"/>
                 </a:solidFill>
@@ -8695,7 +8816,7 @@
               <a:t>Single-product churn drain -</a:t>
             </a:r>
             <a:r>
-              <a:rPr sz="650" b="0">
+              <a:rPr sz="620" b="0">
                 <a:solidFill>
                   <a:srgbClr val="212121"/>
                 </a:solidFill>
@@ -8707,9 +8828,9 @@
           <a:p>
             <a:pPr>
               <a:spcAft>
-                <a:spcPts val="250"/>
-              </a:spcAft>
-              <a:defRPr sz="650" b="1">
+                <a:spcPts val="200"/>
+              </a:spcAft>
+              <a:defRPr sz="620" b="1">
                 <a:solidFill>
                   <a:srgbClr val="ED1D24"/>
                 </a:solidFill>
@@ -8720,7 +8841,7 @@
               <a:t>📺 ④ </a:t>
             </a:r>
             <a:r>
-              <a:rPr sz="650" b="1">
+              <a:rPr sz="620" b="1">
                 <a:solidFill>
                   <a:srgbClr val="212121"/>
                 </a:solidFill>
@@ -8729,7 +8850,7 @@
               <a:t>DTH revenue contracting -</a:t>
             </a:r>
             <a:r>
-              <a:rPr sz="650" b="0">
+              <a:rPr sz="620" b="0">
                 <a:solidFill>
                   <a:srgbClr val="212121"/>
                 </a:solidFill>
@@ -8741,9 +8862,9 @@
           <a:p>
             <a:pPr>
               <a:spcAft>
-                <a:spcPts val="250"/>
-              </a:spcAft>
-              <a:defRPr sz="650" b="1">
+                <a:spcPts val="200"/>
+              </a:spcAft>
+              <a:defRPr sz="620" b="1">
                 <a:solidFill>
                   <a:srgbClr val="ED1D24"/>
                 </a:solidFill>
@@ -8754,7 +8875,7 @@
               <a:t>🔧 ⑤ </a:t>
             </a:r>
             <a:r>
-              <a:rPr sz="650" b="1">
+              <a:rPr sz="620" b="1">
                 <a:solidFill>
                   <a:srgbClr val="212121"/>
                 </a:solidFill>
@@ -8763,7 +8884,7 @@
               <a:t>Field force under-used -</a:t>
             </a:r>
             <a:r>
-              <a:rPr sz="650" b="0">
+              <a:rPr sz="620" b="0">
                 <a:solidFill>
                   <a:srgbClr val="212121"/>
                 </a:solidFill>
@@ -8776,7 +8897,7 @@
       </p:sp>
       <p:sp>
         <p:nvSpPr>
-          <p:cNvPr id="112" name="TextBox 111"/>
+          <p:cNvPr id="119" name="TextBox 118"/>
           <p:cNvSpPr txBox="1"/>
           <p:nvPr/>
         </p:nvSpPr>
@@ -8797,7 +8918,7 @@
           <a:lstStyle/>
           <a:p>
             <a:pPr>
-              <a:defRPr sz="550" b="0" i="1">
+              <a:defRPr sz="520" b="0" i="1">
                 <a:solidFill>
                   <a:srgbClr val="787878"/>
                 </a:solidFill>
@@ -8812,14 +8933,14 @@
       </p:sp>
       <p:sp>
         <p:nvSpPr>
-          <p:cNvPr id="113" name="Rounded Rectangle 112"/>
+          <p:cNvPr id="120" name="Rounded Rectangle 119"/>
           <p:cNvSpPr/>
           <p:nvPr/>
         </p:nvSpPr>
         <p:spPr>
           <a:xfrm>
-            <a:off x="3090672" y="2944368"/>
-            <a:ext cx="2880360" cy="1700784"/>
+            <a:off x="3090672" y="3017520"/>
+            <a:ext cx="2880360" cy="1627632"/>
           </a:xfrm>
           <a:prstGeom prst="roundRect">
             <a:avLst/>
@@ -8857,13 +8978,13 @@
       </p:sp>
       <p:sp>
         <p:nvSpPr>
-          <p:cNvPr id="114" name="Rectangle 113"/>
+          <p:cNvPr id="121" name="Rectangle 120"/>
           <p:cNvSpPr/>
           <p:nvPr/>
         </p:nvSpPr>
         <p:spPr>
           <a:xfrm>
-            <a:off x="3163824" y="3017520"/>
+            <a:off x="3163824" y="3090672"/>
             <a:ext cx="164592" cy="164592"/>
           </a:xfrm>
           <a:prstGeom prst="rect">
@@ -8891,7 +9012,7 @@
           </a:fontRef>
         </p:style>
         <p:txBody>
-          <a:bodyPr rtlCol="0" anchor="ctr" wrap="none" lIns="0" rIns="0" tIns="0" bIns="0"/>
+          <a:bodyPr rtlCol="0" anchor="ctr" lIns="0" rIns="0" tIns="0" bIns="0"/>
           <a:lstStyle/>
           <a:p>
             <a:pPr algn="ctr">
@@ -8910,13 +9031,13 @@
       </p:sp>
       <p:sp>
         <p:nvSpPr>
-          <p:cNvPr id="115" name="TextBox 114"/>
+          <p:cNvPr id="122" name="TextBox 121"/>
           <p:cNvSpPr txBox="1"/>
           <p:nvPr/>
         </p:nvSpPr>
         <p:spPr>
           <a:xfrm>
-            <a:off x="3383280" y="2990088"/>
+            <a:off x="3383280" y="3063240"/>
             <a:ext cx="2514600" cy="219456"/>
           </a:xfrm>
           <a:prstGeom prst="rect">
@@ -8946,13 +9067,13 @@
       </p:sp>
       <p:sp>
         <p:nvSpPr>
-          <p:cNvPr id="116" name="TextBox 115"/>
+          <p:cNvPr id="123" name="TextBox 122"/>
           <p:cNvSpPr txBox="1"/>
           <p:nvPr/>
         </p:nvSpPr>
         <p:spPr>
           <a:xfrm>
-            <a:off x="3383280" y="3163824"/>
+            <a:off x="3383280" y="3236976"/>
             <a:ext cx="2514600" cy="164592"/>
           </a:xfrm>
           <a:prstGeom prst="rect">
@@ -8982,14 +9103,14 @@
       </p:sp>
       <p:sp>
         <p:nvSpPr>
-          <p:cNvPr id="117" name="TextBox 116"/>
+          <p:cNvPr id="124" name="TextBox 123"/>
           <p:cNvSpPr txBox="1"/>
           <p:nvPr/>
         </p:nvSpPr>
         <p:spPr>
           <a:xfrm>
-            <a:off x="3163824" y="3328416"/>
-            <a:ext cx="2734056" cy="1188720"/>
+            <a:off x="3163824" y="3383280"/>
+            <a:ext cx="2734056" cy="1097280"/>
           </a:xfrm>
           <a:prstGeom prst="rect">
             <a:avLst/>
@@ -9004,9 +9125,9 @@
           <a:p>
             <a:pPr>
               <a:spcAft>
-                <a:spcPts val="250"/>
-              </a:spcAft>
-              <a:defRPr sz="650" b="1">
+                <a:spcPts val="200"/>
+              </a:spcAft>
+              <a:defRPr sz="620" b="1">
                 <a:solidFill>
                   <a:srgbClr val="ED1D24"/>
                 </a:solidFill>
@@ -9017,7 +9138,7 @@
               <a:t>⚠️ </a:t>
             </a:r>
             <a:r>
-              <a:rPr sz="650" b="1">
+              <a:rPr sz="620" b="1">
                 <a:solidFill>
                   <a:srgbClr val="212121"/>
                 </a:solidFill>
@@ -9026,7 +9147,7 @@
               <a:t>SPOF anxiety:</a:t>
             </a:r>
             <a:r>
-              <a:rPr sz="650" b="0">
+              <a:rPr sz="620" b="0">
                 <a:solidFill>
                   <a:srgbClr val="212121"/>
                 </a:solidFill>
@@ -9038,9 +9159,9 @@
           <a:p>
             <a:pPr>
               <a:spcAft>
-                <a:spcPts val="250"/>
-              </a:spcAft>
-              <a:defRPr sz="650" b="1">
+                <a:spcPts val="200"/>
+              </a:spcAft>
+              <a:defRPr sz="620" b="1">
                 <a:solidFill>
                   <a:srgbClr val="ED1D24"/>
                 </a:solidFill>
@@ -9051,7 +9172,7 @@
               <a:t>📶 </a:t>
             </a:r>
             <a:r>
-              <a:rPr sz="650" b="1">
+              <a:rPr sz="620" b="1">
                 <a:solidFill>
                   <a:srgbClr val="212121"/>
                 </a:solidFill>
@@ -9060,7 +9181,7 @@
               <a:t>Migration dread:</a:t>
             </a:r>
             <a:r>
-              <a:rPr sz="650" b="0">
+              <a:rPr sz="620" b="0">
                 <a:solidFill>
                   <a:srgbClr val="212121"/>
                 </a:solidFill>
@@ -9072,9 +9193,9 @@
           <a:p>
             <a:pPr>
               <a:spcAft>
-                <a:spcPts val="250"/>
-              </a:spcAft>
-              <a:defRPr sz="650" b="1">
+                <a:spcPts val="200"/>
+              </a:spcAft>
+              <a:defRPr sz="620" b="1">
                 <a:solidFill>
                   <a:srgbClr val="ED1D24"/>
                 </a:solidFill>
@@ -9085,7 +9206,7 @@
               <a:t>🪙 </a:t>
             </a:r>
             <a:r>
-              <a:rPr sz="650" b="1">
+              <a:rPr sz="620" b="1">
                 <a:solidFill>
                   <a:srgbClr val="212121"/>
                 </a:solidFill>
@@ -9094,7 +9215,7 @@
               <a:t>Utility-arbitrage bias:</a:t>
             </a:r>
             <a:r>
-              <a:rPr sz="650" b="0">
+              <a:rPr sz="620" b="0">
                 <a:solidFill>
                   <a:srgbClr val="212121"/>
                 </a:solidFill>
@@ -9106,9 +9227,9 @@
           <a:p>
             <a:pPr>
               <a:spcAft>
-                <a:spcPts val="250"/>
-              </a:spcAft>
-              <a:defRPr sz="650" b="1">
+                <a:spcPts val="200"/>
+              </a:spcAft>
+              <a:defRPr sz="620" b="1">
                 <a:solidFill>
                   <a:srgbClr val="ED1D24"/>
                 </a:solidFill>
@@ -9119,7 +9240,7 @@
               <a:t>📷 </a:t>
             </a:r>
             <a:r>
-              <a:rPr sz="650" b="1">
+              <a:rPr sz="620" b="1">
                 <a:solidFill>
                   <a:srgbClr val="212121"/>
                 </a:solidFill>
@@ -9128,7 +9249,7 @@
               <a:t>Security-camera trust gap:</a:t>
             </a:r>
             <a:r>
-              <a:rPr sz="650" b="0">
+              <a:rPr sz="620" b="0">
                 <a:solidFill>
                   <a:srgbClr val="212121"/>
                 </a:solidFill>
@@ -9141,7 +9262,7 @@
       </p:sp>
       <p:sp>
         <p:nvSpPr>
-          <p:cNvPr id="118" name="TextBox 117"/>
+          <p:cNvPr id="125" name="TextBox 124"/>
           <p:cNvSpPr txBox="1"/>
           <p:nvPr/>
         </p:nvSpPr>
@@ -9162,7 +9283,7 @@
           <a:lstStyle/>
           <a:p>
             <a:pPr>
-              <a:defRPr sz="550" b="0" i="1">
+              <a:defRPr sz="520" b="0" i="1">
                 <a:solidFill>
                   <a:srgbClr val="787878"/>
                 </a:solidFill>
@@ -9177,14 +9298,14 @@
       </p:sp>
       <p:sp>
         <p:nvSpPr>
-          <p:cNvPr id="119" name="Rounded Rectangle 118"/>
+          <p:cNvPr id="126" name="Rounded Rectangle 125"/>
           <p:cNvSpPr/>
           <p:nvPr/>
         </p:nvSpPr>
         <p:spPr>
           <a:xfrm>
-            <a:off x="6071616" y="2944368"/>
-            <a:ext cx="2962656" cy="1700784"/>
+            <a:off x="6071616" y="3017520"/>
+            <a:ext cx="2962656" cy="1627632"/>
           </a:xfrm>
           <a:prstGeom prst="roundRect">
             <a:avLst/>
@@ -9222,13 +9343,13 @@
       </p:sp>
       <p:sp>
         <p:nvSpPr>
-          <p:cNvPr id="120" name="Rectangle 119"/>
+          <p:cNvPr id="127" name="Rectangle 126"/>
           <p:cNvSpPr/>
           <p:nvPr/>
         </p:nvSpPr>
         <p:spPr>
           <a:xfrm>
-            <a:off x="6144768" y="3017520"/>
+            <a:off x="6144768" y="3090672"/>
             <a:ext cx="164592" cy="164592"/>
           </a:xfrm>
           <a:prstGeom prst="rect">
@@ -9256,7 +9377,7 @@
           </a:fontRef>
         </p:style>
         <p:txBody>
-          <a:bodyPr rtlCol="0" anchor="ctr" wrap="none" lIns="0" rIns="0" tIns="0" bIns="0"/>
+          <a:bodyPr rtlCol="0" anchor="ctr" lIns="0" rIns="0" tIns="0" bIns="0"/>
           <a:lstStyle/>
           <a:p>
             <a:pPr algn="ctr">
@@ -9275,13 +9396,13 @@
       </p:sp>
       <p:sp>
         <p:nvSpPr>
-          <p:cNvPr id="121" name="TextBox 120"/>
+          <p:cNvPr id="128" name="TextBox 127"/>
           <p:cNvSpPr txBox="1"/>
           <p:nvPr/>
         </p:nvSpPr>
         <p:spPr>
           <a:xfrm>
-            <a:off x="6364224" y="2990088"/>
+            <a:off x="6364224" y="3063240"/>
             <a:ext cx="2596896" cy="219456"/>
           </a:xfrm>
           <a:prstGeom prst="rect">
@@ -9311,13 +9432,13 @@
       </p:sp>
       <p:sp>
         <p:nvSpPr>
-          <p:cNvPr id="122" name="TextBox 121"/>
+          <p:cNvPr id="129" name="TextBox 128"/>
           <p:cNvSpPr txBox="1"/>
           <p:nvPr/>
         </p:nvSpPr>
         <p:spPr>
           <a:xfrm>
-            <a:off x="6364224" y="3163824"/>
+            <a:off x="6364224" y="3236976"/>
             <a:ext cx="2596896" cy="164592"/>
           </a:xfrm>
           <a:prstGeom prst="rect">
@@ -9347,14 +9468,14 @@
       </p:sp>
       <p:sp>
         <p:nvSpPr>
-          <p:cNvPr id="123" name="Oval 122"/>
+          <p:cNvPr id="130" name="Oval 129"/>
           <p:cNvSpPr/>
           <p:nvPr/>
         </p:nvSpPr>
         <p:spPr>
           <a:xfrm>
-            <a:off x="6144768" y="3355848"/>
-            <a:ext cx="219456" cy="219456"/>
+            <a:off x="6144768" y="3401568"/>
+            <a:ext cx="201168" cy="201168"/>
           </a:xfrm>
           <a:prstGeom prst="ellipse">
             <a:avLst/>
@@ -9387,7 +9508,7 @@
           <a:lstStyle/>
           <a:p>
             <a:pPr algn="ctr">
-              <a:defRPr sz="800" b="1">
+              <a:defRPr sz="750" b="1">
                 <a:solidFill>
                   <a:srgbClr val="ED1D24"/>
                 </a:solidFill>
@@ -9402,14 +9523,14 @@
       </p:sp>
       <p:sp>
         <p:nvSpPr>
-          <p:cNvPr id="124" name="TextBox 123"/>
+          <p:cNvPr id="131" name="TextBox 130"/>
           <p:cNvSpPr txBox="1"/>
           <p:nvPr/>
         </p:nvSpPr>
         <p:spPr>
           <a:xfrm>
-            <a:off x="6419088" y="3328416"/>
-            <a:ext cx="2267712" cy="329184"/>
+            <a:off x="6400800" y="3383280"/>
+            <a:ext cx="2286000" cy="329184"/>
           </a:xfrm>
           <a:prstGeom prst="rect">
             <a:avLst/>
@@ -9423,7 +9544,7 @@
           <a:lstStyle/>
           <a:p>
             <a:pPr>
-              <a:defRPr sz="650" b="1">
+              <a:defRPr sz="620" b="1">
                 <a:solidFill>
                   <a:srgbClr val="212121"/>
                 </a:solidFill>
@@ -9436,7 +9557,7 @@
           </a:p>
           <a:p>
             <a:pPr>
-              <a:defRPr sz="650" b="0" i="1">
+              <a:defRPr sz="620" b="0" i="1">
                 <a:solidFill>
                   <a:srgbClr val="212121"/>
                 </a:solidFill>
@@ -9451,13 +9572,13 @@
       </p:sp>
       <p:sp>
         <p:nvSpPr>
-          <p:cNvPr id="125" name="TextBox 124"/>
+          <p:cNvPr id="132" name="TextBox 131"/>
           <p:cNvSpPr txBox="1"/>
           <p:nvPr/>
         </p:nvSpPr>
         <p:spPr>
           <a:xfrm>
-            <a:off x="8723376" y="3346704"/>
+            <a:off x="8723376" y="3401568"/>
             <a:ext cx="219456" cy="219456"/>
           </a:xfrm>
           <a:prstGeom prst="rect">
@@ -9472,7 +9593,7 @@
           <a:lstStyle/>
           <a:p>
             <a:pPr algn="ctr">
-              <a:defRPr sz="950" b="0">
+              <a:defRPr sz="900" b="0">
                 <a:solidFill>
                   <a:srgbClr val="787878"/>
                 </a:solidFill>
@@ -9487,14 +9608,14 @@
       </p:sp>
       <p:sp>
         <p:nvSpPr>
-          <p:cNvPr id="126" name="Oval 125"/>
+          <p:cNvPr id="133" name="Oval 132"/>
           <p:cNvSpPr/>
           <p:nvPr/>
         </p:nvSpPr>
         <p:spPr>
           <a:xfrm>
-            <a:off x="6144768" y="3739896"/>
-            <a:ext cx="219456" cy="219456"/>
+            <a:off x="6144768" y="3767328"/>
+            <a:ext cx="201168" cy="201168"/>
           </a:xfrm>
           <a:prstGeom prst="ellipse">
             <a:avLst/>
@@ -9527,7 +9648,7 @@
           <a:lstStyle/>
           <a:p>
             <a:pPr algn="ctr">
-              <a:defRPr sz="800" b="1">
+              <a:defRPr sz="750" b="1">
                 <a:solidFill>
                   <a:srgbClr val="ED1D24"/>
                 </a:solidFill>
@@ -9542,14 +9663,14 @@
       </p:sp>
       <p:sp>
         <p:nvSpPr>
-          <p:cNvPr id="127" name="TextBox 126"/>
+          <p:cNvPr id="134" name="TextBox 133"/>
           <p:cNvSpPr txBox="1"/>
           <p:nvPr/>
         </p:nvSpPr>
         <p:spPr>
           <a:xfrm>
-            <a:off x="6419088" y="3712464"/>
-            <a:ext cx="2267712" cy="329184"/>
+            <a:off x="6400800" y="3749040"/>
+            <a:ext cx="2286000" cy="329184"/>
           </a:xfrm>
           <a:prstGeom prst="rect">
             <a:avLst/>
@@ -9563,7 +9684,7 @@
           <a:lstStyle/>
           <a:p>
             <a:pPr>
-              <a:defRPr sz="650" b="1">
+              <a:defRPr sz="620" b="1">
                 <a:solidFill>
                   <a:srgbClr val="212121"/>
                 </a:solidFill>
@@ -9576,7 +9697,7 @@
           </a:p>
           <a:p>
             <a:pPr>
-              <a:defRPr sz="650" b="0" i="1">
+              <a:defRPr sz="620" b="0" i="1">
                 <a:solidFill>
                   <a:srgbClr val="212121"/>
                 </a:solidFill>
@@ -9591,13 +9712,13 @@
       </p:sp>
       <p:sp>
         <p:nvSpPr>
-          <p:cNvPr id="128" name="TextBox 127"/>
+          <p:cNvPr id="135" name="TextBox 134"/>
           <p:cNvSpPr txBox="1"/>
           <p:nvPr/>
         </p:nvSpPr>
         <p:spPr>
           <a:xfrm>
-            <a:off x="8723376" y="3730752"/>
+            <a:off x="8723376" y="3767328"/>
             <a:ext cx="219456" cy="219456"/>
           </a:xfrm>
           <a:prstGeom prst="rect">
@@ -9612,7 +9733,7 @@
           <a:lstStyle/>
           <a:p>
             <a:pPr algn="ctr">
-              <a:defRPr sz="950" b="0">
+              <a:defRPr sz="900" b="0">
                 <a:solidFill>
                   <a:srgbClr val="787878"/>
                 </a:solidFill>
@@ -9627,14 +9748,14 @@
       </p:sp>
       <p:sp>
         <p:nvSpPr>
-          <p:cNvPr id="129" name="Oval 128"/>
+          <p:cNvPr id="136" name="Oval 135"/>
           <p:cNvSpPr/>
           <p:nvPr/>
         </p:nvSpPr>
         <p:spPr>
           <a:xfrm>
-            <a:off x="6144768" y="4123944"/>
-            <a:ext cx="219456" cy="219456"/>
+            <a:off x="6144768" y="4133088"/>
+            <a:ext cx="201168" cy="201168"/>
           </a:xfrm>
           <a:prstGeom prst="ellipse">
             <a:avLst/>
@@ -9667,7 +9788,7 @@
           <a:lstStyle/>
           <a:p>
             <a:pPr algn="ctr">
-              <a:defRPr sz="800" b="1">
+              <a:defRPr sz="750" b="1">
                 <a:solidFill>
                   <a:srgbClr val="ED1D24"/>
                 </a:solidFill>
@@ -9682,14 +9803,14 @@
       </p:sp>
       <p:sp>
         <p:nvSpPr>
-          <p:cNvPr id="130" name="TextBox 129"/>
+          <p:cNvPr id="137" name="TextBox 136"/>
           <p:cNvSpPr txBox="1"/>
           <p:nvPr/>
         </p:nvSpPr>
         <p:spPr>
           <a:xfrm>
-            <a:off x="6419088" y="4096512"/>
-            <a:ext cx="2267712" cy="329184"/>
+            <a:off x="6400800" y="4114800"/>
+            <a:ext cx="2286000" cy="329184"/>
           </a:xfrm>
           <a:prstGeom prst="rect">
             <a:avLst/>
@@ -9703,7 +9824,7 @@
           <a:lstStyle/>
           <a:p>
             <a:pPr>
-              <a:defRPr sz="650" b="1">
+              <a:defRPr sz="620" b="1">
                 <a:solidFill>
                   <a:srgbClr val="212121"/>
                 </a:solidFill>
@@ -9716,7 +9837,7 @@
           </a:p>
           <a:p>
             <a:pPr>
-              <a:defRPr sz="650" b="0" i="1">
+              <a:defRPr sz="620" b="0" i="1">
                 <a:solidFill>
                   <a:srgbClr val="212121"/>
                 </a:solidFill>
@@ -9731,13 +9852,13 @@
       </p:sp>
       <p:sp>
         <p:nvSpPr>
-          <p:cNvPr id="131" name="TextBox 130"/>
+          <p:cNvPr id="138" name="TextBox 137"/>
           <p:cNvSpPr txBox="1"/>
           <p:nvPr/>
         </p:nvSpPr>
         <p:spPr>
           <a:xfrm>
-            <a:off x="8723376" y="4114800"/>
+            <a:off x="8723376" y="4133088"/>
             <a:ext cx="219456" cy="219456"/>
           </a:xfrm>
           <a:prstGeom prst="rect">
@@ -9752,7 +9873,7 @@
           <a:lstStyle/>
           <a:p>
             <a:pPr algn="ctr">
-              <a:defRPr sz="950" b="0">
+              <a:defRPr sz="900" b="0">
                 <a:solidFill>
                   <a:srgbClr val="787878"/>
                 </a:solidFill>
@@ -9767,14 +9888,14 @@
       </p:sp>
       <p:sp>
         <p:nvSpPr>
-          <p:cNvPr id="132" name="TextBox 131"/>
+          <p:cNvPr id="139" name="TextBox 138"/>
           <p:cNvSpPr txBox="1"/>
           <p:nvPr/>
         </p:nvSpPr>
         <p:spPr>
           <a:xfrm>
             <a:off x="6144768" y="4517136"/>
-            <a:ext cx="2816352" cy="109728"/>
+            <a:ext cx="2734056" cy="109728"/>
           </a:xfrm>
           <a:prstGeom prst="rect">
             <a:avLst/>
@@ -9788,7 +9909,7 @@
           <a:lstStyle/>
           <a:p>
             <a:pPr>
-              <a:defRPr sz="550" b="0" i="1">
+              <a:defRPr sz="520" b="0" i="1">
                 <a:solidFill>
                   <a:srgbClr val="787878"/>
                 </a:solidFill>
@@ -10042,863 +10163,6 @@
 </file>
 
 <file path=ppt/slides/slide4.xml><?xml version="1.0" encoding="utf-8"?>
-<p:sld xmlns:a="http://schemas.openxmlformats.org/drawingml/2006/main" xmlns:r="http://schemas.openxmlformats.org/officeDocument/2006/relationships" xmlns:p="http://schemas.openxmlformats.org/presentationml/2006/main">
-  <p:cSld>
-    <p:spTree>
-      <p:nvGrpSpPr>
-        <p:cNvPr id="1" name=""/>
-        <p:cNvGrpSpPr/>
-        <p:nvPr/>
-      </p:nvGrpSpPr>
-      <p:grpSpPr>
-        <a:xfrm>
-          <a:off x="0" y="0"/>
-          <a:ext cx="0" cy="0"/>
-          <a:chOff x="0" y="0"/>
-          <a:chExt cx="0" cy="0"/>
-        </a:xfrm>
-      </p:grpSpPr>
-      <p:sp>
-        <p:nvSpPr>
-          <p:cNvPr id="2" name="Title 1"/>
-          <p:cNvSpPr>
-            <a:spLocks noGrp="1"/>
-          </p:cNvSpPr>
-          <p:nvPr>
-            <p:ph type="title"/>
-          </p:nvPr>
-        </p:nvSpPr>
-        <p:spPr/>
-        <p:txBody>
-          <a:bodyPr/>
-          <a:lstStyle/>
-          <a:p>
-            <a:endParaRPr/>
-          </a:p>
-        </p:txBody>
-      </p:sp>
-      <p:pic>
-        <p:nvPicPr>
-          <p:cNvPr id="3" name="Picture 2" descr="image.jpg"/>
-          <p:cNvPicPr>
-            <a:picLocks noChangeAspect="1"/>
-          </p:cNvPicPr>
-          <p:nvPr/>
-        </p:nvPicPr>
-        <p:blipFill>
-          <a:blip r:embed="rId2"/>
-          <a:stretch>
-            <a:fillRect/>
-          </a:stretch>
-        </p:blipFill>
-        <p:spPr>
-          <a:xfrm>
-            <a:off x="1" y="0"/>
-            <a:ext cx="9144000" cy="5143500"/>
-          </a:xfrm>
-          <a:prstGeom prst="rect">
-            <a:avLst/>
-          </a:prstGeom>
-        </p:spPr>
-      </p:pic>
-      <p:pic>
-        <p:nvPicPr>
-          <p:cNvPr id="6" name="Picture 5" descr="bundle_choice_card.jpg"/>
-          <p:cNvPicPr>
-            <a:picLocks noChangeAspect="1"/>
-          </p:cNvPicPr>
-          <p:nvPr/>
-        </p:nvPicPr>
-        <p:blipFill>
-          <a:blip r:embed="rId3"/>
-          <a:stretch>
-            <a:fillRect/>
-          </a:stretch>
-        </p:blipFill>
-        <p:spPr>
-          <a:xfrm>
-            <a:off x="4572000" y="1188720"/>
-            <a:ext cx="4114800" cy="3086100"/>
-          </a:xfrm>
-          <a:prstGeom prst="rect">
-            <a:avLst/>
-          </a:prstGeom>
-        </p:spPr>
-      </p:pic>
-      <p:sp>
-        <p:nvSpPr>
-          <p:cNvPr id="7" name="TextBox 6"/>
-          <p:cNvSpPr txBox="1"/>
-          <p:nvPr/>
-        </p:nvSpPr>
-        <p:spPr>
-          <a:xfrm>
-            <a:off x="457200" y="182880"/>
-            <a:ext cx="8229600" cy="731520"/>
-          </a:xfrm>
-          <a:prstGeom prst="rect">
-            <a:avLst/>
-          </a:prstGeom>
-          <a:noFill/>
-        </p:spPr>
-        <p:txBody>
-          <a:bodyPr wrap="square" lIns="0" tIns="0">
-            <a:spAutoFit/>
-          </a:bodyPr>
-          <a:lstStyle/>
-          <a:p>
-            <a:pPr>
-              <a:defRPr sz="2100" b="1">
-                <a:solidFill>
-                  <a:srgbClr val="ED1D24"/>
-                </a:solidFill>
-                <a:latin typeface="Calibri"/>
-              </a:defRPr>
-            </a:pPr>
-            <a:r>
-              <a:t>Annexure 1: Primary Research &amp; Conjoint Choice Cards</a:t>
-            </a:r>
-          </a:p>
-        </p:txBody>
-      </p:sp>
-      <p:sp>
-        <p:nvSpPr>
-          <p:cNvPr id="8" name="Rounded Rectangle 7"/>
-          <p:cNvSpPr/>
-          <p:nvPr/>
-        </p:nvSpPr>
-        <p:spPr>
-          <a:xfrm>
-            <a:off x="457200" y="1005840"/>
-            <a:ext cx="3840480" cy="3657600"/>
-          </a:xfrm>
-          <a:prstGeom prst="roundRect">
-            <a:avLst/>
-          </a:prstGeom>
-          <a:solidFill>
-            <a:srgbClr val="F8F9FA"/>
-          </a:solidFill>
-          <a:ln w="12700">
-            <a:solidFill>
-              <a:srgbClr val="E4E6EB"/>
-            </a:solidFill>
-          </a:ln>
-        </p:spPr>
-        <p:style>
-          <a:lnRef idx="1">
-            <a:schemeClr val="accent1"/>
-          </a:lnRef>
-          <a:fillRef idx="3">
-            <a:schemeClr val="accent1"/>
-          </a:fillRef>
-          <a:effectRef idx="2">
-            <a:schemeClr val="accent1"/>
-          </a:effectRef>
-          <a:fontRef idx="minor">
-            <a:schemeClr val="lt1"/>
-          </a:fontRef>
-        </p:style>
-        <p:txBody>
-          <a:bodyPr rtlCol="0" anchor="t" wrap="square" lIns="137160" rIns="137160" tIns="164592" bIns="137160"/>
-          <a:lstStyle/>
-          <a:p>
-            <a:pPr algn="ctr">
-              <a:spcAft>
-                <a:spcPts val="800"/>
-              </a:spcAft>
-              <a:defRPr sz="1300" b="1">
-                <a:solidFill>
-                  <a:srgbClr val="0F121C"/>
-                </a:solidFill>
-                <a:latin typeface="Calibri"/>
-              </a:defRPr>
-            </a:pPr>
-            <a:r>
-              <a:t>Research Methodology &amp; Conjoint Analysis</a:t>
-            </a:r>
-          </a:p>
-          <a:p>
-            <a:pPr>
-              <a:spcAft>
-                <a:spcPts val="500"/>
-              </a:spcAft>
-              <a:defRPr sz="880" b="0">
-                <a:solidFill>
-                  <a:srgbClr val="212121"/>
-                </a:solidFill>
-                <a:latin typeface="Arial"/>
-              </a:defRPr>
-            </a:pPr>
-            <a:r>
-              <a:t>• Conjoint Setup: We deployed 4 binary choice questions directly comparing individual utilities vs. their bundled Altura Home counterparts (Choice Card Starter, Connect, Family Secure, and Infinite).</a:t>
-            </a:r>
-          </a:p>
-          <a:p>
-            <a:pPr>
-              <a:spcAft>
-                <a:spcPts val="500"/>
-              </a:spcAft>
-              <a:defRPr sz="880" b="0">
-                <a:solidFill>
-                  <a:srgbClr val="212121"/>
-                </a:solidFill>
-                <a:latin typeface="Arial"/>
-              </a:defRPr>
-            </a:pPr>
-            <a:r>
-              <a:t>• Goal: This Discrete Choice Conjoint Experiment isolates exactly where price sensitivity breaks and maps household utility values.</a:t>
-            </a:r>
-          </a:p>
-          <a:p>
-            <a:pPr>
-              <a:spcAft>
-                <a:spcPts val="500"/>
-              </a:spcAft>
-              <a:defRPr sz="880" b="0">
-                <a:solidFill>
-                  <a:srgbClr val="212121"/>
-                </a:solidFill>
-                <a:latin typeface="Arial"/>
-              </a:defRPr>
-            </a:pPr>
-            <a:r>
-              <a:t>• Quantifying SPOF: Our survey includes agree/disagree statements to map network reliability concerns and data privacy barriers.</a:t>
-            </a:r>
-          </a:p>
-          <a:p>
-            <a:pPr>
-              <a:spcAft>
-                <a:spcPts val="500"/>
-              </a:spcAft>
-              <a:defRPr sz="880" b="0">
-                <a:solidFill>
-                  <a:srgbClr val="212121"/>
-                </a:solidFill>
-                <a:latin typeface="Arial"/>
-              </a:defRPr>
-            </a:pPr>
-            <a:r>
-              <a:t>• Uploading Cards: The generated card graphics (pictured right) help respondents visually compare price-to-benefit ratios.</a:t>
-            </a:r>
-          </a:p>
-        </p:txBody>
-      </p:sp>
-      <p:sp>
-        <p:nvSpPr>
-          <p:cNvPr id="9" name="Rectangle 8"/>
-          <p:cNvSpPr/>
-          <p:nvPr/>
-        </p:nvSpPr>
-        <p:spPr>
-          <a:xfrm>
-            <a:off x="502920" y="1005840"/>
-            <a:ext cx="3749040" cy="73152"/>
-          </a:xfrm>
-          <a:prstGeom prst="rect">
-            <a:avLst/>
-          </a:prstGeom>
-          <a:solidFill>
-            <a:srgbClr val="0F121C"/>
-          </a:solidFill>
-          <a:ln>
-            <a:noFill/>
-          </a:ln>
-        </p:spPr>
-        <p:style>
-          <a:lnRef idx="1">
-            <a:schemeClr val="accent1"/>
-          </a:lnRef>
-          <a:fillRef idx="3">
-            <a:schemeClr val="accent1"/>
-          </a:fillRef>
-          <a:effectRef idx="2">
-            <a:schemeClr val="accent1"/>
-          </a:effectRef>
-          <a:fontRef idx="minor">
-            <a:schemeClr val="lt1"/>
-          </a:fontRef>
-        </p:style>
-        <p:txBody>
-          <a:bodyPr rtlCol="0" anchor="ctr"/>
-          <a:lstStyle/>
-          <a:p>
-            <a:pPr algn="ctr"/>
-          </a:p>
-        </p:txBody>
-      </p:sp>
-      <p:pic>
-        <p:nvPicPr>
-          <p:cNvPr id="10" name="Picture 9" descr="image.jpg"/>
-          <p:cNvPicPr>
-            <a:picLocks noChangeAspect="1"/>
-          </p:cNvPicPr>
-          <p:nvPr/>
-        </p:nvPicPr>
-        <p:blipFill>
-          <a:blip r:embed="rId4"/>
-          <a:stretch>
-            <a:fillRect/>
-          </a:stretch>
-        </p:blipFill>
-        <p:spPr>
-          <a:xfrm>
-            <a:off x="4572000" y="1188720"/>
-            <a:ext cx="4114800" cy="3086100"/>
-          </a:xfrm>
-          <a:prstGeom prst="rect">
-            <a:avLst/>
-          </a:prstGeom>
-          <a:ln w="12700">
-            <a:solidFill>
-              <a:srgbClr val="E4E6EB"/>
-            </a:solidFill>
-          </a:ln>
-        </p:spPr>
-      </p:pic>
-    </p:spTree>
-  </p:cSld>
-  <p:clrMapOvr>
-    <a:masterClrMapping/>
-  </p:clrMapOvr>
-</p:sld>
-</file>
-
-<file path=ppt/slides/slide5.xml><?xml version="1.0" encoding="utf-8"?>
-<p:sld xmlns:a="http://schemas.openxmlformats.org/drawingml/2006/main" xmlns:r="http://schemas.openxmlformats.org/officeDocument/2006/relationships" xmlns:p="http://schemas.openxmlformats.org/presentationml/2006/main">
-  <p:cSld>
-    <p:spTree>
-      <p:nvGrpSpPr>
-        <p:cNvPr id="1" name=""/>
-        <p:cNvGrpSpPr/>
-        <p:nvPr/>
-      </p:nvGrpSpPr>
-      <p:grpSpPr>
-        <a:xfrm>
-          <a:off x="0" y="0"/>
-          <a:ext cx="0" cy="0"/>
-          <a:chOff x="0" y="0"/>
-          <a:chExt cx="0" cy="0"/>
-        </a:xfrm>
-      </p:grpSpPr>
-      <p:sp>
-        <p:nvSpPr>
-          <p:cNvPr id="2" name="Title 1"/>
-          <p:cNvSpPr>
-            <a:spLocks noGrp="1"/>
-          </p:cNvSpPr>
-          <p:nvPr>
-            <p:ph type="title"/>
-          </p:nvPr>
-        </p:nvSpPr>
-        <p:spPr/>
-        <p:txBody>
-          <a:bodyPr/>
-          <a:lstStyle/>
-          <a:p>
-            <a:endParaRPr/>
-          </a:p>
-        </p:txBody>
-      </p:sp>
-      <p:pic>
-        <p:nvPicPr>
-          <p:cNvPr id="3" name="Picture 2" descr="image.jpg"/>
-          <p:cNvPicPr>
-            <a:picLocks noChangeAspect="1"/>
-          </p:cNvPicPr>
-          <p:nvPr/>
-        </p:nvPicPr>
-        <p:blipFill>
-          <a:blip r:embed="rId2"/>
-          <a:stretch>
-            <a:fillRect/>
-          </a:stretch>
-        </p:blipFill>
-        <p:spPr>
-          <a:xfrm>
-            <a:off x="1" y="0"/>
-            <a:ext cx="9144000" cy="5143500"/>
-          </a:xfrm>
-          <a:prstGeom prst="rect">
-            <a:avLst/>
-          </a:prstGeom>
-        </p:spPr>
-      </p:pic>
-      <p:sp>
-        <p:nvSpPr>
-          <p:cNvPr id="4" name="TextBox 3"/>
-          <p:cNvSpPr txBox="1"/>
-          <p:nvPr/>
-        </p:nvSpPr>
-        <p:spPr>
-          <a:xfrm>
-            <a:off x="457200" y="182880"/>
-            <a:ext cx="8229600" cy="731520"/>
-          </a:xfrm>
-          <a:prstGeom prst="rect">
-            <a:avLst/>
-          </a:prstGeom>
-          <a:noFill/>
-        </p:spPr>
-        <p:txBody>
-          <a:bodyPr wrap="square" lIns="0" tIns="0">
-            <a:spAutoFit/>
-          </a:bodyPr>
-          <a:lstStyle/>
-          <a:p>
-            <a:pPr>
-              <a:defRPr sz="2100" b="1">
-                <a:solidFill>
-                  <a:srgbClr val="ED1D24"/>
-                </a:solidFill>
-                <a:latin typeface="Calibri"/>
-              </a:defRPr>
-            </a:pPr>
-            <a:r>
-              <a:t>Annexure 2: Inbound Customer Portal &amp; Choice Matrices</a:t>
-            </a:r>
-          </a:p>
-        </p:txBody>
-      </p:sp>
-      <p:sp>
-        <p:nvSpPr>
-          <p:cNvPr id="5" name="Rounded Rectangle 4"/>
-          <p:cNvSpPr/>
-          <p:nvPr/>
-        </p:nvSpPr>
-        <p:spPr>
-          <a:xfrm>
-            <a:off x="457200" y="1005840"/>
-            <a:ext cx="3840480" cy="3657600"/>
-          </a:xfrm>
-          <a:prstGeom prst="roundRect">
-            <a:avLst/>
-          </a:prstGeom>
-          <a:solidFill>
-            <a:srgbClr val="F8F9FA"/>
-          </a:solidFill>
-          <a:ln w="12700">
-            <a:solidFill>
-              <a:srgbClr val="E4E6EB"/>
-            </a:solidFill>
-          </a:ln>
-        </p:spPr>
-        <p:style>
-          <a:lnRef idx="1">
-            <a:schemeClr val="accent1"/>
-          </a:lnRef>
-          <a:fillRef idx="3">
-            <a:schemeClr val="accent1"/>
-          </a:fillRef>
-          <a:effectRef idx="2">
-            <a:schemeClr val="accent1"/>
-          </a:effectRef>
-          <a:fontRef idx="minor">
-            <a:schemeClr val="lt1"/>
-          </a:fontRef>
-        </p:style>
-        <p:txBody>
-          <a:bodyPr rtlCol="0" anchor="t" wrap="square" lIns="137160" rIns="137160" tIns="164592" bIns="137160"/>
-          <a:lstStyle/>
-          <a:p>
-            <a:pPr algn="ctr">
-              <a:spcAft>
-                <a:spcPts val="800"/>
-              </a:spcAft>
-              <a:defRPr sz="1300" b="1">
-                <a:solidFill>
-                  <a:srgbClr val="0F121C"/>
-                </a:solidFill>
-                <a:latin typeface="Calibri"/>
-              </a:defRPr>
-            </a:pPr>
-            <a:r>
-              <a:t>Digitizing the Onboarding Funnel</a:t>
-            </a:r>
-          </a:p>
-          <a:p>
-            <a:pPr>
-              <a:spcAft>
-                <a:spcPts val="500"/>
-              </a:spcAft>
-              <a:defRPr sz="880" b="0">
-                <a:solidFill>
-                  <a:srgbClr val="212121"/>
-                </a:solidFill>
-                <a:latin typeface="Arial"/>
-              </a:defRPr>
-            </a:pPr>
-            <a:r>
-              <a:t>• Website Re-architecting: Designed a premium tab-based structure instead of long scroll sheets, streamlining categories for different household priorities.</a:t>
-            </a:r>
-          </a:p>
-          <a:p>
-            <a:pPr>
-              <a:spcAft>
-                <a:spcPts val="500"/>
-              </a:spcAft>
-              <a:defRPr sz="880" b="0">
-                <a:solidFill>
-                  <a:srgbClr val="212121"/>
-                </a:solidFill>
-                <a:latin typeface="Arial"/>
-              </a:defRPr>
-            </a:pPr>
-            <a:r>
-              <a:t>• AirBot Integration: AirBot acts as a frictionless digital concierge. It replaces standard sales pitch dialogue with multi-select service checklists and contextual profiling.</a:t>
-            </a:r>
-          </a:p>
-          <a:p>
-            <a:pPr>
-              <a:spcAft>
-                <a:spcPts val="500"/>
-              </a:spcAft>
-              <a:defRPr sz="880" b="0">
-                <a:solidFill>
-                  <a:srgbClr val="212121"/>
-                </a:solidFill>
-                <a:latin typeface="Arial"/>
-              </a:defRPr>
-            </a:pPr>
-            <a:r>
-              <a:t>• Autopay &amp; Coin Loops: The online checkout dynamically demonstrates monthly savings (₹50 discount) and Thanks Coins loyalty accumulation to increase signup rates.</a:t>
-            </a:r>
-          </a:p>
-        </p:txBody>
-      </p:sp>
-      <p:sp>
-        <p:nvSpPr>
-          <p:cNvPr id="6" name="Rectangle 5"/>
-          <p:cNvSpPr/>
-          <p:nvPr/>
-        </p:nvSpPr>
-        <p:spPr>
-          <a:xfrm>
-            <a:off x="502920" y="1005840"/>
-            <a:ext cx="3749040" cy="73152"/>
-          </a:xfrm>
-          <a:prstGeom prst="rect">
-            <a:avLst/>
-          </a:prstGeom>
-          <a:solidFill>
-            <a:srgbClr val="3498DB"/>
-          </a:solidFill>
-          <a:ln>
-            <a:noFill/>
-          </a:ln>
-        </p:spPr>
-        <p:style>
-          <a:lnRef idx="1">
-            <a:schemeClr val="accent1"/>
-          </a:lnRef>
-          <a:fillRef idx="3">
-            <a:schemeClr val="accent1"/>
-          </a:fillRef>
-          <a:effectRef idx="2">
-            <a:schemeClr val="accent1"/>
-          </a:effectRef>
-          <a:fontRef idx="minor">
-            <a:schemeClr val="lt1"/>
-          </a:fontRef>
-        </p:style>
-        <p:txBody>
-          <a:bodyPr rtlCol="0" anchor="ctr"/>
-          <a:lstStyle/>
-          <a:p>
-            <a:pPr algn="ctr"/>
-          </a:p>
-        </p:txBody>
-      </p:sp>
-      <p:pic>
-        <p:nvPicPr>
-          <p:cNvPr id="7" name="Picture 6" descr="image.jpg"/>
-          <p:cNvPicPr>
-            <a:picLocks noChangeAspect="1"/>
-          </p:cNvPicPr>
-          <p:nvPr/>
-        </p:nvPicPr>
-        <p:blipFill>
-          <a:blip r:embed="rId3"/>
-          <a:stretch>
-            <a:fillRect/>
-          </a:stretch>
-        </p:blipFill>
-        <p:spPr>
-          <a:xfrm>
-            <a:off x="4572000" y="1188720"/>
-            <a:ext cx="4114800" cy="3086100"/>
-          </a:xfrm>
-          <a:prstGeom prst="rect">
-            <a:avLst/>
-          </a:prstGeom>
-          <a:ln w="12700">
-            <a:solidFill>
-              <a:srgbClr val="E4E6EB"/>
-            </a:solidFill>
-          </a:ln>
-        </p:spPr>
-      </p:pic>
-    </p:spTree>
-  </p:cSld>
-  <p:clrMapOvr>
-    <a:masterClrMapping/>
-  </p:clrMapOvr>
-</p:sld>
-</file>
-
-<file path=ppt/slides/slide6.xml><?xml version="1.0" encoding="utf-8"?>
-<p:sld xmlns:a="http://schemas.openxmlformats.org/drawingml/2006/main" xmlns:r="http://schemas.openxmlformats.org/officeDocument/2006/relationships" xmlns:p="http://schemas.openxmlformats.org/presentationml/2006/main">
-  <p:cSld>
-    <p:spTree>
-      <p:nvGrpSpPr>
-        <p:cNvPr id="1" name=""/>
-        <p:cNvGrpSpPr/>
-        <p:nvPr/>
-      </p:nvGrpSpPr>
-      <p:grpSpPr>
-        <a:xfrm>
-          <a:off x="0" y="0"/>
-          <a:ext cx="0" cy="0"/>
-          <a:chOff x="0" y="0"/>
-          <a:chExt cx="0" cy="0"/>
-        </a:xfrm>
-      </p:grpSpPr>
-      <p:sp>
-        <p:nvSpPr>
-          <p:cNvPr id="2" name="Title 1"/>
-          <p:cNvSpPr>
-            <a:spLocks noGrp="1"/>
-          </p:cNvSpPr>
-          <p:nvPr>
-            <p:ph type="title"/>
-          </p:nvPr>
-        </p:nvSpPr>
-        <p:spPr/>
-        <p:txBody>
-          <a:bodyPr/>
-          <a:lstStyle/>
-          <a:p>
-            <a:endParaRPr/>
-          </a:p>
-        </p:txBody>
-      </p:sp>
-      <p:pic>
-        <p:nvPicPr>
-          <p:cNvPr id="3" name="Picture 2" descr="image.jpg"/>
-          <p:cNvPicPr>
-            <a:picLocks noChangeAspect="1"/>
-          </p:cNvPicPr>
-          <p:nvPr/>
-        </p:nvPicPr>
-        <p:blipFill>
-          <a:blip r:embed="rId2"/>
-          <a:stretch>
-            <a:fillRect/>
-          </a:stretch>
-        </p:blipFill>
-        <p:spPr>
-          <a:xfrm>
-            <a:off x="1" y="0"/>
-            <a:ext cx="9144000" cy="5143500"/>
-          </a:xfrm>
-          <a:prstGeom prst="rect">
-            <a:avLst/>
-          </a:prstGeom>
-        </p:spPr>
-      </p:pic>
-      <p:sp>
-        <p:nvSpPr>
-          <p:cNvPr id="4" name="TextBox 3"/>
-          <p:cNvSpPr txBox="1"/>
-          <p:nvPr/>
-        </p:nvSpPr>
-        <p:spPr>
-          <a:xfrm>
-            <a:off x="457200" y="182880"/>
-            <a:ext cx="8229600" cy="731520"/>
-          </a:xfrm>
-          <a:prstGeom prst="rect">
-            <a:avLst/>
-          </a:prstGeom>
-          <a:noFill/>
-        </p:spPr>
-        <p:txBody>
-          <a:bodyPr wrap="square" lIns="0" tIns="0">
-            <a:spAutoFit/>
-          </a:bodyPr>
-          <a:lstStyle/>
-          <a:p>
-            <a:pPr>
-              <a:defRPr sz="2100" b="1">
-                <a:solidFill>
-                  <a:srgbClr val="ED1D24"/>
-                </a:solidFill>
-                <a:latin typeface="Calibri"/>
-              </a:defRPr>
-            </a:pPr>
-            <a:r>
-              <a:t>Annexure 3: Data-Driven Target Cohorts &amp; Economics</a:t>
-            </a:r>
-          </a:p>
-        </p:txBody>
-      </p:sp>
-      <p:sp>
-        <p:nvSpPr>
-          <p:cNvPr id="5" name="Rounded Rectangle 4"/>
-          <p:cNvSpPr/>
-          <p:nvPr/>
-        </p:nvSpPr>
-        <p:spPr>
-          <a:xfrm>
-            <a:off x="457200" y="1005840"/>
-            <a:ext cx="8229600" cy="3657600"/>
-          </a:xfrm>
-          <a:prstGeom prst="roundRect">
-            <a:avLst/>
-          </a:prstGeom>
-          <a:solidFill>
-            <a:srgbClr val="F8F9FA"/>
-          </a:solidFill>
-          <a:ln w="12700">
-            <a:solidFill>
-              <a:srgbClr val="E4E6EB"/>
-            </a:solidFill>
-          </a:ln>
-        </p:spPr>
-        <p:style>
-          <a:lnRef idx="1">
-            <a:schemeClr val="accent1"/>
-          </a:lnRef>
-          <a:fillRef idx="3">
-            <a:schemeClr val="accent1"/>
-          </a:fillRef>
-          <a:effectRef idx="2">
-            <a:schemeClr val="accent1"/>
-          </a:effectRef>
-          <a:fontRef idx="minor">
-            <a:schemeClr val="lt1"/>
-          </a:fontRef>
-        </p:style>
-        <p:txBody>
-          <a:bodyPr rtlCol="0" anchor="t" wrap="square" lIns="137160" rIns="137160" tIns="164592" bIns="137160"/>
-          <a:lstStyle/>
-          <a:p>
-            <a:pPr algn="ctr">
-              <a:spcAft>
-                <a:spcPts val="800"/>
-              </a:spcAft>
-              <a:defRPr sz="1300" b="1">
-                <a:solidFill>
-                  <a:srgbClr val="0F121C"/>
-                </a:solidFill>
-                <a:latin typeface="Calibri"/>
-              </a:defRPr>
-            </a:pPr>
-            <a:r>
-              <a:t>AI-Targeted Cross-Sell Opportunities (Exhibits 4 &amp; 5)</a:t>
-            </a:r>
-          </a:p>
-          <a:p>
-            <a:pPr>
-              <a:spcAft>
-                <a:spcPts val="600"/>
-              </a:spcAft>
-              <a:defRPr sz="900" b="0">
-                <a:solidFill>
-                  <a:srgbClr val="212121"/>
-                </a:solidFill>
-                <a:latin typeface="Arial"/>
-              </a:defRPr>
-            </a:pPr>
-            <a:r>
-              <a:t>• Cohort A: High-Intent Overlaps (2.5M Users): Target the 2.5 million households subscribing to both Broadband and DTH. Since they are already double-billed, they represent low-hanging fruit for the 'Connect' or 'Family Secure' bundles.</a:t>
-            </a:r>
-          </a:p>
-          <a:p>
-            <a:pPr>
-              <a:spcAft>
-                <a:spcPts val="600"/>
-              </a:spcAft>
-              <a:defRPr sz="900" b="0">
-                <a:solidFill>
-                  <a:srgbClr val="212121"/>
-                </a:solidFill>
-                <a:latin typeface="Arial"/>
-              </a:defRPr>
-            </a:pPr>
-            <a:r>
-              <a:t>• Cohort B: DTH-Only Accounts (16M Users): DTH is expected to decline due to streaming (Exhibit 2). Transitioning these 16 million siloed accounts into converged Fiber+SIM+TV bundles saves them money while preventing DTH cord-cutting.</a:t>
-            </a:r>
-          </a:p>
-          <a:p>
-            <a:pPr>
-              <a:spcAft>
-                <a:spcPts val="600"/>
-              </a:spcAft>
-              <a:defRPr sz="900" b="0">
-                <a:solidFill>
-                  <a:srgbClr val="212121"/>
-                </a:solidFill>
-                <a:latin typeface="Arial"/>
-              </a:defRPr>
-            </a:pPr>
-            <a:r>
-              <a:t>• Channel Optimization: Digital channel CAC is 50% lower than direct sales (Broadband: ₹220 vs ₹450), but direct sales secure higher Month-4 retention. We route online AirBot leads directly to concierge field technicians to optimize conversion.</a:t>
-            </a:r>
-          </a:p>
-        </p:txBody>
-      </p:sp>
-      <p:sp>
-        <p:nvSpPr>
-          <p:cNvPr id="6" name="Rectangle 5"/>
-          <p:cNvSpPr/>
-          <p:nvPr/>
-        </p:nvSpPr>
-        <p:spPr>
-          <a:xfrm>
-            <a:off x="502920" y="1005840"/>
-            <a:ext cx="8138160" cy="73152"/>
-          </a:xfrm>
-          <a:prstGeom prst="rect">
-            <a:avLst/>
-          </a:prstGeom>
-          <a:solidFill>
-            <a:srgbClr val="0F121C"/>
-          </a:solidFill>
-          <a:ln>
-            <a:noFill/>
-          </a:ln>
-        </p:spPr>
-        <p:style>
-          <a:lnRef idx="1">
-            <a:schemeClr val="accent1"/>
-          </a:lnRef>
-          <a:fillRef idx="3">
-            <a:schemeClr val="accent1"/>
-          </a:fillRef>
-          <a:effectRef idx="2">
-            <a:schemeClr val="accent1"/>
-          </a:effectRef>
-          <a:fontRef idx="minor">
-            <a:schemeClr val="lt1"/>
-          </a:fontRef>
-        </p:style>
-        <p:txBody>
-          <a:bodyPr rtlCol="0" anchor="ctr"/>
-          <a:lstStyle/>
-          <a:p>
-            <a:pPr algn="ctr"/>
-          </a:p>
-        </p:txBody>
-      </p:sp>
-    </p:spTree>
-  </p:cSld>
-  <p:clrMapOvr>
-    <a:masterClrMapping/>
-  </p:clrMapOvr>
-</p:sld>
-</file>
-
-<file path=ppt/slides/slide7.xml><?xml version="1.0" encoding="utf-8"?>
 <p:sld xmlns:a="http://schemas.openxmlformats.org/drawingml/2006/main" xmlns:p="http://schemas.openxmlformats.org/presentationml/2006/main" xmlns:r="http://schemas.openxmlformats.org/officeDocument/2006/relationships">
   <p:cSld>
     <p:spTree>
@@ -10949,88 +10213,16 @@
           </a:prstGeom>
         </p:spPr>
       </p:pic>
-      <p:pic>
-        <p:nvPicPr>
-          <p:cNvPr id="6" name="Picture 5" descr="screenshot_airbot.png"/>
-          <p:cNvPicPr>
-            <a:picLocks noChangeAspect="1"/>
-          </p:cNvPicPr>
-          <p:nvPr/>
-        </p:nvPicPr>
-        <p:blipFill>
-          <a:blip r:embed="rId3"/>
-          <a:stretch>
-            <a:fillRect/>
-          </a:stretch>
-        </p:blipFill>
-        <p:spPr>
-          <a:xfrm>
-            <a:off x="4389120" y="1005840"/>
-            <a:ext cx="1005840" cy="1097280"/>
-          </a:xfrm>
-          <a:prstGeom prst="rect">
-            <a:avLst/>
-          </a:prstGeom>
-        </p:spPr>
-      </p:pic>
-      <p:pic>
-        <p:nvPicPr>
-          <p:cNvPr id="8" name="Picture 7" descr="screenshot_packages.png"/>
-          <p:cNvPicPr>
-            <a:picLocks noChangeAspect="1"/>
-          </p:cNvPicPr>
-          <p:nvPr/>
-        </p:nvPicPr>
-        <p:blipFill>
-          <a:blip r:embed="rId4"/>
-          <a:stretch>
-            <a:fillRect/>
-          </a:stretch>
-        </p:blipFill>
-        <p:spPr>
-          <a:xfrm>
-            <a:off x="4389120" y="2286000"/>
-            <a:ext cx="1828800" cy="1033271"/>
-          </a:xfrm>
-          <a:prstGeom prst="rect">
-            <a:avLst/>
-          </a:prstGeom>
-        </p:spPr>
-      </p:pic>
-      <p:pic>
-        <p:nvPicPr>
-          <p:cNvPr id="10" name="Picture 9" descr="screenshot_customizer.png"/>
-          <p:cNvPicPr>
-            <a:picLocks noChangeAspect="1"/>
-          </p:cNvPicPr>
-          <p:nvPr/>
-        </p:nvPicPr>
-        <p:blipFill>
-          <a:blip r:embed="rId5"/>
-          <a:stretch>
-            <a:fillRect/>
-          </a:stretch>
-        </p:blipFill>
-        <p:spPr>
-          <a:xfrm>
-            <a:off x="4389120" y="3474720"/>
-            <a:ext cx="1828800" cy="1033271"/>
-          </a:xfrm>
-          <a:prstGeom prst="rect">
-            <a:avLst/>
-          </a:prstGeom>
-        </p:spPr>
-      </p:pic>
-      <p:sp>
-        <p:nvSpPr>
-          <p:cNvPr id="11" name="TextBox 10"/>
+      <p:sp>
+        <p:nvSpPr>
+          <p:cNvPr id="4" name="TextBox 3"/>
           <p:cNvSpPr txBox="1"/>
           <p:nvPr/>
         </p:nvSpPr>
         <p:spPr>
           <a:xfrm>
-            <a:off x="457200" y="182880"/>
-            <a:ext cx="8229600" cy="731520"/>
+            <a:off x="1097280" y="164592"/>
+            <a:ext cx="6858000" cy="411480"/>
           </a:xfrm>
           <a:prstGeom prst="rect">
             <a:avLst/>
@@ -11038,46 +10230,80 @@
           <a:noFill/>
         </p:spPr>
         <p:txBody>
-          <a:bodyPr wrap="square" lIns="0" tIns="0">
+          <a:bodyPr wrap="none" lIns="0" tIns="0" bIns="0">
             <a:spAutoFit/>
           </a:bodyPr>
           <a:lstStyle/>
           <a:p>
             <a:pPr>
-              <a:defRPr sz="2100" b="1">
+              <a:defRPr sz="2400" b="1">
+                <a:solidFill>
+                  <a:srgbClr val="0F121C"/>
+                </a:solidFill>
+                <a:latin typeface="Calibri"/>
+              </a:defRPr>
+            </a:pPr>
+            <a:r>
+              <a:t>Phased Rollout: Foundation to Ecosystem</a:t>
+            </a:r>
+          </a:p>
+        </p:txBody>
+      </p:sp>
+      <p:sp>
+        <p:nvSpPr>
+          <p:cNvPr id="5" name="TextBox 4"/>
+          <p:cNvSpPr txBox="1"/>
+          <p:nvPr/>
+        </p:nvSpPr>
+        <p:spPr>
+          <a:xfrm>
+            <a:off x="1097280" y="548640"/>
+            <a:ext cx="6858000" cy="274320"/>
+          </a:xfrm>
+          <a:prstGeom prst="rect">
+            <a:avLst/>
+          </a:prstGeom>
+          <a:noFill/>
+        </p:spPr>
+        <p:txBody>
+          <a:bodyPr wrap="square" lIns="0" tIns="0" bIns="0">
+            <a:spAutoFit/>
+          </a:bodyPr>
+          <a:lstStyle/>
+          <a:p>
+            <a:pPr>
+              <a:defRPr sz="850" b="0" i="1">
                 <a:solidFill>
                   <a:srgbClr val="ED1D24"/>
                 </a:solidFill>
-                <a:latin typeface="Calibri"/>
+                <a:latin typeface="Arial"/>
               </a:defRPr>
             </a:pPr>
             <a:r>
-              <a:t>Annexure 4: Bundle Pricing Model &amp; EBITDA Accretion</a:t>
-            </a:r>
-          </a:p>
-        </p:txBody>
-      </p:sp>
-      <p:sp>
-        <p:nvSpPr>
-          <p:cNvPr id="12" name="Rounded Rectangle 11"/>
+              <a:t>Sequencing milestones across an 18-month horizon</a:t>
+            </a:r>
+          </a:p>
+        </p:txBody>
+      </p:sp>
+      <p:sp>
+        <p:nvSpPr>
+          <p:cNvPr id="6" name="Rectangle 5"/>
           <p:cNvSpPr/>
           <p:nvPr/>
         </p:nvSpPr>
         <p:spPr>
           <a:xfrm>
-            <a:off x="457200" y="1005840"/>
-            <a:ext cx="8229600" cy="3657600"/>
-          </a:xfrm>
-          <a:prstGeom prst="roundRect">
+            <a:off x="4114800" y="713232"/>
+            <a:ext cx="4572000" cy="9144"/>
+          </a:xfrm>
+          <a:prstGeom prst="rect">
             <a:avLst/>
           </a:prstGeom>
           <a:solidFill>
-            <a:srgbClr val="F8F9FA"/>
+            <a:srgbClr val="DCDEE1"/>
           </a:solidFill>
-          <a:ln w="12700">
-            <a:solidFill>
-              <a:srgbClr val="E4E6EB"/>
-            </a:solidFill>
+          <a:ln>
+            <a:noFill/>
           </a:ln>
         </p:spPr>
         <p:style>
@@ -11095,103 +10321,268 @@
           </a:fontRef>
         </p:style>
         <p:txBody>
-          <a:bodyPr rtlCol="0" anchor="t" wrap="square" lIns="137160" rIns="137160" tIns="164592" bIns="137160"/>
-          <a:lstStyle/>
-          <a:p>
-            <a:pPr algn="ctr">
-              <a:spcAft>
-                <a:spcPts val="800"/>
-              </a:spcAft>
-              <a:defRPr sz="1300" b="1">
-                <a:solidFill>
-                  <a:srgbClr val="0F121C"/>
-                </a:solidFill>
-                <a:latin typeface="Calibri"/>
-              </a:defRPr>
-            </a:pPr>
-            <a:r>
-              <a:t>Converged Pricing Sheets &amp; EBITDA Margins (Exhibits 1 &amp; 2)</a:t>
-            </a:r>
-          </a:p>
-          <a:p>
-            <a:pPr>
-              <a:spcAft>
-                <a:spcPts val="600"/>
-              </a:spcAft>
-              <a:defRPr sz="900" b="0">
-                <a:solidFill>
-                  <a:srgbClr val="212121"/>
-                </a:solidFill>
-                <a:latin typeface="Arial"/>
-              </a:defRPr>
-            </a:pPr>
-            <a:r>
-              <a:t>• Individual vs. Bundle Price Matrix:</a:t>
-            </a:r>
-          </a:p>
-          <a:p>
-            <a:pPr>
-              <a:spcAft>
-                <a:spcPts val="600"/>
-              </a:spcAft>
-              <a:defRPr sz="900" b="0">
-                <a:solidFill>
-                  <a:srgbClr val="212121"/>
-                </a:solidFill>
-                <a:latin typeface="Arial"/>
-              </a:defRPr>
-            </a:pPr>
-            <a:r>
-              <a:t>   - Standalone Sum: Broadband (₹599) + 2 SIMs (₹700) + Xstream Box (₹250) + Google One (₹209) + Xsafe CCTV (₹150) + Bank (₹99) = ₹2,006/mo.</a:t>
-            </a:r>
-          </a:p>
-          <a:p>
-            <a:pPr>
-              <a:spcAft>
-                <a:spcPts val="600"/>
-              </a:spcAft>
-              <a:defRPr sz="900" b="0">
-                <a:solidFill>
-                  <a:srgbClr val="212121"/>
-                </a:solidFill>
-                <a:latin typeface="Arial"/>
-              </a:defRPr>
-            </a:pPr>
-            <a:r>
-              <a:t>   - Consolidated Family Secure: ₹1,499/mo (Saves ₹507/mo or 25% discount). Promoted at ₹999/mo for the first 3 months to destroy switching inertia.</a:t>
-            </a:r>
-          </a:p>
-          <a:p>
-            <a:pPr>
-              <a:spcAft>
-                <a:spcPts val="600"/>
-              </a:spcAft>
-              <a:defRPr sz="900" b="0">
-                <a:solidFill>
-                  <a:srgbClr val="212121"/>
-                </a:solidFill>
-                <a:latin typeface="Arial"/>
-              </a:defRPr>
-            </a:pPr>
-            <a:r>
-              <a:t>• Margin Protection: Home Surveillance holds the highest EBITDA margin at 35% (Exhibit 1) and is growing at 35.7% CAGR (Exhibit 2). By bundling Xsafe cameras into Family Secure and Infinite tiers, we offset lower TV margins (12% EBITDA) and drive net margin expansion.</a:t>
-            </a:r>
-          </a:p>
-          <a:p>
-            <a:pPr>
-              <a:spcAft>
-                <a:spcPts val="600"/>
-              </a:spcAft>
-              <a:defRPr sz="900" b="0">
-                <a:solidFill>
-                  <a:srgbClr val="212121"/>
-                </a:solidFill>
-                <a:latin typeface="Arial"/>
-              </a:defRPr>
-            </a:pPr>
-            <a:r>
-              <a:t>• Churn Leverage: Reducing household churn from 22% down to 5% lifts customer lifetime value (LTV) by over 400%, easily amortizing the initial ₹999/mo introductory launch promo cost.</a:t>
-            </a:r>
+          <a:bodyPr rtlCol="0" anchor="ctr"/>
+          <a:lstStyle/>
+          <a:p>
+            <a:pPr algn="ctr"/>
+          </a:p>
+        </p:txBody>
+      </p:sp>
+      <p:sp>
+        <p:nvSpPr>
+          <p:cNvPr id="7" name="Rectangle 6"/>
+          <p:cNvSpPr/>
+          <p:nvPr/>
+        </p:nvSpPr>
+        <p:spPr>
+          <a:xfrm>
+            <a:off x="4572000" y="438912"/>
+            <a:ext cx="9144" cy="274320"/>
+          </a:xfrm>
+          <a:prstGeom prst="rect">
+            <a:avLst/>
+          </a:prstGeom>
+          <a:solidFill>
+            <a:srgbClr val="DCDEE1"/>
+          </a:solidFill>
+          <a:ln>
+            <a:noFill/>
+          </a:ln>
+        </p:spPr>
+        <p:style>
+          <a:lnRef idx="1">
+            <a:schemeClr val="accent1"/>
+          </a:lnRef>
+          <a:fillRef idx="3">
+            <a:schemeClr val="accent1"/>
+          </a:fillRef>
+          <a:effectRef idx="2">
+            <a:schemeClr val="accent1"/>
+          </a:effectRef>
+          <a:fontRef idx="minor">
+            <a:schemeClr val="lt1"/>
+          </a:fontRef>
+        </p:style>
+        <p:txBody>
+          <a:bodyPr rtlCol="0" anchor="ctr"/>
+          <a:lstStyle/>
+          <a:p>
+            <a:pPr algn="ctr"/>
+          </a:p>
+        </p:txBody>
+      </p:sp>
+      <p:sp>
+        <p:nvSpPr>
+          <p:cNvPr id="8" name="Rectangle 7"/>
+          <p:cNvSpPr/>
+          <p:nvPr/>
+        </p:nvSpPr>
+        <p:spPr>
+          <a:xfrm>
+            <a:off x="4709160" y="438912"/>
+            <a:ext cx="9144" cy="274320"/>
+          </a:xfrm>
+          <a:prstGeom prst="rect">
+            <a:avLst/>
+          </a:prstGeom>
+          <a:solidFill>
+            <a:srgbClr val="DCDEE1"/>
+          </a:solidFill>
+          <a:ln>
+            <a:noFill/>
+          </a:ln>
+        </p:spPr>
+        <p:style>
+          <a:lnRef idx="1">
+            <a:schemeClr val="accent1"/>
+          </a:lnRef>
+          <a:fillRef idx="3">
+            <a:schemeClr val="accent1"/>
+          </a:fillRef>
+          <a:effectRef idx="2">
+            <a:schemeClr val="accent1"/>
+          </a:effectRef>
+          <a:fontRef idx="minor">
+            <a:schemeClr val="lt1"/>
+          </a:fontRef>
+        </p:style>
+        <p:txBody>
+          <a:bodyPr rtlCol="0" anchor="ctr"/>
+          <a:lstStyle/>
+          <a:p>
+            <a:pPr algn="ctr"/>
+          </a:p>
+        </p:txBody>
+      </p:sp>
+      <p:sp>
+        <p:nvSpPr>
+          <p:cNvPr id="9" name="Rectangle 8"/>
+          <p:cNvSpPr/>
+          <p:nvPr/>
+        </p:nvSpPr>
+        <p:spPr>
+          <a:xfrm>
+            <a:off x="4526280" y="502920"/>
+            <a:ext cx="228600" cy="9144"/>
+          </a:xfrm>
+          <a:prstGeom prst="rect">
+            <a:avLst/>
+          </a:prstGeom>
+          <a:solidFill>
+            <a:srgbClr val="DCDEE1"/>
+          </a:solidFill>
+          <a:ln>
+            <a:noFill/>
+          </a:ln>
+        </p:spPr>
+        <p:style>
+          <a:lnRef idx="1">
+            <a:schemeClr val="accent1"/>
+          </a:lnRef>
+          <a:fillRef idx="3">
+            <a:schemeClr val="accent1"/>
+          </a:fillRef>
+          <a:effectRef idx="2">
+            <a:schemeClr val="accent1"/>
+          </a:effectRef>
+          <a:fontRef idx="minor">
+            <a:schemeClr val="lt1"/>
+          </a:fontRef>
+        </p:style>
+        <p:txBody>
+          <a:bodyPr rtlCol="0" anchor="ctr"/>
+          <a:lstStyle/>
+          <a:p>
+            <a:pPr algn="ctr"/>
+          </a:p>
+        </p:txBody>
+      </p:sp>
+      <p:sp>
+        <p:nvSpPr>
+          <p:cNvPr id="10" name="Rectangle 9"/>
+          <p:cNvSpPr/>
+          <p:nvPr/>
+        </p:nvSpPr>
+        <p:spPr>
+          <a:xfrm>
+            <a:off x="5760720" y="438912"/>
+            <a:ext cx="9144" cy="274320"/>
+          </a:xfrm>
+          <a:prstGeom prst="rect">
+            <a:avLst/>
+          </a:prstGeom>
+          <a:solidFill>
+            <a:srgbClr val="DCDEE1"/>
+          </a:solidFill>
+          <a:ln>
+            <a:noFill/>
+          </a:ln>
+        </p:spPr>
+        <p:style>
+          <a:lnRef idx="1">
+            <a:schemeClr val="accent1"/>
+          </a:lnRef>
+          <a:fillRef idx="3">
+            <a:schemeClr val="accent1"/>
+          </a:fillRef>
+          <a:effectRef idx="2">
+            <a:schemeClr val="accent1"/>
+          </a:effectRef>
+          <a:fontRef idx="minor">
+            <a:schemeClr val="lt1"/>
+          </a:fontRef>
+        </p:style>
+        <p:txBody>
+          <a:bodyPr rtlCol="0" anchor="ctr"/>
+          <a:lstStyle/>
+          <a:p>
+            <a:pPr algn="ctr"/>
+          </a:p>
+        </p:txBody>
+      </p:sp>
+      <p:sp>
+        <p:nvSpPr>
+          <p:cNvPr id="11" name="Rectangle 10"/>
+          <p:cNvSpPr/>
+          <p:nvPr/>
+        </p:nvSpPr>
+        <p:spPr>
+          <a:xfrm>
+            <a:off x="5897880" y="438912"/>
+            <a:ext cx="9144" cy="274320"/>
+          </a:xfrm>
+          <a:prstGeom prst="rect">
+            <a:avLst/>
+          </a:prstGeom>
+          <a:solidFill>
+            <a:srgbClr val="DCDEE1"/>
+          </a:solidFill>
+          <a:ln>
+            <a:noFill/>
+          </a:ln>
+        </p:spPr>
+        <p:style>
+          <a:lnRef idx="1">
+            <a:schemeClr val="accent1"/>
+          </a:lnRef>
+          <a:fillRef idx="3">
+            <a:schemeClr val="accent1"/>
+          </a:fillRef>
+          <a:effectRef idx="2">
+            <a:schemeClr val="accent1"/>
+          </a:effectRef>
+          <a:fontRef idx="minor">
+            <a:schemeClr val="lt1"/>
+          </a:fontRef>
+        </p:style>
+        <p:txBody>
+          <a:bodyPr rtlCol="0" anchor="ctr"/>
+          <a:lstStyle/>
+          <a:p>
+            <a:pPr algn="ctr"/>
+          </a:p>
+        </p:txBody>
+      </p:sp>
+      <p:sp>
+        <p:nvSpPr>
+          <p:cNvPr id="12" name="Rectangle 11"/>
+          <p:cNvSpPr/>
+          <p:nvPr/>
+        </p:nvSpPr>
+        <p:spPr>
+          <a:xfrm>
+            <a:off x="5715000" y="502920"/>
+            <a:ext cx="228600" cy="9144"/>
+          </a:xfrm>
+          <a:prstGeom prst="rect">
+            <a:avLst/>
+          </a:prstGeom>
+          <a:solidFill>
+            <a:srgbClr val="DCDEE1"/>
+          </a:solidFill>
+          <a:ln>
+            <a:noFill/>
+          </a:ln>
+        </p:spPr>
+        <p:style>
+          <a:lnRef idx="1">
+            <a:schemeClr val="accent1"/>
+          </a:lnRef>
+          <a:fillRef idx="3">
+            <a:schemeClr val="accent1"/>
+          </a:fillRef>
+          <a:effectRef idx="2">
+            <a:schemeClr val="accent1"/>
+          </a:effectRef>
+          <a:fontRef idx="minor">
+            <a:schemeClr val="lt1"/>
+          </a:fontRef>
+        </p:style>
+        <p:txBody>
+          <a:bodyPr rtlCol="0" anchor="ctr"/>
+          <a:lstStyle/>
+          <a:p>
+            <a:pPr algn="ctr"/>
           </a:p>
         </p:txBody>
       </p:sp>
@@ -11203,8 +10594,913 @@
         </p:nvSpPr>
         <p:spPr>
           <a:xfrm>
-            <a:off x="502920" y="1005840"/>
-            <a:ext cx="8138160" cy="73152"/>
+            <a:off x="6949440" y="438912"/>
+            <a:ext cx="9144" cy="274320"/>
+          </a:xfrm>
+          <a:prstGeom prst="rect">
+            <a:avLst/>
+          </a:prstGeom>
+          <a:solidFill>
+            <a:srgbClr val="DCDEE1"/>
+          </a:solidFill>
+          <a:ln>
+            <a:noFill/>
+          </a:ln>
+        </p:spPr>
+        <p:style>
+          <a:lnRef idx="1">
+            <a:schemeClr val="accent1"/>
+          </a:lnRef>
+          <a:fillRef idx="3">
+            <a:schemeClr val="accent1"/>
+          </a:fillRef>
+          <a:effectRef idx="2">
+            <a:schemeClr val="accent1"/>
+          </a:effectRef>
+          <a:fontRef idx="minor">
+            <a:schemeClr val="lt1"/>
+          </a:fontRef>
+        </p:style>
+        <p:txBody>
+          <a:bodyPr rtlCol="0" anchor="ctr"/>
+          <a:lstStyle/>
+          <a:p>
+            <a:pPr algn="ctr"/>
+          </a:p>
+        </p:txBody>
+      </p:sp>
+      <p:sp>
+        <p:nvSpPr>
+          <p:cNvPr id="14" name="Rectangle 13"/>
+          <p:cNvSpPr/>
+          <p:nvPr/>
+        </p:nvSpPr>
+        <p:spPr>
+          <a:xfrm>
+            <a:off x="7086600" y="438912"/>
+            <a:ext cx="9144" cy="274320"/>
+          </a:xfrm>
+          <a:prstGeom prst="rect">
+            <a:avLst/>
+          </a:prstGeom>
+          <a:solidFill>
+            <a:srgbClr val="DCDEE1"/>
+          </a:solidFill>
+          <a:ln>
+            <a:noFill/>
+          </a:ln>
+        </p:spPr>
+        <p:style>
+          <a:lnRef idx="1">
+            <a:schemeClr val="accent1"/>
+          </a:lnRef>
+          <a:fillRef idx="3">
+            <a:schemeClr val="accent1"/>
+          </a:fillRef>
+          <a:effectRef idx="2">
+            <a:schemeClr val="accent1"/>
+          </a:effectRef>
+          <a:fontRef idx="minor">
+            <a:schemeClr val="lt1"/>
+          </a:fontRef>
+        </p:style>
+        <p:txBody>
+          <a:bodyPr rtlCol="0" anchor="ctr"/>
+          <a:lstStyle/>
+          <a:p>
+            <a:pPr algn="ctr"/>
+          </a:p>
+        </p:txBody>
+      </p:sp>
+      <p:sp>
+        <p:nvSpPr>
+          <p:cNvPr id="15" name="Rectangle 14"/>
+          <p:cNvSpPr/>
+          <p:nvPr/>
+        </p:nvSpPr>
+        <p:spPr>
+          <a:xfrm>
+            <a:off x="6903720" y="502920"/>
+            <a:ext cx="228600" cy="9144"/>
+          </a:xfrm>
+          <a:prstGeom prst="rect">
+            <a:avLst/>
+          </a:prstGeom>
+          <a:solidFill>
+            <a:srgbClr val="DCDEE1"/>
+          </a:solidFill>
+          <a:ln>
+            <a:noFill/>
+          </a:ln>
+        </p:spPr>
+        <p:style>
+          <a:lnRef idx="1">
+            <a:schemeClr val="accent1"/>
+          </a:lnRef>
+          <a:fillRef idx="3">
+            <a:schemeClr val="accent1"/>
+          </a:fillRef>
+          <a:effectRef idx="2">
+            <a:schemeClr val="accent1"/>
+          </a:effectRef>
+          <a:fontRef idx="minor">
+            <a:schemeClr val="lt1"/>
+          </a:fontRef>
+        </p:style>
+        <p:txBody>
+          <a:bodyPr rtlCol="0" anchor="ctr"/>
+          <a:lstStyle/>
+          <a:p>
+            <a:pPr algn="ctr"/>
+          </a:p>
+        </p:txBody>
+      </p:sp>
+      <p:sp>
+        <p:nvSpPr>
+          <p:cNvPr id="16" name="Rectangle 15"/>
+          <p:cNvSpPr/>
+          <p:nvPr/>
+        </p:nvSpPr>
+        <p:spPr>
+          <a:xfrm>
+            <a:off x="8138160" y="438912"/>
+            <a:ext cx="9144" cy="274320"/>
+          </a:xfrm>
+          <a:prstGeom prst="rect">
+            <a:avLst/>
+          </a:prstGeom>
+          <a:solidFill>
+            <a:srgbClr val="DCDEE1"/>
+          </a:solidFill>
+          <a:ln>
+            <a:noFill/>
+          </a:ln>
+        </p:spPr>
+        <p:style>
+          <a:lnRef idx="1">
+            <a:schemeClr val="accent1"/>
+          </a:lnRef>
+          <a:fillRef idx="3">
+            <a:schemeClr val="accent1"/>
+          </a:fillRef>
+          <a:effectRef idx="2">
+            <a:schemeClr val="accent1"/>
+          </a:effectRef>
+          <a:fontRef idx="minor">
+            <a:schemeClr val="lt1"/>
+          </a:fontRef>
+        </p:style>
+        <p:txBody>
+          <a:bodyPr rtlCol="0" anchor="ctr"/>
+          <a:lstStyle/>
+          <a:p>
+            <a:pPr algn="ctr"/>
+          </a:p>
+        </p:txBody>
+      </p:sp>
+      <p:sp>
+        <p:nvSpPr>
+          <p:cNvPr id="17" name="Rectangle 16"/>
+          <p:cNvSpPr/>
+          <p:nvPr/>
+        </p:nvSpPr>
+        <p:spPr>
+          <a:xfrm>
+            <a:off x="8275320" y="438912"/>
+            <a:ext cx="9144" cy="274320"/>
+          </a:xfrm>
+          <a:prstGeom prst="rect">
+            <a:avLst/>
+          </a:prstGeom>
+          <a:solidFill>
+            <a:srgbClr val="DCDEE1"/>
+          </a:solidFill>
+          <a:ln>
+            <a:noFill/>
+          </a:ln>
+        </p:spPr>
+        <p:style>
+          <a:lnRef idx="1">
+            <a:schemeClr val="accent1"/>
+          </a:lnRef>
+          <a:fillRef idx="3">
+            <a:schemeClr val="accent1"/>
+          </a:fillRef>
+          <a:effectRef idx="2">
+            <a:schemeClr val="accent1"/>
+          </a:effectRef>
+          <a:fontRef idx="minor">
+            <a:schemeClr val="lt1"/>
+          </a:fontRef>
+        </p:style>
+        <p:txBody>
+          <a:bodyPr rtlCol="0" anchor="ctr"/>
+          <a:lstStyle/>
+          <a:p>
+            <a:pPr algn="ctr"/>
+          </a:p>
+        </p:txBody>
+      </p:sp>
+      <p:sp>
+        <p:nvSpPr>
+          <p:cNvPr id="18" name="Rectangle 17"/>
+          <p:cNvSpPr/>
+          <p:nvPr/>
+        </p:nvSpPr>
+        <p:spPr>
+          <a:xfrm>
+            <a:off x="8092440" y="502920"/>
+            <a:ext cx="228600" cy="9144"/>
+          </a:xfrm>
+          <a:prstGeom prst="rect">
+            <a:avLst/>
+          </a:prstGeom>
+          <a:solidFill>
+            <a:srgbClr val="DCDEE1"/>
+          </a:solidFill>
+          <a:ln>
+            <a:noFill/>
+          </a:ln>
+        </p:spPr>
+        <p:style>
+          <a:lnRef idx="1">
+            <a:schemeClr val="accent1"/>
+          </a:lnRef>
+          <a:fillRef idx="3">
+            <a:schemeClr val="accent1"/>
+          </a:fillRef>
+          <a:effectRef idx="2">
+            <a:schemeClr val="accent1"/>
+          </a:effectRef>
+          <a:fontRef idx="minor">
+            <a:schemeClr val="lt1"/>
+          </a:fontRef>
+        </p:style>
+        <p:txBody>
+          <a:bodyPr rtlCol="0" anchor="ctr"/>
+          <a:lstStyle/>
+          <a:p>
+            <a:pPr algn="ctr"/>
+          </a:p>
+        </p:txBody>
+      </p:sp>
+      <p:sp>
+        <p:nvSpPr>
+          <p:cNvPr id="19" name="Rectangle 18"/>
+          <p:cNvSpPr/>
+          <p:nvPr/>
+        </p:nvSpPr>
+        <p:spPr>
+          <a:xfrm>
+            <a:off x="182880" y="3794760"/>
+            <a:ext cx="8778240" cy="475488"/>
+          </a:xfrm>
+          <a:prstGeom prst="rect">
+            <a:avLst/>
+          </a:prstGeom>
+          <a:solidFill>
+            <a:srgbClr val="2D3036"/>
+          </a:solidFill>
+          <a:ln>
+            <a:noFill/>
+          </a:ln>
+        </p:spPr>
+        <p:style>
+          <a:lnRef idx="1">
+            <a:schemeClr val="accent1"/>
+          </a:lnRef>
+          <a:fillRef idx="3">
+            <a:schemeClr val="accent1"/>
+          </a:fillRef>
+          <a:effectRef idx="2">
+            <a:schemeClr val="accent1"/>
+          </a:effectRef>
+          <a:fontRef idx="minor">
+            <a:schemeClr val="lt1"/>
+          </a:fontRef>
+        </p:style>
+        <p:txBody>
+          <a:bodyPr rtlCol="0" anchor="ctr"/>
+          <a:lstStyle/>
+          <a:p>
+            <a:pPr algn="ctr"/>
+          </a:p>
+        </p:txBody>
+      </p:sp>
+      <p:sp>
+        <p:nvSpPr>
+          <p:cNvPr id="20" name="Rectangle 19"/>
+          <p:cNvSpPr/>
+          <p:nvPr/>
+        </p:nvSpPr>
+        <p:spPr>
+          <a:xfrm>
+            <a:off x="274320" y="4014216"/>
+            <a:ext cx="320040" cy="27432"/>
+          </a:xfrm>
+          <a:prstGeom prst="rect">
+            <a:avLst/>
+          </a:prstGeom>
+          <a:solidFill>
+            <a:srgbClr val="FFFFFF"/>
+          </a:solidFill>
+          <a:ln>
+            <a:noFill/>
+          </a:ln>
+        </p:spPr>
+        <p:style>
+          <a:lnRef idx="1">
+            <a:schemeClr val="accent1"/>
+          </a:lnRef>
+          <a:fillRef idx="3">
+            <a:schemeClr val="accent1"/>
+          </a:fillRef>
+          <a:effectRef idx="2">
+            <a:schemeClr val="accent1"/>
+          </a:effectRef>
+          <a:fontRef idx="minor">
+            <a:schemeClr val="lt1"/>
+          </a:fontRef>
+        </p:style>
+        <p:txBody>
+          <a:bodyPr rtlCol="0" anchor="ctr"/>
+          <a:lstStyle/>
+          <a:p>
+            <a:pPr algn="ctr"/>
+          </a:p>
+        </p:txBody>
+      </p:sp>
+      <p:sp>
+        <p:nvSpPr>
+          <p:cNvPr id="21" name="Rectangle 20"/>
+          <p:cNvSpPr/>
+          <p:nvPr/>
+        </p:nvSpPr>
+        <p:spPr>
+          <a:xfrm>
+            <a:off x="932688" y="4014216"/>
+            <a:ext cx="320040" cy="27432"/>
+          </a:xfrm>
+          <a:prstGeom prst="rect">
+            <a:avLst/>
+          </a:prstGeom>
+          <a:solidFill>
+            <a:srgbClr val="FFFFFF"/>
+          </a:solidFill>
+          <a:ln>
+            <a:noFill/>
+          </a:ln>
+        </p:spPr>
+        <p:style>
+          <a:lnRef idx="1">
+            <a:schemeClr val="accent1"/>
+          </a:lnRef>
+          <a:fillRef idx="3">
+            <a:schemeClr val="accent1"/>
+          </a:fillRef>
+          <a:effectRef idx="2">
+            <a:schemeClr val="accent1"/>
+          </a:effectRef>
+          <a:fontRef idx="minor">
+            <a:schemeClr val="lt1"/>
+          </a:fontRef>
+        </p:style>
+        <p:txBody>
+          <a:bodyPr rtlCol="0" anchor="ctr"/>
+          <a:lstStyle/>
+          <a:p>
+            <a:pPr algn="ctr"/>
+          </a:p>
+        </p:txBody>
+      </p:sp>
+      <p:sp>
+        <p:nvSpPr>
+          <p:cNvPr id="22" name="Rectangle 21"/>
+          <p:cNvSpPr/>
+          <p:nvPr/>
+        </p:nvSpPr>
+        <p:spPr>
+          <a:xfrm>
+            <a:off x="1591056" y="4014216"/>
+            <a:ext cx="320040" cy="27432"/>
+          </a:xfrm>
+          <a:prstGeom prst="rect">
+            <a:avLst/>
+          </a:prstGeom>
+          <a:solidFill>
+            <a:srgbClr val="FFFFFF"/>
+          </a:solidFill>
+          <a:ln>
+            <a:noFill/>
+          </a:ln>
+        </p:spPr>
+        <p:style>
+          <a:lnRef idx="1">
+            <a:schemeClr val="accent1"/>
+          </a:lnRef>
+          <a:fillRef idx="3">
+            <a:schemeClr val="accent1"/>
+          </a:fillRef>
+          <a:effectRef idx="2">
+            <a:schemeClr val="accent1"/>
+          </a:effectRef>
+          <a:fontRef idx="minor">
+            <a:schemeClr val="lt1"/>
+          </a:fontRef>
+        </p:style>
+        <p:txBody>
+          <a:bodyPr rtlCol="0" anchor="ctr"/>
+          <a:lstStyle/>
+          <a:p>
+            <a:pPr algn="ctr"/>
+          </a:p>
+        </p:txBody>
+      </p:sp>
+      <p:sp>
+        <p:nvSpPr>
+          <p:cNvPr id="23" name="Rectangle 22"/>
+          <p:cNvSpPr/>
+          <p:nvPr/>
+        </p:nvSpPr>
+        <p:spPr>
+          <a:xfrm>
+            <a:off x="2249424" y="4014216"/>
+            <a:ext cx="320040" cy="27432"/>
+          </a:xfrm>
+          <a:prstGeom prst="rect">
+            <a:avLst/>
+          </a:prstGeom>
+          <a:solidFill>
+            <a:srgbClr val="FFFFFF"/>
+          </a:solidFill>
+          <a:ln>
+            <a:noFill/>
+          </a:ln>
+        </p:spPr>
+        <p:style>
+          <a:lnRef idx="1">
+            <a:schemeClr val="accent1"/>
+          </a:lnRef>
+          <a:fillRef idx="3">
+            <a:schemeClr val="accent1"/>
+          </a:fillRef>
+          <a:effectRef idx="2">
+            <a:schemeClr val="accent1"/>
+          </a:effectRef>
+          <a:fontRef idx="minor">
+            <a:schemeClr val="lt1"/>
+          </a:fontRef>
+        </p:style>
+        <p:txBody>
+          <a:bodyPr rtlCol="0" anchor="ctr"/>
+          <a:lstStyle/>
+          <a:p>
+            <a:pPr algn="ctr"/>
+          </a:p>
+        </p:txBody>
+      </p:sp>
+      <p:sp>
+        <p:nvSpPr>
+          <p:cNvPr id="24" name="Rectangle 23"/>
+          <p:cNvSpPr/>
+          <p:nvPr/>
+        </p:nvSpPr>
+        <p:spPr>
+          <a:xfrm>
+            <a:off x="2907791" y="4014216"/>
+            <a:ext cx="320040" cy="27432"/>
+          </a:xfrm>
+          <a:prstGeom prst="rect">
+            <a:avLst/>
+          </a:prstGeom>
+          <a:solidFill>
+            <a:srgbClr val="FFFFFF"/>
+          </a:solidFill>
+          <a:ln>
+            <a:noFill/>
+          </a:ln>
+        </p:spPr>
+        <p:style>
+          <a:lnRef idx="1">
+            <a:schemeClr val="accent1"/>
+          </a:lnRef>
+          <a:fillRef idx="3">
+            <a:schemeClr val="accent1"/>
+          </a:fillRef>
+          <a:effectRef idx="2">
+            <a:schemeClr val="accent1"/>
+          </a:effectRef>
+          <a:fontRef idx="minor">
+            <a:schemeClr val="lt1"/>
+          </a:fontRef>
+        </p:style>
+        <p:txBody>
+          <a:bodyPr rtlCol="0" anchor="ctr"/>
+          <a:lstStyle/>
+          <a:p>
+            <a:pPr algn="ctr"/>
+          </a:p>
+        </p:txBody>
+      </p:sp>
+      <p:sp>
+        <p:nvSpPr>
+          <p:cNvPr id="25" name="Rectangle 24"/>
+          <p:cNvSpPr/>
+          <p:nvPr/>
+        </p:nvSpPr>
+        <p:spPr>
+          <a:xfrm>
+            <a:off x="3566159" y="4014216"/>
+            <a:ext cx="320040" cy="27432"/>
+          </a:xfrm>
+          <a:prstGeom prst="rect">
+            <a:avLst/>
+          </a:prstGeom>
+          <a:solidFill>
+            <a:srgbClr val="FFFFFF"/>
+          </a:solidFill>
+          <a:ln>
+            <a:noFill/>
+          </a:ln>
+        </p:spPr>
+        <p:style>
+          <a:lnRef idx="1">
+            <a:schemeClr val="accent1"/>
+          </a:lnRef>
+          <a:fillRef idx="3">
+            <a:schemeClr val="accent1"/>
+          </a:fillRef>
+          <a:effectRef idx="2">
+            <a:schemeClr val="accent1"/>
+          </a:effectRef>
+          <a:fontRef idx="minor">
+            <a:schemeClr val="lt1"/>
+          </a:fontRef>
+        </p:style>
+        <p:txBody>
+          <a:bodyPr rtlCol="0" anchor="ctr"/>
+          <a:lstStyle/>
+          <a:p>
+            <a:pPr algn="ctr"/>
+          </a:p>
+        </p:txBody>
+      </p:sp>
+      <p:sp>
+        <p:nvSpPr>
+          <p:cNvPr id="26" name="Rectangle 25"/>
+          <p:cNvSpPr/>
+          <p:nvPr/>
+        </p:nvSpPr>
+        <p:spPr>
+          <a:xfrm>
+            <a:off x="4224528" y="4014216"/>
+            <a:ext cx="320040" cy="27432"/>
+          </a:xfrm>
+          <a:prstGeom prst="rect">
+            <a:avLst/>
+          </a:prstGeom>
+          <a:solidFill>
+            <a:srgbClr val="FFFFFF"/>
+          </a:solidFill>
+          <a:ln>
+            <a:noFill/>
+          </a:ln>
+        </p:spPr>
+        <p:style>
+          <a:lnRef idx="1">
+            <a:schemeClr val="accent1"/>
+          </a:lnRef>
+          <a:fillRef idx="3">
+            <a:schemeClr val="accent1"/>
+          </a:fillRef>
+          <a:effectRef idx="2">
+            <a:schemeClr val="accent1"/>
+          </a:effectRef>
+          <a:fontRef idx="minor">
+            <a:schemeClr val="lt1"/>
+          </a:fontRef>
+        </p:style>
+        <p:txBody>
+          <a:bodyPr rtlCol="0" anchor="ctr"/>
+          <a:lstStyle/>
+          <a:p>
+            <a:pPr algn="ctr"/>
+          </a:p>
+        </p:txBody>
+      </p:sp>
+      <p:sp>
+        <p:nvSpPr>
+          <p:cNvPr id="27" name="Rectangle 26"/>
+          <p:cNvSpPr/>
+          <p:nvPr/>
+        </p:nvSpPr>
+        <p:spPr>
+          <a:xfrm>
+            <a:off x="4882896" y="4014216"/>
+            <a:ext cx="320040" cy="27432"/>
+          </a:xfrm>
+          <a:prstGeom prst="rect">
+            <a:avLst/>
+          </a:prstGeom>
+          <a:solidFill>
+            <a:srgbClr val="FFFFFF"/>
+          </a:solidFill>
+          <a:ln>
+            <a:noFill/>
+          </a:ln>
+        </p:spPr>
+        <p:style>
+          <a:lnRef idx="1">
+            <a:schemeClr val="accent1"/>
+          </a:lnRef>
+          <a:fillRef idx="3">
+            <a:schemeClr val="accent1"/>
+          </a:fillRef>
+          <a:effectRef idx="2">
+            <a:schemeClr val="accent1"/>
+          </a:effectRef>
+          <a:fontRef idx="minor">
+            <a:schemeClr val="lt1"/>
+          </a:fontRef>
+        </p:style>
+        <p:txBody>
+          <a:bodyPr rtlCol="0" anchor="ctr"/>
+          <a:lstStyle/>
+          <a:p>
+            <a:pPr algn="ctr"/>
+          </a:p>
+        </p:txBody>
+      </p:sp>
+      <p:sp>
+        <p:nvSpPr>
+          <p:cNvPr id="28" name="Rectangle 27"/>
+          <p:cNvSpPr/>
+          <p:nvPr/>
+        </p:nvSpPr>
+        <p:spPr>
+          <a:xfrm>
+            <a:off x="5541264" y="4014216"/>
+            <a:ext cx="320040" cy="27432"/>
+          </a:xfrm>
+          <a:prstGeom prst="rect">
+            <a:avLst/>
+          </a:prstGeom>
+          <a:solidFill>
+            <a:srgbClr val="FFFFFF"/>
+          </a:solidFill>
+          <a:ln>
+            <a:noFill/>
+          </a:ln>
+        </p:spPr>
+        <p:style>
+          <a:lnRef idx="1">
+            <a:schemeClr val="accent1"/>
+          </a:lnRef>
+          <a:fillRef idx="3">
+            <a:schemeClr val="accent1"/>
+          </a:fillRef>
+          <a:effectRef idx="2">
+            <a:schemeClr val="accent1"/>
+          </a:effectRef>
+          <a:fontRef idx="minor">
+            <a:schemeClr val="lt1"/>
+          </a:fontRef>
+        </p:style>
+        <p:txBody>
+          <a:bodyPr rtlCol="0" anchor="ctr"/>
+          <a:lstStyle/>
+          <a:p>
+            <a:pPr algn="ctr"/>
+          </a:p>
+        </p:txBody>
+      </p:sp>
+      <p:sp>
+        <p:nvSpPr>
+          <p:cNvPr id="29" name="Rectangle 28"/>
+          <p:cNvSpPr/>
+          <p:nvPr/>
+        </p:nvSpPr>
+        <p:spPr>
+          <a:xfrm>
+            <a:off x="6199631" y="4014216"/>
+            <a:ext cx="320040" cy="27432"/>
+          </a:xfrm>
+          <a:prstGeom prst="rect">
+            <a:avLst/>
+          </a:prstGeom>
+          <a:solidFill>
+            <a:srgbClr val="FFFFFF"/>
+          </a:solidFill>
+          <a:ln>
+            <a:noFill/>
+          </a:ln>
+        </p:spPr>
+        <p:style>
+          <a:lnRef idx="1">
+            <a:schemeClr val="accent1"/>
+          </a:lnRef>
+          <a:fillRef idx="3">
+            <a:schemeClr val="accent1"/>
+          </a:fillRef>
+          <a:effectRef idx="2">
+            <a:schemeClr val="accent1"/>
+          </a:effectRef>
+          <a:fontRef idx="minor">
+            <a:schemeClr val="lt1"/>
+          </a:fontRef>
+        </p:style>
+        <p:txBody>
+          <a:bodyPr rtlCol="0" anchor="ctr"/>
+          <a:lstStyle/>
+          <a:p>
+            <a:pPr algn="ctr"/>
+          </a:p>
+        </p:txBody>
+      </p:sp>
+      <p:sp>
+        <p:nvSpPr>
+          <p:cNvPr id="30" name="Rectangle 29"/>
+          <p:cNvSpPr/>
+          <p:nvPr/>
+        </p:nvSpPr>
+        <p:spPr>
+          <a:xfrm>
+            <a:off x="6857999" y="4014216"/>
+            <a:ext cx="320040" cy="27432"/>
+          </a:xfrm>
+          <a:prstGeom prst="rect">
+            <a:avLst/>
+          </a:prstGeom>
+          <a:solidFill>
+            <a:srgbClr val="FFFFFF"/>
+          </a:solidFill>
+          <a:ln>
+            <a:noFill/>
+          </a:ln>
+        </p:spPr>
+        <p:style>
+          <a:lnRef idx="1">
+            <a:schemeClr val="accent1"/>
+          </a:lnRef>
+          <a:fillRef idx="3">
+            <a:schemeClr val="accent1"/>
+          </a:fillRef>
+          <a:effectRef idx="2">
+            <a:schemeClr val="accent1"/>
+          </a:effectRef>
+          <a:fontRef idx="minor">
+            <a:schemeClr val="lt1"/>
+          </a:fontRef>
+        </p:style>
+        <p:txBody>
+          <a:bodyPr rtlCol="0" anchor="ctr"/>
+          <a:lstStyle/>
+          <a:p>
+            <a:pPr algn="ctr"/>
+          </a:p>
+        </p:txBody>
+      </p:sp>
+      <p:sp>
+        <p:nvSpPr>
+          <p:cNvPr id="31" name="Rectangle 30"/>
+          <p:cNvSpPr/>
+          <p:nvPr/>
+        </p:nvSpPr>
+        <p:spPr>
+          <a:xfrm>
+            <a:off x="7516368" y="4014216"/>
+            <a:ext cx="320040" cy="27432"/>
+          </a:xfrm>
+          <a:prstGeom prst="rect">
+            <a:avLst/>
+          </a:prstGeom>
+          <a:solidFill>
+            <a:srgbClr val="FFFFFF"/>
+          </a:solidFill>
+          <a:ln>
+            <a:noFill/>
+          </a:ln>
+        </p:spPr>
+        <p:style>
+          <a:lnRef idx="1">
+            <a:schemeClr val="accent1"/>
+          </a:lnRef>
+          <a:fillRef idx="3">
+            <a:schemeClr val="accent1"/>
+          </a:fillRef>
+          <a:effectRef idx="2">
+            <a:schemeClr val="accent1"/>
+          </a:effectRef>
+          <a:fontRef idx="minor">
+            <a:schemeClr val="lt1"/>
+          </a:fontRef>
+        </p:style>
+        <p:txBody>
+          <a:bodyPr rtlCol="0" anchor="ctr"/>
+          <a:lstStyle/>
+          <a:p>
+            <a:pPr algn="ctr"/>
+          </a:p>
+        </p:txBody>
+      </p:sp>
+      <p:sp>
+        <p:nvSpPr>
+          <p:cNvPr id="32" name="Rectangle 31"/>
+          <p:cNvSpPr/>
+          <p:nvPr/>
+        </p:nvSpPr>
+        <p:spPr>
+          <a:xfrm>
+            <a:off x="8174736" y="4014216"/>
+            <a:ext cx="320040" cy="27432"/>
+          </a:xfrm>
+          <a:prstGeom prst="rect">
+            <a:avLst/>
+          </a:prstGeom>
+          <a:solidFill>
+            <a:srgbClr val="FFFFFF"/>
+          </a:solidFill>
+          <a:ln>
+            <a:noFill/>
+          </a:ln>
+        </p:spPr>
+        <p:style>
+          <a:lnRef idx="1">
+            <a:schemeClr val="accent1"/>
+          </a:lnRef>
+          <a:fillRef idx="3">
+            <a:schemeClr val="accent1"/>
+          </a:fillRef>
+          <a:effectRef idx="2">
+            <a:schemeClr val="accent1"/>
+          </a:effectRef>
+          <a:fontRef idx="minor">
+            <a:schemeClr val="lt1"/>
+          </a:fontRef>
+        </p:style>
+        <p:txBody>
+          <a:bodyPr rtlCol="0" anchor="ctr"/>
+          <a:lstStyle/>
+          <a:p>
+            <a:pPr algn="ctr"/>
+          </a:p>
+        </p:txBody>
+      </p:sp>
+      <p:sp>
+        <p:nvSpPr>
+          <p:cNvPr id="33" name="Rounded Rectangle 32"/>
+          <p:cNvSpPr/>
+          <p:nvPr/>
+        </p:nvSpPr>
+        <p:spPr>
+          <a:xfrm>
+            <a:off x="182880" y="1234440"/>
+            <a:ext cx="1298448" cy="1536192"/>
+          </a:xfrm>
+          <a:prstGeom prst="roundRect">
+            <a:avLst/>
+          </a:prstGeom>
+          <a:solidFill>
+            <a:srgbClr val="FEF3F3"/>
+          </a:solidFill>
+          <a:ln w="12700">
+            <a:solidFill>
+              <a:srgbClr val="FED7D7"/>
+            </a:solidFill>
+          </a:ln>
+        </p:spPr>
+        <p:style>
+          <a:lnRef idx="1">
+            <a:schemeClr val="accent1"/>
+          </a:lnRef>
+          <a:fillRef idx="3">
+            <a:schemeClr val="accent1"/>
+          </a:fillRef>
+          <a:effectRef idx="2">
+            <a:schemeClr val="accent1"/>
+          </a:effectRef>
+          <a:fontRef idx="minor">
+            <a:schemeClr val="lt1"/>
+          </a:fontRef>
+        </p:style>
+        <p:txBody>
+          <a:bodyPr rtlCol="0" anchor="ctr"/>
+          <a:lstStyle/>
+          <a:p>
+            <a:pPr algn="ctr"/>
+          </a:p>
+        </p:txBody>
+      </p:sp>
+      <p:sp>
+        <p:nvSpPr>
+          <p:cNvPr id="34" name="Rectangle 33"/>
+          <p:cNvSpPr/>
+          <p:nvPr/>
+        </p:nvSpPr>
+        <p:spPr>
+          <a:xfrm>
+            <a:off x="219456" y="1234440"/>
+            <a:ext cx="1225296" cy="54864"/>
           </a:xfrm>
           <a:prstGeom prst="rect">
             <a:avLst/>
@@ -11238,172 +11534,1754 @@
           </a:p>
         </p:txBody>
       </p:sp>
-    </p:spTree>
-  </p:cSld>
-  <p:clrMapOvr>
-    <a:masterClrMapping/>
-  </p:clrMapOvr>
-</p:sld>
-</file>
-
-<file path=ppt/slides/slide8.xml><?xml version="1.0" encoding="utf-8"?>
-<p:sld xmlns:a="http://schemas.openxmlformats.org/drawingml/2006/main" xmlns:p="http://schemas.openxmlformats.org/presentationml/2006/main" xmlns:r="http://schemas.openxmlformats.org/officeDocument/2006/relationships">
-  <p:cSld>
-    <p:spTree>
-      <p:nvGrpSpPr>
-        <p:cNvPr id="1" name=""/>
-        <p:cNvGrpSpPr/>
-        <p:nvPr/>
-      </p:nvGrpSpPr>
-      <p:grpSpPr/>
-      <p:sp>
-        <p:nvSpPr>
-          <p:cNvPr id="2" name="Title 1"/>
-          <p:cNvSpPr>
-            <a:spLocks noGrp="1"/>
-          </p:cNvSpPr>
-          <p:nvPr>
-            <p:ph type="title"/>
-          </p:nvPr>
-        </p:nvSpPr>
-        <p:spPr/>
-        <p:txBody>
-          <a:bodyPr/>
-          <a:lstStyle/>
-          <a:p/>
-        </p:txBody>
-      </p:sp>
-      <p:pic>
-        <p:nvPicPr>
-          <p:cNvPr id="3" name="Picture 2" descr="image.jpg"/>
-          <p:cNvPicPr>
-            <a:picLocks noChangeAspect="1"/>
-          </p:cNvPicPr>
-          <p:nvPr/>
-        </p:nvPicPr>
-        <p:blipFill>
-          <a:blip r:embed="rId2"/>
-          <a:stretch>
-            <a:fillRect/>
-          </a:stretch>
-        </p:blipFill>
-        <p:spPr>
-          <a:xfrm>
-            <a:off x="1" y="0"/>
-            <a:ext cx="9144000" cy="5143500"/>
-          </a:xfrm>
-          <a:prstGeom prst="rect">
-            <a:avLst/>
-          </a:prstGeom>
-        </p:spPr>
-      </p:pic>
-      <p:pic>
-        <p:nvPicPr>
-          <p:cNvPr id="6" name="Picture 5" descr="image.jpg"/>
-          <p:cNvPicPr>
-            <a:picLocks noChangeAspect="1"/>
-          </p:cNvPicPr>
-          <p:nvPr/>
-        </p:nvPicPr>
-        <p:blipFill>
-          <a:blip r:embed="rId3"/>
-          <a:stretch>
-            <a:fillRect/>
-          </a:stretch>
-        </p:blipFill>
-        <p:spPr>
-          <a:xfrm>
-            <a:off x="4572000" y="1188720"/>
-            <a:ext cx="4114800" cy="3086100"/>
-          </a:xfrm>
-          <a:prstGeom prst="rect">
-            <a:avLst/>
-          </a:prstGeom>
-        </p:spPr>
-      </p:pic>
-    </p:spTree>
-  </p:cSld>
-  <p:clrMapOvr>
-    <a:masterClrMapping/>
-  </p:clrMapOvr>
-</p:sld>
-</file>
-
-<file path=ppt/slides/slide9.xml><?xml version="1.0" encoding="utf-8"?>
-<p:sld xmlns:a="http://schemas.openxmlformats.org/drawingml/2006/main" xmlns:p="http://schemas.openxmlformats.org/presentationml/2006/main" xmlns:r="http://schemas.openxmlformats.org/officeDocument/2006/relationships">
-  <p:cSld>
-    <p:spTree>
-      <p:nvGrpSpPr>
-        <p:cNvPr id="1" name=""/>
-        <p:cNvGrpSpPr/>
-        <p:nvPr/>
-      </p:nvGrpSpPr>
-      <p:grpSpPr/>
-      <p:sp>
-        <p:nvSpPr>
-          <p:cNvPr id="2" name="Title 1"/>
-          <p:cNvSpPr>
-            <a:spLocks noGrp="1"/>
-          </p:cNvSpPr>
-          <p:nvPr>
-            <p:ph type="title"/>
-          </p:nvPr>
-        </p:nvSpPr>
-        <p:spPr/>
-        <p:txBody>
-          <a:bodyPr/>
-          <a:lstStyle/>
-          <a:p/>
-        </p:txBody>
-      </p:sp>
-      <p:pic>
-        <p:nvPicPr>
-          <p:cNvPr id="3" name="Picture 2" descr="image.jpg"/>
-          <p:cNvPicPr>
-            <a:picLocks noChangeAspect="1"/>
-          </p:cNvPicPr>
-          <p:nvPr/>
-        </p:nvPicPr>
-        <p:blipFill>
-          <a:blip r:embed="rId2"/>
-          <a:stretch>
-            <a:fillRect/>
-          </a:stretch>
-        </p:blipFill>
-        <p:spPr>
-          <a:xfrm>
-            <a:off x="1" y="0"/>
-            <a:ext cx="9144000" cy="5143500"/>
-          </a:xfrm>
-          <a:prstGeom prst="rect">
-            <a:avLst/>
-          </a:prstGeom>
-        </p:spPr>
-      </p:pic>
-      <p:pic>
-        <p:nvPicPr>
-          <p:cNvPr id="6" name="Picture 5" descr="image.jpg"/>
-          <p:cNvPicPr>
-            <a:picLocks noChangeAspect="1"/>
-          </p:cNvPicPr>
-          <p:nvPr/>
-        </p:nvPicPr>
-        <p:blipFill>
-          <a:blip r:embed="rId3"/>
-          <a:stretch>
-            <a:fillRect/>
-          </a:stretch>
-        </p:blipFill>
-        <p:spPr>
-          <a:xfrm>
-            <a:off x="4572000" y="1188720"/>
-            <a:ext cx="4114800" cy="3086100"/>
-          </a:xfrm>
-          <a:prstGeom prst="rect">
-            <a:avLst/>
-          </a:prstGeom>
-        </p:spPr>
-      </p:pic>
+      <p:sp>
+        <p:nvSpPr>
+          <p:cNvPr id="35" name="Isosceles Triangle 34"/>
+          <p:cNvSpPr/>
+          <p:nvPr/>
+        </p:nvSpPr>
+        <p:spPr>
+          <a:xfrm rot="10800000">
+            <a:off x="758952" y="2761488"/>
+            <a:ext cx="146304" cy="109728"/>
+          </a:xfrm>
+          <a:prstGeom prst="triangle">
+            <a:avLst/>
+          </a:prstGeom>
+          <a:solidFill>
+            <a:srgbClr val="FEF3F3"/>
+          </a:solidFill>
+          <a:ln w="12700">
+            <a:solidFill>
+              <a:srgbClr val="FED7D7"/>
+            </a:solidFill>
+          </a:ln>
+        </p:spPr>
+        <p:style>
+          <a:lnRef idx="1">
+            <a:schemeClr val="accent1"/>
+          </a:lnRef>
+          <a:fillRef idx="3">
+            <a:schemeClr val="accent1"/>
+          </a:fillRef>
+          <a:effectRef idx="2">
+            <a:schemeClr val="accent1"/>
+          </a:effectRef>
+          <a:fontRef idx="minor">
+            <a:schemeClr val="lt1"/>
+          </a:fontRef>
+        </p:style>
+        <p:txBody>
+          <a:bodyPr rtlCol="0" anchor="ctr"/>
+          <a:lstStyle/>
+          <a:p>
+            <a:pPr algn="ctr"/>
+          </a:p>
+        </p:txBody>
+      </p:sp>
+      <p:sp>
+        <p:nvSpPr>
+          <p:cNvPr id="36" name="Rectangle 35"/>
+          <p:cNvSpPr/>
+          <p:nvPr/>
+        </p:nvSpPr>
+        <p:spPr>
+          <a:xfrm>
+            <a:off x="822960" y="2862072"/>
+            <a:ext cx="18288" cy="896112"/>
+          </a:xfrm>
+          <a:prstGeom prst="rect">
+            <a:avLst/>
+          </a:prstGeom>
+          <a:solidFill>
+            <a:srgbClr val="DCDEE1"/>
+          </a:solidFill>
+          <a:ln>
+            <a:noFill/>
+          </a:ln>
+        </p:spPr>
+        <p:style>
+          <a:lnRef idx="1">
+            <a:schemeClr val="accent1"/>
+          </a:lnRef>
+          <a:fillRef idx="3">
+            <a:schemeClr val="accent1"/>
+          </a:fillRef>
+          <a:effectRef idx="2">
+            <a:schemeClr val="accent1"/>
+          </a:effectRef>
+          <a:fontRef idx="minor">
+            <a:schemeClr val="lt1"/>
+          </a:fontRef>
+        </p:style>
+        <p:txBody>
+          <a:bodyPr rtlCol="0" anchor="ctr"/>
+          <a:lstStyle/>
+          <a:p>
+            <a:pPr algn="ctr"/>
+          </a:p>
+        </p:txBody>
+      </p:sp>
+      <p:sp>
+        <p:nvSpPr>
+          <p:cNvPr id="37" name="Oval 36"/>
+          <p:cNvSpPr/>
+          <p:nvPr/>
+        </p:nvSpPr>
+        <p:spPr>
+          <a:xfrm>
+            <a:off x="786384" y="3749040"/>
+            <a:ext cx="91440" cy="91440"/>
+          </a:xfrm>
+          <a:prstGeom prst="ellipse">
+            <a:avLst/>
+          </a:prstGeom>
+          <a:solidFill>
+            <a:srgbClr val="ED1D24"/>
+          </a:solidFill>
+          <a:ln>
+            <a:noFill/>
+          </a:ln>
+        </p:spPr>
+        <p:style>
+          <a:lnRef idx="1">
+            <a:schemeClr val="accent1"/>
+          </a:lnRef>
+          <a:fillRef idx="3">
+            <a:schemeClr val="accent1"/>
+          </a:fillRef>
+          <a:effectRef idx="2">
+            <a:schemeClr val="accent1"/>
+          </a:effectRef>
+          <a:fontRef idx="minor">
+            <a:schemeClr val="lt1"/>
+          </a:fontRef>
+        </p:style>
+        <p:txBody>
+          <a:bodyPr rtlCol="0" anchor="ctr"/>
+          <a:lstStyle/>
+          <a:p>
+            <a:pPr algn="ctr"/>
+          </a:p>
+        </p:txBody>
+      </p:sp>
+      <p:sp>
+        <p:nvSpPr>
+          <p:cNvPr id="38" name="TextBox 37"/>
+          <p:cNvSpPr txBox="1"/>
+          <p:nvPr/>
+        </p:nvSpPr>
+        <p:spPr>
+          <a:xfrm>
+            <a:off x="237744" y="1344168"/>
+            <a:ext cx="1188720" cy="1389888"/>
+          </a:xfrm>
+          <a:prstGeom prst="rect">
+            <a:avLst/>
+          </a:prstGeom>
+          <a:noFill/>
+        </p:spPr>
+        <p:txBody>
+          <a:bodyPr wrap="square" lIns="0" rIns="0" tIns="0" bIns="0">
+            <a:spAutoFit/>
+          </a:bodyPr>
+          <a:lstStyle/>
+          <a:p>
+            <a:pPr algn="ctr">
+              <a:spcAft>
+                <a:spcPts val="600"/>
+              </a:spcAft>
+              <a:defRPr sz="900" b="1">
+                <a:solidFill>
+                  <a:srgbClr val="ED1D24"/>
+                </a:solidFill>
+                <a:latin typeface="Calibri"/>
+              </a:defRPr>
+            </a:pPr>
+            <a:r>
+              <a:t>Foundation</a:t>
+            </a:r>
+          </a:p>
+          <a:p>
+            <a:pPr algn="ctr">
+              <a:spcAft>
+                <a:spcPts val="400"/>
+              </a:spcAft>
+              <a:defRPr sz="720" b="0">
+                <a:solidFill>
+                  <a:srgbClr val="212121"/>
+                </a:solidFill>
+                <a:latin typeface="Arial"/>
+              </a:defRPr>
+            </a:pPr>
+            <a:r>
+              <a:t>Launch savings calculator</a:t>
+            </a:r>
+          </a:p>
+          <a:p>
+            <a:pPr algn="ctr">
+              <a:spcAft>
+                <a:spcPts val="400"/>
+              </a:spcAft>
+              <a:defRPr sz="720" b="0">
+                <a:solidFill>
+                  <a:srgbClr val="212121"/>
+                </a:solidFill>
+                <a:latin typeface="Arial"/>
+              </a:defRPr>
+            </a:pPr>
+            <a:r>
+              <a:t>₹0-balance bank accounts</a:t>
+            </a:r>
+          </a:p>
+          <a:p>
+            <a:pPr algn="ctr">
+              <a:spcAft>
+                <a:spcPts val="400"/>
+              </a:spcAft>
+              <a:defRPr sz="720" b="0">
+                <a:solidFill>
+                  <a:srgbClr val="212121"/>
+                </a:solidFill>
+                <a:latin typeface="Arial"/>
+              </a:defRPr>
+            </a:pPr>
+            <a:r>
+              <a:t>Unified billing backend</a:t>
+            </a:r>
+          </a:p>
+        </p:txBody>
+      </p:sp>
+      <p:sp>
+        <p:nvSpPr>
+          <p:cNvPr id="39" name="Rounded Rectangle 38"/>
+          <p:cNvSpPr/>
+          <p:nvPr/>
+        </p:nvSpPr>
+        <p:spPr>
+          <a:xfrm>
+            <a:off x="1664208" y="1234440"/>
+            <a:ext cx="1298448" cy="1536192"/>
+          </a:xfrm>
+          <a:prstGeom prst="roundRect">
+            <a:avLst/>
+          </a:prstGeom>
+          <a:solidFill>
+            <a:srgbClr val="FEF3F3"/>
+          </a:solidFill>
+          <a:ln w="12700">
+            <a:solidFill>
+              <a:srgbClr val="FED7D7"/>
+            </a:solidFill>
+          </a:ln>
+        </p:spPr>
+        <p:style>
+          <a:lnRef idx="1">
+            <a:schemeClr val="accent1"/>
+          </a:lnRef>
+          <a:fillRef idx="3">
+            <a:schemeClr val="accent1"/>
+          </a:fillRef>
+          <a:effectRef idx="2">
+            <a:schemeClr val="accent1"/>
+          </a:effectRef>
+          <a:fontRef idx="minor">
+            <a:schemeClr val="lt1"/>
+          </a:fontRef>
+        </p:style>
+        <p:txBody>
+          <a:bodyPr rtlCol="0" anchor="ctr"/>
+          <a:lstStyle/>
+          <a:p>
+            <a:pPr algn="ctr"/>
+          </a:p>
+        </p:txBody>
+      </p:sp>
+      <p:sp>
+        <p:nvSpPr>
+          <p:cNvPr id="40" name="Rectangle 39"/>
+          <p:cNvSpPr/>
+          <p:nvPr/>
+        </p:nvSpPr>
+        <p:spPr>
+          <a:xfrm>
+            <a:off x="1700784" y="1234440"/>
+            <a:ext cx="1225296" cy="54864"/>
+          </a:xfrm>
+          <a:prstGeom prst="rect">
+            <a:avLst/>
+          </a:prstGeom>
+          <a:solidFill>
+            <a:srgbClr val="ED1D24"/>
+          </a:solidFill>
+          <a:ln>
+            <a:noFill/>
+          </a:ln>
+        </p:spPr>
+        <p:style>
+          <a:lnRef idx="1">
+            <a:schemeClr val="accent1"/>
+          </a:lnRef>
+          <a:fillRef idx="3">
+            <a:schemeClr val="accent1"/>
+          </a:fillRef>
+          <a:effectRef idx="2">
+            <a:schemeClr val="accent1"/>
+          </a:effectRef>
+          <a:fontRef idx="minor">
+            <a:schemeClr val="lt1"/>
+          </a:fontRef>
+        </p:style>
+        <p:txBody>
+          <a:bodyPr rtlCol="0" anchor="ctr"/>
+          <a:lstStyle/>
+          <a:p>
+            <a:pPr algn="ctr"/>
+          </a:p>
+        </p:txBody>
+      </p:sp>
+      <p:sp>
+        <p:nvSpPr>
+          <p:cNvPr id="41" name="Isosceles Triangle 40"/>
+          <p:cNvSpPr/>
+          <p:nvPr/>
+        </p:nvSpPr>
+        <p:spPr>
+          <a:xfrm rot="10800000">
+            <a:off x="2240280" y="2761488"/>
+            <a:ext cx="146304" cy="109728"/>
+          </a:xfrm>
+          <a:prstGeom prst="triangle">
+            <a:avLst/>
+          </a:prstGeom>
+          <a:solidFill>
+            <a:srgbClr val="FEF3F3"/>
+          </a:solidFill>
+          <a:ln w="12700">
+            <a:solidFill>
+              <a:srgbClr val="FED7D7"/>
+            </a:solidFill>
+          </a:ln>
+        </p:spPr>
+        <p:style>
+          <a:lnRef idx="1">
+            <a:schemeClr val="accent1"/>
+          </a:lnRef>
+          <a:fillRef idx="3">
+            <a:schemeClr val="accent1"/>
+          </a:fillRef>
+          <a:effectRef idx="2">
+            <a:schemeClr val="accent1"/>
+          </a:effectRef>
+          <a:fontRef idx="minor">
+            <a:schemeClr val="lt1"/>
+          </a:fontRef>
+        </p:style>
+        <p:txBody>
+          <a:bodyPr rtlCol="0" anchor="ctr"/>
+          <a:lstStyle/>
+          <a:p>
+            <a:pPr algn="ctr"/>
+          </a:p>
+        </p:txBody>
+      </p:sp>
+      <p:sp>
+        <p:nvSpPr>
+          <p:cNvPr id="42" name="Rectangle 41"/>
+          <p:cNvSpPr/>
+          <p:nvPr/>
+        </p:nvSpPr>
+        <p:spPr>
+          <a:xfrm>
+            <a:off x="2304288" y="2862072"/>
+            <a:ext cx="18288" cy="896112"/>
+          </a:xfrm>
+          <a:prstGeom prst="rect">
+            <a:avLst/>
+          </a:prstGeom>
+          <a:solidFill>
+            <a:srgbClr val="DCDEE1"/>
+          </a:solidFill>
+          <a:ln>
+            <a:noFill/>
+          </a:ln>
+        </p:spPr>
+        <p:style>
+          <a:lnRef idx="1">
+            <a:schemeClr val="accent1"/>
+          </a:lnRef>
+          <a:fillRef idx="3">
+            <a:schemeClr val="accent1"/>
+          </a:fillRef>
+          <a:effectRef idx="2">
+            <a:schemeClr val="accent1"/>
+          </a:effectRef>
+          <a:fontRef idx="minor">
+            <a:schemeClr val="lt1"/>
+          </a:fontRef>
+        </p:style>
+        <p:txBody>
+          <a:bodyPr rtlCol="0" anchor="ctr"/>
+          <a:lstStyle/>
+          <a:p>
+            <a:pPr algn="ctr"/>
+          </a:p>
+        </p:txBody>
+      </p:sp>
+      <p:sp>
+        <p:nvSpPr>
+          <p:cNvPr id="43" name="Oval 42"/>
+          <p:cNvSpPr/>
+          <p:nvPr/>
+        </p:nvSpPr>
+        <p:spPr>
+          <a:xfrm>
+            <a:off x="2267712" y="3749040"/>
+            <a:ext cx="91440" cy="91440"/>
+          </a:xfrm>
+          <a:prstGeom prst="ellipse">
+            <a:avLst/>
+          </a:prstGeom>
+          <a:solidFill>
+            <a:srgbClr val="ED1D24"/>
+          </a:solidFill>
+          <a:ln>
+            <a:noFill/>
+          </a:ln>
+        </p:spPr>
+        <p:style>
+          <a:lnRef idx="1">
+            <a:schemeClr val="accent1"/>
+          </a:lnRef>
+          <a:fillRef idx="3">
+            <a:schemeClr val="accent1"/>
+          </a:fillRef>
+          <a:effectRef idx="2">
+            <a:schemeClr val="accent1"/>
+          </a:effectRef>
+          <a:fontRef idx="minor">
+            <a:schemeClr val="lt1"/>
+          </a:fontRef>
+        </p:style>
+        <p:txBody>
+          <a:bodyPr rtlCol="0" anchor="ctr"/>
+          <a:lstStyle/>
+          <a:p>
+            <a:pPr algn="ctr"/>
+          </a:p>
+        </p:txBody>
+      </p:sp>
+      <p:sp>
+        <p:nvSpPr>
+          <p:cNvPr id="44" name="TextBox 43"/>
+          <p:cNvSpPr txBox="1"/>
+          <p:nvPr/>
+        </p:nvSpPr>
+        <p:spPr>
+          <a:xfrm>
+            <a:off x="1719072" y="1344168"/>
+            <a:ext cx="1188720" cy="1389888"/>
+          </a:xfrm>
+          <a:prstGeom prst="rect">
+            <a:avLst/>
+          </a:prstGeom>
+          <a:noFill/>
+        </p:spPr>
+        <p:txBody>
+          <a:bodyPr wrap="square" lIns="0" rIns="0" tIns="0" bIns="0">
+            <a:spAutoFit/>
+          </a:bodyPr>
+          <a:lstStyle/>
+          <a:p>
+            <a:pPr algn="ctr">
+              <a:spcAft>
+                <a:spcPts val="600"/>
+              </a:spcAft>
+              <a:defRPr sz="900" b="1">
+                <a:solidFill>
+                  <a:srgbClr val="ED1D24"/>
+                </a:solidFill>
+                <a:latin typeface="Calibri"/>
+              </a:defRPr>
+            </a:pPr>
+            <a:r>
+              <a:t>Urban Launch</a:t>
+            </a:r>
+          </a:p>
+          <a:p>
+            <a:pPr algn="ctr">
+              <a:spcAft>
+                <a:spcPts val="400"/>
+              </a:spcAft>
+              <a:defRPr sz="720" b="0">
+                <a:solidFill>
+                  <a:srgbClr val="212121"/>
+                </a:solidFill>
+                <a:latin typeface="Arial"/>
+              </a:defRPr>
+            </a:pPr>
+            <a:r>
+              <a:t>Family bundle configurator</a:t>
+            </a:r>
+          </a:p>
+          <a:p>
+            <a:pPr algn="ctr">
+              <a:spcAft>
+                <a:spcPts val="400"/>
+              </a:spcAft>
+              <a:defRPr sz="720" b="0">
+                <a:solidFill>
+                  <a:srgbClr val="212121"/>
+                </a:solidFill>
+                <a:latin typeface="Arial"/>
+              </a:defRPr>
+            </a:pPr>
+            <a:r>
+              <a:t>"Live In Your Home" Ads</a:t>
+            </a:r>
+          </a:p>
+          <a:p>
+            <a:pPr algn="ctr">
+              <a:spcAft>
+                <a:spcPts val="400"/>
+              </a:spcAft>
+              <a:defRPr sz="720" b="0">
+                <a:solidFill>
+                  <a:srgbClr val="212121"/>
+                </a:solidFill>
+                <a:latin typeface="Arial"/>
+              </a:defRPr>
+            </a:pPr>
+            <a:r>
+              <a:t>AI scam cover rollout</a:t>
+            </a:r>
+          </a:p>
+        </p:txBody>
+      </p:sp>
+      <p:sp>
+        <p:nvSpPr>
+          <p:cNvPr id="45" name="Rounded Rectangle 44"/>
+          <p:cNvSpPr/>
+          <p:nvPr/>
+        </p:nvSpPr>
+        <p:spPr>
+          <a:xfrm>
+            <a:off x="3145536" y="1234440"/>
+            <a:ext cx="1298448" cy="1536192"/>
+          </a:xfrm>
+          <a:prstGeom prst="roundRect">
+            <a:avLst/>
+          </a:prstGeom>
+          <a:solidFill>
+            <a:srgbClr val="FEF3F3"/>
+          </a:solidFill>
+          <a:ln w="12700">
+            <a:solidFill>
+              <a:srgbClr val="FED7D7"/>
+            </a:solidFill>
+          </a:ln>
+        </p:spPr>
+        <p:style>
+          <a:lnRef idx="1">
+            <a:schemeClr val="accent1"/>
+          </a:lnRef>
+          <a:fillRef idx="3">
+            <a:schemeClr val="accent1"/>
+          </a:fillRef>
+          <a:effectRef idx="2">
+            <a:schemeClr val="accent1"/>
+          </a:effectRef>
+          <a:fontRef idx="minor">
+            <a:schemeClr val="lt1"/>
+          </a:fontRef>
+        </p:style>
+        <p:txBody>
+          <a:bodyPr rtlCol="0" anchor="ctr"/>
+          <a:lstStyle/>
+          <a:p>
+            <a:pPr algn="ctr"/>
+          </a:p>
+        </p:txBody>
+      </p:sp>
+      <p:sp>
+        <p:nvSpPr>
+          <p:cNvPr id="46" name="Rectangle 45"/>
+          <p:cNvSpPr/>
+          <p:nvPr/>
+        </p:nvSpPr>
+        <p:spPr>
+          <a:xfrm>
+            <a:off x="3182112" y="1234440"/>
+            <a:ext cx="1225296" cy="54864"/>
+          </a:xfrm>
+          <a:prstGeom prst="rect">
+            <a:avLst/>
+          </a:prstGeom>
+          <a:solidFill>
+            <a:srgbClr val="ED1D24"/>
+          </a:solidFill>
+          <a:ln>
+            <a:noFill/>
+          </a:ln>
+        </p:spPr>
+        <p:style>
+          <a:lnRef idx="1">
+            <a:schemeClr val="accent1"/>
+          </a:lnRef>
+          <a:fillRef idx="3">
+            <a:schemeClr val="accent1"/>
+          </a:fillRef>
+          <a:effectRef idx="2">
+            <a:schemeClr val="accent1"/>
+          </a:effectRef>
+          <a:fontRef idx="minor">
+            <a:schemeClr val="lt1"/>
+          </a:fontRef>
+        </p:style>
+        <p:txBody>
+          <a:bodyPr rtlCol="0" anchor="ctr"/>
+          <a:lstStyle/>
+          <a:p>
+            <a:pPr algn="ctr"/>
+          </a:p>
+        </p:txBody>
+      </p:sp>
+      <p:sp>
+        <p:nvSpPr>
+          <p:cNvPr id="47" name="Isosceles Triangle 46"/>
+          <p:cNvSpPr/>
+          <p:nvPr/>
+        </p:nvSpPr>
+        <p:spPr>
+          <a:xfrm rot="10800000">
+            <a:off x="3721608" y="2761488"/>
+            <a:ext cx="146304" cy="109728"/>
+          </a:xfrm>
+          <a:prstGeom prst="triangle">
+            <a:avLst/>
+          </a:prstGeom>
+          <a:solidFill>
+            <a:srgbClr val="FEF3F3"/>
+          </a:solidFill>
+          <a:ln w="12700">
+            <a:solidFill>
+              <a:srgbClr val="FED7D7"/>
+            </a:solidFill>
+          </a:ln>
+        </p:spPr>
+        <p:style>
+          <a:lnRef idx="1">
+            <a:schemeClr val="accent1"/>
+          </a:lnRef>
+          <a:fillRef idx="3">
+            <a:schemeClr val="accent1"/>
+          </a:fillRef>
+          <a:effectRef idx="2">
+            <a:schemeClr val="accent1"/>
+          </a:effectRef>
+          <a:fontRef idx="minor">
+            <a:schemeClr val="lt1"/>
+          </a:fontRef>
+        </p:style>
+        <p:txBody>
+          <a:bodyPr rtlCol="0" anchor="ctr"/>
+          <a:lstStyle/>
+          <a:p>
+            <a:pPr algn="ctr"/>
+          </a:p>
+        </p:txBody>
+      </p:sp>
+      <p:sp>
+        <p:nvSpPr>
+          <p:cNvPr id="48" name="Rectangle 47"/>
+          <p:cNvSpPr/>
+          <p:nvPr/>
+        </p:nvSpPr>
+        <p:spPr>
+          <a:xfrm>
+            <a:off x="3785616" y="2862072"/>
+            <a:ext cx="18288" cy="896112"/>
+          </a:xfrm>
+          <a:prstGeom prst="rect">
+            <a:avLst/>
+          </a:prstGeom>
+          <a:solidFill>
+            <a:srgbClr val="DCDEE1"/>
+          </a:solidFill>
+          <a:ln>
+            <a:noFill/>
+          </a:ln>
+        </p:spPr>
+        <p:style>
+          <a:lnRef idx="1">
+            <a:schemeClr val="accent1"/>
+          </a:lnRef>
+          <a:fillRef idx="3">
+            <a:schemeClr val="accent1"/>
+          </a:fillRef>
+          <a:effectRef idx="2">
+            <a:schemeClr val="accent1"/>
+          </a:effectRef>
+          <a:fontRef idx="minor">
+            <a:schemeClr val="lt1"/>
+          </a:fontRef>
+        </p:style>
+        <p:txBody>
+          <a:bodyPr rtlCol="0" anchor="ctr"/>
+          <a:lstStyle/>
+          <a:p>
+            <a:pPr algn="ctr"/>
+          </a:p>
+        </p:txBody>
+      </p:sp>
+      <p:sp>
+        <p:nvSpPr>
+          <p:cNvPr id="49" name="Oval 48"/>
+          <p:cNvSpPr/>
+          <p:nvPr/>
+        </p:nvSpPr>
+        <p:spPr>
+          <a:xfrm>
+            <a:off x="3749040" y="3749040"/>
+            <a:ext cx="91440" cy="91440"/>
+          </a:xfrm>
+          <a:prstGeom prst="ellipse">
+            <a:avLst/>
+          </a:prstGeom>
+          <a:solidFill>
+            <a:srgbClr val="ED1D24"/>
+          </a:solidFill>
+          <a:ln>
+            <a:noFill/>
+          </a:ln>
+        </p:spPr>
+        <p:style>
+          <a:lnRef idx="1">
+            <a:schemeClr val="accent1"/>
+          </a:lnRef>
+          <a:fillRef idx="3">
+            <a:schemeClr val="accent1"/>
+          </a:fillRef>
+          <a:effectRef idx="2">
+            <a:schemeClr val="accent1"/>
+          </a:effectRef>
+          <a:fontRef idx="minor">
+            <a:schemeClr val="lt1"/>
+          </a:fontRef>
+        </p:style>
+        <p:txBody>
+          <a:bodyPr rtlCol="0" anchor="ctr"/>
+          <a:lstStyle/>
+          <a:p>
+            <a:pPr algn="ctr"/>
+          </a:p>
+        </p:txBody>
+      </p:sp>
+      <p:sp>
+        <p:nvSpPr>
+          <p:cNvPr id="50" name="TextBox 49"/>
+          <p:cNvSpPr txBox="1"/>
+          <p:nvPr/>
+        </p:nvSpPr>
+        <p:spPr>
+          <a:xfrm>
+            <a:off x="3200400" y="1344168"/>
+            <a:ext cx="1188720" cy="1389888"/>
+          </a:xfrm>
+          <a:prstGeom prst="rect">
+            <a:avLst/>
+          </a:prstGeom>
+          <a:noFill/>
+        </p:spPr>
+        <p:txBody>
+          <a:bodyPr wrap="square" lIns="0" rIns="0" tIns="0" bIns="0">
+            <a:spAutoFit/>
+          </a:bodyPr>
+          <a:lstStyle/>
+          <a:p>
+            <a:pPr algn="ctr">
+              <a:spcAft>
+                <a:spcPts val="600"/>
+              </a:spcAft>
+              <a:defRPr sz="900" b="1">
+                <a:solidFill>
+                  <a:srgbClr val="ED1D24"/>
+                </a:solidFill>
+                <a:latin typeface="Calibri"/>
+              </a:defRPr>
+            </a:pPr>
+            <a:r>
+              <a:t>Rural GTM</a:t>
+            </a:r>
+          </a:p>
+          <a:p>
+            <a:pPr algn="ctr">
+              <a:spcAft>
+                <a:spcPts val="400"/>
+              </a:spcAft>
+              <a:defRPr sz="720" b="0">
+                <a:solidFill>
+                  <a:srgbClr val="212121"/>
+                </a:solidFill>
+                <a:latin typeface="Arial"/>
+              </a:defRPr>
+            </a:pPr>
+            <a:r>
+              <a:t>Wall painting and DTH ads</a:t>
+            </a:r>
+          </a:p>
+          <a:p>
+            <a:pPr algn="ctr">
+              <a:spcAft>
+                <a:spcPts val="400"/>
+              </a:spcAft>
+              <a:defRPr sz="720" b="0">
+                <a:solidFill>
+                  <a:srgbClr val="212121"/>
+                </a:solidFill>
+                <a:latin typeface="Arial"/>
+              </a:defRPr>
+            </a:pPr>
+            <a:r>
+              <a:t>Bundled SIM + bank access</a:t>
+            </a:r>
+          </a:p>
+          <a:p>
+            <a:pPr algn="ctr">
+              <a:spcAft>
+                <a:spcPts val="400"/>
+              </a:spcAft>
+              <a:defRPr sz="720" b="0">
+                <a:solidFill>
+                  <a:srgbClr val="212121"/>
+                </a:solidFill>
+                <a:latin typeface="Arial"/>
+              </a:defRPr>
+            </a:pPr>
+            <a:r>
+              <a:t>Local partner programme</a:t>
+            </a:r>
+          </a:p>
+        </p:txBody>
+      </p:sp>
+      <p:sp>
+        <p:nvSpPr>
+          <p:cNvPr id="51" name="Rounded Rectangle 50"/>
+          <p:cNvSpPr/>
+          <p:nvPr/>
+        </p:nvSpPr>
+        <p:spPr>
+          <a:xfrm>
+            <a:off x="4626864" y="1234440"/>
+            <a:ext cx="1298448" cy="1536192"/>
+          </a:xfrm>
+          <a:prstGeom prst="roundRect">
+            <a:avLst/>
+          </a:prstGeom>
+          <a:solidFill>
+            <a:srgbClr val="FEF3F3"/>
+          </a:solidFill>
+          <a:ln w="12700">
+            <a:solidFill>
+              <a:srgbClr val="FED7D7"/>
+            </a:solidFill>
+          </a:ln>
+        </p:spPr>
+        <p:style>
+          <a:lnRef idx="1">
+            <a:schemeClr val="accent1"/>
+          </a:lnRef>
+          <a:fillRef idx="3">
+            <a:schemeClr val="accent1"/>
+          </a:fillRef>
+          <a:effectRef idx="2">
+            <a:schemeClr val="accent1"/>
+          </a:effectRef>
+          <a:fontRef idx="minor">
+            <a:schemeClr val="lt1"/>
+          </a:fontRef>
+        </p:style>
+        <p:txBody>
+          <a:bodyPr rtlCol="0" anchor="ctr"/>
+          <a:lstStyle/>
+          <a:p>
+            <a:pPr algn="ctr"/>
+          </a:p>
+        </p:txBody>
+      </p:sp>
+      <p:sp>
+        <p:nvSpPr>
+          <p:cNvPr id="52" name="Rectangle 51"/>
+          <p:cNvSpPr/>
+          <p:nvPr/>
+        </p:nvSpPr>
+        <p:spPr>
+          <a:xfrm>
+            <a:off x="4663440" y="1234440"/>
+            <a:ext cx="1225296" cy="54864"/>
+          </a:xfrm>
+          <a:prstGeom prst="rect">
+            <a:avLst/>
+          </a:prstGeom>
+          <a:solidFill>
+            <a:srgbClr val="ED1D24"/>
+          </a:solidFill>
+          <a:ln>
+            <a:noFill/>
+          </a:ln>
+        </p:spPr>
+        <p:style>
+          <a:lnRef idx="1">
+            <a:schemeClr val="accent1"/>
+          </a:lnRef>
+          <a:fillRef idx="3">
+            <a:schemeClr val="accent1"/>
+          </a:fillRef>
+          <a:effectRef idx="2">
+            <a:schemeClr val="accent1"/>
+          </a:effectRef>
+          <a:fontRef idx="minor">
+            <a:schemeClr val="lt1"/>
+          </a:fontRef>
+        </p:style>
+        <p:txBody>
+          <a:bodyPr rtlCol="0" anchor="ctr"/>
+          <a:lstStyle/>
+          <a:p>
+            <a:pPr algn="ctr"/>
+          </a:p>
+        </p:txBody>
+      </p:sp>
+      <p:sp>
+        <p:nvSpPr>
+          <p:cNvPr id="53" name="Isosceles Triangle 52"/>
+          <p:cNvSpPr/>
+          <p:nvPr/>
+        </p:nvSpPr>
+        <p:spPr>
+          <a:xfrm rot="10800000">
+            <a:off x="5202936" y="2761488"/>
+            <a:ext cx="146304" cy="109728"/>
+          </a:xfrm>
+          <a:prstGeom prst="triangle">
+            <a:avLst/>
+          </a:prstGeom>
+          <a:solidFill>
+            <a:srgbClr val="FEF3F3"/>
+          </a:solidFill>
+          <a:ln w="12700">
+            <a:solidFill>
+              <a:srgbClr val="FED7D7"/>
+            </a:solidFill>
+          </a:ln>
+        </p:spPr>
+        <p:style>
+          <a:lnRef idx="1">
+            <a:schemeClr val="accent1"/>
+          </a:lnRef>
+          <a:fillRef idx="3">
+            <a:schemeClr val="accent1"/>
+          </a:fillRef>
+          <a:effectRef idx="2">
+            <a:schemeClr val="accent1"/>
+          </a:effectRef>
+          <a:fontRef idx="minor">
+            <a:schemeClr val="lt1"/>
+          </a:fontRef>
+        </p:style>
+        <p:txBody>
+          <a:bodyPr rtlCol="0" anchor="ctr"/>
+          <a:lstStyle/>
+          <a:p>
+            <a:pPr algn="ctr"/>
+          </a:p>
+        </p:txBody>
+      </p:sp>
+      <p:sp>
+        <p:nvSpPr>
+          <p:cNvPr id="54" name="Rectangle 53"/>
+          <p:cNvSpPr/>
+          <p:nvPr/>
+        </p:nvSpPr>
+        <p:spPr>
+          <a:xfrm>
+            <a:off x="5266944" y="2862072"/>
+            <a:ext cx="18288" cy="896112"/>
+          </a:xfrm>
+          <a:prstGeom prst="rect">
+            <a:avLst/>
+          </a:prstGeom>
+          <a:solidFill>
+            <a:srgbClr val="DCDEE1"/>
+          </a:solidFill>
+          <a:ln>
+            <a:noFill/>
+          </a:ln>
+        </p:spPr>
+        <p:style>
+          <a:lnRef idx="1">
+            <a:schemeClr val="accent1"/>
+          </a:lnRef>
+          <a:fillRef idx="3">
+            <a:schemeClr val="accent1"/>
+          </a:fillRef>
+          <a:effectRef idx="2">
+            <a:schemeClr val="accent1"/>
+          </a:effectRef>
+          <a:fontRef idx="minor">
+            <a:schemeClr val="lt1"/>
+          </a:fontRef>
+        </p:style>
+        <p:txBody>
+          <a:bodyPr rtlCol="0" anchor="ctr"/>
+          <a:lstStyle/>
+          <a:p>
+            <a:pPr algn="ctr"/>
+          </a:p>
+        </p:txBody>
+      </p:sp>
+      <p:sp>
+        <p:nvSpPr>
+          <p:cNvPr id="55" name="Oval 54"/>
+          <p:cNvSpPr/>
+          <p:nvPr/>
+        </p:nvSpPr>
+        <p:spPr>
+          <a:xfrm>
+            <a:off x="5230368" y="3749040"/>
+            <a:ext cx="91440" cy="91440"/>
+          </a:xfrm>
+          <a:prstGeom prst="ellipse">
+            <a:avLst/>
+          </a:prstGeom>
+          <a:solidFill>
+            <a:srgbClr val="ED1D24"/>
+          </a:solidFill>
+          <a:ln>
+            <a:noFill/>
+          </a:ln>
+        </p:spPr>
+        <p:style>
+          <a:lnRef idx="1">
+            <a:schemeClr val="accent1"/>
+          </a:lnRef>
+          <a:fillRef idx="3">
+            <a:schemeClr val="accent1"/>
+          </a:fillRef>
+          <a:effectRef idx="2">
+            <a:schemeClr val="accent1"/>
+          </a:effectRef>
+          <a:fontRef idx="minor">
+            <a:schemeClr val="lt1"/>
+          </a:fontRef>
+        </p:style>
+        <p:txBody>
+          <a:bodyPr rtlCol="0" anchor="ctr"/>
+          <a:lstStyle/>
+          <a:p>
+            <a:pPr algn="ctr"/>
+          </a:p>
+        </p:txBody>
+      </p:sp>
+      <p:sp>
+        <p:nvSpPr>
+          <p:cNvPr id="56" name="TextBox 55"/>
+          <p:cNvSpPr txBox="1"/>
+          <p:nvPr/>
+        </p:nvSpPr>
+        <p:spPr>
+          <a:xfrm>
+            <a:off x="4681728" y="1344168"/>
+            <a:ext cx="1188720" cy="1389888"/>
+          </a:xfrm>
+          <a:prstGeom prst="rect">
+            <a:avLst/>
+          </a:prstGeom>
+          <a:noFill/>
+        </p:spPr>
+        <p:txBody>
+          <a:bodyPr wrap="square" lIns="0" rIns="0" tIns="0" bIns="0">
+            <a:spAutoFit/>
+          </a:bodyPr>
+          <a:lstStyle/>
+          <a:p>
+            <a:pPr algn="ctr">
+              <a:spcAft>
+                <a:spcPts val="600"/>
+              </a:spcAft>
+              <a:defRPr sz="900" b="1">
+                <a:solidFill>
+                  <a:srgbClr val="ED1D24"/>
+                </a:solidFill>
+                <a:latin typeface="Calibri"/>
+              </a:defRPr>
+            </a:pPr>
+            <a:r>
+              <a:t>AI Personalization</a:t>
+            </a:r>
+          </a:p>
+          <a:p>
+            <a:pPr algn="ctr">
+              <a:spcAft>
+                <a:spcPts val="400"/>
+              </a:spcAft>
+              <a:defRPr sz="720" b="0">
+                <a:solidFill>
+                  <a:srgbClr val="212121"/>
+                </a:solidFill>
+                <a:latin typeface="Arial"/>
+              </a:defRPr>
+            </a:pPr>
+            <a:r>
+              <a:t>Smart plan tool launch</a:t>
+            </a:r>
+          </a:p>
+          <a:p>
+            <a:pPr algn="ctr">
+              <a:spcAft>
+                <a:spcPts val="400"/>
+              </a:spcAft>
+              <a:defRPr sz="720" b="0">
+                <a:solidFill>
+                  <a:srgbClr val="212121"/>
+                </a:solidFill>
+                <a:latin typeface="Arial"/>
+              </a:defRPr>
+            </a:pPr>
+            <a:r>
+              <a:t>Usage alerts &amp; spend caps</a:t>
+            </a:r>
+          </a:p>
+          <a:p>
+            <a:pPr algn="ctr">
+              <a:spcAft>
+                <a:spcPts val="400"/>
+              </a:spcAft>
+              <a:defRPr sz="720" b="0">
+                <a:solidFill>
+                  <a:srgbClr val="212121"/>
+                </a:solidFill>
+                <a:latin typeface="Arial"/>
+              </a:defRPr>
+            </a:pPr>
+            <a:r>
+              <a:t>Postpaid conversion push</a:t>
+            </a:r>
+          </a:p>
+        </p:txBody>
+      </p:sp>
+      <p:sp>
+        <p:nvSpPr>
+          <p:cNvPr id="57" name="Rounded Rectangle 56"/>
+          <p:cNvSpPr/>
+          <p:nvPr/>
+        </p:nvSpPr>
+        <p:spPr>
+          <a:xfrm>
+            <a:off x="6108192" y="1234440"/>
+            <a:ext cx="1298448" cy="1536192"/>
+          </a:xfrm>
+          <a:prstGeom prst="roundRect">
+            <a:avLst/>
+          </a:prstGeom>
+          <a:solidFill>
+            <a:srgbClr val="FEF3F3"/>
+          </a:solidFill>
+          <a:ln w="12700">
+            <a:solidFill>
+              <a:srgbClr val="FED7D7"/>
+            </a:solidFill>
+          </a:ln>
+        </p:spPr>
+        <p:style>
+          <a:lnRef idx="1">
+            <a:schemeClr val="accent1"/>
+          </a:lnRef>
+          <a:fillRef idx="3">
+            <a:schemeClr val="accent1"/>
+          </a:fillRef>
+          <a:effectRef idx="2">
+            <a:schemeClr val="accent1"/>
+          </a:effectRef>
+          <a:fontRef idx="minor">
+            <a:schemeClr val="lt1"/>
+          </a:fontRef>
+        </p:style>
+        <p:txBody>
+          <a:bodyPr rtlCol="0" anchor="ctr"/>
+          <a:lstStyle/>
+          <a:p>
+            <a:pPr algn="ctr"/>
+          </a:p>
+        </p:txBody>
+      </p:sp>
+      <p:sp>
+        <p:nvSpPr>
+          <p:cNvPr id="58" name="Rectangle 57"/>
+          <p:cNvSpPr/>
+          <p:nvPr/>
+        </p:nvSpPr>
+        <p:spPr>
+          <a:xfrm>
+            <a:off x="6144768" y="1234440"/>
+            <a:ext cx="1225296" cy="54864"/>
+          </a:xfrm>
+          <a:prstGeom prst="rect">
+            <a:avLst/>
+          </a:prstGeom>
+          <a:solidFill>
+            <a:srgbClr val="ED1D24"/>
+          </a:solidFill>
+          <a:ln>
+            <a:noFill/>
+          </a:ln>
+        </p:spPr>
+        <p:style>
+          <a:lnRef idx="1">
+            <a:schemeClr val="accent1"/>
+          </a:lnRef>
+          <a:fillRef idx="3">
+            <a:schemeClr val="accent1"/>
+          </a:fillRef>
+          <a:effectRef idx="2">
+            <a:schemeClr val="accent1"/>
+          </a:effectRef>
+          <a:fontRef idx="minor">
+            <a:schemeClr val="lt1"/>
+          </a:fontRef>
+        </p:style>
+        <p:txBody>
+          <a:bodyPr rtlCol="0" anchor="ctr"/>
+          <a:lstStyle/>
+          <a:p>
+            <a:pPr algn="ctr"/>
+          </a:p>
+        </p:txBody>
+      </p:sp>
+      <p:sp>
+        <p:nvSpPr>
+          <p:cNvPr id="59" name="Isosceles Triangle 58"/>
+          <p:cNvSpPr/>
+          <p:nvPr/>
+        </p:nvSpPr>
+        <p:spPr>
+          <a:xfrm rot="10800000">
+            <a:off x="6684264" y="2761488"/>
+            <a:ext cx="146304" cy="109728"/>
+          </a:xfrm>
+          <a:prstGeom prst="triangle">
+            <a:avLst/>
+          </a:prstGeom>
+          <a:solidFill>
+            <a:srgbClr val="FEF3F3"/>
+          </a:solidFill>
+          <a:ln w="12700">
+            <a:solidFill>
+              <a:srgbClr val="FED7D7"/>
+            </a:solidFill>
+          </a:ln>
+        </p:spPr>
+        <p:style>
+          <a:lnRef idx="1">
+            <a:schemeClr val="accent1"/>
+          </a:lnRef>
+          <a:fillRef idx="3">
+            <a:schemeClr val="accent1"/>
+          </a:fillRef>
+          <a:effectRef idx="2">
+            <a:schemeClr val="accent1"/>
+          </a:effectRef>
+          <a:fontRef idx="minor">
+            <a:schemeClr val="lt1"/>
+          </a:fontRef>
+        </p:style>
+        <p:txBody>
+          <a:bodyPr rtlCol="0" anchor="ctr"/>
+          <a:lstStyle/>
+          <a:p>
+            <a:pPr algn="ctr"/>
+          </a:p>
+        </p:txBody>
+      </p:sp>
+      <p:sp>
+        <p:nvSpPr>
+          <p:cNvPr id="60" name="Rectangle 59"/>
+          <p:cNvSpPr/>
+          <p:nvPr/>
+        </p:nvSpPr>
+        <p:spPr>
+          <a:xfrm>
+            <a:off x="6748272" y="2862072"/>
+            <a:ext cx="18288" cy="896112"/>
+          </a:xfrm>
+          <a:prstGeom prst="rect">
+            <a:avLst/>
+          </a:prstGeom>
+          <a:solidFill>
+            <a:srgbClr val="DCDEE1"/>
+          </a:solidFill>
+          <a:ln>
+            <a:noFill/>
+          </a:ln>
+        </p:spPr>
+        <p:style>
+          <a:lnRef idx="1">
+            <a:schemeClr val="accent1"/>
+          </a:lnRef>
+          <a:fillRef idx="3">
+            <a:schemeClr val="accent1"/>
+          </a:fillRef>
+          <a:effectRef idx="2">
+            <a:schemeClr val="accent1"/>
+          </a:effectRef>
+          <a:fontRef idx="minor">
+            <a:schemeClr val="lt1"/>
+          </a:fontRef>
+        </p:style>
+        <p:txBody>
+          <a:bodyPr rtlCol="0" anchor="ctr"/>
+          <a:lstStyle/>
+          <a:p>
+            <a:pPr algn="ctr"/>
+          </a:p>
+        </p:txBody>
+      </p:sp>
+      <p:sp>
+        <p:nvSpPr>
+          <p:cNvPr id="61" name="Oval 60"/>
+          <p:cNvSpPr/>
+          <p:nvPr/>
+        </p:nvSpPr>
+        <p:spPr>
+          <a:xfrm>
+            <a:off x="6711696" y="3749040"/>
+            <a:ext cx="91440" cy="91440"/>
+          </a:xfrm>
+          <a:prstGeom prst="ellipse">
+            <a:avLst/>
+          </a:prstGeom>
+          <a:solidFill>
+            <a:srgbClr val="ED1D24"/>
+          </a:solidFill>
+          <a:ln>
+            <a:noFill/>
+          </a:ln>
+        </p:spPr>
+        <p:style>
+          <a:lnRef idx="1">
+            <a:schemeClr val="accent1"/>
+          </a:lnRef>
+          <a:fillRef idx="3">
+            <a:schemeClr val="accent1"/>
+          </a:fillRef>
+          <a:effectRef idx="2">
+            <a:schemeClr val="accent1"/>
+          </a:effectRef>
+          <a:fontRef idx="minor">
+            <a:schemeClr val="lt1"/>
+          </a:fontRef>
+        </p:style>
+        <p:txBody>
+          <a:bodyPr rtlCol="0" anchor="ctr"/>
+          <a:lstStyle/>
+          <a:p>
+            <a:pPr algn="ctr"/>
+          </a:p>
+        </p:txBody>
+      </p:sp>
+      <p:sp>
+        <p:nvSpPr>
+          <p:cNvPr id="62" name="TextBox 61"/>
+          <p:cNvSpPr txBox="1"/>
+          <p:nvPr/>
+        </p:nvSpPr>
+        <p:spPr>
+          <a:xfrm>
+            <a:off x="6163056" y="1344168"/>
+            <a:ext cx="1188720" cy="1389888"/>
+          </a:xfrm>
+          <a:prstGeom prst="rect">
+            <a:avLst/>
+          </a:prstGeom>
+          <a:noFill/>
+        </p:spPr>
+        <p:txBody>
+          <a:bodyPr wrap="square" lIns="0" rIns="0" tIns="0" bIns="0">
+            <a:spAutoFit/>
+          </a:bodyPr>
+          <a:lstStyle/>
+          <a:p>
+            <a:pPr algn="ctr">
+              <a:spcAft>
+                <a:spcPts val="600"/>
+              </a:spcAft>
+              <a:defRPr sz="900" b="1">
+                <a:solidFill>
+                  <a:srgbClr val="ED1D24"/>
+                </a:solidFill>
+                <a:latin typeface="Calibri"/>
+              </a:defRPr>
+            </a:pPr>
+            <a:r>
+              <a:t>Cross-sell Scale</a:t>
+            </a:r>
+          </a:p>
+          <a:p>
+            <a:pPr algn="ctr">
+              <a:spcAft>
+                <a:spcPts val="400"/>
+              </a:spcAft>
+              <a:defRPr sz="720" b="0">
+                <a:solidFill>
+                  <a:srgbClr val="212121"/>
+                </a:solidFill>
+                <a:latin typeface="Arial"/>
+              </a:defRPr>
+            </a:pPr>
+            <a:r>
+              <a:t>Household bundle push</a:t>
+            </a:r>
+          </a:p>
+          <a:p>
+            <a:pPr algn="ctr">
+              <a:spcAft>
+                <a:spcPts val="400"/>
+              </a:spcAft>
+              <a:defRPr sz="720" b="0">
+                <a:solidFill>
+                  <a:srgbClr val="212121"/>
+                </a:solidFill>
+                <a:latin typeface="Arial"/>
+              </a:defRPr>
+            </a:pPr>
+            <a:r>
+              <a:t>Auto-pay discount active</a:t>
+            </a:r>
+          </a:p>
+          <a:p>
+            <a:pPr algn="ctr">
+              <a:spcAft>
+                <a:spcPts val="400"/>
+              </a:spcAft>
+              <a:defRPr sz="720" b="0">
+                <a:solidFill>
+                  <a:srgbClr val="212121"/>
+                </a:solidFill>
+                <a:latin typeface="Arial"/>
+              </a:defRPr>
+            </a:pPr>
+            <a:r>
+              <a:t>Device EMI financing</a:t>
+            </a:r>
+          </a:p>
+        </p:txBody>
+      </p:sp>
+      <p:sp>
+        <p:nvSpPr>
+          <p:cNvPr id="63" name="Rounded Rectangle 62"/>
+          <p:cNvSpPr/>
+          <p:nvPr/>
+        </p:nvSpPr>
+        <p:spPr>
+          <a:xfrm>
+            <a:off x="7589520" y="1234440"/>
+            <a:ext cx="1298448" cy="1536192"/>
+          </a:xfrm>
+          <a:prstGeom prst="roundRect">
+            <a:avLst/>
+          </a:prstGeom>
+          <a:solidFill>
+            <a:srgbClr val="FEF3F3"/>
+          </a:solidFill>
+          <a:ln w="12700">
+            <a:solidFill>
+              <a:srgbClr val="FED7D7"/>
+            </a:solidFill>
+          </a:ln>
+        </p:spPr>
+        <p:style>
+          <a:lnRef idx="1">
+            <a:schemeClr val="accent1"/>
+          </a:lnRef>
+          <a:fillRef idx="3">
+            <a:schemeClr val="accent1"/>
+          </a:fillRef>
+          <a:effectRef idx="2">
+            <a:schemeClr val="accent1"/>
+          </a:effectRef>
+          <a:fontRef idx="minor">
+            <a:schemeClr val="lt1"/>
+          </a:fontRef>
+        </p:style>
+        <p:txBody>
+          <a:bodyPr rtlCol="0" anchor="ctr"/>
+          <a:lstStyle/>
+          <a:p>
+            <a:pPr algn="ctr"/>
+          </a:p>
+        </p:txBody>
+      </p:sp>
+      <p:sp>
+        <p:nvSpPr>
+          <p:cNvPr id="64" name="Rectangle 63"/>
+          <p:cNvSpPr/>
+          <p:nvPr/>
+        </p:nvSpPr>
+        <p:spPr>
+          <a:xfrm>
+            <a:off x="7626096" y="1234440"/>
+            <a:ext cx="1225296" cy="54864"/>
+          </a:xfrm>
+          <a:prstGeom prst="rect">
+            <a:avLst/>
+          </a:prstGeom>
+          <a:solidFill>
+            <a:srgbClr val="ED1D24"/>
+          </a:solidFill>
+          <a:ln>
+            <a:noFill/>
+          </a:ln>
+        </p:spPr>
+        <p:style>
+          <a:lnRef idx="1">
+            <a:schemeClr val="accent1"/>
+          </a:lnRef>
+          <a:fillRef idx="3">
+            <a:schemeClr val="accent1"/>
+          </a:fillRef>
+          <a:effectRef idx="2">
+            <a:schemeClr val="accent1"/>
+          </a:effectRef>
+          <a:fontRef idx="minor">
+            <a:schemeClr val="lt1"/>
+          </a:fontRef>
+        </p:style>
+        <p:txBody>
+          <a:bodyPr rtlCol="0" anchor="ctr"/>
+          <a:lstStyle/>
+          <a:p>
+            <a:pPr algn="ctr"/>
+          </a:p>
+        </p:txBody>
+      </p:sp>
+      <p:sp>
+        <p:nvSpPr>
+          <p:cNvPr id="65" name="Isosceles Triangle 64"/>
+          <p:cNvSpPr/>
+          <p:nvPr/>
+        </p:nvSpPr>
+        <p:spPr>
+          <a:xfrm rot="10800000">
+            <a:off x="8165592" y="2761488"/>
+            <a:ext cx="146304" cy="109728"/>
+          </a:xfrm>
+          <a:prstGeom prst="triangle">
+            <a:avLst/>
+          </a:prstGeom>
+          <a:solidFill>
+            <a:srgbClr val="FEF3F3"/>
+          </a:solidFill>
+          <a:ln w="12700">
+            <a:solidFill>
+              <a:srgbClr val="FED7D7"/>
+            </a:solidFill>
+          </a:ln>
+        </p:spPr>
+        <p:style>
+          <a:lnRef idx="1">
+            <a:schemeClr val="accent1"/>
+          </a:lnRef>
+          <a:fillRef idx="3">
+            <a:schemeClr val="accent1"/>
+          </a:fillRef>
+          <a:effectRef idx="2">
+            <a:schemeClr val="accent1"/>
+          </a:effectRef>
+          <a:fontRef idx="minor">
+            <a:schemeClr val="lt1"/>
+          </a:fontRef>
+        </p:style>
+        <p:txBody>
+          <a:bodyPr rtlCol="0" anchor="ctr"/>
+          <a:lstStyle/>
+          <a:p>
+            <a:pPr algn="ctr"/>
+          </a:p>
+        </p:txBody>
+      </p:sp>
+      <p:sp>
+        <p:nvSpPr>
+          <p:cNvPr id="66" name="Rectangle 65"/>
+          <p:cNvSpPr/>
+          <p:nvPr/>
+        </p:nvSpPr>
+        <p:spPr>
+          <a:xfrm>
+            <a:off x="8229600" y="2862072"/>
+            <a:ext cx="18288" cy="896112"/>
+          </a:xfrm>
+          <a:prstGeom prst="rect">
+            <a:avLst/>
+          </a:prstGeom>
+          <a:solidFill>
+            <a:srgbClr val="DCDEE1"/>
+          </a:solidFill>
+          <a:ln>
+            <a:noFill/>
+          </a:ln>
+        </p:spPr>
+        <p:style>
+          <a:lnRef idx="1">
+            <a:schemeClr val="accent1"/>
+          </a:lnRef>
+          <a:fillRef idx="3">
+            <a:schemeClr val="accent1"/>
+          </a:fillRef>
+          <a:effectRef idx="2">
+            <a:schemeClr val="accent1"/>
+          </a:effectRef>
+          <a:fontRef idx="minor">
+            <a:schemeClr val="lt1"/>
+          </a:fontRef>
+        </p:style>
+        <p:txBody>
+          <a:bodyPr rtlCol="0" anchor="ctr"/>
+          <a:lstStyle/>
+          <a:p>
+            <a:pPr algn="ctr"/>
+          </a:p>
+        </p:txBody>
+      </p:sp>
+      <p:sp>
+        <p:nvSpPr>
+          <p:cNvPr id="67" name="Oval 66"/>
+          <p:cNvSpPr/>
+          <p:nvPr/>
+        </p:nvSpPr>
+        <p:spPr>
+          <a:xfrm>
+            <a:off x="8193024" y="3749040"/>
+            <a:ext cx="91440" cy="91440"/>
+          </a:xfrm>
+          <a:prstGeom prst="ellipse">
+            <a:avLst/>
+          </a:prstGeom>
+          <a:solidFill>
+            <a:srgbClr val="ED1D24"/>
+          </a:solidFill>
+          <a:ln>
+            <a:noFill/>
+          </a:ln>
+        </p:spPr>
+        <p:style>
+          <a:lnRef idx="1">
+            <a:schemeClr val="accent1"/>
+          </a:lnRef>
+          <a:fillRef idx="3">
+            <a:schemeClr val="accent1"/>
+          </a:fillRef>
+          <a:effectRef idx="2">
+            <a:schemeClr val="accent1"/>
+          </a:effectRef>
+          <a:fontRef idx="minor">
+            <a:schemeClr val="lt1"/>
+          </a:fontRef>
+        </p:style>
+        <p:txBody>
+          <a:bodyPr rtlCol="0" anchor="ctr"/>
+          <a:lstStyle/>
+          <a:p>
+            <a:pPr algn="ctr"/>
+          </a:p>
+        </p:txBody>
+      </p:sp>
+      <p:sp>
+        <p:nvSpPr>
+          <p:cNvPr id="68" name="TextBox 67"/>
+          <p:cNvSpPr txBox="1"/>
+          <p:nvPr/>
+        </p:nvSpPr>
+        <p:spPr>
+          <a:xfrm>
+            <a:off x="7644384" y="1344168"/>
+            <a:ext cx="1188720" cy="1389888"/>
+          </a:xfrm>
+          <a:prstGeom prst="rect">
+            <a:avLst/>
+          </a:prstGeom>
+          <a:noFill/>
+        </p:spPr>
+        <p:txBody>
+          <a:bodyPr wrap="square" lIns="0" rIns="0" tIns="0" bIns="0">
+            <a:spAutoFit/>
+          </a:bodyPr>
+          <a:lstStyle/>
+          <a:p>
+            <a:pPr algn="ctr">
+              <a:spcAft>
+                <a:spcPts val="600"/>
+              </a:spcAft>
+              <a:defRPr sz="900" b="1">
+                <a:solidFill>
+                  <a:srgbClr val="ED1D24"/>
+                </a:solidFill>
+                <a:latin typeface="Calibri"/>
+              </a:defRPr>
+            </a:pPr>
+            <a:r>
+              <a:t>Banking Transition</a:t>
+            </a:r>
+          </a:p>
+          <a:p>
+            <a:pPr algn="ctr">
+              <a:spcAft>
+                <a:spcPts val="400"/>
+              </a:spcAft>
+              <a:defRPr sz="720" b="0">
+                <a:solidFill>
+                  <a:srgbClr val="212121"/>
+                </a:solidFill>
+                <a:latin typeface="Arial"/>
+              </a:defRPr>
+            </a:pPr>
+            <a:r>
+              <a:t>Next Banking License</a:t>
+            </a:r>
+          </a:p>
+          <a:p>
+            <a:pPr algn="ctr">
+              <a:spcAft>
+                <a:spcPts val="400"/>
+              </a:spcAft>
+              <a:defRPr sz="720" b="0">
+                <a:solidFill>
+                  <a:srgbClr val="212121"/>
+                </a:solidFill>
+                <a:latin typeface="Arial"/>
+              </a:defRPr>
+            </a:pPr>
+            <a:r>
+              <a:t>Micro-credit &amp; rural loans</a:t>
+            </a:r>
+          </a:p>
+          <a:p>
+            <a:pPr algn="ctr">
+              <a:spcAft>
+                <a:spcPts val="400"/>
+              </a:spcAft>
+              <a:defRPr sz="720" b="0">
+                <a:solidFill>
+                  <a:srgbClr val="212121"/>
+                </a:solidFill>
+                <a:latin typeface="Arial"/>
+              </a:defRPr>
+            </a:pPr>
+            <a:r>
+              <a:t>Super app as interface</a:t>
+            </a:r>
+          </a:p>
+        </p:txBody>
+      </p:sp>
     </p:spTree>
   </p:cSld>
   <p:clrMapOvr>

--- a/Altura_Household_Convergence_Strategy.pptx
+++ b/Altura_Household_Convergence_Strategy.pptx
@@ -8074,7 +8074,7 @@
                         </a:defRPr>
                       </a:pPr>
                       <a:r>
-                        <a:t>Scale Rival</a:t>
+                        <a:t>Jio</a:t>
                       </a:r>
                     </a:p>
                   </a:txBody>
@@ -8098,7 +8098,7 @@
                         </a:defRPr>
                       </a:pPr>
                       <a:r>
-                        <a:t>Value Chall.</a:t>
+                        <a:t>VI</a:t>
                       </a:r>
                     </a:p>
                   </a:txBody>
